--- a/Presentacion_CID_IA_Sectores.pptx
+++ b/Presentacion_CID_IA_Sectores.pptx
@@ -23,6 +23,7 @@
     <p:sldId id="271" r:id="rId22"/>
     <p:sldId id="272" r:id="rId23"/>
     <p:sldId id="273" r:id="rId24"/>
+    <p:sldId id="274" r:id="rId25"/>
   </p:sldIdLst>
   <p:sldSz cx="12191695" cy="6858000" type="screen4x3"/>
   <p:notesSz cx="6858000" cy="9144000"/>
@@ -3399,7 +3400,7 @@
                 </a:solidFill>
                 <a:latin typeface="Calibri"/>
               </a:rPr>
-              <a:t>HALLAZGO 3</a:t>
+              <a:t>HALLAZGO 2</a:t>
             </a:r>
           </a:p>
         </p:txBody>
@@ -3441,14 +3442,14 @@
                 </a:solidFill>
                 <a:latin typeface="Calibri"/>
               </a:rPr>
-              <a:t>Tener gente preparada no basta: hay que atraer los trabajos que la usan</a:t>
+              <a:t>En la cadena regional, cada país ocupa un lugar distinto</a:t>
             </a:r>
           </a:p>
         </p:txBody>
       </p:sp>
       <p:pic>
         <p:nvPicPr>
-          <p:cNvPr id="4" name="Picture 3" descr="W7_brecha_terciaria_capa.png"/>
+          <p:cNvPr id="4" name="Picture 3" descr="W5_cadena_regional_capas.png"/>
           <p:cNvPicPr>
             <a:picLocks noChangeAspect="1"/>
           </p:cNvPicPr>
@@ -3462,8 +3463,8 @@
         </p:blipFill>
         <p:spPr>
           <a:xfrm>
-            <a:off x="3108271" y="1691640"/>
-            <a:ext cx="5975153" cy="4114800"/>
+            <a:off x="970667" y="1737360"/>
+            <a:ext cx="10250361" cy="3931920"/>
           </a:xfrm>
           <a:prstGeom prst="rect">
             <a:avLst/>
@@ -3507,7 +3508,7 @@
                 </a:solidFill>
                 <a:latin typeface="Calibri"/>
               </a:rPr>
-              <a:t>Cuatro países. El Salvador y Guatemala quedan fuera porque sus sectores estratégicos son demasiado pequeños en la muestra para este corte.</a:t>
+              <a:t>Solo se muestran las combinaciones país-sector con más de 5.000 personas ocupadas: por eso El Salvador y Guatemala no aparecen, y Honduras solo en cables.</a:t>
             </a:r>
           </a:p>
         </p:txBody>
@@ -3567,7 +3568,7 @@
                 </a:solidFill>
                 <a:latin typeface="Calibri"/>
               </a:rPr>
-              <a:t>HALLAZGO 3 · QUÉ SIGNIFICA</a:t>
+              <a:t>HALLAZGO 3</a:t>
             </a:r>
           </a:p>
         </p:txBody>
@@ -3609,21 +3610,45 @@
                 </a:solidFill>
                 <a:latin typeface="Calibri"/>
               </a:rPr>
-              <a:t>República Dominicana tiene la gente, pero no los puestos</a:t>
-            </a:r>
-          </a:p>
-        </p:txBody>
-      </p:sp>
-      <p:sp>
-        <p:nvSpPr>
-          <p:cNvPr id="4" name="TextBox 3"/>
+              <a:t>Tener gente preparada no basta: hay que atraer los trabajos que la usan</a:t>
+            </a:r>
+          </a:p>
+        </p:txBody>
+      </p:sp>
+      <p:pic>
+        <p:nvPicPr>
+          <p:cNvPr id="4" name="Picture 3" descr="W7_brecha_terciaria_capa.png"/>
+          <p:cNvPicPr>
+            <a:picLocks noChangeAspect="1"/>
+          </p:cNvPicPr>
+          <p:nvPr/>
+        </p:nvPicPr>
+        <p:blipFill>
+          <a:blip r:embed="rId2"/>
+          <a:stretch>
+            <a:fillRect/>
+          </a:stretch>
+        </p:blipFill>
+        <p:spPr>
+          <a:xfrm>
+            <a:off x="3108271" y="1691640"/>
+            <a:ext cx="5975153" cy="4114800"/>
+          </a:xfrm>
+          <a:prstGeom prst="rect">
+            <a:avLst/>
+          </a:prstGeom>
+        </p:spPr>
+      </p:pic>
+      <p:sp>
+        <p:nvSpPr>
+          <p:cNvPr id="5" name="TextBox 4"/>
           <p:cNvSpPr txBox="1"/>
           <p:nvPr/>
         </p:nvSpPr>
         <p:spPr>
           <a:xfrm>
-            <a:off x="658368" y="1965960"/>
-            <a:ext cx="3108960" cy="731520"/>
+            <a:off x="658368" y="6199632"/>
+            <a:ext cx="10874959" cy="457200"/>
           </a:xfrm>
           <a:prstGeom prst="rect">
             <a:avLst/>
@@ -3638,349 +3663,20 @@
           <a:p>
             <a:pPr algn="l">
               <a:lnSpc>
-                <a:spcPct val="95000"/>
-              </a:lnSpc>
-              <a:spcAft>
-                <a:spcPts val="600"/>
-              </a:spcAft>
-            </a:pPr>
-            <a:r>
-              <a:rPr sz="4200" b="1">
-                <a:solidFill>
-                  <a:srgbClr val="2A78D6"/>
-                </a:solidFill>
-                <a:latin typeface="Calibri"/>
-              </a:rPr>
-              <a:t>26%</a:t>
-            </a:r>
-          </a:p>
-        </p:txBody>
-      </p:sp>
-      <p:sp>
-        <p:nvSpPr>
-          <p:cNvPr id="5" name="TextBox 4"/>
-          <p:cNvSpPr txBox="1"/>
-          <p:nvPr/>
-        </p:nvSpPr>
-        <p:spPr>
-          <a:xfrm>
-            <a:off x="658368" y="2624328"/>
-            <a:ext cx="3108960" cy="914400"/>
-          </a:xfrm>
-          <a:prstGeom prst="rect">
-            <a:avLst/>
-          </a:prstGeom>
-          <a:noFill/>
-        </p:spPr>
-        <p:txBody>
-          <a:bodyPr wrap="square" lIns="0" rIns="0" tIns="0" bIns="0">
-            <a:spAutoFit/>
-          </a:bodyPr>
-          <a:lstStyle/>
-          <a:p>
-            <a:pPr algn="l">
-              <a:lnSpc>
-                <a:spcPct val="120000"/>
-              </a:lnSpc>
-              <a:spcAft>
-                <a:spcPts val="600"/>
-              </a:spcAft>
-            </a:pPr>
-            <a:r>
-              <a:rPr sz="1250" b="0">
+                <a:spcPct val="115000"/>
+              </a:lnSpc>
+              <a:spcAft>
+                <a:spcPts val="600"/>
+              </a:spcAft>
+            </a:pPr>
+            <a:r>
+              <a:rPr sz="1050" b="0">
                 <a:solidFill>
                   <a:srgbClr val="6B6A64"/>
                 </a:solidFill>
                 <a:latin typeface="Calibri"/>
               </a:rPr>
-              <a:t>de los trabajadores dominicanos tienen educación superior — casi lo mismo que México</a:t>
-            </a:r>
-          </a:p>
-        </p:txBody>
-      </p:sp>
-      <p:sp>
-        <p:nvSpPr>
-          <p:cNvPr id="6" name="TextBox 5"/>
-          <p:cNvSpPr txBox="1"/>
-          <p:nvPr/>
-        </p:nvSpPr>
-        <p:spPr>
-          <a:xfrm>
-            <a:off x="4480560" y="1965960"/>
-            <a:ext cx="3108960" cy="731520"/>
-          </a:xfrm>
-          <a:prstGeom prst="rect">
-            <a:avLst/>
-          </a:prstGeom>
-          <a:noFill/>
-        </p:spPr>
-        <p:txBody>
-          <a:bodyPr wrap="square" lIns="0" rIns="0" tIns="0" bIns="0">
-            <a:spAutoFit/>
-          </a:bodyPr>
-          <a:lstStyle/>
-          <a:p>
-            <a:pPr algn="l">
-              <a:lnSpc>
-                <a:spcPct val="95000"/>
-              </a:lnSpc>
-              <a:spcAft>
-                <a:spcPts val="600"/>
-              </a:spcAft>
-            </a:pPr>
-            <a:r>
-              <a:rPr sz="4200" b="1">
-                <a:solidFill>
-                  <a:srgbClr val="4A3AA7"/>
-                </a:solidFill>
-                <a:latin typeface="Calibri"/>
-              </a:rPr>
-              <a:t>13%</a:t>
-            </a:r>
-          </a:p>
-        </p:txBody>
-      </p:sp>
-      <p:sp>
-        <p:nvSpPr>
-          <p:cNvPr id="7" name="TextBox 6"/>
-          <p:cNvSpPr txBox="1"/>
-          <p:nvPr/>
-        </p:nvSpPr>
-        <p:spPr>
-          <a:xfrm>
-            <a:off x="4480560" y="2624328"/>
-            <a:ext cx="3108960" cy="914400"/>
-          </a:xfrm>
-          <a:prstGeom prst="rect">
-            <a:avLst/>
-          </a:prstGeom>
-          <a:noFill/>
-        </p:spPr>
-        <p:txBody>
-          <a:bodyPr wrap="square" lIns="0" rIns="0" tIns="0" bIns="0">
-            <a:spAutoFit/>
-          </a:bodyPr>
-          <a:lstStyle/>
-          <a:p>
-            <a:pPr algn="l">
-              <a:lnSpc>
-                <a:spcPct val="120000"/>
-              </a:lnSpc>
-              <a:spcAft>
-                <a:spcPts val="600"/>
-              </a:spcAft>
-            </a:pPr>
-            <a:r>
-              <a:rPr sz="1250" b="0">
-                <a:solidFill>
-                  <a:srgbClr val="6B6A64"/>
-                </a:solidFill>
-                <a:latin typeface="Calibri"/>
-              </a:rPr>
-              <a:t>pero su sector de dispositivos médicos emplea esa proporción de técnicos y profesionales</a:t>
-            </a:r>
-          </a:p>
-        </p:txBody>
-      </p:sp>
-      <p:sp>
-        <p:nvSpPr>
-          <p:cNvPr id="8" name="TextBox 7"/>
-          <p:cNvSpPr txBox="1"/>
-          <p:nvPr/>
-        </p:nvSpPr>
-        <p:spPr>
-          <a:xfrm>
-            <a:off x="8321040" y="1965960"/>
-            <a:ext cx="3108960" cy="731520"/>
-          </a:xfrm>
-          <a:prstGeom prst="rect">
-            <a:avLst/>
-          </a:prstGeom>
-          <a:noFill/>
-        </p:spPr>
-        <p:txBody>
-          <a:bodyPr wrap="square" lIns="0" rIns="0" tIns="0" bIns="0">
-            <a:spAutoFit/>
-          </a:bodyPr>
-          <a:lstStyle/>
-          <a:p>
-            <a:pPr algn="l">
-              <a:lnSpc>
-                <a:spcPct val="95000"/>
-              </a:lnSpc>
-              <a:spcAft>
-                <a:spcPts val="600"/>
-              </a:spcAft>
-            </a:pPr>
-            <a:r>
-              <a:rPr sz="4200" b="1">
-                <a:solidFill>
-                  <a:srgbClr val="1BAF7A"/>
-                </a:solidFill>
-                <a:latin typeface="Calibri"/>
-              </a:rPr>
-              <a:t>26%</a:t>
-            </a:r>
-          </a:p>
-        </p:txBody>
-      </p:sp>
-      <p:sp>
-        <p:nvSpPr>
-          <p:cNvPr id="9" name="TextBox 8"/>
-          <p:cNvSpPr txBox="1"/>
-          <p:nvPr/>
-        </p:nvSpPr>
-        <p:spPr>
-          <a:xfrm>
-            <a:off x="8321040" y="2624328"/>
-            <a:ext cx="3108960" cy="914400"/>
-          </a:xfrm>
-          <a:prstGeom prst="rect">
-            <a:avLst/>
-          </a:prstGeom>
-          <a:noFill/>
-        </p:spPr>
-        <p:txBody>
-          <a:bodyPr wrap="square" lIns="0" rIns="0" tIns="0" bIns="0">
-            <a:spAutoFit/>
-          </a:bodyPr>
-          <a:lstStyle/>
-          <a:p>
-            <a:pPr algn="l">
-              <a:lnSpc>
-                <a:spcPct val="120000"/>
-              </a:lnSpc>
-              <a:spcAft>
-                <a:spcPts val="600"/>
-              </a:spcAft>
-            </a:pPr>
-            <a:r>
-              <a:rPr sz="1250" b="0">
-                <a:solidFill>
-                  <a:srgbClr val="6B6A64"/>
-                </a:solidFill>
-                <a:latin typeface="Calibri"/>
-              </a:rPr>
-              <a:t>Costa Rica, con un stock parecido, llega al doble en el mismo sector</a:t>
-            </a:r>
-          </a:p>
-        </p:txBody>
-      </p:sp>
-      <p:cxnSp>
-        <p:nvCxnSpPr>
-          <p:cNvPr id="10" name="Connector 9"/>
-          <p:cNvCxnSpPr/>
-          <p:nvPr/>
-        </p:nvCxnSpPr>
-        <p:spPr>
-          <a:xfrm>
-            <a:off x="658368" y="4343400"/>
-            <a:ext cx="10874959" cy="0"/>
-          </a:xfrm>
-          <a:prstGeom prst="line">
-            <a:avLst/>
-          </a:prstGeom>
-          <a:ln w="19050">
-            <a:solidFill>
-              <a:srgbClr val="E4E4DF"/>
-            </a:solidFill>
-          </a:ln>
-        </p:spPr>
-        <p:style>
-          <a:lnRef idx="2">
-            <a:schemeClr val="accent1"/>
-          </a:lnRef>
-          <a:fillRef idx="0">
-            <a:schemeClr val="accent1"/>
-          </a:fillRef>
-          <a:effectRef idx="1">
-            <a:schemeClr val="accent1"/>
-          </a:effectRef>
-          <a:fontRef idx="minor">
-            <a:schemeClr val="tx1"/>
-          </a:fontRef>
-        </p:style>
-      </p:cxnSp>
-      <p:sp>
-        <p:nvSpPr>
-          <p:cNvPr id="11" name="TextBox 10"/>
-          <p:cNvSpPr txBox="1"/>
-          <p:nvPr/>
-        </p:nvSpPr>
-        <p:spPr>
-          <a:xfrm>
-            <a:off x="658368" y="4617720"/>
-            <a:ext cx="10881360" cy="1463040"/>
-          </a:xfrm>
-          <a:prstGeom prst="rect">
-            <a:avLst/>
-          </a:prstGeom>
-          <a:noFill/>
-        </p:spPr>
-        <p:txBody>
-          <a:bodyPr wrap="square" lIns="0" rIns="0" tIns="0" bIns="0">
-            <a:spAutoFit/>
-          </a:bodyPr>
-          <a:lstStyle/>
-          <a:p>
-            <a:pPr algn="l">
-              <a:lnSpc>
-                <a:spcPct val="135000"/>
-              </a:lnSpc>
-              <a:spcAft>
-                <a:spcPts val="600"/>
-              </a:spcAft>
-            </a:pPr>
-            <a:r>
-              <a:rPr sz="1900" b="0">
-                <a:solidFill>
-                  <a:srgbClr val="1C1C1A"/>
-                </a:solidFill>
-                <a:latin typeface="Calibri"/>
-              </a:rPr>
-              <a:t>El país formó a la gente, pero las plantas que instaló son de ensamble. Honduras muestra el caso contrario: emplea más técnicos de los que su nivel educativo haría esperar, y ahí la restricción sí es de formación.</a:t>
-            </a:r>
-          </a:p>
-        </p:txBody>
-      </p:sp>
-      <p:sp>
-        <p:nvSpPr>
-          <p:cNvPr id="12" name="TextBox 11"/>
-          <p:cNvSpPr txBox="1"/>
-          <p:nvPr/>
-        </p:nvSpPr>
-        <p:spPr>
-          <a:xfrm>
-            <a:off x="658368" y="5852160"/>
-            <a:ext cx="10881360" cy="548640"/>
-          </a:xfrm>
-          <a:prstGeom prst="rect">
-            <a:avLst/>
-          </a:prstGeom>
-          <a:noFill/>
-        </p:spPr>
-        <p:txBody>
-          <a:bodyPr wrap="square" lIns="0" rIns="0" tIns="0" bIns="0">
-            <a:spAutoFit/>
-          </a:bodyPr>
-          <a:lstStyle/>
-          <a:p>
-            <a:pPr algn="l">
-              <a:lnSpc>
-                <a:spcPct val="125000"/>
-              </a:lnSpc>
-              <a:spcAft>
-                <a:spcPts val="600"/>
-              </a:spcAft>
-            </a:pPr>
-            <a:r>
-              <a:rPr sz="1600" b="1">
-                <a:solidFill>
-                  <a:srgbClr val="1BAF7A"/>
-                </a:solidFill>
-                <a:latin typeface="Calibri"/>
-              </a:rPr>
-              <a:t>Formar y atraer funciones son dos políticas distintas; hacen falta las dos.</a:t>
+              <a:t>Cuatro países. El Salvador y Guatemala quedan fuera porque sus sectores estratégicos son demasiado pequeños en la muestra para este corte.</a:t>
             </a:r>
           </a:p>
         </p:txBody>
@@ -4040,7 +3736,7 @@
                 </a:solidFill>
                 <a:latin typeface="Calibri"/>
               </a:rPr>
-              <a:t>HALLAZGO 4</a:t>
+              <a:t>HALLAZGO 3 · QUÉ SIGNIFICA</a:t>
             </a:r>
           </a:p>
         </p:txBody>
@@ -4082,45 +3778,21 @@
                 </a:solidFill>
                 <a:latin typeface="Calibri"/>
               </a:rPr>
-              <a:t>Los anuncios de trabajo delatan en qué se especializa cada bloque</a:t>
-            </a:r>
-          </a:p>
-        </p:txBody>
-      </p:sp>
-      <p:pic>
-        <p:nvPicPr>
-          <p:cNvPr id="4" name="Picture 3" descr="W10_habilidades_bloques.png"/>
-          <p:cNvPicPr>
-            <a:picLocks noChangeAspect="1"/>
-          </p:cNvPicPr>
-          <p:nvPr/>
-        </p:nvPicPr>
-        <p:blipFill>
-          <a:blip r:embed="rId2"/>
-          <a:stretch>
-            <a:fillRect/>
-          </a:stretch>
-        </p:blipFill>
-        <p:spPr>
-          <a:xfrm>
-            <a:off x="3054620" y="1645920"/>
-            <a:ext cx="6082455" cy="4114800"/>
-          </a:xfrm>
-          <a:prstGeom prst="rect">
-            <a:avLst/>
-          </a:prstGeom>
-        </p:spPr>
-      </p:pic>
-      <p:sp>
-        <p:nvSpPr>
-          <p:cNvPr id="5" name="TextBox 4"/>
+              <a:t>República Dominicana tiene la gente, pero no los puestos</a:t>
+            </a:r>
+          </a:p>
+        </p:txBody>
+      </p:sp>
+      <p:sp>
+        <p:nvSpPr>
+          <p:cNvPr id="4" name="TextBox 3"/>
           <p:cNvSpPr txBox="1"/>
           <p:nvPr/>
         </p:nvSpPr>
         <p:spPr>
           <a:xfrm>
-            <a:off x="658368" y="6199632"/>
-            <a:ext cx="10874959" cy="457200"/>
+            <a:off x="658368" y="1965960"/>
+            <a:ext cx="3108960" cy="731520"/>
           </a:xfrm>
           <a:prstGeom prst="rect">
             <a:avLst/>
@@ -4135,20 +3807,349 @@
           <a:p>
             <a:pPr algn="l">
               <a:lnSpc>
-                <a:spcPct val="115000"/>
-              </a:lnSpc>
-              <a:spcAft>
-                <a:spcPts val="600"/>
-              </a:spcAft>
-            </a:pPr>
-            <a:r>
-              <a:rPr sz="1050" b="0">
+                <a:spcPct val="95000"/>
+              </a:lnSpc>
+              <a:spcAft>
+                <a:spcPts val="600"/>
+              </a:spcAft>
+            </a:pPr>
+            <a:r>
+              <a:rPr sz="4200" b="1">
+                <a:solidFill>
+                  <a:srgbClr val="2A78D6"/>
+                </a:solidFill>
+                <a:latin typeface="Calibri"/>
+              </a:rPr>
+              <a:t>26%</a:t>
+            </a:r>
+          </a:p>
+        </p:txBody>
+      </p:sp>
+      <p:sp>
+        <p:nvSpPr>
+          <p:cNvPr id="5" name="TextBox 4"/>
+          <p:cNvSpPr txBox="1"/>
+          <p:nvPr/>
+        </p:nvSpPr>
+        <p:spPr>
+          <a:xfrm>
+            <a:off x="658368" y="2624328"/>
+            <a:ext cx="3108960" cy="914400"/>
+          </a:xfrm>
+          <a:prstGeom prst="rect">
+            <a:avLst/>
+          </a:prstGeom>
+          <a:noFill/>
+        </p:spPr>
+        <p:txBody>
+          <a:bodyPr wrap="square" lIns="0" rIns="0" tIns="0" bIns="0">
+            <a:spAutoFit/>
+          </a:bodyPr>
+          <a:lstStyle/>
+          <a:p>
+            <a:pPr algn="l">
+              <a:lnSpc>
+                <a:spcPct val="120000"/>
+              </a:lnSpc>
+              <a:spcAft>
+                <a:spcPts val="600"/>
+              </a:spcAft>
+            </a:pPr>
+            <a:r>
+              <a:rPr sz="1250" b="0">
                 <a:solidFill>
                   <a:srgbClr val="6B6A64"/>
                 </a:solidFill>
                 <a:latin typeface="Calibri"/>
               </a:rPr>
-              <a:t>925 mil anuncios de CAPARD (Guatemala, Honduras, Costa Rica y República Dominicana) y 1,6 millones de México. El Salvador, Nicaragua y Panamá no tienen anuncios en la base.</a:t>
+              <a:t>de los trabajadores dominicanos tienen educación superior — casi lo mismo que México</a:t>
+            </a:r>
+          </a:p>
+        </p:txBody>
+      </p:sp>
+      <p:sp>
+        <p:nvSpPr>
+          <p:cNvPr id="6" name="TextBox 5"/>
+          <p:cNvSpPr txBox="1"/>
+          <p:nvPr/>
+        </p:nvSpPr>
+        <p:spPr>
+          <a:xfrm>
+            <a:off x="4480560" y="1965960"/>
+            <a:ext cx="3108960" cy="731520"/>
+          </a:xfrm>
+          <a:prstGeom prst="rect">
+            <a:avLst/>
+          </a:prstGeom>
+          <a:noFill/>
+        </p:spPr>
+        <p:txBody>
+          <a:bodyPr wrap="square" lIns="0" rIns="0" tIns="0" bIns="0">
+            <a:spAutoFit/>
+          </a:bodyPr>
+          <a:lstStyle/>
+          <a:p>
+            <a:pPr algn="l">
+              <a:lnSpc>
+                <a:spcPct val="95000"/>
+              </a:lnSpc>
+              <a:spcAft>
+                <a:spcPts val="600"/>
+              </a:spcAft>
+            </a:pPr>
+            <a:r>
+              <a:rPr sz="4200" b="1">
+                <a:solidFill>
+                  <a:srgbClr val="4A3AA7"/>
+                </a:solidFill>
+                <a:latin typeface="Calibri"/>
+              </a:rPr>
+              <a:t>13%</a:t>
+            </a:r>
+          </a:p>
+        </p:txBody>
+      </p:sp>
+      <p:sp>
+        <p:nvSpPr>
+          <p:cNvPr id="7" name="TextBox 6"/>
+          <p:cNvSpPr txBox="1"/>
+          <p:nvPr/>
+        </p:nvSpPr>
+        <p:spPr>
+          <a:xfrm>
+            <a:off x="4480560" y="2624328"/>
+            <a:ext cx="3108960" cy="914400"/>
+          </a:xfrm>
+          <a:prstGeom prst="rect">
+            <a:avLst/>
+          </a:prstGeom>
+          <a:noFill/>
+        </p:spPr>
+        <p:txBody>
+          <a:bodyPr wrap="square" lIns="0" rIns="0" tIns="0" bIns="0">
+            <a:spAutoFit/>
+          </a:bodyPr>
+          <a:lstStyle/>
+          <a:p>
+            <a:pPr algn="l">
+              <a:lnSpc>
+                <a:spcPct val="120000"/>
+              </a:lnSpc>
+              <a:spcAft>
+                <a:spcPts val="600"/>
+              </a:spcAft>
+            </a:pPr>
+            <a:r>
+              <a:rPr sz="1250" b="0">
+                <a:solidFill>
+                  <a:srgbClr val="6B6A64"/>
+                </a:solidFill>
+                <a:latin typeface="Calibri"/>
+              </a:rPr>
+              <a:t>pero su sector de dispositivos médicos emplea esa proporción de técnicos y profesionales</a:t>
+            </a:r>
+          </a:p>
+        </p:txBody>
+      </p:sp>
+      <p:sp>
+        <p:nvSpPr>
+          <p:cNvPr id="8" name="TextBox 7"/>
+          <p:cNvSpPr txBox="1"/>
+          <p:nvPr/>
+        </p:nvSpPr>
+        <p:spPr>
+          <a:xfrm>
+            <a:off x="8321040" y="1965960"/>
+            <a:ext cx="3108960" cy="731520"/>
+          </a:xfrm>
+          <a:prstGeom prst="rect">
+            <a:avLst/>
+          </a:prstGeom>
+          <a:noFill/>
+        </p:spPr>
+        <p:txBody>
+          <a:bodyPr wrap="square" lIns="0" rIns="0" tIns="0" bIns="0">
+            <a:spAutoFit/>
+          </a:bodyPr>
+          <a:lstStyle/>
+          <a:p>
+            <a:pPr algn="l">
+              <a:lnSpc>
+                <a:spcPct val="95000"/>
+              </a:lnSpc>
+              <a:spcAft>
+                <a:spcPts val="600"/>
+              </a:spcAft>
+            </a:pPr>
+            <a:r>
+              <a:rPr sz="4200" b="1">
+                <a:solidFill>
+                  <a:srgbClr val="1BAF7A"/>
+                </a:solidFill>
+                <a:latin typeface="Calibri"/>
+              </a:rPr>
+              <a:t>26%</a:t>
+            </a:r>
+          </a:p>
+        </p:txBody>
+      </p:sp>
+      <p:sp>
+        <p:nvSpPr>
+          <p:cNvPr id="9" name="TextBox 8"/>
+          <p:cNvSpPr txBox="1"/>
+          <p:nvPr/>
+        </p:nvSpPr>
+        <p:spPr>
+          <a:xfrm>
+            <a:off x="8321040" y="2624328"/>
+            <a:ext cx="3108960" cy="914400"/>
+          </a:xfrm>
+          <a:prstGeom prst="rect">
+            <a:avLst/>
+          </a:prstGeom>
+          <a:noFill/>
+        </p:spPr>
+        <p:txBody>
+          <a:bodyPr wrap="square" lIns="0" rIns="0" tIns="0" bIns="0">
+            <a:spAutoFit/>
+          </a:bodyPr>
+          <a:lstStyle/>
+          <a:p>
+            <a:pPr algn="l">
+              <a:lnSpc>
+                <a:spcPct val="120000"/>
+              </a:lnSpc>
+              <a:spcAft>
+                <a:spcPts val="600"/>
+              </a:spcAft>
+            </a:pPr>
+            <a:r>
+              <a:rPr sz="1250" b="0">
+                <a:solidFill>
+                  <a:srgbClr val="6B6A64"/>
+                </a:solidFill>
+                <a:latin typeface="Calibri"/>
+              </a:rPr>
+              <a:t>Costa Rica, con un stock parecido, llega al doble en el mismo sector</a:t>
+            </a:r>
+          </a:p>
+        </p:txBody>
+      </p:sp>
+      <p:cxnSp>
+        <p:nvCxnSpPr>
+          <p:cNvPr id="10" name="Connector 9"/>
+          <p:cNvCxnSpPr/>
+          <p:nvPr/>
+        </p:nvCxnSpPr>
+        <p:spPr>
+          <a:xfrm>
+            <a:off x="658368" y="4343400"/>
+            <a:ext cx="10874959" cy="0"/>
+          </a:xfrm>
+          <a:prstGeom prst="line">
+            <a:avLst/>
+          </a:prstGeom>
+          <a:ln w="19050">
+            <a:solidFill>
+              <a:srgbClr val="E4E4DF"/>
+            </a:solidFill>
+          </a:ln>
+        </p:spPr>
+        <p:style>
+          <a:lnRef idx="2">
+            <a:schemeClr val="accent1"/>
+          </a:lnRef>
+          <a:fillRef idx="0">
+            <a:schemeClr val="accent1"/>
+          </a:fillRef>
+          <a:effectRef idx="1">
+            <a:schemeClr val="accent1"/>
+          </a:effectRef>
+          <a:fontRef idx="minor">
+            <a:schemeClr val="tx1"/>
+          </a:fontRef>
+        </p:style>
+      </p:cxnSp>
+      <p:sp>
+        <p:nvSpPr>
+          <p:cNvPr id="11" name="TextBox 10"/>
+          <p:cNvSpPr txBox="1"/>
+          <p:nvPr/>
+        </p:nvSpPr>
+        <p:spPr>
+          <a:xfrm>
+            <a:off x="658368" y="4617720"/>
+            <a:ext cx="10881360" cy="1463040"/>
+          </a:xfrm>
+          <a:prstGeom prst="rect">
+            <a:avLst/>
+          </a:prstGeom>
+          <a:noFill/>
+        </p:spPr>
+        <p:txBody>
+          <a:bodyPr wrap="square" lIns="0" rIns="0" tIns="0" bIns="0">
+            <a:spAutoFit/>
+          </a:bodyPr>
+          <a:lstStyle/>
+          <a:p>
+            <a:pPr algn="l">
+              <a:lnSpc>
+                <a:spcPct val="135000"/>
+              </a:lnSpc>
+              <a:spcAft>
+                <a:spcPts val="600"/>
+              </a:spcAft>
+            </a:pPr>
+            <a:r>
+              <a:rPr sz="1900" b="0">
+                <a:solidFill>
+                  <a:srgbClr val="1C1C1A"/>
+                </a:solidFill>
+                <a:latin typeface="Calibri"/>
+              </a:rPr>
+              <a:t>El país formó a la gente, pero las plantas que instaló son de ensamble. Honduras muestra el caso contrario: emplea más técnicos de los que su nivel educativo haría esperar, y ahí la restricción sí es de formación.</a:t>
+            </a:r>
+          </a:p>
+        </p:txBody>
+      </p:sp>
+      <p:sp>
+        <p:nvSpPr>
+          <p:cNvPr id="12" name="TextBox 11"/>
+          <p:cNvSpPr txBox="1"/>
+          <p:nvPr/>
+        </p:nvSpPr>
+        <p:spPr>
+          <a:xfrm>
+            <a:off x="658368" y="5852160"/>
+            <a:ext cx="10881360" cy="548640"/>
+          </a:xfrm>
+          <a:prstGeom prst="rect">
+            <a:avLst/>
+          </a:prstGeom>
+          <a:noFill/>
+        </p:spPr>
+        <p:txBody>
+          <a:bodyPr wrap="square" lIns="0" rIns="0" tIns="0" bIns="0">
+            <a:spAutoFit/>
+          </a:bodyPr>
+          <a:lstStyle/>
+          <a:p>
+            <a:pPr algn="l">
+              <a:lnSpc>
+                <a:spcPct val="125000"/>
+              </a:lnSpc>
+              <a:spcAft>
+                <a:spcPts val="600"/>
+              </a:spcAft>
+            </a:pPr>
+            <a:r>
+              <a:rPr sz="1600" b="1">
+                <a:solidFill>
+                  <a:srgbClr val="1BAF7A"/>
+                </a:solidFill>
+                <a:latin typeface="Calibri"/>
+              </a:rPr>
+              <a:t>Formar y atraer funciones son dos políticas distintas; hacen falta las dos.</a:t>
             </a:r>
           </a:p>
         </p:txBody>
@@ -4208,7 +4209,7 @@
                 </a:solidFill>
                 <a:latin typeface="Calibri"/>
               </a:rPr>
-              <a:t>HALLAZGO 4 · QUÉ SIGNIFICA</a:t>
+              <a:t>HALLAZGO 4</a:t>
             </a:r>
           </a:p>
         </p:txBody>
@@ -4250,21 +4251,45 @@
                 </a:solidFill>
                 <a:latin typeface="Calibri"/>
               </a:rPr>
-              <a:t>México contrata para fábrica de autos; Centroamérica, para planta médica</a:t>
-            </a:r>
-          </a:p>
-        </p:txBody>
-      </p:sp>
-      <p:sp>
-        <p:nvSpPr>
-          <p:cNvPr id="4" name="TextBox 3"/>
+              <a:t>Los anuncios de trabajo delatan en qué se especializa cada bloque</a:t>
+            </a:r>
+          </a:p>
+        </p:txBody>
+      </p:sp>
+      <p:pic>
+        <p:nvPicPr>
+          <p:cNvPr id="4" name="Picture 3" descr="W10_habilidades_bloques.png"/>
+          <p:cNvPicPr>
+            <a:picLocks noChangeAspect="1"/>
+          </p:cNvPicPr>
+          <p:nvPr/>
+        </p:nvPicPr>
+        <p:blipFill>
+          <a:blip r:embed="rId2"/>
+          <a:stretch>
+            <a:fillRect/>
+          </a:stretch>
+        </p:blipFill>
+        <p:spPr>
+          <a:xfrm>
+            <a:off x="3054620" y="1645920"/>
+            <a:ext cx="6082455" cy="4114800"/>
+          </a:xfrm>
+          <a:prstGeom prst="rect">
+            <a:avLst/>
+          </a:prstGeom>
+        </p:spPr>
+      </p:pic>
+      <p:sp>
+        <p:nvSpPr>
+          <p:cNvPr id="5" name="TextBox 4"/>
           <p:cNvSpPr txBox="1"/>
           <p:nvPr/>
         </p:nvSpPr>
         <p:spPr>
           <a:xfrm>
-            <a:off x="658368" y="1920240"/>
-            <a:ext cx="5394960" cy="2926080"/>
+            <a:off x="658368" y="6199632"/>
+            <a:ext cx="10874959" cy="457200"/>
           </a:xfrm>
           <a:prstGeom prst="rect">
             <a:avLst/>
@@ -4279,409 +4304,20 @@
           <a:p>
             <a:pPr algn="l">
               <a:lnSpc>
-                <a:spcPct val="130000"/>
-              </a:lnSpc>
-              <a:spcAft>
-                <a:spcPts val="600"/>
-              </a:spcAft>
-            </a:pPr>
-            <a:r>
-              <a:rPr sz="1550" b="0">
-                <a:solidFill>
-                  <a:srgbClr val="1C1C1A"/>
-                </a:solidFill>
-                <a:latin typeface="Calibri"/>
-              </a:rPr>
-              <a:t>México pide mucho más:</a:t>
-            </a:r>
-          </a:p>
-          <a:p>
-            <a:pPr algn="l">
-              <a:lnSpc>
-                <a:spcPct val="130000"/>
-              </a:lnSpc>
-              <a:spcAft>
-                <a:spcPts val="600"/>
-              </a:spcAft>
-            </a:pPr>
-            <a:r>
-              <a:rPr sz="1550" b="0">
-                <a:solidFill>
-                  <a:srgbClr val="1C1C1A"/>
-                </a:solidFill>
-                <a:latin typeface="Calibri"/>
-              </a:rPr>
-              <a:t/>
-            </a:r>
-          </a:p>
-          <a:p>
-            <a:pPr algn="l">
-              <a:lnSpc>
-                <a:spcPct val="130000"/>
-              </a:lnSpc>
-              <a:spcAft>
-                <a:spcPts val="600"/>
-              </a:spcAft>
-            </a:pPr>
-            <a:r>
-              <a:rPr sz="1550" b="0">
-                <a:solidFill>
-                  <a:srgbClr val="1C1C1A"/>
-                </a:solidFill>
-                <a:latin typeface="Calibri"/>
-              </a:rPr>
-              <a:t>•  Herramientas de calidad de la industria automotriz (ocho veces más que CAPARD)</a:t>
-            </a:r>
-          </a:p>
-          <a:p>
-            <a:pPr algn="l">
-              <a:lnSpc>
-                <a:spcPct val="130000"/>
-              </a:lnSpc>
-              <a:spcAft>
-                <a:spcPts val="600"/>
-              </a:spcAft>
-            </a:pPr>
-            <a:r>
-              <a:rPr sz="1550" b="0">
-                <a:solidFill>
-                  <a:srgbClr val="1C1C1A"/>
-                </a:solidFill>
-                <a:latin typeface="Calibri"/>
-              </a:rPr>
-              <a:t/>
-            </a:r>
-          </a:p>
-          <a:p>
-            <a:pPr algn="l">
-              <a:lnSpc>
-                <a:spcPct val="130000"/>
-              </a:lnSpc>
-              <a:spcAft>
-                <a:spcPts val="600"/>
-              </a:spcAft>
-            </a:pPr>
-            <a:r>
-              <a:rPr sz="1550" b="0">
-                <a:solidFill>
-                  <a:srgbClr val="1C1C1A"/>
-                </a:solidFill>
-                <a:latin typeface="Calibri"/>
-              </a:rPr>
-              <a:t>•  Análisis de fallas en la producción (tres veces más)</a:t>
-            </a:r>
-          </a:p>
-          <a:p>
-            <a:pPr algn="l">
-              <a:lnSpc>
-                <a:spcPct val="130000"/>
-              </a:lnSpc>
-              <a:spcAft>
-                <a:spcPts val="600"/>
-              </a:spcAft>
-            </a:pPr>
-            <a:r>
-              <a:rPr sz="1550" b="0">
-                <a:solidFill>
-                  <a:srgbClr val="1C1C1A"/>
-                </a:solidFill>
-                <a:latin typeface="Calibri"/>
-              </a:rPr>
-              <a:t/>
-            </a:r>
-          </a:p>
-          <a:p>
-            <a:pPr algn="l">
-              <a:lnSpc>
-                <a:spcPct val="130000"/>
-              </a:lnSpc>
-              <a:spcAft>
-                <a:spcPts val="600"/>
-              </a:spcAft>
-            </a:pPr>
-            <a:r>
-              <a:rPr sz="1550" b="0">
-                <a:solidFill>
-                  <a:srgbClr val="1C1C1A"/>
-                </a:solidFill>
-                <a:latin typeface="Calibri"/>
-              </a:rPr>
-              <a:t>•  Robótica (casi cuatro veces más)</a:t>
-            </a:r>
-          </a:p>
-        </p:txBody>
-      </p:sp>
-      <p:sp>
-        <p:nvSpPr>
-          <p:cNvPr id="5" name="TextBox 4"/>
-          <p:cNvSpPr txBox="1"/>
-          <p:nvPr/>
-        </p:nvSpPr>
-        <p:spPr>
-          <a:xfrm>
-            <a:off x="6492240" y="1920240"/>
-            <a:ext cx="5029200" cy="2926080"/>
-          </a:xfrm>
-          <a:prstGeom prst="rect">
-            <a:avLst/>
-          </a:prstGeom>
-          <a:noFill/>
-        </p:spPr>
-        <p:txBody>
-          <a:bodyPr wrap="square" lIns="0" rIns="0" tIns="0" bIns="0">
-            <a:spAutoFit/>
-          </a:bodyPr>
-          <a:lstStyle/>
-          <a:p>
-            <a:pPr algn="l">
-              <a:lnSpc>
-                <a:spcPct val="130000"/>
-              </a:lnSpc>
-              <a:spcAft>
-                <a:spcPts val="600"/>
-              </a:spcAft>
-            </a:pPr>
-            <a:r>
-              <a:rPr sz="1550" b="0">
-                <a:solidFill>
-                  <a:srgbClr val="1C1C1A"/>
-                </a:solidFill>
-                <a:latin typeface="Calibri"/>
-              </a:rPr>
-              <a:t>CAPARD pide mucho más:</a:t>
-            </a:r>
-          </a:p>
-          <a:p>
-            <a:pPr algn="l">
-              <a:lnSpc>
-                <a:spcPct val="130000"/>
-              </a:lnSpc>
-              <a:spcAft>
-                <a:spcPts val="600"/>
-              </a:spcAft>
-            </a:pPr>
-            <a:r>
-              <a:rPr sz="1550" b="0">
-                <a:solidFill>
-                  <a:srgbClr val="1C1C1A"/>
-                </a:solidFill>
-                <a:latin typeface="Calibri"/>
-              </a:rPr>
-              <a:t/>
-            </a:r>
-          </a:p>
-          <a:p>
-            <a:pPr algn="l">
-              <a:lnSpc>
-                <a:spcPct val="130000"/>
-              </a:lnSpc>
-              <a:spcAft>
-                <a:spcPts val="600"/>
-              </a:spcAft>
-            </a:pPr>
-            <a:r>
-              <a:rPr sz="1550" b="0">
-                <a:solidFill>
-                  <a:srgbClr val="1C1C1A"/>
-                </a:solidFill>
-                <a:latin typeface="Calibri"/>
-              </a:rPr>
-              <a:t>•  Excel y herramientas de análisis de datos</a:t>
-            </a:r>
-          </a:p>
-          <a:p>
-            <a:pPr algn="l">
-              <a:lnSpc>
-                <a:spcPct val="130000"/>
-              </a:lnSpc>
-              <a:spcAft>
-                <a:spcPts val="600"/>
-              </a:spcAft>
-            </a:pPr>
-            <a:r>
-              <a:rPr sz="1550" b="0">
-                <a:solidFill>
-                  <a:srgbClr val="1C1C1A"/>
-                </a:solidFill>
-                <a:latin typeface="Calibri"/>
-              </a:rPr>
-              <a:t/>
-            </a:r>
-          </a:p>
-          <a:p>
-            <a:pPr algn="l">
-              <a:lnSpc>
-                <a:spcPct val="130000"/>
-              </a:lnSpc>
-              <a:spcAft>
-                <a:spcPts val="600"/>
-              </a:spcAft>
-            </a:pPr>
-            <a:r>
-              <a:rPr sz="1550" b="0">
-                <a:solidFill>
-                  <a:srgbClr val="1C1C1A"/>
-                </a:solidFill>
-                <a:latin typeface="Calibri"/>
-              </a:rPr>
-              <a:t>•  Buenas prácticas de manufactura (tres veces más)</a:t>
-            </a:r>
-          </a:p>
-          <a:p>
-            <a:pPr algn="l">
-              <a:lnSpc>
-                <a:spcPct val="130000"/>
-              </a:lnSpc>
-              <a:spcAft>
-                <a:spcPts val="600"/>
-              </a:spcAft>
-            </a:pPr>
-            <a:r>
-              <a:rPr sz="1550" b="0">
-                <a:solidFill>
-                  <a:srgbClr val="1C1C1A"/>
-                </a:solidFill>
-                <a:latin typeface="Calibri"/>
-              </a:rPr>
-              <a:t/>
-            </a:r>
-          </a:p>
-          <a:p>
-            <a:pPr algn="l">
-              <a:lnSpc>
-                <a:spcPct val="130000"/>
-              </a:lnSpc>
-              <a:spcAft>
-                <a:spcPts val="600"/>
-              </a:spcAft>
-            </a:pPr>
-            <a:r>
-              <a:rPr sz="1550" b="0">
-                <a:solidFill>
-                  <a:srgbClr val="1C1C1A"/>
-                </a:solidFill>
-                <a:latin typeface="Calibri"/>
-              </a:rPr>
-              <a:t>•  Requisitos de la FDA, la agencia sanitaria de Estados Unidos (tres veces más)</a:t>
-            </a:r>
-          </a:p>
-        </p:txBody>
-      </p:sp>
-      <p:cxnSp>
-        <p:nvCxnSpPr>
-          <p:cNvPr id="6" name="Connector 5"/>
-          <p:cNvCxnSpPr/>
-          <p:nvPr/>
-        </p:nvCxnSpPr>
-        <p:spPr>
-          <a:xfrm>
-            <a:off x="658368" y="4892040"/>
-            <a:ext cx="10874959" cy="0"/>
-          </a:xfrm>
-          <a:prstGeom prst="line">
-            <a:avLst/>
-          </a:prstGeom>
-          <a:ln w="19050">
-            <a:solidFill>
-              <a:srgbClr val="E4E4DF"/>
-            </a:solidFill>
-          </a:ln>
-        </p:spPr>
-        <p:style>
-          <a:lnRef idx="2">
-            <a:schemeClr val="accent1"/>
-          </a:lnRef>
-          <a:fillRef idx="0">
-            <a:schemeClr val="accent1"/>
-          </a:fillRef>
-          <a:effectRef idx="1">
-            <a:schemeClr val="accent1"/>
-          </a:effectRef>
-          <a:fontRef idx="minor">
-            <a:schemeClr val="tx1"/>
-          </a:fontRef>
-        </p:style>
-      </p:cxnSp>
-      <p:sp>
-        <p:nvSpPr>
-          <p:cNvPr id="7" name="TextBox 6"/>
-          <p:cNvSpPr txBox="1"/>
-          <p:nvPr/>
-        </p:nvSpPr>
-        <p:spPr>
-          <a:xfrm>
-            <a:off x="658368" y="5120640"/>
-            <a:ext cx="10881360" cy="1097280"/>
-          </a:xfrm>
-          <a:prstGeom prst="rect">
-            <a:avLst/>
-          </a:prstGeom>
-          <a:noFill/>
-        </p:spPr>
-        <p:txBody>
-          <a:bodyPr wrap="square" lIns="0" rIns="0" tIns="0" bIns="0">
-            <a:spAutoFit/>
-          </a:bodyPr>
-          <a:lstStyle/>
-          <a:p>
-            <a:pPr algn="l">
-              <a:lnSpc>
-                <a:spcPct val="135000"/>
-              </a:lnSpc>
-              <a:spcAft>
-                <a:spcPts val="600"/>
-              </a:spcAft>
-            </a:pPr>
-            <a:r>
-              <a:rPr sz="1800" b="0">
-                <a:solidFill>
-                  <a:srgbClr val="1C1C1A"/>
-                </a:solidFill>
-                <a:latin typeface="Calibri"/>
-              </a:rPr>
-              <a:t>Es la huella de los dispositivos médicos —un sector regulado por la FDA— frente a la de las cadenas automotriz y electrónica. Lo que la Nota Técnica ve en las exportaciones, se ve igual en los anuncios de empleo.</a:t>
-            </a:r>
-          </a:p>
-        </p:txBody>
-      </p:sp>
-      <p:sp>
-        <p:nvSpPr>
-          <p:cNvPr id="8" name="TextBox 7"/>
-          <p:cNvSpPr txBox="1"/>
-          <p:nvPr/>
-        </p:nvSpPr>
-        <p:spPr>
-          <a:xfrm>
-            <a:off x="658368" y="6172200"/>
-            <a:ext cx="10881360" cy="457200"/>
-          </a:xfrm>
-          <a:prstGeom prst="rect">
-            <a:avLst/>
-          </a:prstGeom>
-          <a:noFill/>
-        </p:spPr>
-        <p:txBody>
-          <a:bodyPr wrap="square" lIns="0" rIns="0" tIns="0" bIns="0">
-            <a:spAutoFit/>
-          </a:bodyPr>
-          <a:lstStyle/>
-          <a:p>
-            <a:pPr algn="l">
-              <a:lnSpc>
-                <a:spcPct val="125000"/>
-              </a:lnSpc>
-              <a:spcAft>
-                <a:spcPts val="600"/>
-              </a:spcAft>
-            </a:pPr>
-            <a:r>
-              <a:rPr sz="1400" b="0">
+                <a:spcPct val="115000"/>
+              </a:lnSpc>
+              <a:spcAft>
+                <a:spcPts val="600"/>
+              </a:spcAft>
+            </a:pPr>
+            <a:r>
+              <a:rPr sz="1050" b="0">
                 <a:solidFill>
                   <a:srgbClr val="6B6A64"/>
                 </a:solidFill>
                 <a:latin typeface="Calibri"/>
               </a:rPr>
-              <a:t>El inglés se pide casi igual en los dos bloques (16% y 15%): la brecha de idioma que suele suponerse no aparece.</a:t>
+              <a:t>925 mil anuncios de CAPARD (Guatemala, Honduras, Costa Rica y República Dominicana) y 1,6 millones de México. El Salvador, Nicaragua y Panamá no tienen anuncios en la base.</a:t>
             </a:r>
           </a:p>
         </p:txBody>
@@ -4741,7 +4377,7 @@
                 </a:solidFill>
                 <a:latin typeface="Calibri"/>
               </a:rPr>
-              <a:t>LA PREGUNTA DE FONDO</a:t>
+              <a:t>HALLAZGO 4 · QUÉ SIGNIFICA</a:t>
             </a:r>
           </a:p>
         </p:txBody>
@@ -4783,45 +4419,21 @@
                 </a:solidFill>
                 <a:latin typeface="Calibri"/>
               </a:rPr>
-              <a:t>¿Está la región formando la gente que estos sectores necesitan?</a:t>
-            </a:r>
-          </a:p>
-        </p:txBody>
-      </p:sp>
-      <p:pic>
-        <p:nvPicPr>
-          <p:cNvPr id="4" name="Picture 3" descr="W11_escalamiento.png"/>
-          <p:cNvPicPr>
-            <a:picLocks noChangeAspect="1"/>
-          </p:cNvPicPr>
-          <p:nvPr/>
-        </p:nvPicPr>
-        <p:blipFill>
-          <a:blip r:embed="rId2"/>
-          <a:stretch>
-            <a:fillRect/>
-          </a:stretch>
-        </p:blipFill>
-        <p:spPr>
-          <a:xfrm>
-            <a:off x="1743789" y="1737360"/>
-            <a:ext cx="8704117" cy="3931920"/>
-          </a:xfrm>
-          <a:prstGeom prst="rect">
-            <a:avLst/>
-          </a:prstGeom>
-        </p:spPr>
-      </p:pic>
-      <p:sp>
-        <p:nvSpPr>
-          <p:cNvPr id="5" name="TextBox 4"/>
+              <a:t>México contrata para fábrica de autos; Centroamérica, para planta médica</a:t>
+            </a:r>
+          </a:p>
+        </p:txBody>
+      </p:sp>
+      <p:sp>
+        <p:nvSpPr>
+          <p:cNvPr id="4" name="TextBox 3"/>
           <p:cNvSpPr txBox="1"/>
           <p:nvPr/>
         </p:nvSpPr>
         <p:spPr>
           <a:xfrm>
-            <a:off x="658368" y="6199632"/>
-            <a:ext cx="10874959" cy="457200"/>
+            <a:off x="658368" y="1920240"/>
+            <a:ext cx="5394960" cy="2926080"/>
           </a:xfrm>
           <a:prstGeom prst="rect">
             <a:avLst/>
@@ -4836,20 +4448,409 @@
           <a:p>
             <a:pPr algn="l">
               <a:lnSpc>
-                <a:spcPct val="115000"/>
-              </a:lnSpc>
-              <a:spcAft>
-                <a:spcPts val="600"/>
-              </a:spcAft>
-            </a:pPr>
-            <a:r>
-              <a:rPr sz="1050" b="0">
+                <a:spcPct val="130000"/>
+              </a:lnSpc>
+              <a:spcAft>
+                <a:spcPts val="600"/>
+              </a:spcAft>
+            </a:pPr>
+            <a:r>
+              <a:rPr sz="1550" b="0">
+                <a:solidFill>
+                  <a:srgbClr val="1C1C1A"/>
+                </a:solidFill>
+                <a:latin typeface="Calibri"/>
+              </a:rPr>
+              <a:t>México pide mucho más:</a:t>
+            </a:r>
+          </a:p>
+          <a:p>
+            <a:pPr algn="l">
+              <a:lnSpc>
+                <a:spcPct val="130000"/>
+              </a:lnSpc>
+              <a:spcAft>
+                <a:spcPts val="600"/>
+              </a:spcAft>
+            </a:pPr>
+            <a:r>
+              <a:rPr sz="1550" b="0">
+                <a:solidFill>
+                  <a:srgbClr val="1C1C1A"/>
+                </a:solidFill>
+                <a:latin typeface="Calibri"/>
+              </a:rPr>
+              <a:t/>
+            </a:r>
+          </a:p>
+          <a:p>
+            <a:pPr algn="l">
+              <a:lnSpc>
+                <a:spcPct val="130000"/>
+              </a:lnSpc>
+              <a:spcAft>
+                <a:spcPts val="600"/>
+              </a:spcAft>
+            </a:pPr>
+            <a:r>
+              <a:rPr sz="1550" b="0">
+                <a:solidFill>
+                  <a:srgbClr val="1C1C1A"/>
+                </a:solidFill>
+                <a:latin typeface="Calibri"/>
+              </a:rPr>
+              <a:t>•  Herramientas de calidad de la industria automotriz (ocho veces más que CAPARD)</a:t>
+            </a:r>
+          </a:p>
+          <a:p>
+            <a:pPr algn="l">
+              <a:lnSpc>
+                <a:spcPct val="130000"/>
+              </a:lnSpc>
+              <a:spcAft>
+                <a:spcPts val="600"/>
+              </a:spcAft>
+            </a:pPr>
+            <a:r>
+              <a:rPr sz="1550" b="0">
+                <a:solidFill>
+                  <a:srgbClr val="1C1C1A"/>
+                </a:solidFill>
+                <a:latin typeface="Calibri"/>
+              </a:rPr>
+              <a:t/>
+            </a:r>
+          </a:p>
+          <a:p>
+            <a:pPr algn="l">
+              <a:lnSpc>
+                <a:spcPct val="130000"/>
+              </a:lnSpc>
+              <a:spcAft>
+                <a:spcPts val="600"/>
+              </a:spcAft>
+            </a:pPr>
+            <a:r>
+              <a:rPr sz="1550" b="0">
+                <a:solidFill>
+                  <a:srgbClr val="1C1C1A"/>
+                </a:solidFill>
+                <a:latin typeface="Calibri"/>
+              </a:rPr>
+              <a:t>•  Análisis de fallas en la producción (tres veces más)</a:t>
+            </a:r>
+          </a:p>
+          <a:p>
+            <a:pPr algn="l">
+              <a:lnSpc>
+                <a:spcPct val="130000"/>
+              </a:lnSpc>
+              <a:spcAft>
+                <a:spcPts val="600"/>
+              </a:spcAft>
+            </a:pPr>
+            <a:r>
+              <a:rPr sz="1550" b="0">
+                <a:solidFill>
+                  <a:srgbClr val="1C1C1A"/>
+                </a:solidFill>
+                <a:latin typeface="Calibri"/>
+              </a:rPr>
+              <a:t/>
+            </a:r>
+          </a:p>
+          <a:p>
+            <a:pPr algn="l">
+              <a:lnSpc>
+                <a:spcPct val="130000"/>
+              </a:lnSpc>
+              <a:spcAft>
+                <a:spcPts val="600"/>
+              </a:spcAft>
+            </a:pPr>
+            <a:r>
+              <a:rPr sz="1550" b="0">
+                <a:solidFill>
+                  <a:srgbClr val="1C1C1A"/>
+                </a:solidFill>
+                <a:latin typeface="Calibri"/>
+              </a:rPr>
+              <a:t>•  Robótica (casi cuatro veces más)</a:t>
+            </a:r>
+          </a:p>
+        </p:txBody>
+      </p:sp>
+      <p:sp>
+        <p:nvSpPr>
+          <p:cNvPr id="5" name="TextBox 4"/>
+          <p:cNvSpPr txBox="1"/>
+          <p:nvPr/>
+        </p:nvSpPr>
+        <p:spPr>
+          <a:xfrm>
+            <a:off x="6492240" y="1920240"/>
+            <a:ext cx="5029200" cy="2926080"/>
+          </a:xfrm>
+          <a:prstGeom prst="rect">
+            <a:avLst/>
+          </a:prstGeom>
+          <a:noFill/>
+        </p:spPr>
+        <p:txBody>
+          <a:bodyPr wrap="square" lIns="0" rIns="0" tIns="0" bIns="0">
+            <a:spAutoFit/>
+          </a:bodyPr>
+          <a:lstStyle/>
+          <a:p>
+            <a:pPr algn="l">
+              <a:lnSpc>
+                <a:spcPct val="130000"/>
+              </a:lnSpc>
+              <a:spcAft>
+                <a:spcPts val="600"/>
+              </a:spcAft>
+            </a:pPr>
+            <a:r>
+              <a:rPr sz="1550" b="0">
+                <a:solidFill>
+                  <a:srgbClr val="1C1C1A"/>
+                </a:solidFill>
+                <a:latin typeface="Calibri"/>
+              </a:rPr>
+              <a:t>CAPARD pide mucho más:</a:t>
+            </a:r>
+          </a:p>
+          <a:p>
+            <a:pPr algn="l">
+              <a:lnSpc>
+                <a:spcPct val="130000"/>
+              </a:lnSpc>
+              <a:spcAft>
+                <a:spcPts val="600"/>
+              </a:spcAft>
+            </a:pPr>
+            <a:r>
+              <a:rPr sz="1550" b="0">
+                <a:solidFill>
+                  <a:srgbClr val="1C1C1A"/>
+                </a:solidFill>
+                <a:latin typeface="Calibri"/>
+              </a:rPr>
+              <a:t/>
+            </a:r>
+          </a:p>
+          <a:p>
+            <a:pPr algn="l">
+              <a:lnSpc>
+                <a:spcPct val="130000"/>
+              </a:lnSpc>
+              <a:spcAft>
+                <a:spcPts val="600"/>
+              </a:spcAft>
+            </a:pPr>
+            <a:r>
+              <a:rPr sz="1550" b="0">
+                <a:solidFill>
+                  <a:srgbClr val="1C1C1A"/>
+                </a:solidFill>
+                <a:latin typeface="Calibri"/>
+              </a:rPr>
+              <a:t>•  Excel y herramientas de análisis de datos</a:t>
+            </a:r>
+          </a:p>
+          <a:p>
+            <a:pPr algn="l">
+              <a:lnSpc>
+                <a:spcPct val="130000"/>
+              </a:lnSpc>
+              <a:spcAft>
+                <a:spcPts val="600"/>
+              </a:spcAft>
+            </a:pPr>
+            <a:r>
+              <a:rPr sz="1550" b="0">
+                <a:solidFill>
+                  <a:srgbClr val="1C1C1A"/>
+                </a:solidFill>
+                <a:latin typeface="Calibri"/>
+              </a:rPr>
+              <a:t/>
+            </a:r>
+          </a:p>
+          <a:p>
+            <a:pPr algn="l">
+              <a:lnSpc>
+                <a:spcPct val="130000"/>
+              </a:lnSpc>
+              <a:spcAft>
+                <a:spcPts val="600"/>
+              </a:spcAft>
+            </a:pPr>
+            <a:r>
+              <a:rPr sz="1550" b="0">
+                <a:solidFill>
+                  <a:srgbClr val="1C1C1A"/>
+                </a:solidFill>
+                <a:latin typeface="Calibri"/>
+              </a:rPr>
+              <a:t>•  Buenas prácticas de manufactura (tres veces más)</a:t>
+            </a:r>
+          </a:p>
+          <a:p>
+            <a:pPr algn="l">
+              <a:lnSpc>
+                <a:spcPct val="130000"/>
+              </a:lnSpc>
+              <a:spcAft>
+                <a:spcPts val="600"/>
+              </a:spcAft>
+            </a:pPr>
+            <a:r>
+              <a:rPr sz="1550" b="0">
+                <a:solidFill>
+                  <a:srgbClr val="1C1C1A"/>
+                </a:solidFill>
+                <a:latin typeface="Calibri"/>
+              </a:rPr>
+              <a:t/>
+            </a:r>
+          </a:p>
+          <a:p>
+            <a:pPr algn="l">
+              <a:lnSpc>
+                <a:spcPct val="130000"/>
+              </a:lnSpc>
+              <a:spcAft>
+                <a:spcPts val="600"/>
+              </a:spcAft>
+            </a:pPr>
+            <a:r>
+              <a:rPr sz="1550" b="0">
+                <a:solidFill>
+                  <a:srgbClr val="1C1C1A"/>
+                </a:solidFill>
+                <a:latin typeface="Calibri"/>
+              </a:rPr>
+              <a:t>•  Requisitos de la FDA, la agencia sanitaria de Estados Unidos (tres veces más)</a:t>
+            </a:r>
+          </a:p>
+        </p:txBody>
+      </p:sp>
+      <p:cxnSp>
+        <p:nvCxnSpPr>
+          <p:cNvPr id="6" name="Connector 5"/>
+          <p:cNvCxnSpPr/>
+          <p:nvPr/>
+        </p:nvCxnSpPr>
+        <p:spPr>
+          <a:xfrm>
+            <a:off x="658368" y="4892040"/>
+            <a:ext cx="10874959" cy="0"/>
+          </a:xfrm>
+          <a:prstGeom prst="line">
+            <a:avLst/>
+          </a:prstGeom>
+          <a:ln w="19050">
+            <a:solidFill>
+              <a:srgbClr val="E4E4DF"/>
+            </a:solidFill>
+          </a:ln>
+        </p:spPr>
+        <p:style>
+          <a:lnRef idx="2">
+            <a:schemeClr val="accent1"/>
+          </a:lnRef>
+          <a:fillRef idx="0">
+            <a:schemeClr val="accent1"/>
+          </a:fillRef>
+          <a:effectRef idx="1">
+            <a:schemeClr val="accent1"/>
+          </a:effectRef>
+          <a:fontRef idx="minor">
+            <a:schemeClr val="tx1"/>
+          </a:fontRef>
+        </p:style>
+      </p:cxnSp>
+      <p:sp>
+        <p:nvSpPr>
+          <p:cNvPr id="7" name="TextBox 6"/>
+          <p:cNvSpPr txBox="1"/>
+          <p:nvPr/>
+        </p:nvSpPr>
+        <p:spPr>
+          <a:xfrm>
+            <a:off x="658368" y="5120640"/>
+            <a:ext cx="10881360" cy="1097280"/>
+          </a:xfrm>
+          <a:prstGeom prst="rect">
+            <a:avLst/>
+          </a:prstGeom>
+          <a:noFill/>
+        </p:spPr>
+        <p:txBody>
+          <a:bodyPr wrap="square" lIns="0" rIns="0" tIns="0" bIns="0">
+            <a:spAutoFit/>
+          </a:bodyPr>
+          <a:lstStyle/>
+          <a:p>
+            <a:pPr algn="l">
+              <a:lnSpc>
+                <a:spcPct val="135000"/>
+              </a:lnSpc>
+              <a:spcAft>
+                <a:spcPts val="600"/>
+              </a:spcAft>
+            </a:pPr>
+            <a:r>
+              <a:rPr sz="1800" b="0">
+                <a:solidFill>
+                  <a:srgbClr val="1C1C1A"/>
+                </a:solidFill>
+                <a:latin typeface="Calibri"/>
+              </a:rPr>
+              <a:t>Es la huella de los dispositivos médicos —un sector regulado por la FDA— frente a la de las cadenas automotriz y electrónica. Lo que la Nota Técnica ve en las exportaciones, se ve igual en los anuncios de empleo.</a:t>
+            </a:r>
+          </a:p>
+        </p:txBody>
+      </p:sp>
+      <p:sp>
+        <p:nvSpPr>
+          <p:cNvPr id="8" name="TextBox 7"/>
+          <p:cNvSpPr txBox="1"/>
+          <p:nvPr/>
+        </p:nvSpPr>
+        <p:spPr>
+          <a:xfrm>
+            <a:off x="658368" y="6172200"/>
+            <a:ext cx="10881360" cy="457200"/>
+          </a:xfrm>
+          <a:prstGeom prst="rect">
+            <a:avLst/>
+          </a:prstGeom>
+          <a:noFill/>
+        </p:spPr>
+        <p:txBody>
+          <a:bodyPr wrap="square" lIns="0" rIns="0" tIns="0" bIns="0">
+            <a:spAutoFit/>
+          </a:bodyPr>
+          <a:lstStyle/>
+          <a:p>
+            <a:pPr algn="l">
+              <a:lnSpc>
+                <a:spcPct val="125000"/>
+              </a:lnSpc>
+              <a:spcAft>
+                <a:spcPts val="600"/>
+              </a:spcAft>
+            </a:pPr>
+            <a:r>
+              <a:rPr sz="1400" b="0">
                 <a:solidFill>
                   <a:srgbClr val="6B6A64"/>
                 </a:solidFill>
                 <a:latin typeface="Calibri"/>
               </a:rPr>
-              <a:t>Izquierda: los dos países cuya encuesta permite seguir el sector año a año. Derecha: los cinco países con anuncios, sobre el total de su economía, porque la base no permite separar los sectores.</a:t>
+              <a:t>El inglés se pide casi igual en los dos bloques (16% y 15%): la brecha de idioma que suele suponerse no aparece.</a:t>
             </a:r>
           </a:p>
         </p:txBody>
@@ -4909,7 +4910,7 @@
                 </a:solidFill>
                 <a:latin typeface="Calibri"/>
               </a:rPr>
-              <a:t>LA RESPUESTA</a:t>
+              <a:t>LA PREGUNTA DE FONDO</a:t>
             </a:r>
           </a:p>
         </p:txBody>
@@ -4951,21 +4952,45 @@
                 </a:solidFill>
                 <a:latin typeface="Calibri"/>
               </a:rPr>
-              <a:t>Las empresas piden más gente calificada; el empleo no la está dando</a:t>
-            </a:r>
-          </a:p>
-        </p:txBody>
-      </p:sp>
-      <p:sp>
-        <p:nvSpPr>
-          <p:cNvPr id="4" name="TextBox 3"/>
+              <a:t>¿Está la región formando la gente que estos sectores necesitan?</a:t>
+            </a:r>
+          </a:p>
+        </p:txBody>
+      </p:sp>
+      <p:pic>
+        <p:nvPicPr>
+          <p:cNvPr id="4" name="Picture 3" descr="W11_escalamiento.png"/>
+          <p:cNvPicPr>
+            <a:picLocks noChangeAspect="1"/>
+          </p:cNvPicPr>
+          <p:nvPr/>
+        </p:nvPicPr>
+        <p:blipFill>
+          <a:blip r:embed="rId2"/>
+          <a:stretch>
+            <a:fillRect/>
+          </a:stretch>
+        </p:blipFill>
+        <p:spPr>
+          <a:xfrm>
+            <a:off x="1743789" y="1737360"/>
+            <a:ext cx="8704117" cy="3931920"/>
+          </a:xfrm>
+          <a:prstGeom prst="rect">
+            <a:avLst/>
+          </a:prstGeom>
+        </p:spPr>
+      </p:pic>
+      <p:sp>
+        <p:nvSpPr>
+          <p:cNvPr id="5" name="TextBox 4"/>
           <p:cNvSpPr txBox="1"/>
           <p:nvPr/>
         </p:nvSpPr>
         <p:spPr>
           <a:xfrm>
-            <a:off x="658368" y="1965960"/>
-            <a:ext cx="3108960" cy="731520"/>
+            <a:off x="658368" y="6199632"/>
+            <a:ext cx="10874959" cy="457200"/>
           </a:xfrm>
           <a:prstGeom prst="rect">
             <a:avLst/>
@@ -4980,349 +5005,20 @@
           <a:p>
             <a:pPr algn="l">
               <a:lnSpc>
-                <a:spcPct val="95000"/>
-              </a:lnSpc>
-              <a:spcAft>
-                <a:spcPts val="600"/>
-              </a:spcAft>
-            </a:pPr>
-            <a:r>
-              <a:rPr sz="4200" b="1">
-                <a:solidFill>
-                  <a:srgbClr val="4A3AA7"/>
-                </a:solidFill>
-                <a:latin typeface="Calibri"/>
-              </a:rPr>
-              <a:t>−0,9</a:t>
-            </a:r>
-          </a:p>
-        </p:txBody>
-      </p:sp>
-      <p:sp>
-        <p:nvSpPr>
-          <p:cNvPr id="5" name="TextBox 4"/>
-          <p:cNvSpPr txBox="1"/>
-          <p:nvPr/>
-        </p:nvSpPr>
-        <p:spPr>
-          <a:xfrm>
-            <a:off x="658368" y="2624328"/>
-            <a:ext cx="3108960" cy="914400"/>
-          </a:xfrm>
-          <a:prstGeom prst="rect">
-            <a:avLst/>
-          </a:prstGeom>
-          <a:noFill/>
-        </p:spPr>
-        <p:txBody>
-          <a:bodyPr wrap="square" lIns="0" rIns="0" tIns="0" bIns="0">
-            <a:spAutoFit/>
-          </a:bodyPr>
-          <a:lstStyle/>
-          <a:p>
-            <a:pPr algn="l">
-              <a:lnSpc>
-                <a:spcPct val="120000"/>
-              </a:lnSpc>
-              <a:spcAft>
-                <a:spcPts val="600"/>
-              </a:spcAft>
-            </a:pPr>
-            <a:r>
-              <a:rPr sz="1250" b="0">
+                <a:spcPct val="115000"/>
+              </a:lnSpc>
+              <a:spcAft>
+                <a:spcPts val="600"/>
+              </a:spcAft>
+            </a:pPr>
+            <a:r>
+              <a:rPr sz="1050" b="0">
                 <a:solidFill>
                   <a:srgbClr val="6B6A64"/>
                 </a:solidFill>
                 <a:latin typeface="Calibri"/>
               </a:rPr>
-              <a:t>puntos por año cae la proporción de técnicos y profesionales en los sectores mexicanos</a:t>
-            </a:r>
-          </a:p>
-        </p:txBody>
-      </p:sp>
-      <p:sp>
-        <p:nvSpPr>
-          <p:cNvPr id="6" name="TextBox 5"/>
-          <p:cNvSpPr txBox="1"/>
-          <p:nvPr/>
-        </p:nvSpPr>
-        <p:spPr>
-          <a:xfrm>
-            <a:off x="4480560" y="1965960"/>
-            <a:ext cx="3291840" cy="731520"/>
-          </a:xfrm>
-          <a:prstGeom prst="rect">
-            <a:avLst/>
-          </a:prstGeom>
-          <a:noFill/>
-        </p:spPr>
-        <p:txBody>
-          <a:bodyPr wrap="square" lIns="0" rIns="0" tIns="0" bIns="0">
-            <a:spAutoFit/>
-          </a:bodyPr>
-          <a:lstStyle/>
-          <a:p>
-            <a:pPr algn="l">
-              <a:lnSpc>
-                <a:spcPct val="95000"/>
-              </a:lnSpc>
-              <a:spcAft>
-                <a:spcPts val="600"/>
-              </a:spcAft>
-            </a:pPr>
-            <a:r>
-              <a:rPr sz="4200" b="1">
-                <a:solidFill>
-                  <a:srgbClr val="6B6A64"/>
-                </a:solidFill>
-                <a:latin typeface="Calibri"/>
-              </a:rPr>
-              <a:t>617 → 633 mil</a:t>
-            </a:r>
-          </a:p>
-        </p:txBody>
-      </p:sp>
-      <p:sp>
-        <p:nvSpPr>
-          <p:cNvPr id="7" name="TextBox 6"/>
-          <p:cNvSpPr txBox="1"/>
-          <p:nvPr/>
-        </p:nvSpPr>
-        <p:spPr>
-          <a:xfrm>
-            <a:off x="4480560" y="2624328"/>
-            <a:ext cx="3291840" cy="914400"/>
-          </a:xfrm>
-          <a:prstGeom prst="rect">
-            <a:avLst/>
-          </a:prstGeom>
-          <a:noFill/>
-        </p:spPr>
-        <p:txBody>
-          <a:bodyPr wrap="square" lIns="0" rIns="0" tIns="0" bIns="0">
-            <a:spAutoFit/>
-          </a:bodyPr>
-          <a:lstStyle/>
-          <a:p>
-            <a:pPr algn="l">
-              <a:lnSpc>
-                <a:spcPct val="120000"/>
-              </a:lnSpc>
-              <a:spcAft>
-                <a:spcPts val="600"/>
-              </a:spcAft>
-            </a:pPr>
-            <a:r>
-              <a:rPr sz="1250" b="0">
-                <a:solidFill>
-                  <a:srgbClr val="6B6A64"/>
-                </a:solidFill>
-                <a:latin typeface="Calibri"/>
-              </a:rPr>
-              <a:t>y eso pasa mientras el empleo del sector crece: contrata, pero hacia abajo</a:t>
-            </a:r>
-          </a:p>
-        </p:txBody>
-      </p:sp>
-      <p:sp>
-        <p:nvSpPr>
-          <p:cNvPr id="8" name="TextBox 7"/>
-          <p:cNvSpPr txBox="1"/>
-          <p:nvPr/>
-        </p:nvSpPr>
-        <p:spPr>
-          <a:xfrm>
-            <a:off x="8503920" y="1965960"/>
-            <a:ext cx="2926080" cy="731520"/>
-          </a:xfrm>
-          <a:prstGeom prst="rect">
-            <a:avLst/>
-          </a:prstGeom>
-          <a:noFill/>
-        </p:spPr>
-        <p:txBody>
-          <a:bodyPr wrap="square" lIns="0" rIns="0" tIns="0" bIns="0">
-            <a:spAutoFit/>
-          </a:bodyPr>
-          <a:lstStyle/>
-          <a:p>
-            <a:pPr algn="l">
-              <a:lnSpc>
-                <a:spcPct val="95000"/>
-              </a:lnSpc>
-              <a:spcAft>
-                <a:spcPts val="600"/>
-              </a:spcAft>
-            </a:pPr>
-            <a:r>
-              <a:rPr sz="4200" b="1">
-                <a:solidFill>
-                  <a:srgbClr val="1BAF7A"/>
-                </a:solidFill>
-                <a:latin typeface="Calibri"/>
-              </a:rPr>
-              <a:t>+6,7</a:t>
-            </a:r>
-          </a:p>
-        </p:txBody>
-      </p:sp>
-      <p:sp>
-        <p:nvSpPr>
-          <p:cNvPr id="9" name="TextBox 8"/>
-          <p:cNvSpPr txBox="1"/>
-          <p:nvPr/>
-        </p:nvSpPr>
-        <p:spPr>
-          <a:xfrm>
-            <a:off x="8503920" y="2624328"/>
-            <a:ext cx="2926080" cy="914400"/>
-          </a:xfrm>
-          <a:prstGeom prst="rect">
-            <a:avLst/>
-          </a:prstGeom>
-          <a:noFill/>
-        </p:spPr>
-        <p:txBody>
-          <a:bodyPr wrap="square" lIns="0" rIns="0" tIns="0" bIns="0">
-            <a:spAutoFit/>
-          </a:bodyPr>
-          <a:lstStyle/>
-          <a:p>
-            <a:pPr algn="l">
-              <a:lnSpc>
-                <a:spcPct val="120000"/>
-              </a:lnSpc>
-              <a:spcAft>
-                <a:spcPts val="600"/>
-              </a:spcAft>
-            </a:pPr>
-            <a:r>
-              <a:rPr sz="1250" b="0">
-                <a:solidFill>
-                  <a:srgbClr val="6B6A64"/>
-                </a:solidFill>
-                <a:latin typeface="Calibri"/>
-              </a:rPr>
-              <a:t>puntos sube esa misma proporción en los anuncios mexicanos</a:t>
-            </a:r>
-          </a:p>
-        </p:txBody>
-      </p:sp>
-      <p:cxnSp>
-        <p:nvCxnSpPr>
-          <p:cNvPr id="10" name="Connector 9"/>
-          <p:cNvCxnSpPr/>
-          <p:nvPr/>
-        </p:nvCxnSpPr>
-        <p:spPr>
-          <a:xfrm>
-            <a:off x="658368" y="4343400"/>
-            <a:ext cx="10874959" cy="0"/>
-          </a:xfrm>
-          <a:prstGeom prst="line">
-            <a:avLst/>
-          </a:prstGeom>
-          <a:ln w="19050">
-            <a:solidFill>
-              <a:srgbClr val="E4E4DF"/>
-            </a:solidFill>
-          </a:ln>
-        </p:spPr>
-        <p:style>
-          <a:lnRef idx="2">
-            <a:schemeClr val="accent1"/>
-          </a:lnRef>
-          <a:fillRef idx="0">
-            <a:schemeClr val="accent1"/>
-          </a:fillRef>
-          <a:effectRef idx="1">
-            <a:schemeClr val="accent1"/>
-          </a:effectRef>
-          <a:fontRef idx="minor">
-            <a:schemeClr val="tx1"/>
-          </a:fontRef>
-        </p:style>
-      </p:cxnSp>
-      <p:sp>
-        <p:nvSpPr>
-          <p:cNvPr id="11" name="TextBox 10"/>
-          <p:cNvSpPr txBox="1"/>
-          <p:nvPr/>
-        </p:nvSpPr>
-        <p:spPr>
-          <a:xfrm>
-            <a:off x="658368" y="4617720"/>
-            <a:ext cx="10881360" cy="1463040"/>
-          </a:xfrm>
-          <a:prstGeom prst="rect">
-            <a:avLst/>
-          </a:prstGeom>
-          <a:noFill/>
-        </p:spPr>
-        <p:txBody>
-          <a:bodyPr wrap="square" lIns="0" rIns="0" tIns="0" bIns="0">
-            <a:spAutoFit/>
-          </a:bodyPr>
-          <a:lstStyle/>
-          <a:p>
-            <a:pPr algn="l">
-              <a:lnSpc>
-                <a:spcPct val="135000"/>
-              </a:lnSpc>
-              <a:spcAft>
-                <a:spcPts val="600"/>
-              </a:spcAft>
-            </a:pPr>
-            <a:r>
-              <a:rPr sz="1900" b="0">
-                <a:solidFill>
-                  <a:srgbClr val="1C1C1A"/>
-                </a:solidFill>
-                <a:latin typeface="Calibri"/>
-              </a:rPr>
-              <a:t>La Nota Técnica acierta: el capital humano calificado es el margen que importa. Pero el crecimiento exportador no lo está resolviendo solo. Los sectores crearon empleo ensanchando la base, no la capa que permite escalar.</a:t>
-            </a:r>
-          </a:p>
-        </p:txBody>
-      </p:sp>
-      <p:sp>
-        <p:nvSpPr>
-          <p:cNvPr id="12" name="TextBox 11"/>
-          <p:cNvSpPr txBox="1"/>
-          <p:nvPr/>
-        </p:nvSpPr>
-        <p:spPr>
-          <a:xfrm>
-            <a:off x="658368" y="5897880"/>
-            <a:ext cx="10881360" cy="548640"/>
-          </a:xfrm>
-          <a:prstGeom prst="rect">
-            <a:avLst/>
-          </a:prstGeom>
-          <a:noFill/>
-        </p:spPr>
-        <p:txBody>
-          <a:bodyPr wrap="square" lIns="0" rIns="0" tIns="0" bIns="0">
-            <a:spAutoFit/>
-          </a:bodyPr>
-          <a:lstStyle/>
-          <a:p>
-            <a:pPr algn="l">
-              <a:lnSpc>
-                <a:spcPct val="125000"/>
-              </a:lnSpc>
-              <a:spcAft>
-                <a:spcPts val="600"/>
-              </a:spcAft>
-            </a:pPr>
-            <a:r>
-              <a:rPr sz="1600" b="1">
-                <a:solidFill>
-                  <a:srgbClr val="1BAF7A"/>
-                </a:solidFill>
-                <a:latin typeface="Calibri"/>
-              </a:rPr>
-              <a:t>No conviene dar por hecho que el auge exportador arrastrará por sí solo la calificación de la fuerza laboral.</a:t>
+              <a:t>Izquierda: los dos países cuya encuesta permite seguir el sector año a año. Derecha: los cinco países con anuncios, sobre el total de su economía, porque la base no permite separar los sectores.</a:t>
             </a:r>
           </a:p>
         </p:txBody>
@@ -5382,7 +5078,7 @@
                 </a:solidFill>
                 <a:latin typeface="Calibri"/>
               </a:rPr>
-              <a:t>HONESTIDAD SOBRE LOS DATOS</a:t>
+              <a:t>LA RESPUESTA</a:t>
             </a:r>
           </a:p>
         </p:txBody>
@@ -5424,7 +5120,7 @@
                 </a:solidFill>
                 <a:latin typeface="Calibri"/>
               </a:rPr>
-              <a:t>Lo que estos números NO nos permiten decir</a:t>
+              <a:t>Las empresas piden más gente calificada; el empleo no la está dando</a:t>
             </a:r>
           </a:p>
         </p:txBody>
@@ -5437,8 +5133,8 @@
         </p:nvSpPr>
         <p:spPr>
           <a:xfrm>
-            <a:off x="658368" y="1828800"/>
-            <a:ext cx="10881360" cy="3840480"/>
+            <a:off x="658368" y="1965960"/>
+            <a:ext cx="3108960" cy="731520"/>
           </a:xfrm>
           <a:prstGeom prst="rect">
             <a:avLst/>
@@ -5453,172 +5149,349 @@
           <a:p>
             <a:pPr algn="l">
               <a:lnSpc>
-                <a:spcPct val="130000"/>
-              </a:lnSpc>
-              <a:spcAft>
-                <a:spcPts val="600"/>
-              </a:spcAft>
-            </a:pPr>
-            <a:r>
-              <a:rPr sz="1600" b="0">
+                <a:spcPct val="95000"/>
+              </a:lnSpc>
+              <a:spcAft>
+                <a:spcPts val="600"/>
+              </a:spcAft>
+            </a:pPr>
+            <a:r>
+              <a:rPr sz="4200" b="1">
+                <a:solidFill>
+                  <a:srgbClr val="4A3AA7"/>
+                </a:solidFill>
+                <a:latin typeface="Calibri"/>
+              </a:rPr>
+              <a:t>−0,9</a:t>
+            </a:r>
+          </a:p>
+        </p:txBody>
+      </p:sp>
+      <p:sp>
+        <p:nvSpPr>
+          <p:cNvPr id="5" name="TextBox 4"/>
+          <p:cNvSpPr txBox="1"/>
+          <p:nvPr/>
+        </p:nvSpPr>
+        <p:spPr>
+          <a:xfrm>
+            <a:off x="658368" y="2624328"/>
+            <a:ext cx="3108960" cy="914400"/>
+          </a:xfrm>
+          <a:prstGeom prst="rect">
+            <a:avLst/>
+          </a:prstGeom>
+          <a:noFill/>
+        </p:spPr>
+        <p:txBody>
+          <a:bodyPr wrap="square" lIns="0" rIns="0" tIns="0" bIns="0">
+            <a:spAutoFit/>
+          </a:bodyPr>
+          <a:lstStyle/>
+          <a:p>
+            <a:pPr algn="l">
+              <a:lnSpc>
+                <a:spcPct val="120000"/>
+              </a:lnSpc>
+              <a:spcAft>
+                <a:spcPts val="600"/>
+              </a:spcAft>
+            </a:pPr>
+            <a:r>
+              <a:rPr sz="1250" b="0">
+                <a:solidFill>
+                  <a:srgbClr val="6B6A64"/>
+                </a:solidFill>
+                <a:latin typeface="Calibri"/>
+              </a:rPr>
+              <a:t>puntos por año cae la proporción de técnicos y profesionales en los sectores mexicanos</a:t>
+            </a:r>
+          </a:p>
+        </p:txBody>
+      </p:sp>
+      <p:sp>
+        <p:nvSpPr>
+          <p:cNvPr id="6" name="TextBox 5"/>
+          <p:cNvSpPr txBox="1"/>
+          <p:nvPr/>
+        </p:nvSpPr>
+        <p:spPr>
+          <a:xfrm>
+            <a:off x="4480560" y="1965960"/>
+            <a:ext cx="3291840" cy="731520"/>
+          </a:xfrm>
+          <a:prstGeom prst="rect">
+            <a:avLst/>
+          </a:prstGeom>
+          <a:noFill/>
+        </p:spPr>
+        <p:txBody>
+          <a:bodyPr wrap="square" lIns="0" rIns="0" tIns="0" bIns="0">
+            <a:spAutoFit/>
+          </a:bodyPr>
+          <a:lstStyle/>
+          <a:p>
+            <a:pPr algn="l">
+              <a:lnSpc>
+                <a:spcPct val="95000"/>
+              </a:lnSpc>
+              <a:spcAft>
+                <a:spcPts val="600"/>
+              </a:spcAft>
+            </a:pPr>
+            <a:r>
+              <a:rPr sz="4200" b="1">
+                <a:solidFill>
+                  <a:srgbClr val="6B6A64"/>
+                </a:solidFill>
+                <a:latin typeface="Calibri"/>
+              </a:rPr>
+              <a:t>617 → 633 mil</a:t>
+            </a:r>
+          </a:p>
+        </p:txBody>
+      </p:sp>
+      <p:sp>
+        <p:nvSpPr>
+          <p:cNvPr id="7" name="TextBox 6"/>
+          <p:cNvSpPr txBox="1"/>
+          <p:nvPr/>
+        </p:nvSpPr>
+        <p:spPr>
+          <a:xfrm>
+            <a:off x="4480560" y="2624328"/>
+            <a:ext cx="3291840" cy="914400"/>
+          </a:xfrm>
+          <a:prstGeom prst="rect">
+            <a:avLst/>
+          </a:prstGeom>
+          <a:noFill/>
+        </p:spPr>
+        <p:txBody>
+          <a:bodyPr wrap="square" lIns="0" rIns="0" tIns="0" bIns="0">
+            <a:spAutoFit/>
+          </a:bodyPr>
+          <a:lstStyle/>
+          <a:p>
+            <a:pPr algn="l">
+              <a:lnSpc>
+                <a:spcPct val="120000"/>
+              </a:lnSpc>
+              <a:spcAft>
+                <a:spcPts val="600"/>
+              </a:spcAft>
+            </a:pPr>
+            <a:r>
+              <a:rPr sz="1250" b="0">
+                <a:solidFill>
+                  <a:srgbClr val="6B6A64"/>
+                </a:solidFill>
+                <a:latin typeface="Calibri"/>
+              </a:rPr>
+              <a:t>y eso pasa mientras el empleo del sector crece: contrata, pero hacia abajo</a:t>
+            </a:r>
+          </a:p>
+        </p:txBody>
+      </p:sp>
+      <p:sp>
+        <p:nvSpPr>
+          <p:cNvPr id="8" name="TextBox 7"/>
+          <p:cNvSpPr txBox="1"/>
+          <p:nvPr/>
+        </p:nvSpPr>
+        <p:spPr>
+          <a:xfrm>
+            <a:off x="8503920" y="1965960"/>
+            <a:ext cx="2926080" cy="731520"/>
+          </a:xfrm>
+          <a:prstGeom prst="rect">
+            <a:avLst/>
+          </a:prstGeom>
+          <a:noFill/>
+        </p:spPr>
+        <p:txBody>
+          <a:bodyPr wrap="square" lIns="0" rIns="0" tIns="0" bIns="0">
+            <a:spAutoFit/>
+          </a:bodyPr>
+          <a:lstStyle/>
+          <a:p>
+            <a:pPr algn="l">
+              <a:lnSpc>
+                <a:spcPct val="95000"/>
+              </a:lnSpc>
+              <a:spcAft>
+                <a:spcPts val="600"/>
+              </a:spcAft>
+            </a:pPr>
+            <a:r>
+              <a:rPr sz="4200" b="1">
+                <a:solidFill>
+                  <a:srgbClr val="1BAF7A"/>
+                </a:solidFill>
+                <a:latin typeface="Calibri"/>
+              </a:rPr>
+              <a:t>+6,7</a:t>
+            </a:r>
+          </a:p>
+        </p:txBody>
+      </p:sp>
+      <p:sp>
+        <p:nvSpPr>
+          <p:cNvPr id="9" name="TextBox 8"/>
+          <p:cNvSpPr txBox="1"/>
+          <p:nvPr/>
+        </p:nvSpPr>
+        <p:spPr>
+          <a:xfrm>
+            <a:off x="8503920" y="2624328"/>
+            <a:ext cx="2926080" cy="914400"/>
+          </a:xfrm>
+          <a:prstGeom prst="rect">
+            <a:avLst/>
+          </a:prstGeom>
+          <a:noFill/>
+        </p:spPr>
+        <p:txBody>
+          <a:bodyPr wrap="square" lIns="0" rIns="0" tIns="0" bIns="0">
+            <a:spAutoFit/>
+          </a:bodyPr>
+          <a:lstStyle/>
+          <a:p>
+            <a:pPr algn="l">
+              <a:lnSpc>
+                <a:spcPct val="120000"/>
+              </a:lnSpc>
+              <a:spcAft>
+                <a:spcPts val="600"/>
+              </a:spcAft>
+            </a:pPr>
+            <a:r>
+              <a:rPr sz="1250" b="0">
+                <a:solidFill>
+                  <a:srgbClr val="6B6A64"/>
+                </a:solidFill>
+                <a:latin typeface="Calibri"/>
+              </a:rPr>
+              <a:t>puntos sube esa misma proporción en los anuncios mexicanos</a:t>
+            </a:r>
+          </a:p>
+        </p:txBody>
+      </p:sp>
+      <p:cxnSp>
+        <p:nvCxnSpPr>
+          <p:cNvPr id="10" name="Connector 9"/>
+          <p:cNvCxnSpPr/>
+          <p:nvPr/>
+        </p:nvCxnSpPr>
+        <p:spPr>
+          <a:xfrm>
+            <a:off x="658368" y="4343400"/>
+            <a:ext cx="10874959" cy="0"/>
+          </a:xfrm>
+          <a:prstGeom prst="line">
+            <a:avLst/>
+          </a:prstGeom>
+          <a:ln w="19050">
+            <a:solidFill>
+              <a:srgbClr val="E4E4DF"/>
+            </a:solidFill>
+          </a:ln>
+        </p:spPr>
+        <p:style>
+          <a:lnRef idx="2">
+            <a:schemeClr val="accent1"/>
+          </a:lnRef>
+          <a:fillRef idx="0">
+            <a:schemeClr val="accent1"/>
+          </a:fillRef>
+          <a:effectRef idx="1">
+            <a:schemeClr val="accent1"/>
+          </a:effectRef>
+          <a:fontRef idx="minor">
+            <a:schemeClr val="tx1"/>
+          </a:fontRef>
+        </p:style>
+      </p:cxnSp>
+      <p:sp>
+        <p:nvSpPr>
+          <p:cNvPr id="11" name="TextBox 10"/>
+          <p:cNvSpPr txBox="1"/>
+          <p:nvPr/>
+        </p:nvSpPr>
+        <p:spPr>
+          <a:xfrm>
+            <a:off x="658368" y="4617720"/>
+            <a:ext cx="10881360" cy="1463040"/>
+          </a:xfrm>
+          <a:prstGeom prst="rect">
+            <a:avLst/>
+          </a:prstGeom>
+          <a:noFill/>
+        </p:spPr>
+        <p:txBody>
+          <a:bodyPr wrap="square" lIns="0" rIns="0" tIns="0" bIns="0">
+            <a:spAutoFit/>
+          </a:bodyPr>
+          <a:lstStyle/>
+          <a:p>
+            <a:pPr algn="l">
+              <a:lnSpc>
+                <a:spcPct val="135000"/>
+              </a:lnSpc>
+              <a:spcAft>
+                <a:spcPts val="600"/>
+              </a:spcAft>
+            </a:pPr>
+            <a:r>
+              <a:rPr sz="1900" b="0">
                 <a:solidFill>
                   <a:srgbClr val="1C1C1A"/>
                 </a:solidFill>
                 <a:latin typeface="Calibri"/>
               </a:rPr>
-              <a:t>•  No sabemos si se van a perder empleos. La medida dice cuánto tiempo se puede ahorrar, no quién se queda con ese ahorro.</a:t>
-            </a:r>
-          </a:p>
-          <a:p>
-            <a:pPr algn="l">
-              <a:lnSpc>
-                <a:spcPct val="130000"/>
-              </a:lnSpc>
-              <a:spcAft>
-                <a:spcPts val="600"/>
-              </a:spcAft>
-            </a:pPr>
-            <a:r>
-              <a:rPr sz="1600" b="0">
-                <a:solidFill>
-                  <a:srgbClr val="1C1C1A"/>
-                </a:solidFill>
-                <a:latin typeface="Calibri"/>
-              </a:rPr>
-              <a:t/>
-            </a:r>
-          </a:p>
-          <a:p>
-            <a:pPr algn="l">
-              <a:lnSpc>
-                <a:spcPct val="130000"/>
-              </a:lnSpc>
-              <a:spcAft>
-                <a:spcPts val="600"/>
-              </a:spcAft>
-            </a:pPr>
-            <a:r>
-              <a:rPr sz="1600" b="0">
-                <a:solidFill>
-                  <a:srgbClr val="1C1C1A"/>
-                </a:solidFill>
-                <a:latin typeface="Calibri"/>
-              </a:rPr>
-              <a:t>•  Los anuncios en línea no son el mercado laboral. Son la parte formal y urbana: sirven para ver qué se pide, no cuántos empleos hay.</a:t>
-            </a:r>
-          </a:p>
-          <a:p>
-            <a:pPr algn="l">
-              <a:lnSpc>
-                <a:spcPct val="130000"/>
-              </a:lnSpc>
-              <a:spcAft>
-                <a:spcPts val="600"/>
-              </a:spcAft>
-            </a:pPr>
-            <a:r>
-              <a:rPr sz="1600" b="0">
-                <a:solidFill>
-                  <a:srgbClr val="1C1C1A"/>
-                </a:solidFill>
-                <a:latin typeface="Calibri"/>
-              </a:rPr>
-              <a:t/>
-            </a:r>
-          </a:p>
-          <a:p>
-            <a:pPr algn="l">
-              <a:lnSpc>
-                <a:spcPct val="130000"/>
-              </a:lnSpc>
-              <a:spcAft>
-                <a:spcPts val="600"/>
-              </a:spcAft>
-            </a:pPr>
-            <a:r>
-              <a:rPr sz="1600" b="0">
-                <a:solidFill>
-                  <a:srgbClr val="1C1C1A"/>
-                </a:solidFill>
-                <a:latin typeface="Calibri"/>
-              </a:rPr>
-              <a:t>•  Faltan países. Nicaragua y Panamá no están; El Salvador no tiene anuncios. Nuestro CAPARD nunca son los siete países.</a:t>
-            </a:r>
-          </a:p>
-          <a:p>
-            <a:pPr algn="l">
-              <a:lnSpc>
-                <a:spcPct val="130000"/>
-              </a:lnSpc>
-              <a:spcAft>
-                <a:spcPts val="600"/>
-              </a:spcAft>
-            </a:pPr>
-            <a:r>
-              <a:rPr sz="1600" b="0">
-                <a:solidFill>
-                  <a:srgbClr val="1C1C1A"/>
-                </a:solidFill>
-                <a:latin typeface="Calibri"/>
-              </a:rPr>
-              <a:t/>
-            </a:r>
-          </a:p>
-          <a:p>
-            <a:pPr algn="l">
-              <a:lnSpc>
-                <a:spcPct val="130000"/>
-              </a:lnSpc>
-              <a:spcAft>
-                <a:spcPts val="600"/>
-              </a:spcAft>
-            </a:pPr>
-            <a:r>
-              <a:rPr sz="1600" b="0">
-                <a:solidFill>
-                  <a:srgbClr val="1C1C1A"/>
-                </a:solidFill>
-                <a:latin typeface="Calibri"/>
-              </a:rPr>
-              <a:t>•  Guatemala queda fuera de varios análisis porque su encuesta registra la ocupación con menos detalle que las demás.</a:t>
-            </a:r>
-          </a:p>
-          <a:p>
-            <a:pPr algn="l">
-              <a:lnSpc>
-                <a:spcPct val="130000"/>
-              </a:lnSpc>
-              <a:spcAft>
-                <a:spcPts val="600"/>
-              </a:spcAft>
-            </a:pPr>
-            <a:r>
-              <a:rPr sz="1600" b="0">
-                <a:solidFill>
-                  <a:srgbClr val="1C1C1A"/>
-                </a:solidFill>
-                <a:latin typeface="Calibri"/>
-              </a:rPr>
-              <a:t/>
-            </a:r>
-          </a:p>
-          <a:p>
-            <a:pPr algn="l">
-              <a:lnSpc>
-                <a:spcPct val="130000"/>
-              </a:lnSpc>
-              <a:spcAft>
-                <a:spcPts val="600"/>
-              </a:spcAft>
-            </a:pPr>
-            <a:r>
-              <a:rPr sz="1600" b="0">
-                <a:solidFill>
-                  <a:srgbClr val="1C1C1A"/>
-                </a:solidFill>
-                <a:latin typeface="Calibri"/>
-              </a:rPr>
-              <a:t>•  Un empleo poco expuesto también gana poco con la IA. Estar a salvo de esta ola y estar estancado en tareas de bajo valor son, en estos datos, la misma cosa.</a:t>
+              <a:t>La Nota Técnica acierta: el capital humano calificado es el margen que importa. Pero el crecimiento exportador no lo está resolviendo solo. Los sectores crearon empleo ensanchando la base, no la capa que permite escalar.</a:t>
+            </a:r>
+          </a:p>
+        </p:txBody>
+      </p:sp>
+      <p:sp>
+        <p:nvSpPr>
+          <p:cNvPr id="12" name="TextBox 11"/>
+          <p:cNvSpPr txBox="1"/>
+          <p:nvPr/>
+        </p:nvSpPr>
+        <p:spPr>
+          <a:xfrm>
+            <a:off x="658368" y="5897880"/>
+            <a:ext cx="10881360" cy="548640"/>
+          </a:xfrm>
+          <a:prstGeom prst="rect">
+            <a:avLst/>
+          </a:prstGeom>
+          <a:noFill/>
+        </p:spPr>
+        <p:txBody>
+          <a:bodyPr wrap="square" lIns="0" rIns="0" tIns="0" bIns="0">
+            <a:spAutoFit/>
+          </a:bodyPr>
+          <a:lstStyle/>
+          <a:p>
+            <a:pPr algn="l">
+              <a:lnSpc>
+                <a:spcPct val="125000"/>
+              </a:lnSpc>
+              <a:spcAft>
+                <a:spcPts val="600"/>
+              </a:spcAft>
+            </a:pPr>
+            <a:r>
+              <a:rPr sz="1600" b="1">
+                <a:solidFill>
+                  <a:srgbClr val="1BAF7A"/>
+                </a:solidFill>
+                <a:latin typeface="Calibri"/>
+              </a:rPr>
+              <a:t>No conviene dar por hecho que el auge exportador arrastrará por sí solo la calificación de la fuerza laboral.</a:t>
             </a:r>
           </a:p>
         </p:txBody>
@@ -5678,7 +5551,7 @@
                 </a:solidFill>
                 <a:latin typeface="Calibri"/>
               </a:rPr>
-              <a:t>PARA DISCUSIÓN</a:t>
+              <a:t>HONESTIDAD SOBRE LOS DATOS</a:t>
             </a:r>
           </a:p>
         </p:txBody>
@@ -5720,7 +5593,7 @@
                 </a:solidFill>
                 <a:latin typeface="Calibri"/>
               </a:rPr>
-              <a:t>Cuatro cosas que se desprenden</a:t>
+              <a:t>Lo que estos números NO nos permiten decir</a:t>
             </a:r>
           </a:p>
         </p:txBody>
@@ -5733,8 +5606,8 @@
         </p:nvSpPr>
         <p:spPr>
           <a:xfrm>
-            <a:off x="658368" y="1783080"/>
-            <a:ext cx="5394960" cy="4023360"/>
+            <a:off x="658368" y="1828800"/>
+            <a:ext cx="10881360" cy="3840480"/>
           </a:xfrm>
           <a:prstGeom prst="rect">
             <a:avLst/>
@@ -5756,13 +5629,13 @@
               </a:spcAft>
             </a:pPr>
             <a:r>
-              <a:rPr sz="1550" b="0">
+              <a:rPr sz="1600" b="0">
                 <a:solidFill>
                   <a:srgbClr val="1C1C1A"/>
                 </a:solidFill>
                 <a:latin typeface="Calibri"/>
               </a:rPr>
-              <a:t>1.  No frenar la atracción de estos sectores por miedo a la IA. Su base de empleo es de las menos alcanzables por estas herramientas.</a:t>
+              <a:t>•  No sabemos si se van a perder empleos. La medida dice cuánto tiempo se puede ahorrar, no quién se queda con ese ahorro.</a:t>
             </a:r>
           </a:p>
           <a:p>
@@ -5775,7 +5648,7 @@
               </a:spcAft>
             </a:pPr>
             <a:r>
-              <a:rPr sz="1550" b="0">
+              <a:rPr sz="1600" b="0">
                 <a:solidFill>
                   <a:srgbClr val="1C1C1A"/>
                 </a:solidFill>
@@ -5794,38 +5667,15 @@
               </a:spcAft>
             </a:pPr>
             <a:r>
-              <a:rPr sz="1550" b="0">
+              <a:rPr sz="1600" b="0">
                 <a:solidFill>
                   <a:srgbClr val="1C1C1A"/>
                 </a:solidFill>
                 <a:latin typeface="Calibri"/>
               </a:rPr>
-              <a:t>2.  Pero tampoco esperar que el auge resuelva la calificación. Hoy los sectores crecen ensanchando la planta, no la capa técnica.</a:t>
-            </a:r>
-          </a:p>
-        </p:txBody>
-      </p:sp>
-      <p:sp>
-        <p:nvSpPr>
-          <p:cNvPr id="5" name="TextBox 4"/>
-          <p:cNvSpPr txBox="1"/>
-          <p:nvPr/>
-        </p:nvSpPr>
-        <p:spPr>
-          <a:xfrm>
-            <a:off x="6492240" y="1783080"/>
-            <a:ext cx="5029200" cy="4023360"/>
-          </a:xfrm>
-          <a:prstGeom prst="rect">
-            <a:avLst/>
-          </a:prstGeom>
-          <a:noFill/>
-        </p:spPr>
-        <p:txBody>
-          <a:bodyPr wrap="square" lIns="0" rIns="0" tIns="0" bIns="0">
-            <a:spAutoFit/>
-          </a:bodyPr>
-          <a:lstStyle/>
+              <a:t>•  Los anuncios en línea no son el mercado laboral. Son la parte formal y urbana: sirven para ver qué se pide, no cuántos empleos hay.</a:t>
+            </a:r>
+          </a:p>
           <a:p>
             <a:pPr algn="l">
               <a:lnSpc>
@@ -5836,13 +5686,13 @@
               </a:spcAft>
             </a:pPr>
             <a:r>
-              <a:rPr sz="1550" b="0">
+              <a:rPr sz="1600" b="0">
                 <a:solidFill>
                   <a:srgbClr val="1C1C1A"/>
                 </a:solidFill>
                 <a:latin typeface="Calibri"/>
               </a:rPr>
-              <a:t>3.  Formar técnicos y profesionales es a la vez la agenda exportadora y la agenda de IA. Es la misma gente.</a:t>
+              <a:t/>
             </a:r>
           </a:p>
           <a:p>
@@ -5855,12 +5705,31 @@
               </a:spcAft>
             </a:pPr>
             <a:r>
-              <a:rPr sz="1550" b="0">
+              <a:rPr sz="1600" b="0">
                 <a:solidFill>
                   <a:srgbClr val="1C1C1A"/>
                 </a:solidFill>
                 <a:latin typeface="Calibri"/>
               </a:rPr>
+              <a:t>•  Faltan países. Nicaragua y Panamá no están; El Salvador no tiene anuncios. Nuestro CAPARD nunca son los siete países.</a:t>
+            </a:r>
+          </a:p>
+          <a:p>
+            <a:pPr algn="l">
+              <a:lnSpc>
+                <a:spcPct val="130000"/>
+              </a:lnSpc>
+              <a:spcAft>
+                <a:spcPts val="600"/>
+              </a:spcAft>
+            </a:pPr>
+            <a:r>
+              <a:rPr sz="1600" b="0">
+                <a:solidFill>
+                  <a:srgbClr val="1C1C1A"/>
+                </a:solidFill>
+                <a:latin typeface="Calibri"/>
+              </a:rPr>
               <a:t/>
             </a:r>
           </a:p>
@@ -5874,73 +5743,15 @@
               </a:spcAft>
             </a:pPr>
             <a:r>
-              <a:rPr sz="1550" b="0">
+              <a:rPr sz="1600" b="0">
                 <a:solidFill>
                   <a:srgbClr val="1C1C1A"/>
                 </a:solidFill>
                 <a:latin typeface="Calibri"/>
               </a:rPr>
-              <a:t>4.  Atender al personal administrativo. Son unas 60 mil personas en estos sectores, con la exposición más alta después de los profesionales, y el debate público casi no los menciona.</a:t>
-            </a:r>
-          </a:p>
-        </p:txBody>
-      </p:sp>
-      <p:cxnSp>
-        <p:nvCxnSpPr>
-          <p:cNvPr id="6" name="Connector 5"/>
-          <p:cNvCxnSpPr/>
-          <p:nvPr/>
-        </p:nvCxnSpPr>
-        <p:spPr>
-          <a:xfrm>
-            <a:off x="658368" y="5257800"/>
-            <a:ext cx="10874959" cy="0"/>
-          </a:xfrm>
-          <a:prstGeom prst="line">
-            <a:avLst/>
-          </a:prstGeom>
-          <a:ln w="19050">
-            <a:solidFill>
-              <a:srgbClr val="E4E4DF"/>
-            </a:solidFill>
-          </a:ln>
-        </p:spPr>
-        <p:style>
-          <a:lnRef idx="2">
-            <a:schemeClr val="accent1"/>
-          </a:lnRef>
-          <a:fillRef idx="0">
-            <a:schemeClr val="accent1"/>
-          </a:fillRef>
-          <a:effectRef idx="1">
-            <a:schemeClr val="accent1"/>
-          </a:effectRef>
-          <a:fontRef idx="minor">
-            <a:schemeClr val="tx1"/>
-          </a:fontRef>
-        </p:style>
-      </p:cxnSp>
-      <p:sp>
-        <p:nvSpPr>
-          <p:cNvPr id="7" name="TextBox 6"/>
-          <p:cNvSpPr txBox="1"/>
-          <p:nvPr/>
-        </p:nvSpPr>
-        <p:spPr>
-          <a:xfrm>
-            <a:off x="658368" y="5486400"/>
-            <a:ext cx="10881360" cy="822960"/>
-          </a:xfrm>
-          <a:prstGeom prst="rect">
-            <a:avLst/>
-          </a:prstGeom>
-          <a:noFill/>
-        </p:spPr>
-        <p:txBody>
-          <a:bodyPr wrap="square" lIns="0" rIns="0" tIns="0" bIns="0">
-            <a:spAutoFit/>
-          </a:bodyPr>
-          <a:lstStyle/>
+              <a:t>•  Guatemala queda fuera de varios análisis porque su encuesta registra la ocupación con menos detalle que las demás.</a:t>
+            </a:r>
+          </a:p>
           <a:p>
             <a:pPr algn="l">
               <a:lnSpc>
@@ -5951,13 +5762,32 @@
               </a:spcAft>
             </a:pPr>
             <a:r>
-              <a:rPr sz="1500" b="0">
-                <a:solidFill>
-                  <a:srgbClr val="6B6A64"/>
-                </a:solidFill>
-                <a:latin typeface="Calibri"/>
-              </a:rPr>
-              <a:t>Pendiente: conseguir los anuncios de Panamá y El Salvador, y explorar con el equipo si conviene un corte por tamaño de empresa.</a:t>
+              <a:rPr sz="1600" b="0">
+                <a:solidFill>
+                  <a:srgbClr val="1C1C1A"/>
+                </a:solidFill>
+                <a:latin typeface="Calibri"/>
+              </a:rPr>
+              <a:t/>
+            </a:r>
+          </a:p>
+          <a:p>
+            <a:pPr algn="l">
+              <a:lnSpc>
+                <a:spcPct val="130000"/>
+              </a:lnSpc>
+              <a:spcAft>
+                <a:spcPts val="600"/>
+              </a:spcAft>
+            </a:pPr>
+            <a:r>
+              <a:rPr sz="1600" b="0">
+                <a:solidFill>
+                  <a:srgbClr val="1C1C1A"/>
+                </a:solidFill>
+                <a:latin typeface="Calibri"/>
+              </a:rPr>
+              <a:t>•  Un empleo poco expuesto también gana poco con la IA. Estar a salvo de esta ola y estar estancado en tareas de bajo valor son, en estos datos, la misma cosa.</a:t>
             </a:r>
           </a:p>
         </p:txBody>
@@ -5980,6 +5810,345 @@
         <p:nvPr/>
       </p:nvGrpSpPr>
       <p:grpSpPr/>
+      <p:sp>
+        <p:nvSpPr>
+          <p:cNvPr id="2" name="TextBox 1"/>
+          <p:cNvSpPr txBox="1"/>
+          <p:nvPr/>
+        </p:nvSpPr>
+        <p:spPr>
+          <a:xfrm>
+            <a:off x="658368" y="402336"/>
+            <a:ext cx="10874959" cy="274320"/>
+          </a:xfrm>
+          <a:prstGeom prst="rect">
+            <a:avLst/>
+          </a:prstGeom>
+          <a:noFill/>
+        </p:spPr>
+        <p:txBody>
+          <a:bodyPr wrap="square" lIns="0" rIns="0" tIns="0" bIns="0">
+            <a:spAutoFit/>
+          </a:bodyPr>
+          <a:lstStyle/>
+          <a:p>
+            <a:pPr algn="l">
+              <a:lnSpc>
+                <a:spcPct val="100000"/>
+              </a:lnSpc>
+              <a:spcAft>
+                <a:spcPts val="600"/>
+              </a:spcAft>
+            </a:pPr>
+            <a:r>
+              <a:rPr sz="1100" b="0">
+                <a:solidFill>
+                  <a:srgbClr val="6B6A64"/>
+                </a:solidFill>
+                <a:latin typeface="Calibri"/>
+              </a:rPr>
+              <a:t>PARA DISCUSIÓN</a:t>
+            </a:r>
+          </a:p>
+        </p:txBody>
+      </p:sp>
+      <p:sp>
+        <p:nvSpPr>
+          <p:cNvPr id="3" name="TextBox 2"/>
+          <p:cNvSpPr txBox="1"/>
+          <p:nvPr/>
+        </p:nvSpPr>
+        <p:spPr>
+          <a:xfrm>
+            <a:off x="658368" y="713232"/>
+            <a:ext cx="10874959" cy="914400"/>
+          </a:xfrm>
+          <a:prstGeom prst="rect">
+            <a:avLst/>
+          </a:prstGeom>
+          <a:noFill/>
+        </p:spPr>
+        <p:txBody>
+          <a:bodyPr wrap="square" lIns="0" rIns="0" tIns="0" bIns="0">
+            <a:spAutoFit/>
+          </a:bodyPr>
+          <a:lstStyle/>
+          <a:p>
+            <a:pPr algn="l">
+              <a:lnSpc>
+                <a:spcPct val="106000"/>
+              </a:lnSpc>
+              <a:spcAft>
+                <a:spcPts val="600"/>
+              </a:spcAft>
+            </a:pPr>
+            <a:r>
+              <a:rPr sz="3000" b="1">
+                <a:solidFill>
+                  <a:srgbClr val="1C1C1A"/>
+                </a:solidFill>
+                <a:latin typeface="Calibri"/>
+              </a:rPr>
+              <a:t>Cuatro cosas que se desprenden</a:t>
+            </a:r>
+          </a:p>
+        </p:txBody>
+      </p:sp>
+      <p:sp>
+        <p:nvSpPr>
+          <p:cNvPr id="4" name="TextBox 3"/>
+          <p:cNvSpPr txBox="1"/>
+          <p:nvPr/>
+        </p:nvSpPr>
+        <p:spPr>
+          <a:xfrm>
+            <a:off x="658368" y="1783080"/>
+            <a:ext cx="5394960" cy="4023360"/>
+          </a:xfrm>
+          <a:prstGeom prst="rect">
+            <a:avLst/>
+          </a:prstGeom>
+          <a:noFill/>
+        </p:spPr>
+        <p:txBody>
+          <a:bodyPr wrap="square" lIns="0" rIns="0" tIns="0" bIns="0">
+            <a:spAutoFit/>
+          </a:bodyPr>
+          <a:lstStyle/>
+          <a:p>
+            <a:pPr algn="l">
+              <a:lnSpc>
+                <a:spcPct val="130000"/>
+              </a:lnSpc>
+              <a:spcAft>
+                <a:spcPts val="600"/>
+              </a:spcAft>
+            </a:pPr>
+            <a:r>
+              <a:rPr sz="1550" b="0">
+                <a:solidFill>
+                  <a:srgbClr val="1C1C1A"/>
+                </a:solidFill>
+                <a:latin typeface="Calibri"/>
+              </a:rPr>
+              <a:t>1.  No frenar la atracción de estos sectores por miedo a la IA. Su base de empleo es de las menos alcanzables por estas herramientas.</a:t>
+            </a:r>
+          </a:p>
+          <a:p>
+            <a:pPr algn="l">
+              <a:lnSpc>
+                <a:spcPct val="130000"/>
+              </a:lnSpc>
+              <a:spcAft>
+                <a:spcPts val="600"/>
+              </a:spcAft>
+            </a:pPr>
+            <a:r>
+              <a:rPr sz="1550" b="0">
+                <a:solidFill>
+                  <a:srgbClr val="1C1C1A"/>
+                </a:solidFill>
+                <a:latin typeface="Calibri"/>
+              </a:rPr>
+              <a:t/>
+            </a:r>
+          </a:p>
+          <a:p>
+            <a:pPr algn="l">
+              <a:lnSpc>
+                <a:spcPct val="130000"/>
+              </a:lnSpc>
+              <a:spcAft>
+                <a:spcPts val="600"/>
+              </a:spcAft>
+            </a:pPr>
+            <a:r>
+              <a:rPr sz="1550" b="0">
+                <a:solidFill>
+                  <a:srgbClr val="1C1C1A"/>
+                </a:solidFill>
+                <a:latin typeface="Calibri"/>
+              </a:rPr>
+              <a:t>2.  Pero tampoco esperar que el auge resuelva la calificación. Hoy los sectores crecen ensanchando la planta, no la capa técnica.</a:t>
+            </a:r>
+          </a:p>
+        </p:txBody>
+      </p:sp>
+      <p:sp>
+        <p:nvSpPr>
+          <p:cNvPr id="5" name="TextBox 4"/>
+          <p:cNvSpPr txBox="1"/>
+          <p:nvPr/>
+        </p:nvSpPr>
+        <p:spPr>
+          <a:xfrm>
+            <a:off x="6492240" y="1783080"/>
+            <a:ext cx="5029200" cy="4023360"/>
+          </a:xfrm>
+          <a:prstGeom prst="rect">
+            <a:avLst/>
+          </a:prstGeom>
+          <a:noFill/>
+        </p:spPr>
+        <p:txBody>
+          <a:bodyPr wrap="square" lIns="0" rIns="0" tIns="0" bIns="0">
+            <a:spAutoFit/>
+          </a:bodyPr>
+          <a:lstStyle/>
+          <a:p>
+            <a:pPr algn="l">
+              <a:lnSpc>
+                <a:spcPct val="130000"/>
+              </a:lnSpc>
+              <a:spcAft>
+                <a:spcPts val="600"/>
+              </a:spcAft>
+            </a:pPr>
+            <a:r>
+              <a:rPr sz="1550" b="0">
+                <a:solidFill>
+                  <a:srgbClr val="1C1C1A"/>
+                </a:solidFill>
+                <a:latin typeface="Calibri"/>
+              </a:rPr>
+              <a:t>3.  Formar técnicos y profesionales es a la vez la agenda exportadora y la agenda de IA. Es la misma gente.</a:t>
+            </a:r>
+          </a:p>
+          <a:p>
+            <a:pPr algn="l">
+              <a:lnSpc>
+                <a:spcPct val="130000"/>
+              </a:lnSpc>
+              <a:spcAft>
+                <a:spcPts val="600"/>
+              </a:spcAft>
+            </a:pPr>
+            <a:r>
+              <a:rPr sz="1550" b="0">
+                <a:solidFill>
+                  <a:srgbClr val="1C1C1A"/>
+                </a:solidFill>
+                <a:latin typeface="Calibri"/>
+              </a:rPr>
+              <a:t/>
+            </a:r>
+          </a:p>
+          <a:p>
+            <a:pPr algn="l">
+              <a:lnSpc>
+                <a:spcPct val="130000"/>
+              </a:lnSpc>
+              <a:spcAft>
+                <a:spcPts val="600"/>
+              </a:spcAft>
+            </a:pPr>
+            <a:r>
+              <a:rPr sz="1550" b="0">
+                <a:solidFill>
+                  <a:srgbClr val="1C1C1A"/>
+                </a:solidFill>
+                <a:latin typeface="Calibri"/>
+              </a:rPr>
+              <a:t>4.  Atender al personal administrativo. Son unas 60 mil personas en estos sectores, con la exposición más alta después de los profesionales, y el debate público casi no los menciona.</a:t>
+            </a:r>
+          </a:p>
+        </p:txBody>
+      </p:sp>
+      <p:cxnSp>
+        <p:nvCxnSpPr>
+          <p:cNvPr id="6" name="Connector 5"/>
+          <p:cNvCxnSpPr/>
+          <p:nvPr/>
+        </p:nvCxnSpPr>
+        <p:spPr>
+          <a:xfrm>
+            <a:off x="658368" y="5257800"/>
+            <a:ext cx="10874959" cy="0"/>
+          </a:xfrm>
+          <a:prstGeom prst="line">
+            <a:avLst/>
+          </a:prstGeom>
+          <a:ln w="19050">
+            <a:solidFill>
+              <a:srgbClr val="E4E4DF"/>
+            </a:solidFill>
+          </a:ln>
+        </p:spPr>
+        <p:style>
+          <a:lnRef idx="2">
+            <a:schemeClr val="accent1"/>
+          </a:lnRef>
+          <a:fillRef idx="0">
+            <a:schemeClr val="accent1"/>
+          </a:fillRef>
+          <a:effectRef idx="1">
+            <a:schemeClr val="accent1"/>
+          </a:effectRef>
+          <a:fontRef idx="minor">
+            <a:schemeClr val="tx1"/>
+          </a:fontRef>
+        </p:style>
+      </p:cxnSp>
+      <p:sp>
+        <p:nvSpPr>
+          <p:cNvPr id="7" name="TextBox 6"/>
+          <p:cNvSpPr txBox="1"/>
+          <p:nvPr/>
+        </p:nvSpPr>
+        <p:spPr>
+          <a:xfrm>
+            <a:off x="658368" y="5486400"/>
+            <a:ext cx="10881360" cy="822960"/>
+          </a:xfrm>
+          <a:prstGeom prst="rect">
+            <a:avLst/>
+          </a:prstGeom>
+          <a:noFill/>
+        </p:spPr>
+        <p:txBody>
+          <a:bodyPr wrap="square" lIns="0" rIns="0" tIns="0" bIns="0">
+            <a:spAutoFit/>
+          </a:bodyPr>
+          <a:lstStyle/>
+          <a:p>
+            <a:pPr algn="l">
+              <a:lnSpc>
+                <a:spcPct val="130000"/>
+              </a:lnSpc>
+              <a:spcAft>
+                <a:spcPts val="600"/>
+              </a:spcAft>
+            </a:pPr>
+            <a:r>
+              <a:rPr sz="1500" b="0">
+                <a:solidFill>
+                  <a:srgbClr val="6B6A64"/>
+                </a:solidFill>
+                <a:latin typeface="Calibri"/>
+              </a:rPr>
+              <a:t>Pendiente: conseguir los anuncios de Panamá y El Salvador, y explorar con el equipo si conviene un corte por tamaño de empresa.</a:t>
+            </a:r>
+          </a:p>
+        </p:txBody>
+      </p:sp>
+    </p:spTree>
+  </p:cSld>
+  <p:clrMapOvr>
+    <a:masterClrMapping/>
+  </p:clrMapOvr>
+</p:sld>
+</file>
+
+<file path=ppt/slides/slide19.xml><?xml version="1.0" encoding="utf-8"?>
+<p:sld xmlns:a="http://schemas.openxmlformats.org/drawingml/2006/main" xmlns:p="http://schemas.openxmlformats.org/presentationml/2006/main" xmlns:r="http://schemas.openxmlformats.org/officeDocument/2006/relationships">
+  <p:cSld>
+    <p:spTree>
+      <p:nvGrpSpPr>
+        <p:cNvPr id="1" name=""/>
+        <p:cNvGrpSpPr/>
+        <p:nvPr/>
+      </p:nvGrpSpPr>
+      <p:grpSpPr/>
       <p:cxnSp>
         <p:nvCxnSpPr>
           <p:cNvPr id="2" name="Connector 1"/>
@@ -7567,7 +7736,7 @@
                 </a:solidFill>
                 <a:latin typeface="Calibri"/>
               </a:rPr>
-              <a:t>PANORAMA</a:t>
+              <a:t>LA LETRA CHICA</a:t>
             </a:r>
           </a:p>
         </p:txBody>
@@ -7609,35 +7778,1003 @@
                 </a:solidFill>
                 <a:latin typeface="Calibri"/>
               </a:rPr>
-              <a:t>Los empleos formales están igual de expuestos en toda la región</a:t>
-            </a:r>
-          </a:p>
-        </p:txBody>
-      </p:sp>
-      <p:pic>
-        <p:nvPicPr>
-          <p:cNvPr id="4" name="Picture 3" descr="W8_comparacion_paises.png"/>
-          <p:cNvPicPr>
-            <a:picLocks noChangeAspect="1"/>
-          </p:cNvPicPr>
-          <p:nvPr/>
-        </p:nvPicPr>
-        <p:blipFill>
-          <a:blip r:embed="rId2"/>
-          <a:stretch>
-            <a:fillRect/>
-          </a:stretch>
-        </p:blipFill>
-        <p:spPr>
-          <a:xfrm>
-            <a:off x="2742118" y="1691640"/>
-            <a:ext cx="6707458" cy="4343400"/>
-          </a:xfrm>
-          <a:prstGeom prst="rect">
-            <a:avLst/>
-          </a:prstGeom>
-        </p:spPr>
-      </p:pic>
+              <a:t>Ningún resultado cubre los siete países de CAPARD</a:t>
+            </a:r>
+          </a:p>
+        </p:txBody>
+      </p:sp>
+      <p:graphicFrame>
+        <p:nvGraphicFramePr>
+          <p:cNvPr id="4" name="Table 3"/>
+          <p:cNvGraphicFramePr>
+            <a:graphicFrameLocks noGrp="1"/>
+          </p:cNvGraphicFramePr>
+          <p:nvPr/>
+        </p:nvGraphicFramePr>
+        <p:xfrm>
+          <a:off x="658368" y="1783080"/>
+          <a:ext cx="7863837" cy="3108960"/>
+        </p:xfrm>
+        <a:graphic>
+          <a:graphicData uri="http://schemas.openxmlformats.org/drawingml/2006/table">
+            <a:tbl>
+              <a:tblPr>
+                <a:tableStyleId>{5C22544A-7EE6-4342-B048-85BDC9FD1C3A}</a:tableStyleId>
+              </a:tblPr>
+              <a:tblGrid>
+                <a:gridCol w="2179136"/>
+                <a:gridCol w="1231685"/>
+                <a:gridCol w="1515920"/>
+                <a:gridCol w="1326430"/>
+                <a:gridCol w="1610666"/>
+              </a:tblGrid>
+              <a:tr h="345440">
+                <a:tc>
+                  <a:txBody>
+                    <a:bodyPr/>
+                    <a:lstStyle/>
+                    <a:p>
+                      <a:pPr algn="l">
+                        <a:defRPr sz="1250" b="1">
+                          <a:solidFill>
+                            <a:srgbClr val="6B6A64"/>
+                          </a:solidFill>
+                        </a:defRPr>
+                      </a:pPr>
+                      <a:r>
+                        <a:t>País</a:t>
+                      </a:r>
+                    </a:p>
+                  </a:txBody>
+                  <a:tcPr marL="54864" marR="54864">
+                    <a:noFill/>
+                  </a:tcPr>
+                </a:tc>
+                <a:tc>
+                  <a:txBody>
+                    <a:bodyPr/>
+                    <a:lstStyle/>
+                    <a:p>
+                      <a:pPr algn="r">
+                        <a:defRPr sz="1250" b="1">
+                          <a:solidFill>
+                            <a:srgbClr val="6B6A64"/>
+                          </a:solidFill>
+                        </a:defRPr>
+                      </a:pPr>
+                      <a:r>
+                        <a:t>Encuesta</a:t>
+                      </a:r>
+                    </a:p>
+                  </a:txBody>
+                  <a:tcPr marL="54864" marR="54864">
+                    <a:noFill/>
+                  </a:tcPr>
+                </a:tc>
+                <a:tc>
+                  <a:txBody>
+                    <a:bodyPr/>
+                    <a:lstStyle/>
+                    <a:p>
+                      <a:pPr algn="r">
+                        <a:defRPr sz="1250" b="1">
+                          <a:solidFill>
+                            <a:srgbClr val="6B6A64"/>
+                          </a:solidFill>
+                        </a:defRPr>
+                      </a:pPr>
+                      <a:r>
+                        <a:t>Años</a:t>
+                      </a:r>
+                    </a:p>
+                  </a:txBody>
+                  <a:tcPr marL="54864" marR="54864">
+                    <a:noFill/>
+                  </a:tcPr>
+                </a:tc>
+                <a:tc>
+                  <a:txBody>
+                    <a:bodyPr/>
+                    <a:lstStyle/>
+                    <a:p>
+                      <a:pPr algn="r">
+                        <a:defRPr sz="1250" b="1">
+                          <a:solidFill>
+                            <a:srgbClr val="6B6A64"/>
+                          </a:solidFill>
+                        </a:defRPr>
+                      </a:pPr>
+                      <a:r>
+                        <a:t>Ocupados</a:t>
+                      </a:r>
+                    </a:p>
+                  </a:txBody>
+                  <a:tcPr marL="54864" marR="54864">
+                    <a:noFill/>
+                  </a:tcPr>
+                </a:tc>
+                <a:tc>
+                  <a:txBody>
+                    <a:bodyPr/>
+                    <a:lstStyle/>
+                    <a:p>
+                      <a:pPr algn="r">
+                        <a:defRPr sz="1250" b="1">
+                          <a:solidFill>
+                            <a:srgbClr val="6B6A64"/>
+                          </a:solidFill>
+                        </a:defRPr>
+                      </a:pPr>
+                      <a:r>
+                        <a:t>Anuncios</a:t>
+                      </a:r>
+                    </a:p>
+                  </a:txBody>
+                  <a:tcPr marL="54864" marR="54864">
+                    <a:noFill/>
+                  </a:tcPr>
+                </a:tc>
+              </a:tr>
+              <a:tr h="345440">
+                <a:tc>
+                  <a:txBody>
+                    <a:bodyPr/>
+                    <a:lstStyle/>
+                    <a:p>
+                      <a:pPr algn="l">
+                        <a:defRPr sz="1250" b="0">
+                          <a:solidFill>
+                            <a:srgbClr val="6B6A64"/>
+                          </a:solidFill>
+                        </a:defRPr>
+                      </a:pPr>
+                      <a:r>
+                        <a:t>México</a:t>
+                      </a:r>
+                    </a:p>
+                  </a:txBody>
+                  <a:tcPr marL="54864" marR="54864">
+                    <a:noFill/>
+                  </a:tcPr>
+                </a:tc>
+                <a:tc>
+                  <a:txBody>
+                    <a:bodyPr/>
+                    <a:lstStyle/>
+                    <a:p>
+                      <a:pPr algn="r">
+                        <a:defRPr sz="1250" b="0">
+                          <a:solidFill>
+                            <a:srgbClr val="6B6A64"/>
+                          </a:solidFill>
+                        </a:defRPr>
+                      </a:pPr>
+                      <a:r>
+                        <a:t>ENOE</a:t>
+                      </a:r>
+                    </a:p>
+                  </a:txBody>
+                  <a:tcPr marL="54864" marR="54864">
+                    <a:noFill/>
+                  </a:tcPr>
+                </a:tc>
+                <a:tc>
+                  <a:txBody>
+                    <a:bodyPr/>
+                    <a:lstStyle/>
+                    <a:p>
+                      <a:pPr algn="r">
+                        <a:defRPr sz="1250" b="0">
+                          <a:solidFill>
+                            <a:srgbClr val="6B6A64"/>
+                          </a:solidFill>
+                        </a:defRPr>
+                      </a:pPr>
+                      <a:r>
+                        <a:t>2022–2025</a:t>
+                      </a:r>
+                    </a:p>
+                  </a:txBody>
+                  <a:tcPr marL="54864" marR="54864">
+                    <a:noFill/>
+                  </a:tcPr>
+                </a:tc>
+                <a:tc>
+                  <a:txBody>
+                    <a:bodyPr/>
+                    <a:lstStyle/>
+                    <a:p>
+                      <a:pPr algn="r">
+                        <a:defRPr sz="1250" b="0">
+                          <a:solidFill>
+                            <a:srgbClr val="6B6A64"/>
+                          </a:solidFill>
+                        </a:defRPr>
+                      </a:pPr>
+                      <a:r>
+                        <a:t>59.8 mill.</a:t>
+                      </a:r>
+                    </a:p>
+                  </a:txBody>
+                  <a:tcPr marL="54864" marR="54864">
+                    <a:noFill/>
+                  </a:tcPr>
+                </a:tc>
+                <a:tc>
+                  <a:txBody>
+                    <a:bodyPr/>
+                    <a:lstStyle/>
+                    <a:p>
+                      <a:pPr algn="r">
+                        <a:defRPr sz="1250" b="0">
+                          <a:solidFill>
+                            <a:srgbClr val="6B6A64"/>
+                          </a:solidFill>
+                        </a:defRPr>
+                      </a:pPr>
+                      <a:r>
+                        <a:t>1 631 491</a:t>
+                      </a:r>
+                    </a:p>
+                  </a:txBody>
+                  <a:tcPr marL="54864" marR="54864">
+                    <a:noFill/>
+                  </a:tcPr>
+                </a:tc>
+              </a:tr>
+              <a:tr h="345440">
+                <a:tc>
+                  <a:txBody>
+                    <a:bodyPr/>
+                    <a:lstStyle/>
+                    <a:p>
+                      <a:pPr algn="l">
+                        <a:defRPr sz="1250" b="0">
+                          <a:solidFill>
+                            <a:srgbClr val="6B6A64"/>
+                          </a:solidFill>
+                        </a:defRPr>
+                      </a:pPr>
+                      <a:r>
+                        <a:t>Costa Rica</a:t>
+                      </a:r>
+                    </a:p>
+                  </a:txBody>
+                  <a:tcPr marL="54864" marR="54864">
+                    <a:noFill/>
+                  </a:tcPr>
+                </a:tc>
+                <a:tc>
+                  <a:txBody>
+                    <a:bodyPr/>
+                    <a:lstStyle/>
+                    <a:p>
+                      <a:pPr algn="r">
+                        <a:defRPr sz="1250" b="0">
+                          <a:solidFill>
+                            <a:srgbClr val="6B6A64"/>
+                          </a:solidFill>
+                        </a:defRPr>
+                      </a:pPr>
+                      <a:r>
+                        <a:t>ECE</a:t>
+                      </a:r>
+                    </a:p>
+                  </a:txBody>
+                  <a:tcPr marL="54864" marR="54864">
+                    <a:noFill/>
+                  </a:tcPr>
+                </a:tc>
+                <a:tc>
+                  <a:txBody>
+                    <a:bodyPr/>
+                    <a:lstStyle/>
+                    <a:p>
+                      <a:pPr algn="r">
+                        <a:defRPr sz="1250" b="0">
+                          <a:solidFill>
+                            <a:srgbClr val="6B6A64"/>
+                          </a:solidFill>
+                        </a:defRPr>
+                      </a:pPr>
+                      <a:r>
+                        <a:t>2021–2025</a:t>
+                      </a:r>
+                    </a:p>
+                  </a:txBody>
+                  <a:tcPr marL="54864" marR="54864">
+                    <a:noFill/>
+                  </a:tcPr>
+                </a:tc>
+                <a:tc>
+                  <a:txBody>
+                    <a:bodyPr/>
+                    <a:lstStyle/>
+                    <a:p>
+                      <a:pPr algn="r">
+                        <a:defRPr sz="1250" b="0">
+                          <a:solidFill>
+                            <a:srgbClr val="6B6A64"/>
+                          </a:solidFill>
+                        </a:defRPr>
+                      </a:pPr>
+                      <a:r>
+                        <a:t>2.2 mill.</a:t>
+                      </a:r>
+                    </a:p>
+                  </a:txBody>
+                  <a:tcPr marL="54864" marR="54864">
+                    <a:noFill/>
+                  </a:tcPr>
+                </a:tc>
+                <a:tc>
+                  <a:txBody>
+                    <a:bodyPr/>
+                    <a:lstStyle/>
+                    <a:p>
+                      <a:pPr algn="r">
+                        <a:defRPr sz="1250" b="0">
+                          <a:solidFill>
+                            <a:srgbClr val="6B6A64"/>
+                          </a:solidFill>
+                        </a:defRPr>
+                      </a:pPr>
+                      <a:r>
+                        <a:t>247 036</a:t>
+                      </a:r>
+                    </a:p>
+                  </a:txBody>
+                  <a:tcPr marL="54864" marR="54864">
+                    <a:noFill/>
+                  </a:tcPr>
+                </a:tc>
+              </a:tr>
+              <a:tr h="345440">
+                <a:tc>
+                  <a:txBody>
+                    <a:bodyPr/>
+                    <a:lstStyle/>
+                    <a:p>
+                      <a:pPr algn="l">
+                        <a:defRPr sz="1250" b="0">
+                          <a:solidFill>
+                            <a:srgbClr val="6B6A64"/>
+                          </a:solidFill>
+                        </a:defRPr>
+                      </a:pPr>
+                      <a:r>
+                        <a:t>Rep. Dominicana</a:t>
+                      </a:r>
+                    </a:p>
+                  </a:txBody>
+                  <a:tcPr marL="54864" marR="54864">
+                    <a:noFill/>
+                  </a:tcPr>
+                </a:tc>
+                <a:tc>
+                  <a:txBody>
+                    <a:bodyPr/>
+                    <a:lstStyle/>
+                    <a:p>
+                      <a:pPr algn="r">
+                        <a:defRPr sz="1250" b="0">
+                          <a:solidFill>
+                            <a:srgbClr val="6B6A64"/>
+                          </a:solidFill>
+                        </a:defRPr>
+                      </a:pPr>
+                      <a:r>
+                        <a:t>ENCFT</a:t>
+                      </a:r>
+                    </a:p>
+                  </a:txBody>
+                  <a:tcPr marL="54864" marR="54864">
+                    <a:noFill/>
+                  </a:tcPr>
+                </a:tc>
+                <a:tc>
+                  <a:txBody>
+                    <a:bodyPr/>
+                    <a:lstStyle/>
+                    <a:p>
+                      <a:pPr algn="r">
+                        <a:defRPr sz="1250" b="0">
+                          <a:solidFill>
+                            <a:srgbClr val="6B6A64"/>
+                          </a:solidFill>
+                        </a:defRPr>
+                      </a:pPr>
+                      <a:r>
+                        <a:t>2021 y 2024</a:t>
+                      </a:r>
+                    </a:p>
+                  </a:txBody>
+                  <a:tcPr marL="54864" marR="54864">
+                    <a:noFill/>
+                  </a:tcPr>
+                </a:tc>
+                <a:tc>
+                  <a:txBody>
+                    <a:bodyPr/>
+                    <a:lstStyle/>
+                    <a:p>
+                      <a:pPr algn="r">
+                        <a:defRPr sz="1250" b="0">
+                          <a:solidFill>
+                            <a:srgbClr val="6B6A64"/>
+                          </a:solidFill>
+                        </a:defRPr>
+                      </a:pPr>
+                      <a:r>
+                        <a:t>5.0 mill.</a:t>
+                      </a:r>
+                    </a:p>
+                  </a:txBody>
+                  <a:tcPr marL="54864" marR="54864">
+                    <a:noFill/>
+                  </a:tcPr>
+                </a:tc>
+                <a:tc>
+                  <a:txBody>
+                    <a:bodyPr/>
+                    <a:lstStyle/>
+                    <a:p>
+                      <a:pPr algn="r">
+                        <a:defRPr sz="1250" b="0">
+                          <a:solidFill>
+                            <a:srgbClr val="6B6A64"/>
+                          </a:solidFill>
+                        </a:defRPr>
+                      </a:pPr>
+                      <a:r>
+                        <a:t>251 935</a:t>
+                      </a:r>
+                    </a:p>
+                  </a:txBody>
+                  <a:tcPr marL="54864" marR="54864">
+                    <a:noFill/>
+                  </a:tcPr>
+                </a:tc>
+              </a:tr>
+              <a:tr h="345440">
+                <a:tc>
+                  <a:txBody>
+                    <a:bodyPr/>
+                    <a:lstStyle/>
+                    <a:p>
+                      <a:pPr algn="l">
+                        <a:defRPr sz="1250" b="0">
+                          <a:solidFill>
+                            <a:srgbClr val="6B6A64"/>
+                          </a:solidFill>
+                        </a:defRPr>
+                      </a:pPr>
+                      <a:r>
+                        <a:t>Honduras</a:t>
+                      </a:r>
+                    </a:p>
+                  </a:txBody>
+                  <a:tcPr marL="54864" marR="54864">
+                    <a:noFill/>
+                  </a:tcPr>
+                </a:tc>
+                <a:tc>
+                  <a:txBody>
+                    <a:bodyPr/>
+                    <a:lstStyle/>
+                    <a:p>
+                      <a:pPr algn="r">
+                        <a:defRPr sz="1250" b="0">
+                          <a:solidFill>
+                            <a:srgbClr val="6B6A64"/>
+                          </a:solidFill>
+                        </a:defRPr>
+                      </a:pPr>
+                      <a:r>
+                        <a:t>EPHPM</a:t>
+                      </a:r>
+                    </a:p>
+                  </a:txBody>
+                  <a:tcPr marL="54864" marR="54864">
+                    <a:noFill/>
+                  </a:tcPr>
+                </a:tc>
+                <a:tc>
+                  <a:txBody>
+                    <a:bodyPr/>
+                    <a:lstStyle/>
+                    <a:p>
+                      <a:pPr algn="r">
+                        <a:defRPr sz="1250" b="0">
+                          <a:solidFill>
+                            <a:srgbClr val="6B6A64"/>
+                          </a:solidFill>
+                        </a:defRPr>
+                      </a:pPr>
+                      <a:r>
+                        <a:t>2021–2025</a:t>
+                      </a:r>
+                    </a:p>
+                  </a:txBody>
+                  <a:tcPr marL="54864" marR="54864">
+                    <a:noFill/>
+                  </a:tcPr>
+                </a:tc>
+                <a:tc>
+                  <a:txBody>
+                    <a:bodyPr/>
+                    <a:lstStyle/>
+                    <a:p>
+                      <a:pPr algn="r">
+                        <a:defRPr sz="1250" b="0">
+                          <a:solidFill>
+                            <a:srgbClr val="6B6A64"/>
+                          </a:solidFill>
+                        </a:defRPr>
+                      </a:pPr>
+                      <a:r>
+                        <a:t>4.1 mill.</a:t>
+                      </a:r>
+                    </a:p>
+                  </a:txBody>
+                  <a:tcPr marL="54864" marR="54864">
+                    <a:noFill/>
+                  </a:tcPr>
+                </a:tc>
+                <a:tc>
+                  <a:txBody>
+                    <a:bodyPr/>
+                    <a:lstStyle/>
+                    <a:p>
+                      <a:pPr algn="r">
+                        <a:defRPr sz="1250" b="0">
+                          <a:solidFill>
+                            <a:srgbClr val="6B6A64"/>
+                          </a:solidFill>
+                        </a:defRPr>
+                      </a:pPr>
+                      <a:r>
+                        <a:t>199 633</a:t>
+                      </a:r>
+                    </a:p>
+                  </a:txBody>
+                  <a:tcPr marL="54864" marR="54864">
+                    <a:noFill/>
+                  </a:tcPr>
+                </a:tc>
+              </a:tr>
+              <a:tr h="345440">
+                <a:tc>
+                  <a:txBody>
+                    <a:bodyPr/>
+                    <a:lstStyle/>
+                    <a:p>
+                      <a:pPr algn="l">
+                        <a:defRPr sz="1250" b="0">
+                          <a:solidFill>
+                            <a:srgbClr val="6B6A64"/>
+                          </a:solidFill>
+                        </a:defRPr>
+                      </a:pPr>
+                      <a:r>
+                        <a:t>Guatemala</a:t>
+                      </a:r>
+                    </a:p>
+                  </a:txBody>
+                  <a:tcPr marL="54864" marR="54864">
+                    <a:noFill/>
+                  </a:tcPr>
+                </a:tc>
+                <a:tc>
+                  <a:txBody>
+                    <a:bodyPr/>
+                    <a:lstStyle/>
+                    <a:p>
+                      <a:pPr algn="r">
+                        <a:defRPr sz="1250" b="0">
+                          <a:solidFill>
+                            <a:srgbClr val="6B6A64"/>
+                          </a:solidFill>
+                        </a:defRPr>
+                      </a:pPr>
+                      <a:r>
+                        <a:t>ENCOVI</a:t>
+                      </a:r>
+                    </a:p>
+                  </a:txBody>
+                  <a:tcPr marL="54864" marR="54864">
+                    <a:noFill/>
+                  </a:tcPr>
+                </a:tc>
+                <a:tc>
+                  <a:txBody>
+                    <a:bodyPr/>
+                    <a:lstStyle/>
+                    <a:p>
+                      <a:pPr algn="r">
+                        <a:defRPr sz="1250" b="0">
+                          <a:solidFill>
+                            <a:srgbClr val="6B6A64"/>
+                          </a:solidFill>
+                        </a:defRPr>
+                      </a:pPr>
+                      <a:r>
+                        <a:t>solo 2023</a:t>
+                      </a:r>
+                    </a:p>
+                  </a:txBody>
+                  <a:tcPr marL="54864" marR="54864">
+                    <a:noFill/>
+                  </a:tcPr>
+                </a:tc>
+                <a:tc>
+                  <a:txBody>
+                    <a:bodyPr/>
+                    <a:lstStyle/>
+                    <a:p>
+                      <a:pPr algn="r">
+                        <a:defRPr sz="1250" b="0">
+                          <a:solidFill>
+                            <a:srgbClr val="6B6A64"/>
+                          </a:solidFill>
+                        </a:defRPr>
+                      </a:pPr>
+                      <a:r>
+                        <a:t>6.8 mill.</a:t>
+                      </a:r>
+                    </a:p>
+                  </a:txBody>
+                  <a:tcPr marL="54864" marR="54864">
+                    <a:noFill/>
+                  </a:tcPr>
+                </a:tc>
+                <a:tc>
+                  <a:txBody>
+                    <a:bodyPr/>
+                    <a:lstStyle/>
+                    <a:p>
+                      <a:pPr algn="r">
+                        <a:defRPr sz="1250" b="0">
+                          <a:solidFill>
+                            <a:srgbClr val="6B6A64"/>
+                          </a:solidFill>
+                        </a:defRPr>
+                      </a:pPr>
+                      <a:r>
+                        <a:t>256 077</a:t>
+                      </a:r>
+                    </a:p>
+                  </a:txBody>
+                  <a:tcPr marL="54864" marR="54864">
+                    <a:noFill/>
+                  </a:tcPr>
+                </a:tc>
+              </a:tr>
+              <a:tr h="345440">
+                <a:tc>
+                  <a:txBody>
+                    <a:bodyPr/>
+                    <a:lstStyle/>
+                    <a:p>
+                      <a:pPr algn="l">
+                        <a:defRPr sz="1250" b="0">
+                          <a:solidFill>
+                            <a:srgbClr val="6B6A64"/>
+                          </a:solidFill>
+                        </a:defRPr>
+                      </a:pPr>
+                      <a:r>
+                        <a:t>El Salvador</a:t>
+                      </a:r>
+                    </a:p>
+                  </a:txBody>
+                  <a:tcPr marL="54864" marR="54864">
+                    <a:noFill/>
+                  </a:tcPr>
+                </a:tc>
+                <a:tc>
+                  <a:txBody>
+                    <a:bodyPr/>
+                    <a:lstStyle/>
+                    <a:p>
+                      <a:pPr algn="r">
+                        <a:defRPr sz="1250" b="0">
+                          <a:solidFill>
+                            <a:srgbClr val="6B6A64"/>
+                          </a:solidFill>
+                        </a:defRPr>
+                      </a:pPr>
+                      <a:r>
+                        <a:t>EHPM</a:t>
+                      </a:r>
+                    </a:p>
+                  </a:txBody>
+                  <a:tcPr marL="54864" marR="54864">
+                    <a:noFill/>
+                  </a:tcPr>
+                </a:tc>
+                <a:tc>
+                  <a:txBody>
+                    <a:bodyPr/>
+                    <a:lstStyle/>
+                    <a:p>
+                      <a:pPr algn="r">
+                        <a:defRPr sz="1250" b="0">
+                          <a:solidFill>
+                            <a:srgbClr val="6B6A64"/>
+                          </a:solidFill>
+                        </a:defRPr>
+                      </a:pPr>
+                      <a:r>
+                        <a:t>2021–2025</a:t>
+                      </a:r>
+                    </a:p>
+                  </a:txBody>
+                  <a:tcPr marL="54864" marR="54864">
+                    <a:noFill/>
+                  </a:tcPr>
+                </a:tc>
+                <a:tc>
+                  <a:txBody>
+                    <a:bodyPr/>
+                    <a:lstStyle/>
+                    <a:p>
+                      <a:pPr algn="r">
+                        <a:defRPr sz="1250" b="0">
+                          <a:solidFill>
+                            <a:srgbClr val="6B6A64"/>
+                          </a:solidFill>
+                        </a:defRPr>
+                      </a:pPr>
+                      <a:r>
+                        <a:t>3.0 mill.</a:t>
+                      </a:r>
+                    </a:p>
+                  </a:txBody>
+                  <a:tcPr marL="54864" marR="54864">
+                    <a:noFill/>
+                  </a:tcPr>
+                </a:tc>
+                <a:tc>
+                  <a:txBody>
+                    <a:bodyPr/>
+                    <a:lstStyle/>
+                    <a:p>
+                      <a:pPr algn="r">
+                        <a:defRPr sz="1250" b="0">
+                          <a:solidFill>
+                            <a:srgbClr val="6B6A64"/>
+                          </a:solidFill>
+                        </a:defRPr>
+                      </a:pPr>
+                      <a:r>
+                        <a:t>no entregados</a:t>
+                      </a:r>
+                    </a:p>
+                  </a:txBody>
+                  <a:tcPr marL="54864" marR="54864">
+                    <a:noFill/>
+                  </a:tcPr>
+                </a:tc>
+              </a:tr>
+              <a:tr h="345440">
+                <a:tc>
+                  <a:txBody>
+                    <a:bodyPr/>
+                    <a:lstStyle/>
+                    <a:p>
+                      <a:pPr algn="l">
+                        <a:defRPr sz="1250" b="1">
+                          <a:solidFill>
+                            <a:srgbClr val="1C1C1A"/>
+                          </a:solidFill>
+                        </a:defRPr>
+                      </a:pPr>
+                      <a:r>
+                        <a:t>Panamá</a:t>
+                      </a:r>
+                    </a:p>
+                  </a:txBody>
+                  <a:tcPr marL="54864" marR="54864">
+                    <a:noFill/>
+                  </a:tcPr>
+                </a:tc>
+                <a:tc>
+                  <a:txBody>
+                    <a:bodyPr/>
+                    <a:lstStyle/>
+                    <a:p>
+                      <a:pPr algn="r">
+                        <a:defRPr sz="1250" b="1">
+                          <a:solidFill>
+                            <a:srgbClr val="1C1C1A"/>
+                          </a:solidFill>
+                        </a:defRPr>
+                      </a:pPr>
+                      <a:r>
+                        <a:t>sin datos</a:t>
+                      </a:r>
+                    </a:p>
+                  </a:txBody>
+                  <a:tcPr marL="54864" marR="54864">
+                    <a:noFill/>
+                  </a:tcPr>
+                </a:tc>
+                <a:tc>
+                  <a:txBody>
+                    <a:bodyPr/>
+                    <a:lstStyle/>
+                    <a:p>
+                      <a:pPr algn="r">
+                        <a:defRPr sz="1250" b="1">
+                          <a:solidFill>
+                            <a:srgbClr val="1C1C1A"/>
+                          </a:solidFill>
+                        </a:defRPr>
+                      </a:pPr>
+                      <a:r>
+                        <a:t>—</a:t>
+                      </a:r>
+                    </a:p>
+                  </a:txBody>
+                  <a:tcPr marL="54864" marR="54864">
+                    <a:noFill/>
+                  </a:tcPr>
+                </a:tc>
+                <a:tc>
+                  <a:txBody>
+                    <a:bodyPr/>
+                    <a:lstStyle/>
+                    <a:p>
+                      <a:pPr algn="r">
+                        <a:defRPr sz="1250" b="1">
+                          <a:solidFill>
+                            <a:srgbClr val="1C1C1A"/>
+                          </a:solidFill>
+                        </a:defRPr>
+                      </a:pPr>
+                      <a:r>
+                        <a:t>—</a:t>
+                      </a:r>
+                    </a:p>
+                  </a:txBody>
+                  <a:tcPr marL="54864" marR="54864">
+                    <a:noFill/>
+                  </a:tcPr>
+                </a:tc>
+                <a:tc>
+                  <a:txBody>
+                    <a:bodyPr/>
+                    <a:lstStyle/>
+                    <a:p>
+                      <a:pPr algn="r">
+                        <a:defRPr sz="1250" b="1">
+                          <a:solidFill>
+                            <a:srgbClr val="1C1C1A"/>
+                          </a:solidFill>
+                        </a:defRPr>
+                      </a:pPr>
+                      <a:r>
+                        <a:t>no entregados</a:t>
+                      </a:r>
+                    </a:p>
+                  </a:txBody>
+                  <a:tcPr marL="54864" marR="54864">
+                    <a:noFill/>
+                  </a:tcPr>
+                </a:tc>
+              </a:tr>
+              <a:tr h="345440">
+                <a:tc>
+                  <a:txBody>
+                    <a:bodyPr/>
+                    <a:lstStyle/>
+                    <a:p>
+                      <a:pPr algn="l">
+                        <a:defRPr sz="1250" b="1">
+                          <a:solidFill>
+                            <a:srgbClr val="1C1C1A"/>
+                          </a:solidFill>
+                        </a:defRPr>
+                      </a:pPr>
+                      <a:r>
+                        <a:t>Nicaragua</a:t>
+                      </a:r>
+                    </a:p>
+                  </a:txBody>
+                  <a:tcPr marL="54864" marR="54864">
+                    <a:noFill/>
+                  </a:tcPr>
+                </a:tc>
+                <a:tc>
+                  <a:txBody>
+                    <a:bodyPr/>
+                    <a:lstStyle/>
+                    <a:p>
+                      <a:pPr algn="r">
+                        <a:defRPr sz="1250" b="1">
+                          <a:solidFill>
+                            <a:srgbClr val="1C1C1A"/>
+                          </a:solidFill>
+                        </a:defRPr>
+                      </a:pPr>
+                      <a:r>
+                        <a:t>sin datos</a:t>
+                      </a:r>
+                    </a:p>
+                  </a:txBody>
+                  <a:tcPr marL="54864" marR="54864">
+                    <a:noFill/>
+                  </a:tcPr>
+                </a:tc>
+                <a:tc>
+                  <a:txBody>
+                    <a:bodyPr/>
+                    <a:lstStyle/>
+                    <a:p>
+                      <a:pPr algn="r">
+                        <a:defRPr sz="1250" b="1">
+                          <a:solidFill>
+                            <a:srgbClr val="1C1C1A"/>
+                          </a:solidFill>
+                        </a:defRPr>
+                      </a:pPr>
+                      <a:r>
+                        <a:t>—</a:t>
+                      </a:r>
+                    </a:p>
+                  </a:txBody>
+                  <a:tcPr marL="54864" marR="54864">
+                    <a:noFill/>
+                  </a:tcPr>
+                </a:tc>
+                <a:tc>
+                  <a:txBody>
+                    <a:bodyPr/>
+                    <a:lstStyle/>
+                    <a:p>
+                      <a:pPr algn="r">
+                        <a:defRPr sz="1250" b="1">
+                          <a:solidFill>
+                            <a:srgbClr val="1C1C1A"/>
+                          </a:solidFill>
+                        </a:defRPr>
+                      </a:pPr>
+                      <a:r>
+                        <a:t>—</a:t>
+                      </a:r>
+                    </a:p>
+                  </a:txBody>
+                  <a:tcPr marL="54864" marR="54864">
+                    <a:noFill/>
+                  </a:tcPr>
+                </a:tc>
+                <a:tc>
+                  <a:txBody>
+                    <a:bodyPr/>
+                    <a:lstStyle/>
+                    <a:p>
+                      <a:pPr algn="r">
+                        <a:defRPr sz="1250" b="1">
+                          <a:solidFill>
+                            <a:srgbClr val="1C1C1A"/>
+                          </a:solidFill>
+                        </a:defRPr>
+                      </a:pPr>
+                      <a:r>
+                        <a:t>no entregados</a:t>
+                      </a:r>
+                    </a:p>
+                  </a:txBody>
+                  <a:tcPr marL="54864" marR="54864">
+                    <a:noFill/>
+                  </a:tcPr>
+                </a:tc>
+              </a:tr>
+            </a:tbl>
+          </a:graphicData>
+        </a:graphic>
+      </p:graphicFrame>
       <p:sp>
         <p:nvSpPr>
           <p:cNvPr id="5" name="TextBox 4"/>
@@ -7646,8 +8783,8 @@
         </p:nvSpPr>
         <p:spPr>
           <a:xfrm>
-            <a:off x="658368" y="6199632"/>
-            <a:ext cx="10874959" cy="457200"/>
+            <a:off x="9052560" y="1874519"/>
+            <a:ext cx="2743200" cy="3108960"/>
           </a:xfrm>
           <a:prstGeom prst="rect">
             <a:avLst/>
@@ -7662,20 +8799,211 @@
           <a:p>
             <a:pPr algn="l">
               <a:lnSpc>
-                <a:spcPct val="115000"/>
-              </a:lnSpc>
-              <a:spcAft>
-                <a:spcPts val="600"/>
-              </a:spcAft>
-            </a:pPr>
-            <a:r>
-              <a:rPr sz="1050" b="0">
-                <a:solidFill>
-                  <a:srgbClr val="6B6A64"/>
-                </a:solidFill>
-                <a:latin typeface="Calibri"/>
-              </a:rPr>
-              <a:t>Cada país en su último año con encuesta. El Salvador no tiene anuncios de trabajo porque no fueron entregados; Panamá no tiene ninguna de las dos fuentes.</a:t>
+                <a:spcPct val="130000"/>
+              </a:lnSpc>
+              <a:spcAft>
+                <a:spcPts val="600"/>
+              </a:spcAft>
+            </a:pPr>
+            <a:r>
+              <a:rPr sz="1300" b="0">
+                <a:solidFill>
+                  <a:srgbClr val="1C1C1A"/>
+                </a:solidFill>
+                <a:latin typeface="Calibri"/>
+              </a:rPr>
+              <a:t>Qué significa esto</a:t>
+            </a:r>
+          </a:p>
+          <a:p>
+            <a:pPr algn="l">
+              <a:lnSpc>
+                <a:spcPct val="130000"/>
+              </a:lnSpc>
+              <a:spcAft>
+                <a:spcPts val="600"/>
+              </a:spcAft>
+            </a:pPr>
+            <a:r>
+              <a:rPr sz="1300" b="0">
+                <a:solidFill>
+                  <a:srgbClr val="1C1C1A"/>
+                </a:solidFill>
+                <a:latin typeface="Calibri"/>
+              </a:rPr>
+              <a:t/>
+            </a:r>
+          </a:p>
+          <a:p>
+            <a:pPr algn="l">
+              <a:lnSpc>
+                <a:spcPct val="130000"/>
+              </a:lnSpc>
+              <a:spcAft>
+                <a:spcPts val="600"/>
+              </a:spcAft>
+            </a:pPr>
+            <a:r>
+              <a:rPr sz="1300" b="0">
+                <a:solidFill>
+                  <a:srgbClr val="1C1C1A"/>
+                </a:solidFill>
+                <a:latin typeface="Calibri"/>
+              </a:rPr>
+              <a:t>Cuando decimos CAPARD hablamos de cinco países en las encuestas y de cuatro en los anuncios.</a:t>
+            </a:r>
+          </a:p>
+          <a:p>
+            <a:pPr algn="l">
+              <a:lnSpc>
+                <a:spcPct val="130000"/>
+              </a:lnSpc>
+              <a:spcAft>
+                <a:spcPts val="600"/>
+              </a:spcAft>
+            </a:pPr>
+            <a:r>
+              <a:rPr sz="1300" b="0">
+                <a:solidFill>
+                  <a:srgbClr val="1C1C1A"/>
+                </a:solidFill>
+                <a:latin typeface="Calibri"/>
+              </a:rPr>
+              <a:t/>
+            </a:r>
+          </a:p>
+          <a:p>
+            <a:pPr algn="l">
+              <a:lnSpc>
+                <a:spcPct val="130000"/>
+              </a:lnSpc>
+              <a:spcAft>
+                <a:spcPts val="600"/>
+              </a:spcAft>
+            </a:pPr>
+            <a:r>
+              <a:rPr sz="1300" b="0">
+                <a:solidFill>
+                  <a:srgbClr val="1C1C1A"/>
+                </a:solidFill>
+                <a:latin typeface="Calibri"/>
+              </a:rPr>
+              <a:t>Guatemala tiene un solo año, así que no entra en ninguna tendencia.</a:t>
+            </a:r>
+          </a:p>
+          <a:p>
+            <a:pPr algn="l">
+              <a:lnSpc>
+                <a:spcPct val="130000"/>
+              </a:lnSpc>
+              <a:spcAft>
+                <a:spcPts val="600"/>
+              </a:spcAft>
+            </a:pPr>
+            <a:r>
+              <a:rPr sz="1300" b="0">
+                <a:solidFill>
+                  <a:srgbClr val="1C1C1A"/>
+                </a:solidFill>
+                <a:latin typeface="Calibri"/>
+              </a:rPr>
+              <a:t/>
+            </a:r>
+          </a:p>
+          <a:p>
+            <a:pPr algn="l">
+              <a:lnSpc>
+                <a:spcPct val="130000"/>
+              </a:lnSpc>
+              <a:spcAft>
+                <a:spcPts val="600"/>
+              </a:spcAft>
+            </a:pPr>
+            <a:r>
+              <a:rPr sz="1300" b="0">
+                <a:solidFill>
+                  <a:srgbClr val="1C1C1A"/>
+                </a:solidFill>
+                <a:latin typeface="Calibri"/>
+              </a:rPr>
+              <a:t>República Dominicana tiene dos cortes, no una serie.</a:t>
+            </a:r>
+          </a:p>
+        </p:txBody>
+      </p:sp>
+      <p:cxnSp>
+        <p:nvCxnSpPr>
+          <p:cNvPr id="6" name="Connector 5"/>
+          <p:cNvCxnSpPr/>
+          <p:nvPr/>
+        </p:nvCxnSpPr>
+        <p:spPr>
+          <a:xfrm>
+            <a:off x="658368" y="5138928"/>
+            <a:ext cx="10874959" cy="0"/>
+          </a:xfrm>
+          <a:prstGeom prst="line">
+            <a:avLst/>
+          </a:prstGeom>
+          <a:ln w="19050">
+            <a:solidFill>
+              <a:srgbClr val="E4E4DF"/>
+            </a:solidFill>
+          </a:ln>
+        </p:spPr>
+        <p:style>
+          <a:lnRef idx="2">
+            <a:schemeClr val="accent1"/>
+          </a:lnRef>
+          <a:fillRef idx="0">
+            <a:schemeClr val="accent1"/>
+          </a:fillRef>
+          <a:effectRef idx="1">
+            <a:schemeClr val="accent1"/>
+          </a:effectRef>
+          <a:fontRef idx="minor">
+            <a:schemeClr val="tx1"/>
+          </a:fontRef>
+        </p:style>
+      </p:cxnSp>
+      <p:sp>
+        <p:nvSpPr>
+          <p:cNvPr id="7" name="TextBox 6"/>
+          <p:cNvSpPr txBox="1"/>
+          <p:nvPr/>
+        </p:nvSpPr>
+        <p:spPr>
+          <a:xfrm>
+            <a:off x="658368" y="5349240"/>
+            <a:ext cx="10881360" cy="914400"/>
+          </a:xfrm>
+          <a:prstGeom prst="rect">
+            <a:avLst/>
+          </a:prstGeom>
+          <a:noFill/>
+        </p:spPr>
+        <p:txBody>
+          <a:bodyPr wrap="square" lIns="0" rIns="0" tIns="0" bIns="0">
+            <a:spAutoFit/>
+          </a:bodyPr>
+          <a:lstStyle/>
+          <a:p>
+            <a:pPr algn="l">
+              <a:lnSpc>
+                <a:spcPct val="130000"/>
+              </a:lnSpc>
+              <a:spcAft>
+                <a:spcPts val="600"/>
+              </a:spcAft>
+            </a:pPr>
+            <a:r>
+              <a:rPr sz="1450" b="0">
+                <a:solidFill>
+                  <a:srgbClr val="1C1C1A"/>
+                </a:solidFill>
+                <a:latin typeface="Calibri"/>
+              </a:rPr>
+              <a:t>Cada gráfico dice al pie qué países incluye. Cuando un país falta no es una decisión nuestra: o su encuesta no permite el corte, o sus anuncios no llegaron.</a:t>
             </a:r>
           </a:p>
         </p:txBody>
@@ -7735,7 +9063,7 @@
                 </a:solidFill>
                 <a:latin typeface="Calibri"/>
               </a:rPr>
-              <a:t>PANORAMA · QUÉ SIGNIFICA</a:t>
+              <a:t>PANORAMA</a:t>
             </a:r>
           </a:p>
         </p:txBody>
@@ -7777,21 +9105,45 @@
                 </a:solidFill>
                 <a:latin typeface="Calibri"/>
               </a:rPr>
-              <a:t>La diferencia entre países es informalidad, no tecnología</a:t>
-            </a:r>
-          </a:p>
-        </p:txBody>
-      </p:sp>
-      <p:sp>
-        <p:nvSpPr>
-          <p:cNvPr id="4" name="TextBox 3"/>
+              <a:t>Los empleos formales están igual de expuestos en toda la región</a:t>
+            </a:r>
+          </a:p>
+        </p:txBody>
+      </p:sp>
+      <p:pic>
+        <p:nvPicPr>
+          <p:cNvPr id="4" name="Picture 3" descr="W8_comparacion_paises.png"/>
+          <p:cNvPicPr>
+            <a:picLocks noChangeAspect="1"/>
+          </p:cNvPicPr>
+          <p:nvPr/>
+        </p:nvPicPr>
+        <p:blipFill>
+          <a:blip r:embed="rId2"/>
+          <a:stretch>
+            <a:fillRect/>
+          </a:stretch>
+        </p:blipFill>
+        <p:spPr>
+          <a:xfrm>
+            <a:off x="2742118" y="1691640"/>
+            <a:ext cx="6707458" cy="4343400"/>
+          </a:xfrm>
+          <a:prstGeom prst="rect">
+            <a:avLst/>
+          </a:prstGeom>
+        </p:spPr>
+      </p:pic>
+      <p:sp>
+        <p:nvSpPr>
+          <p:cNvPr id="5" name="TextBox 4"/>
           <p:cNvSpPr txBox="1"/>
           <p:nvPr/>
         </p:nvSpPr>
         <p:spPr>
           <a:xfrm>
-            <a:off x="658368" y="1920240"/>
-            <a:ext cx="3200400" cy="731520"/>
+            <a:off x="658368" y="6199632"/>
+            <a:ext cx="10874959" cy="457200"/>
           </a:xfrm>
           <a:prstGeom prst="rect">
             <a:avLst/>
@@ -7806,349 +9158,20 @@
           <a:p>
             <a:pPr algn="l">
               <a:lnSpc>
-                <a:spcPct val="95000"/>
-              </a:lnSpc>
-              <a:spcAft>
-                <a:spcPts val="600"/>
-              </a:spcAft>
-            </a:pPr>
-            <a:r>
-              <a:rPr sz="4200" b="1">
-                <a:solidFill>
-                  <a:srgbClr val="2A78D6"/>
-                </a:solidFill>
-                <a:latin typeface="Calibri"/>
-              </a:rPr>
-              <a:t>0,21 a 0,29</a:t>
-            </a:r>
-          </a:p>
-        </p:txBody>
-      </p:sp>
-      <p:sp>
-        <p:nvSpPr>
-          <p:cNvPr id="5" name="TextBox 4"/>
-          <p:cNvSpPr txBox="1"/>
-          <p:nvPr/>
-        </p:nvSpPr>
-        <p:spPr>
-          <a:xfrm>
-            <a:off x="658368" y="2578608"/>
-            <a:ext cx="3200400" cy="914400"/>
-          </a:xfrm>
-          <a:prstGeom prst="rect">
-            <a:avLst/>
-          </a:prstGeom>
-          <a:noFill/>
-        </p:spPr>
-        <p:txBody>
-          <a:bodyPr wrap="square" lIns="0" rIns="0" tIns="0" bIns="0">
-            <a:spAutoFit/>
-          </a:bodyPr>
-          <a:lstStyle/>
-          <a:p>
-            <a:pPr algn="l">
-              <a:lnSpc>
-                <a:spcPct val="120000"/>
-              </a:lnSpc>
-              <a:spcAft>
-                <a:spcPts val="600"/>
-              </a:spcAft>
-            </a:pPr>
-            <a:r>
-              <a:rPr sz="1250" b="0">
+                <a:spcPct val="115000"/>
+              </a:lnSpc>
+              <a:spcAft>
+                <a:spcPts val="600"/>
+              </a:spcAft>
+            </a:pPr>
+            <a:r>
+              <a:rPr sz="1050" b="0">
                 <a:solidFill>
                   <a:srgbClr val="6B6A64"/>
                 </a:solidFill>
                 <a:latin typeface="Calibri"/>
               </a:rPr>
-              <a:t>Exposición del empleo total: los países se ven muy distintos entre sí</a:t>
-            </a:r>
-          </a:p>
-        </p:txBody>
-      </p:sp>
-      <p:sp>
-        <p:nvSpPr>
-          <p:cNvPr id="6" name="TextBox 5"/>
-          <p:cNvSpPr txBox="1"/>
-          <p:nvPr/>
-        </p:nvSpPr>
-        <p:spPr>
-          <a:xfrm>
-            <a:off x="4343400" y="1920240"/>
-            <a:ext cx="3200400" cy="731520"/>
-          </a:xfrm>
-          <a:prstGeom prst="rect">
-            <a:avLst/>
-          </a:prstGeom>
-          <a:noFill/>
-        </p:spPr>
-        <p:txBody>
-          <a:bodyPr wrap="square" lIns="0" rIns="0" tIns="0" bIns="0">
-            <a:spAutoFit/>
-          </a:bodyPr>
-          <a:lstStyle/>
-          <a:p>
-            <a:pPr algn="l">
-              <a:lnSpc>
-                <a:spcPct val="95000"/>
-              </a:lnSpc>
-              <a:spcAft>
-                <a:spcPts val="600"/>
-              </a:spcAft>
-            </a:pPr>
-            <a:r>
-              <a:rPr sz="4200" b="1">
-                <a:solidFill>
-                  <a:srgbClr val="1BAF7A"/>
-                </a:solidFill>
-                <a:latin typeface="Calibri"/>
-              </a:rPr>
-              <a:t>0,30 a 0,35</a:t>
-            </a:r>
-          </a:p>
-        </p:txBody>
-      </p:sp>
-      <p:sp>
-        <p:nvSpPr>
-          <p:cNvPr id="7" name="TextBox 6"/>
-          <p:cNvSpPr txBox="1"/>
-          <p:nvPr/>
-        </p:nvSpPr>
-        <p:spPr>
-          <a:xfrm>
-            <a:off x="4343400" y="2578608"/>
-            <a:ext cx="3200400" cy="914400"/>
-          </a:xfrm>
-          <a:prstGeom prst="rect">
-            <a:avLst/>
-          </a:prstGeom>
-          <a:noFill/>
-        </p:spPr>
-        <p:txBody>
-          <a:bodyPr wrap="square" lIns="0" rIns="0" tIns="0" bIns="0">
-            <a:spAutoFit/>
-          </a:bodyPr>
-          <a:lstStyle/>
-          <a:p>
-            <a:pPr algn="l">
-              <a:lnSpc>
-                <a:spcPct val="120000"/>
-              </a:lnSpc>
-              <a:spcAft>
-                <a:spcPts val="600"/>
-              </a:spcAft>
-            </a:pPr>
-            <a:r>
-              <a:rPr sz="1250" b="0">
-                <a:solidFill>
-                  <a:srgbClr val="6B6A64"/>
-                </a:solidFill>
-                <a:latin typeface="Calibri"/>
-              </a:rPr>
-              <a:t>Pero si miramos solo el empleo formal, casi no hay diferencia</a:t>
-            </a:r>
-          </a:p>
-        </p:txBody>
-      </p:sp>
-      <p:sp>
-        <p:nvSpPr>
-          <p:cNvPr id="8" name="TextBox 7"/>
-          <p:cNvSpPr txBox="1"/>
-          <p:nvPr/>
-        </p:nvSpPr>
-        <p:spPr>
-          <a:xfrm>
-            <a:off x="8229600" y="1920240"/>
-            <a:ext cx="3200400" cy="731520"/>
-          </a:xfrm>
-          <a:prstGeom prst="rect">
-            <a:avLst/>
-          </a:prstGeom>
-          <a:noFill/>
-        </p:spPr>
-        <p:txBody>
-          <a:bodyPr wrap="square" lIns="0" rIns="0" tIns="0" bIns="0">
-            <a:spAutoFit/>
-          </a:bodyPr>
-          <a:lstStyle/>
-          <a:p>
-            <a:pPr algn="l">
-              <a:lnSpc>
-                <a:spcPct val="95000"/>
-              </a:lnSpc>
-              <a:spcAft>
-                <a:spcPts val="600"/>
-              </a:spcAft>
-            </a:pPr>
-            <a:r>
-              <a:rPr sz="4200" b="1">
-                <a:solidFill>
-                  <a:srgbClr val="6B6A64"/>
-                </a:solidFill>
-                <a:latin typeface="Calibri"/>
-              </a:rPr>
-              <a:t>+0,89 → 0,00</a:t>
-            </a:r>
-          </a:p>
-        </p:txBody>
-      </p:sp>
-      <p:sp>
-        <p:nvSpPr>
-          <p:cNvPr id="9" name="TextBox 8"/>
-          <p:cNvSpPr txBox="1"/>
-          <p:nvPr/>
-        </p:nvSpPr>
-        <p:spPr>
-          <a:xfrm>
-            <a:off x="8229600" y="2578608"/>
-            <a:ext cx="3200400" cy="914400"/>
-          </a:xfrm>
-          <a:prstGeom prst="rect">
-            <a:avLst/>
-          </a:prstGeom>
-          <a:noFill/>
-        </p:spPr>
-        <p:txBody>
-          <a:bodyPr wrap="square" lIns="0" rIns="0" tIns="0" bIns="0">
-            <a:spAutoFit/>
-          </a:bodyPr>
-          <a:lstStyle/>
-          <a:p>
-            <a:pPr algn="l">
-              <a:lnSpc>
-                <a:spcPct val="120000"/>
-              </a:lnSpc>
-              <a:spcAft>
-                <a:spcPts val="600"/>
-              </a:spcAft>
-            </a:pPr>
-            <a:r>
-              <a:rPr sz="1250" b="0">
-                <a:solidFill>
-                  <a:srgbClr val="6B6A64"/>
-                </a:solidFill>
-                <a:latin typeface="Calibri"/>
-              </a:rPr>
-              <a:t>La relación con la informalidad desaparece al comparar solo empleo formal</a:t>
-            </a:r>
-          </a:p>
-        </p:txBody>
-      </p:sp>
-      <p:cxnSp>
-        <p:nvCxnSpPr>
-          <p:cNvPr id="10" name="Connector 9"/>
-          <p:cNvCxnSpPr/>
-          <p:nvPr/>
-        </p:nvCxnSpPr>
-        <p:spPr>
-          <a:xfrm>
-            <a:off x="658368" y="4206240"/>
-            <a:ext cx="10874959" cy="0"/>
-          </a:xfrm>
-          <a:prstGeom prst="line">
-            <a:avLst/>
-          </a:prstGeom>
-          <a:ln w="19050">
-            <a:solidFill>
-              <a:srgbClr val="E4E4DF"/>
-            </a:solidFill>
-          </a:ln>
-        </p:spPr>
-        <p:style>
-          <a:lnRef idx="2">
-            <a:schemeClr val="accent1"/>
-          </a:lnRef>
-          <a:fillRef idx="0">
-            <a:schemeClr val="accent1"/>
-          </a:fillRef>
-          <a:effectRef idx="1">
-            <a:schemeClr val="accent1"/>
-          </a:effectRef>
-          <a:fontRef idx="minor">
-            <a:schemeClr val="tx1"/>
-          </a:fontRef>
-        </p:style>
-      </p:cxnSp>
-      <p:sp>
-        <p:nvSpPr>
-          <p:cNvPr id="11" name="TextBox 10"/>
-          <p:cNvSpPr txBox="1"/>
-          <p:nvPr/>
-        </p:nvSpPr>
-        <p:spPr>
-          <a:xfrm>
-            <a:off x="658368" y="4480560"/>
-            <a:ext cx="10881360" cy="1645920"/>
-          </a:xfrm>
-          <a:prstGeom prst="rect">
-            <a:avLst/>
-          </a:prstGeom>
-          <a:noFill/>
-        </p:spPr>
-        <p:txBody>
-          <a:bodyPr wrap="square" lIns="0" rIns="0" tIns="0" bIns="0">
-            <a:spAutoFit/>
-          </a:bodyPr>
-          <a:lstStyle/>
-          <a:p>
-            <a:pPr algn="l">
-              <a:lnSpc>
-                <a:spcPct val="135000"/>
-              </a:lnSpc>
-              <a:spcAft>
-                <a:spcPts val="600"/>
-              </a:spcAft>
-            </a:pPr>
-            <a:r>
-              <a:rPr sz="1900" b="0">
-                <a:solidFill>
-                  <a:srgbClr val="1C1C1A"/>
-                </a:solidFill>
-                <a:latin typeface="Calibri"/>
-              </a:rPr>
-              <a:t>Guatemala parece mucho menos expuesta que México. Pero no es porque su empleo formal sea distinto: es porque arrastra mucho más empleo informal, que casi no está expuesto. Cuando comparamos formales con formales, los seis países se parecen.</a:t>
-            </a:r>
-          </a:p>
-        </p:txBody>
-      </p:sp>
-      <p:sp>
-        <p:nvSpPr>
-          <p:cNvPr id="12" name="TextBox 11"/>
-          <p:cNvSpPr txBox="1"/>
-          <p:nvPr/>
-        </p:nvSpPr>
-        <p:spPr>
-          <a:xfrm>
-            <a:off x="658368" y="5806440"/>
-            <a:ext cx="10881360" cy="548640"/>
-          </a:xfrm>
-          <a:prstGeom prst="rect">
-            <a:avLst/>
-          </a:prstGeom>
-          <a:noFill/>
-        </p:spPr>
-        <p:txBody>
-          <a:bodyPr wrap="square" lIns="0" rIns="0" tIns="0" bIns="0">
-            <a:spAutoFit/>
-          </a:bodyPr>
-          <a:lstStyle/>
-          <a:p>
-            <a:pPr algn="l">
-              <a:lnSpc>
-                <a:spcPct val="125000"/>
-              </a:lnSpc>
-              <a:spcAft>
-                <a:spcPts val="600"/>
-              </a:spcAft>
-            </a:pPr>
-            <a:r>
-              <a:rPr sz="1600" b="1">
-                <a:solidFill>
-                  <a:srgbClr val="1BAF7A"/>
-                </a:solidFill>
-                <a:latin typeface="Calibri"/>
-              </a:rPr>
-              <a:t>Para política: hablar de exposición a la IA en la región es, en buena medida, hablar de informalidad.</a:t>
+              <a:t>Cada país en su último año con encuesta. El Salvador no tiene anuncios de trabajo porque no fueron entregados; Panamá no tiene ninguna de las dos fuentes.</a:t>
             </a:r>
           </a:p>
         </p:txBody>
@@ -8208,7 +9231,7 @@
                 </a:solidFill>
                 <a:latin typeface="Calibri"/>
               </a:rPr>
-              <a:t>HALLAZGO 1</a:t>
+              <a:t>PANORAMA · QUÉ SIGNIFICA</a:t>
             </a:r>
           </a:p>
         </p:txBody>
@@ -8250,45 +9273,21 @@
                 </a:solidFill>
                 <a:latin typeface="Calibri"/>
               </a:rPr>
-              <a:t>La IA alcanza más a los empleos calificados que a los de planta</a:t>
-            </a:r>
-          </a:p>
-        </p:txBody>
-      </p:sp>
-      <p:pic>
-        <p:nvPicPr>
-          <p:cNvPr id="4" name="Picture 3" descr="W4_escalera_bloques.png"/>
-          <p:cNvPicPr>
-            <a:picLocks noChangeAspect="1"/>
-          </p:cNvPicPr>
-          <p:nvPr/>
-        </p:nvPicPr>
-        <p:blipFill>
-          <a:blip r:embed="rId2"/>
-          <a:stretch>
-            <a:fillRect/>
-          </a:stretch>
-        </p:blipFill>
-        <p:spPr>
-          <a:xfrm>
-            <a:off x="2915550" y="1645920"/>
-            <a:ext cx="6360594" cy="4206240"/>
-          </a:xfrm>
-          <a:prstGeom prst="rect">
-            <a:avLst/>
-          </a:prstGeom>
-        </p:spPr>
-      </p:pic>
-      <p:sp>
-        <p:nvSpPr>
-          <p:cNvPr id="5" name="TextBox 4"/>
+              <a:t>La diferencia entre países es informalidad, no tecnología</a:t>
+            </a:r>
+          </a:p>
+        </p:txBody>
+      </p:sp>
+      <p:sp>
+        <p:nvSpPr>
+          <p:cNvPr id="4" name="TextBox 3"/>
           <p:cNvSpPr txBox="1"/>
           <p:nvPr/>
         </p:nvSpPr>
         <p:spPr>
           <a:xfrm>
-            <a:off x="658368" y="6199632"/>
-            <a:ext cx="10874959" cy="457200"/>
+            <a:off x="658368" y="1920240"/>
+            <a:ext cx="3200400" cy="731520"/>
           </a:xfrm>
           <a:prstGeom prst="rect">
             <a:avLst/>
@@ -8303,20 +9302,349 @@
           <a:p>
             <a:pPr algn="l">
               <a:lnSpc>
-                <a:spcPct val="115000"/>
-              </a:lnSpc>
-              <a:spcAft>
-                <a:spcPts val="600"/>
-              </a:spcAft>
-            </a:pPr>
-            <a:r>
-              <a:rPr sz="1050" b="0">
+                <a:spcPct val="95000"/>
+              </a:lnSpc>
+              <a:spcAft>
+                <a:spcPts val="600"/>
+              </a:spcAft>
+            </a:pPr>
+            <a:r>
+              <a:rPr sz="4200" b="1">
+                <a:solidFill>
+                  <a:srgbClr val="2A78D6"/>
+                </a:solidFill>
+                <a:latin typeface="Calibri"/>
+              </a:rPr>
+              <a:t>0,21 a 0,29</a:t>
+            </a:r>
+          </a:p>
+        </p:txBody>
+      </p:sp>
+      <p:sp>
+        <p:nvSpPr>
+          <p:cNvPr id="5" name="TextBox 4"/>
+          <p:cNvSpPr txBox="1"/>
+          <p:nvPr/>
+        </p:nvSpPr>
+        <p:spPr>
+          <a:xfrm>
+            <a:off x="658368" y="2578608"/>
+            <a:ext cx="3200400" cy="914400"/>
+          </a:xfrm>
+          <a:prstGeom prst="rect">
+            <a:avLst/>
+          </a:prstGeom>
+          <a:noFill/>
+        </p:spPr>
+        <p:txBody>
+          <a:bodyPr wrap="square" lIns="0" rIns="0" tIns="0" bIns="0">
+            <a:spAutoFit/>
+          </a:bodyPr>
+          <a:lstStyle/>
+          <a:p>
+            <a:pPr algn="l">
+              <a:lnSpc>
+                <a:spcPct val="120000"/>
+              </a:lnSpc>
+              <a:spcAft>
+                <a:spcPts val="600"/>
+              </a:spcAft>
+            </a:pPr>
+            <a:r>
+              <a:rPr sz="1250" b="0">
                 <a:solidFill>
                   <a:srgbClr val="6B6A64"/>
                 </a:solidFill>
                 <a:latin typeface="Calibri"/>
               </a:rPr>
-              <a:t>CAPARD son aquí cuatro países: Costa Rica, El Salvador, Honduras y República Dominicana. Guatemala no aparece porque su encuesta registra la ocupación con menos detalle; Nicaragua y Panamá no están disponibles.</a:t>
+              <a:t>Exposición del empleo total: los países se ven muy distintos entre sí</a:t>
+            </a:r>
+          </a:p>
+        </p:txBody>
+      </p:sp>
+      <p:sp>
+        <p:nvSpPr>
+          <p:cNvPr id="6" name="TextBox 5"/>
+          <p:cNvSpPr txBox="1"/>
+          <p:nvPr/>
+        </p:nvSpPr>
+        <p:spPr>
+          <a:xfrm>
+            <a:off x="4343400" y="1920240"/>
+            <a:ext cx="3200400" cy="731520"/>
+          </a:xfrm>
+          <a:prstGeom prst="rect">
+            <a:avLst/>
+          </a:prstGeom>
+          <a:noFill/>
+        </p:spPr>
+        <p:txBody>
+          <a:bodyPr wrap="square" lIns="0" rIns="0" tIns="0" bIns="0">
+            <a:spAutoFit/>
+          </a:bodyPr>
+          <a:lstStyle/>
+          <a:p>
+            <a:pPr algn="l">
+              <a:lnSpc>
+                <a:spcPct val="95000"/>
+              </a:lnSpc>
+              <a:spcAft>
+                <a:spcPts val="600"/>
+              </a:spcAft>
+            </a:pPr>
+            <a:r>
+              <a:rPr sz="4200" b="1">
+                <a:solidFill>
+                  <a:srgbClr val="1BAF7A"/>
+                </a:solidFill>
+                <a:latin typeface="Calibri"/>
+              </a:rPr>
+              <a:t>0,30 a 0,35</a:t>
+            </a:r>
+          </a:p>
+        </p:txBody>
+      </p:sp>
+      <p:sp>
+        <p:nvSpPr>
+          <p:cNvPr id="7" name="TextBox 6"/>
+          <p:cNvSpPr txBox="1"/>
+          <p:nvPr/>
+        </p:nvSpPr>
+        <p:spPr>
+          <a:xfrm>
+            <a:off x="4343400" y="2578608"/>
+            <a:ext cx="3200400" cy="914400"/>
+          </a:xfrm>
+          <a:prstGeom prst="rect">
+            <a:avLst/>
+          </a:prstGeom>
+          <a:noFill/>
+        </p:spPr>
+        <p:txBody>
+          <a:bodyPr wrap="square" lIns="0" rIns="0" tIns="0" bIns="0">
+            <a:spAutoFit/>
+          </a:bodyPr>
+          <a:lstStyle/>
+          <a:p>
+            <a:pPr algn="l">
+              <a:lnSpc>
+                <a:spcPct val="120000"/>
+              </a:lnSpc>
+              <a:spcAft>
+                <a:spcPts val="600"/>
+              </a:spcAft>
+            </a:pPr>
+            <a:r>
+              <a:rPr sz="1250" b="0">
+                <a:solidFill>
+                  <a:srgbClr val="6B6A64"/>
+                </a:solidFill>
+                <a:latin typeface="Calibri"/>
+              </a:rPr>
+              <a:t>Pero si miramos solo el empleo formal, casi no hay diferencia</a:t>
+            </a:r>
+          </a:p>
+        </p:txBody>
+      </p:sp>
+      <p:sp>
+        <p:nvSpPr>
+          <p:cNvPr id="8" name="TextBox 7"/>
+          <p:cNvSpPr txBox="1"/>
+          <p:nvPr/>
+        </p:nvSpPr>
+        <p:spPr>
+          <a:xfrm>
+            <a:off x="8229600" y="1920240"/>
+            <a:ext cx="3200400" cy="731520"/>
+          </a:xfrm>
+          <a:prstGeom prst="rect">
+            <a:avLst/>
+          </a:prstGeom>
+          <a:noFill/>
+        </p:spPr>
+        <p:txBody>
+          <a:bodyPr wrap="square" lIns="0" rIns="0" tIns="0" bIns="0">
+            <a:spAutoFit/>
+          </a:bodyPr>
+          <a:lstStyle/>
+          <a:p>
+            <a:pPr algn="l">
+              <a:lnSpc>
+                <a:spcPct val="95000"/>
+              </a:lnSpc>
+              <a:spcAft>
+                <a:spcPts val="600"/>
+              </a:spcAft>
+            </a:pPr>
+            <a:r>
+              <a:rPr sz="4200" b="1">
+                <a:solidFill>
+                  <a:srgbClr val="6B6A64"/>
+                </a:solidFill>
+                <a:latin typeface="Calibri"/>
+              </a:rPr>
+              <a:t>+0,89 → 0,00</a:t>
+            </a:r>
+          </a:p>
+        </p:txBody>
+      </p:sp>
+      <p:sp>
+        <p:nvSpPr>
+          <p:cNvPr id="9" name="TextBox 8"/>
+          <p:cNvSpPr txBox="1"/>
+          <p:nvPr/>
+        </p:nvSpPr>
+        <p:spPr>
+          <a:xfrm>
+            <a:off x="8229600" y="2578608"/>
+            <a:ext cx="3200400" cy="914400"/>
+          </a:xfrm>
+          <a:prstGeom prst="rect">
+            <a:avLst/>
+          </a:prstGeom>
+          <a:noFill/>
+        </p:spPr>
+        <p:txBody>
+          <a:bodyPr wrap="square" lIns="0" rIns="0" tIns="0" bIns="0">
+            <a:spAutoFit/>
+          </a:bodyPr>
+          <a:lstStyle/>
+          <a:p>
+            <a:pPr algn="l">
+              <a:lnSpc>
+                <a:spcPct val="120000"/>
+              </a:lnSpc>
+              <a:spcAft>
+                <a:spcPts val="600"/>
+              </a:spcAft>
+            </a:pPr>
+            <a:r>
+              <a:rPr sz="1250" b="0">
+                <a:solidFill>
+                  <a:srgbClr val="6B6A64"/>
+                </a:solidFill>
+                <a:latin typeface="Calibri"/>
+              </a:rPr>
+              <a:t>La relación con la informalidad desaparece al comparar solo empleo formal</a:t>
+            </a:r>
+          </a:p>
+        </p:txBody>
+      </p:sp>
+      <p:cxnSp>
+        <p:nvCxnSpPr>
+          <p:cNvPr id="10" name="Connector 9"/>
+          <p:cNvCxnSpPr/>
+          <p:nvPr/>
+        </p:nvCxnSpPr>
+        <p:spPr>
+          <a:xfrm>
+            <a:off x="658368" y="4206240"/>
+            <a:ext cx="10874959" cy="0"/>
+          </a:xfrm>
+          <a:prstGeom prst="line">
+            <a:avLst/>
+          </a:prstGeom>
+          <a:ln w="19050">
+            <a:solidFill>
+              <a:srgbClr val="E4E4DF"/>
+            </a:solidFill>
+          </a:ln>
+        </p:spPr>
+        <p:style>
+          <a:lnRef idx="2">
+            <a:schemeClr val="accent1"/>
+          </a:lnRef>
+          <a:fillRef idx="0">
+            <a:schemeClr val="accent1"/>
+          </a:fillRef>
+          <a:effectRef idx="1">
+            <a:schemeClr val="accent1"/>
+          </a:effectRef>
+          <a:fontRef idx="minor">
+            <a:schemeClr val="tx1"/>
+          </a:fontRef>
+        </p:style>
+      </p:cxnSp>
+      <p:sp>
+        <p:nvSpPr>
+          <p:cNvPr id="11" name="TextBox 10"/>
+          <p:cNvSpPr txBox="1"/>
+          <p:nvPr/>
+        </p:nvSpPr>
+        <p:spPr>
+          <a:xfrm>
+            <a:off x="658368" y="4480560"/>
+            <a:ext cx="10881360" cy="1645920"/>
+          </a:xfrm>
+          <a:prstGeom prst="rect">
+            <a:avLst/>
+          </a:prstGeom>
+          <a:noFill/>
+        </p:spPr>
+        <p:txBody>
+          <a:bodyPr wrap="square" lIns="0" rIns="0" tIns="0" bIns="0">
+            <a:spAutoFit/>
+          </a:bodyPr>
+          <a:lstStyle/>
+          <a:p>
+            <a:pPr algn="l">
+              <a:lnSpc>
+                <a:spcPct val="135000"/>
+              </a:lnSpc>
+              <a:spcAft>
+                <a:spcPts val="600"/>
+              </a:spcAft>
+            </a:pPr>
+            <a:r>
+              <a:rPr sz="1900" b="0">
+                <a:solidFill>
+                  <a:srgbClr val="1C1C1A"/>
+                </a:solidFill>
+                <a:latin typeface="Calibri"/>
+              </a:rPr>
+              <a:t>Guatemala parece mucho menos expuesta que México. Pero no es porque su empleo formal sea distinto: es porque arrastra mucho más empleo informal, que casi no está expuesto. Cuando comparamos formales con formales, los seis países se parecen.</a:t>
+            </a:r>
+          </a:p>
+        </p:txBody>
+      </p:sp>
+      <p:sp>
+        <p:nvSpPr>
+          <p:cNvPr id="12" name="TextBox 11"/>
+          <p:cNvSpPr txBox="1"/>
+          <p:nvPr/>
+        </p:nvSpPr>
+        <p:spPr>
+          <a:xfrm>
+            <a:off x="658368" y="5806440"/>
+            <a:ext cx="10881360" cy="548640"/>
+          </a:xfrm>
+          <a:prstGeom prst="rect">
+            <a:avLst/>
+          </a:prstGeom>
+          <a:noFill/>
+        </p:spPr>
+        <p:txBody>
+          <a:bodyPr wrap="square" lIns="0" rIns="0" tIns="0" bIns="0">
+            <a:spAutoFit/>
+          </a:bodyPr>
+          <a:lstStyle/>
+          <a:p>
+            <a:pPr algn="l">
+              <a:lnSpc>
+                <a:spcPct val="125000"/>
+              </a:lnSpc>
+              <a:spcAft>
+                <a:spcPts val="600"/>
+              </a:spcAft>
+            </a:pPr>
+            <a:r>
+              <a:rPr sz="1600" b="1">
+                <a:solidFill>
+                  <a:srgbClr val="1BAF7A"/>
+                </a:solidFill>
+                <a:latin typeface="Calibri"/>
+              </a:rPr>
+              <a:t>Para política: hablar de exposición a la IA en la región es, en buena medida, hablar de informalidad.</a:t>
             </a:r>
           </a:p>
         </p:txBody>
@@ -8376,7 +9704,7 @@
                 </a:solidFill>
                 <a:latin typeface="Calibri"/>
               </a:rPr>
-              <a:t>HALLAZGO 1 · QUÉ SIGNIFICA</a:t>
+              <a:t>HALLAZGO 1</a:t>
             </a:r>
           </a:p>
         </p:txBody>
@@ -8418,21 +9746,45 @@
                 </a:solidFill>
                 <a:latin typeface="Calibri"/>
               </a:rPr>
-              <a:t>El empleo de planta casi no cambia; el de oficina y oficina técnica, sí</a:t>
-            </a:r>
-          </a:p>
-        </p:txBody>
-      </p:sp>
-      <p:sp>
-        <p:nvSpPr>
-          <p:cNvPr id="4" name="TextBox 3"/>
+              <a:t>La IA alcanza más a los empleos calificados que a los de planta</a:t>
+            </a:r>
+          </a:p>
+        </p:txBody>
+      </p:sp>
+      <p:pic>
+        <p:nvPicPr>
+          <p:cNvPr id="4" name="Picture 3" descr="W4_escalera_bloques.png"/>
+          <p:cNvPicPr>
+            <a:picLocks noChangeAspect="1"/>
+          </p:cNvPicPr>
+          <p:nvPr/>
+        </p:nvPicPr>
+        <p:blipFill>
+          <a:blip r:embed="rId2"/>
+          <a:stretch>
+            <a:fillRect/>
+          </a:stretch>
+        </p:blipFill>
+        <p:spPr>
+          <a:xfrm>
+            <a:off x="2915550" y="1645920"/>
+            <a:ext cx="6360594" cy="4206240"/>
+          </a:xfrm>
+          <a:prstGeom prst="rect">
+            <a:avLst/>
+          </a:prstGeom>
+        </p:spPr>
+      </p:pic>
+      <p:sp>
+        <p:nvSpPr>
+          <p:cNvPr id="5" name="TextBox 4"/>
           <p:cNvSpPr txBox="1"/>
           <p:nvPr/>
         </p:nvSpPr>
         <p:spPr>
           <a:xfrm>
-            <a:off x="658368" y="1828800"/>
-            <a:ext cx="5577840" cy="3108960"/>
+            <a:off x="658368" y="6199632"/>
+            <a:ext cx="10874959" cy="457200"/>
           </a:xfrm>
           <a:prstGeom prst="rect">
             <a:avLst/>
@@ -8447,256 +9799,20 @@
           <a:p>
             <a:pPr algn="l">
               <a:lnSpc>
-                <a:spcPct val="130000"/>
-              </a:lnSpc>
-              <a:spcAft>
-                <a:spcPts val="600"/>
-              </a:spcAft>
-            </a:pPr>
-            <a:r>
-              <a:rPr sz="1550" b="0">
-                <a:solidFill>
-                  <a:srgbClr val="1C1C1A"/>
-                </a:solidFill>
-                <a:latin typeface="Calibri"/>
-              </a:rPr>
-              <a:t>Más de la mitad del empleo de estos sectores son ensambladores, operarios y empacadores. Su exposición es muy baja: alrededor de 0,10.</a:t>
-            </a:r>
-          </a:p>
-          <a:p>
-            <a:pPr algn="l">
-              <a:lnSpc>
-                <a:spcPct val="130000"/>
-              </a:lnSpc>
-              <a:spcAft>
-                <a:spcPts val="600"/>
-              </a:spcAft>
-            </a:pPr>
-            <a:r>
-              <a:rPr sz="1550" b="0">
-                <a:solidFill>
-                  <a:srgbClr val="1C1C1A"/>
-                </a:solidFill>
-                <a:latin typeface="Calibri"/>
-              </a:rPr>
-              <a:t/>
-            </a:r>
-          </a:p>
-          <a:p>
-            <a:pPr algn="l">
-              <a:lnSpc>
-                <a:spcPct val="130000"/>
-              </a:lnSpc>
-              <a:spcAft>
-                <a:spcPts val="600"/>
-              </a:spcAft>
-            </a:pPr>
-            <a:r>
-              <a:rPr sz="1550" b="0">
-                <a:solidFill>
-                  <a:srgbClr val="1C1C1A"/>
-                </a:solidFill>
-                <a:latin typeface="Calibri"/>
-              </a:rPr>
-              <a:t>La razón no es que estén protegidos, sino que su trabajo es físico y estas herramientas no lo alcanzan.</a:t>
-            </a:r>
-          </a:p>
-          <a:p>
-            <a:pPr algn="l">
-              <a:lnSpc>
-                <a:spcPct val="130000"/>
-              </a:lnSpc>
-              <a:spcAft>
-                <a:spcPts val="600"/>
-              </a:spcAft>
-            </a:pPr>
-            <a:r>
-              <a:rPr sz="1550" b="0">
-                <a:solidFill>
-                  <a:srgbClr val="1C1C1A"/>
-                </a:solidFill>
-                <a:latin typeface="Calibri"/>
-              </a:rPr>
-              <a:t/>
-            </a:r>
-          </a:p>
-          <a:p>
-            <a:pPr algn="l">
-              <a:lnSpc>
-                <a:spcPct val="130000"/>
-              </a:lnSpc>
-              <a:spcAft>
-                <a:spcPts val="600"/>
-              </a:spcAft>
-            </a:pPr>
-            <a:r>
-              <a:rPr sz="1550" b="0">
-                <a:solidFill>
-                  <a:srgbClr val="1C1C1A"/>
-                </a:solidFill>
-                <a:latin typeface="Calibri"/>
-              </a:rPr>
-              <a:t>La exposición sube conforme sube la calificación: técnicos 0,41, personal administrativo 0,48, profesionales e ingenieros 0,56.</a:t>
-            </a:r>
-          </a:p>
-        </p:txBody>
-      </p:sp>
-      <p:sp>
-        <p:nvSpPr>
-          <p:cNvPr id="5" name="TextBox 4"/>
-          <p:cNvSpPr txBox="1"/>
-          <p:nvPr/>
-        </p:nvSpPr>
-        <p:spPr>
-          <a:xfrm>
-            <a:off x="6675120" y="1828800"/>
-            <a:ext cx="4846320" cy="3108960"/>
-          </a:xfrm>
-          <a:prstGeom prst="rect">
-            <a:avLst/>
-          </a:prstGeom>
-          <a:noFill/>
-        </p:spPr>
-        <p:txBody>
-          <a:bodyPr wrap="square" lIns="0" rIns="0" tIns="0" bIns="0">
-            <a:spAutoFit/>
-          </a:bodyPr>
-          <a:lstStyle/>
-          <a:p>
-            <a:pPr algn="l">
-              <a:lnSpc>
-                <a:spcPct val="135000"/>
-              </a:lnSpc>
-              <a:spcAft>
-                <a:spcPts val="600"/>
-              </a:spcAft>
-            </a:pPr>
-            <a:r>
-              <a:rPr sz="1600" b="0">
-                <a:solidFill>
-                  <a:srgbClr val="1C1C1A"/>
-                </a:solidFill>
-                <a:latin typeface="Calibri"/>
-              </a:rPr>
-              <a:t>Y aquí está lo incómodo:</a:t>
-            </a:r>
-          </a:p>
-          <a:p>
-            <a:pPr algn="l">
-              <a:lnSpc>
-                <a:spcPct val="135000"/>
-              </a:lnSpc>
-              <a:spcAft>
-                <a:spcPts val="600"/>
-              </a:spcAft>
-            </a:pPr>
-            <a:r>
-              <a:rPr sz="1600" b="0">
-                <a:solidFill>
-                  <a:srgbClr val="1C1C1A"/>
-                </a:solidFill>
-                <a:latin typeface="Calibri"/>
-              </a:rPr>
-              <a:t/>
-            </a:r>
-          </a:p>
-          <a:p>
-            <a:pPr algn="l">
-              <a:lnSpc>
-                <a:spcPct val="135000"/>
-              </a:lnSpc>
-              <a:spcAft>
-                <a:spcPts val="600"/>
-              </a:spcAft>
-            </a:pPr>
-            <a:r>
-              <a:rPr sz="1600" b="0">
-                <a:solidFill>
-                  <a:srgbClr val="1C1C1A"/>
-                </a:solidFill>
-                <a:latin typeface="Calibri"/>
-              </a:rPr>
-              <a:t>La capa que más alcanza la IA es justamente la que hace falta para que estos sectores pasen a productos de mayor valor.</a:t>
-            </a:r>
-          </a:p>
-          <a:p>
-            <a:pPr algn="l">
-              <a:lnSpc>
-                <a:spcPct val="135000"/>
-              </a:lnSpc>
-              <a:spcAft>
-                <a:spcPts val="600"/>
-              </a:spcAft>
-            </a:pPr>
-            <a:r>
-              <a:rPr sz="1600" b="0">
-                <a:solidFill>
-                  <a:srgbClr val="1C1C1A"/>
-                </a:solidFill>
-                <a:latin typeface="Calibri"/>
-              </a:rPr>
-              <a:t/>
-            </a:r>
-          </a:p>
-          <a:p>
-            <a:pPr algn="l">
-              <a:lnSpc>
-                <a:spcPct val="135000"/>
-              </a:lnSpc>
-              <a:spcAft>
-                <a:spcPts val="600"/>
-              </a:spcAft>
-            </a:pPr>
-            <a:r>
-              <a:rPr sz="1600" b="0">
-                <a:solidFill>
-                  <a:srgbClr val="1C1C1A"/>
-                </a:solidFill>
-                <a:latin typeface="Calibri"/>
-              </a:rPr>
-              <a:t>Subir en la cadena de valor significa mover gente hacia empleos MÁS expuestos, no menos.</a:t>
-            </a:r>
-          </a:p>
-        </p:txBody>
-      </p:sp>
-      <p:sp>
-        <p:nvSpPr>
-          <p:cNvPr id="6" name="TextBox 5"/>
-          <p:cNvSpPr txBox="1"/>
-          <p:nvPr/>
-        </p:nvSpPr>
-        <p:spPr>
-          <a:xfrm>
-            <a:off x="6675120" y="5212080"/>
-            <a:ext cx="4846320" cy="822960"/>
-          </a:xfrm>
-          <a:prstGeom prst="rect">
-            <a:avLst/>
-          </a:prstGeom>
-          <a:noFill/>
-        </p:spPr>
-        <p:txBody>
-          <a:bodyPr wrap="square" lIns="0" rIns="0" tIns="0" bIns="0">
-            <a:spAutoFit/>
-          </a:bodyPr>
-          <a:lstStyle/>
-          <a:p>
-            <a:pPr algn="l">
-              <a:lnSpc>
-                <a:spcPct val="125000"/>
-              </a:lnSpc>
-              <a:spcAft>
-                <a:spcPts val="600"/>
-              </a:spcAft>
-            </a:pPr>
-            <a:r>
-              <a:rPr sz="1600" b="1">
-                <a:solidFill>
-                  <a:srgbClr val="1BAF7A"/>
-                </a:solidFill>
-                <a:latin typeface="Calibri"/>
-              </a:rPr>
-              <a:t>La agenda de formación y la de IA no son dos agendas: son la misma.</a:t>
+                <a:spcPct val="115000"/>
+              </a:lnSpc>
+              <a:spcAft>
+                <a:spcPts val="600"/>
+              </a:spcAft>
+            </a:pPr>
+            <a:r>
+              <a:rPr sz="1050" b="0">
+                <a:solidFill>
+                  <a:srgbClr val="6B6A64"/>
+                </a:solidFill>
+                <a:latin typeface="Calibri"/>
+              </a:rPr>
+              <a:t>CAPARD son aquí cuatro países: Costa Rica, El Salvador, Honduras y República Dominicana. Guatemala no aparece porque su encuesta registra la ocupación con menos detalle; Nicaragua y Panamá no están disponibles.</a:t>
             </a:r>
           </a:p>
         </p:txBody>
@@ -8756,7 +9872,7 @@
                 </a:solidFill>
                 <a:latin typeface="Calibri"/>
               </a:rPr>
-              <a:t>HALLAZGO 2</a:t>
+              <a:t>HALLAZGO 1 · QUÉ SIGNIFICA</a:t>
             </a:r>
           </a:p>
         </p:txBody>
@@ -8798,45 +9914,21 @@
                 </a:solidFill>
                 <a:latin typeface="Calibri"/>
               </a:rPr>
-              <a:t>En la cadena regional, cada país ocupa un lugar distinto</a:t>
-            </a:r>
-          </a:p>
-        </p:txBody>
-      </p:sp>
-      <p:pic>
-        <p:nvPicPr>
-          <p:cNvPr id="4" name="Picture 3" descr="W5_cadena_regional_capas.png"/>
-          <p:cNvPicPr>
-            <a:picLocks noChangeAspect="1"/>
-          </p:cNvPicPr>
-          <p:nvPr/>
-        </p:nvPicPr>
-        <p:blipFill>
-          <a:blip r:embed="rId2"/>
-          <a:stretch>
-            <a:fillRect/>
-          </a:stretch>
-        </p:blipFill>
-        <p:spPr>
-          <a:xfrm>
-            <a:off x="970667" y="1737360"/>
-            <a:ext cx="10250361" cy="3931920"/>
-          </a:xfrm>
-          <a:prstGeom prst="rect">
-            <a:avLst/>
-          </a:prstGeom>
-        </p:spPr>
-      </p:pic>
-      <p:sp>
-        <p:nvSpPr>
-          <p:cNvPr id="5" name="TextBox 4"/>
+              <a:t>El empleo de planta casi no cambia; el de oficina y oficina técnica, sí</a:t>
+            </a:r>
+          </a:p>
+        </p:txBody>
+      </p:sp>
+      <p:sp>
+        <p:nvSpPr>
+          <p:cNvPr id="4" name="TextBox 3"/>
           <p:cNvSpPr txBox="1"/>
           <p:nvPr/>
         </p:nvSpPr>
         <p:spPr>
           <a:xfrm>
-            <a:off x="658368" y="6199632"/>
-            <a:ext cx="10874959" cy="457200"/>
+            <a:off x="658368" y="1828800"/>
+            <a:ext cx="5577840" cy="3108960"/>
           </a:xfrm>
           <a:prstGeom prst="rect">
             <a:avLst/>
@@ -8851,20 +9943,256 @@
           <a:p>
             <a:pPr algn="l">
               <a:lnSpc>
-                <a:spcPct val="115000"/>
-              </a:lnSpc>
-              <a:spcAft>
-                <a:spcPts val="600"/>
-              </a:spcAft>
-            </a:pPr>
-            <a:r>
-              <a:rPr sz="1050" b="0">
-                <a:solidFill>
-                  <a:srgbClr val="6B6A64"/>
-                </a:solidFill>
-                <a:latin typeface="Calibri"/>
-              </a:rPr>
-              <a:t>Solo se muestran las combinaciones país-sector con más de 5.000 personas ocupadas: por eso El Salvador y Guatemala no aparecen, y Honduras solo en cables.</a:t>
+                <a:spcPct val="130000"/>
+              </a:lnSpc>
+              <a:spcAft>
+                <a:spcPts val="600"/>
+              </a:spcAft>
+            </a:pPr>
+            <a:r>
+              <a:rPr sz="1550" b="0">
+                <a:solidFill>
+                  <a:srgbClr val="1C1C1A"/>
+                </a:solidFill>
+                <a:latin typeface="Calibri"/>
+              </a:rPr>
+              <a:t>Más de la mitad del empleo de estos sectores son ensambladores, operarios y empacadores. Su exposición es muy baja: alrededor de 0,10.</a:t>
+            </a:r>
+          </a:p>
+          <a:p>
+            <a:pPr algn="l">
+              <a:lnSpc>
+                <a:spcPct val="130000"/>
+              </a:lnSpc>
+              <a:spcAft>
+                <a:spcPts val="600"/>
+              </a:spcAft>
+            </a:pPr>
+            <a:r>
+              <a:rPr sz="1550" b="0">
+                <a:solidFill>
+                  <a:srgbClr val="1C1C1A"/>
+                </a:solidFill>
+                <a:latin typeface="Calibri"/>
+              </a:rPr>
+              <a:t/>
+            </a:r>
+          </a:p>
+          <a:p>
+            <a:pPr algn="l">
+              <a:lnSpc>
+                <a:spcPct val="130000"/>
+              </a:lnSpc>
+              <a:spcAft>
+                <a:spcPts val="600"/>
+              </a:spcAft>
+            </a:pPr>
+            <a:r>
+              <a:rPr sz="1550" b="0">
+                <a:solidFill>
+                  <a:srgbClr val="1C1C1A"/>
+                </a:solidFill>
+                <a:latin typeface="Calibri"/>
+              </a:rPr>
+              <a:t>La razón no es que estén protegidos, sino que su trabajo es físico y estas herramientas no lo alcanzan.</a:t>
+            </a:r>
+          </a:p>
+          <a:p>
+            <a:pPr algn="l">
+              <a:lnSpc>
+                <a:spcPct val="130000"/>
+              </a:lnSpc>
+              <a:spcAft>
+                <a:spcPts val="600"/>
+              </a:spcAft>
+            </a:pPr>
+            <a:r>
+              <a:rPr sz="1550" b="0">
+                <a:solidFill>
+                  <a:srgbClr val="1C1C1A"/>
+                </a:solidFill>
+                <a:latin typeface="Calibri"/>
+              </a:rPr>
+              <a:t/>
+            </a:r>
+          </a:p>
+          <a:p>
+            <a:pPr algn="l">
+              <a:lnSpc>
+                <a:spcPct val="130000"/>
+              </a:lnSpc>
+              <a:spcAft>
+                <a:spcPts val="600"/>
+              </a:spcAft>
+            </a:pPr>
+            <a:r>
+              <a:rPr sz="1550" b="0">
+                <a:solidFill>
+                  <a:srgbClr val="1C1C1A"/>
+                </a:solidFill>
+                <a:latin typeface="Calibri"/>
+              </a:rPr>
+              <a:t>La exposición sube conforme sube la calificación: técnicos 0,41, personal administrativo 0,48, profesionales e ingenieros 0,56.</a:t>
+            </a:r>
+          </a:p>
+        </p:txBody>
+      </p:sp>
+      <p:sp>
+        <p:nvSpPr>
+          <p:cNvPr id="5" name="TextBox 4"/>
+          <p:cNvSpPr txBox="1"/>
+          <p:nvPr/>
+        </p:nvSpPr>
+        <p:spPr>
+          <a:xfrm>
+            <a:off x="6675120" y="1828800"/>
+            <a:ext cx="4846320" cy="3108960"/>
+          </a:xfrm>
+          <a:prstGeom prst="rect">
+            <a:avLst/>
+          </a:prstGeom>
+          <a:noFill/>
+        </p:spPr>
+        <p:txBody>
+          <a:bodyPr wrap="square" lIns="0" rIns="0" tIns="0" bIns="0">
+            <a:spAutoFit/>
+          </a:bodyPr>
+          <a:lstStyle/>
+          <a:p>
+            <a:pPr algn="l">
+              <a:lnSpc>
+                <a:spcPct val="135000"/>
+              </a:lnSpc>
+              <a:spcAft>
+                <a:spcPts val="600"/>
+              </a:spcAft>
+            </a:pPr>
+            <a:r>
+              <a:rPr sz="1600" b="0">
+                <a:solidFill>
+                  <a:srgbClr val="1C1C1A"/>
+                </a:solidFill>
+                <a:latin typeface="Calibri"/>
+              </a:rPr>
+              <a:t>Y aquí está lo incómodo:</a:t>
+            </a:r>
+          </a:p>
+          <a:p>
+            <a:pPr algn="l">
+              <a:lnSpc>
+                <a:spcPct val="135000"/>
+              </a:lnSpc>
+              <a:spcAft>
+                <a:spcPts val="600"/>
+              </a:spcAft>
+            </a:pPr>
+            <a:r>
+              <a:rPr sz="1600" b="0">
+                <a:solidFill>
+                  <a:srgbClr val="1C1C1A"/>
+                </a:solidFill>
+                <a:latin typeface="Calibri"/>
+              </a:rPr>
+              <a:t/>
+            </a:r>
+          </a:p>
+          <a:p>
+            <a:pPr algn="l">
+              <a:lnSpc>
+                <a:spcPct val="135000"/>
+              </a:lnSpc>
+              <a:spcAft>
+                <a:spcPts val="600"/>
+              </a:spcAft>
+            </a:pPr>
+            <a:r>
+              <a:rPr sz="1600" b="0">
+                <a:solidFill>
+                  <a:srgbClr val="1C1C1A"/>
+                </a:solidFill>
+                <a:latin typeface="Calibri"/>
+              </a:rPr>
+              <a:t>La capa que más alcanza la IA es justamente la que hace falta para que estos sectores pasen a productos de mayor valor.</a:t>
+            </a:r>
+          </a:p>
+          <a:p>
+            <a:pPr algn="l">
+              <a:lnSpc>
+                <a:spcPct val="135000"/>
+              </a:lnSpc>
+              <a:spcAft>
+                <a:spcPts val="600"/>
+              </a:spcAft>
+            </a:pPr>
+            <a:r>
+              <a:rPr sz="1600" b="0">
+                <a:solidFill>
+                  <a:srgbClr val="1C1C1A"/>
+                </a:solidFill>
+                <a:latin typeface="Calibri"/>
+              </a:rPr>
+              <a:t/>
+            </a:r>
+          </a:p>
+          <a:p>
+            <a:pPr algn="l">
+              <a:lnSpc>
+                <a:spcPct val="135000"/>
+              </a:lnSpc>
+              <a:spcAft>
+                <a:spcPts val="600"/>
+              </a:spcAft>
+            </a:pPr>
+            <a:r>
+              <a:rPr sz="1600" b="0">
+                <a:solidFill>
+                  <a:srgbClr val="1C1C1A"/>
+                </a:solidFill>
+                <a:latin typeface="Calibri"/>
+              </a:rPr>
+              <a:t>Subir en la cadena de valor significa mover gente hacia empleos MÁS expuestos, no menos.</a:t>
+            </a:r>
+          </a:p>
+        </p:txBody>
+      </p:sp>
+      <p:sp>
+        <p:nvSpPr>
+          <p:cNvPr id="6" name="TextBox 5"/>
+          <p:cNvSpPr txBox="1"/>
+          <p:nvPr/>
+        </p:nvSpPr>
+        <p:spPr>
+          <a:xfrm>
+            <a:off x="6675120" y="5212080"/>
+            <a:ext cx="4846320" cy="822960"/>
+          </a:xfrm>
+          <a:prstGeom prst="rect">
+            <a:avLst/>
+          </a:prstGeom>
+          <a:noFill/>
+        </p:spPr>
+        <p:txBody>
+          <a:bodyPr wrap="square" lIns="0" rIns="0" tIns="0" bIns="0">
+            <a:spAutoFit/>
+          </a:bodyPr>
+          <a:lstStyle/>
+          <a:p>
+            <a:pPr algn="l">
+              <a:lnSpc>
+                <a:spcPct val="125000"/>
+              </a:lnSpc>
+              <a:spcAft>
+                <a:spcPts val="600"/>
+              </a:spcAft>
+            </a:pPr>
+            <a:r>
+              <a:rPr sz="1600" b="1">
+                <a:solidFill>
+                  <a:srgbClr val="1BAF7A"/>
+                </a:solidFill>
+                <a:latin typeface="Calibri"/>
+              </a:rPr>
+              <a:t>La agenda de formación y la de IA no son dos agendas: son la misma.</a:t>
             </a:r>
           </a:p>
         </p:txBody>

--- a/Presentacion_CID_IA_Sectores.pptx
+++ b/Presentacion_CID_IA_Sectores.pptx
@@ -3340,7 +3340,7 @@
                 </a:solidFill>
                 <a:latin typeface="Calibri"/>
               </a:rPr>
-              <a:t>6 encuestas de empleo  ·  2,5 millones de anuncios de trabajo  ·  2021–2026</a:t>
+              <a:t>6 encuestas de empleo  ·  2,5 millones de anuncios de trabajo  ·  2015–2026</a:t>
             </a:r>
           </a:p>
         </p:txBody>
@@ -4973,8 +4973,8 @@
         </p:blipFill>
         <p:spPr>
           <a:xfrm>
-            <a:off x="1743789" y="1737360"/>
-            <a:ext cx="8704117" cy="3931920"/>
+            <a:off x="1737365" y="1737360"/>
+            <a:ext cx="8716965" cy="3931920"/>
           </a:xfrm>
           <a:prstGeom prst="rect">
             <a:avLst/>
@@ -5018,7 +5018,7 @@
                 </a:solidFill>
                 <a:latin typeface="Calibri"/>
               </a:rPr>
-              <a:t>Izquierda: los dos países cuya encuesta permite seguir el sector año a año. Derecha: los cinco países con anuncios, sobre el total de su economía, porque la base no permite separar los sectores.</a:t>
+              <a:t>Izquierda: los dos países cuya encuesta permite seguir el sector año a año; Costa Rica desde 2016, porque su encuesta previa a la pandemia sí está en el kit. En 2020 no hubo encuesta. Derecha: los cinco países con anuncios, sobre el total de su economía, porque la base no permite separar los sectores.</a:t>
             </a:r>
           </a:p>
         </p:txBody>
@@ -5377,15 +5377,57 @@
           </a:p>
         </p:txBody>
       </p:sp>
+      <p:sp>
+        <p:nvSpPr>
+          <p:cNvPr id="10" name="TextBox 9"/>
+          <p:cNvSpPr txBox="1"/>
+          <p:nvPr/>
+        </p:nvSpPr>
+        <p:spPr>
+          <a:xfrm>
+            <a:off x="658368" y="3749039"/>
+            <a:ext cx="10881360" cy="457200"/>
+          </a:xfrm>
+          <a:prstGeom prst="rect">
+            <a:avLst/>
+          </a:prstGeom>
+          <a:noFill/>
+        </p:spPr>
+        <p:txBody>
+          <a:bodyPr wrap="square" lIns="0" rIns="0" tIns="0" bIns="0">
+            <a:spAutoFit/>
+          </a:bodyPr>
+          <a:lstStyle/>
+          <a:p>
+            <a:pPr algn="l">
+              <a:lnSpc>
+                <a:spcPct val="125000"/>
+              </a:lnSpc>
+              <a:spcAft>
+                <a:spcPts val="600"/>
+              </a:spcAft>
+            </a:pPr>
+            <a:r>
+              <a:rPr sz="1400" b="0">
+                <a:solidFill>
+                  <a:srgbClr val="6B6A64"/>
+                </a:solidFill>
+                <a:latin typeface="Calibri"/>
+              </a:rPr>
+              <a:t>Costa Rica permite mirar una década entera: entre 2016 y 2024 el empleo del sector se duplicó, y la proporción de técnicos y profesionales pasó de 31% antes de la pandemia a 27% después. No subió en ningún tramo.</a:t>
+            </a:r>
+          </a:p>
+        </p:txBody>
+      </p:sp>
       <p:cxnSp>
         <p:nvCxnSpPr>
-          <p:cNvPr id="10" name="Connector 9"/>
+          <p:cNvPr id="11" name="Connector 10"/>
           <p:cNvCxnSpPr/>
           <p:nvPr/>
         </p:nvCxnSpPr>
         <p:spPr>
           <a:xfrm>
-            <a:off x="658368" y="4343400"/>
+            <a:off x="658368" y="4590288"/>
             <a:ext cx="10874959" cy="0"/>
           </a:xfrm>
           <a:prstGeom prst="line">
@@ -5414,13 +5456,13 @@
       </p:cxnSp>
       <p:sp>
         <p:nvSpPr>
-          <p:cNvPr id="11" name="TextBox 10"/>
+          <p:cNvPr id="12" name="TextBox 11"/>
           <p:cNvSpPr txBox="1"/>
           <p:nvPr/>
         </p:nvSpPr>
         <p:spPr>
           <a:xfrm>
-            <a:off x="658368" y="4617720"/>
+            <a:off x="658368" y="4846320"/>
             <a:ext cx="10881360" cy="1463040"/>
           </a:xfrm>
           <a:prstGeom prst="rect">
@@ -5456,13 +5498,13 @@
       </p:sp>
       <p:sp>
         <p:nvSpPr>
-          <p:cNvPr id="12" name="TextBox 11"/>
+          <p:cNvPr id="13" name="TextBox 12"/>
           <p:cNvSpPr txBox="1"/>
           <p:nvPr/>
         </p:nvSpPr>
         <p:spPr>
           <a:xfrm>
-            <a:off x="658368" y="5897880"/>
+            <a:off x="658368" y="6053328"/>
             <a:ext cx="10881360" cy="548640"/>
           </a:xfrm>
           <a:prstGeom prst="rect">
@@ -8078,7 +8120,7 @@
                         </a:defRPr>
                       </a:pPr>
                       <a:r>
-                        <a:t>2021–2025</a:t>
+                        <a:t>2016–2025</a:t>
                       </a:r>
                     </a:p>
                   </a:txBody>

--- a/Presentacion_CID_IA_Sectores.pptx
+++ b/Presentacion_CID_IA_Sectores.pptx
@@ -8841,14 +8841,14 @@
           <a:p>
             <a:pPr algn="l">
               <a:lnSpc>
-                <a:spcPct val="130000"/>
-              </a:lnSpc>
-              <a:spcAft>
-                <a:spcPts val="600"/>
-              </a:spcAft>
-            </a:pPr>
-            <a:r>
-              <a:rPr sz="1300" b="0">
+                <a:spcPct val="125000"/>
+              </a:lnSpc>
+              <a:spcAft>
+                <a:spcPts val="600"/>
+              </a:spcAft>
+            </a:pPr>
+            <a:r>
+              <a:rPr sz="1250" b="0">
                 <a:solidFill>
                   <a:srgbClr val="1C1C1A"/>
                 </a:solidFill>
@@ -8860,14 +8860,14 @@
           <a:p>
             <a:pPr algn="l">
               <a:lnSpc>
-                <a:spcPct val="130000"/>
-              </a:lnSpc>
-              <a:spcAft>
-                <a:spcPts val="600"/>
-              </a:spcAft>
-            </a:pPr>
-            <a:r>
-              <a:rPr sz="1300" b="0">
+                <a:spcPct val="125000"/>
+              </a:lnSpc>
+              <a:spcAft>
+                <a:spcPts val="600"/>
+              </a:spcAft>
+            </a:pPr>
+            <a:r>
+              <a:rPr sz="1250" b="0">
                 <a:solidFill>
                   <a:srgbClr val="1C1C1A"/>
                 </a:solidFill>
@@ -8879,14 +8879,14 @@
           <a:p>
             <a:pPr algn="l">
               <a:lnSpc>
-                <a:spcPct val="130000"/>
-              </a:lnSpc>
-              <a:spcAft>
-                <a:spcPts val="600"/>
-              </a:spcAft>
-            </a:pPr>
-            <a:r>
-              <a:rPr sz="1300" b="0">
+                <a:spcPct val="125000"/>
+              </a:lnSpc>
+              <a:spcAft>
+                <a:spcPts val="600"/>
+              </a:spcAft>
+            </a:pPr>
+            <a:r>
+              <a:rPr sz="1250" b="0">
                 <a:solidFill>
                   <a:srgbClr val="1C1C1A"/>
                 </a:solidFill>
@@ -8898,14 +8898,14 @@
           <a:p>
             <a:pPr algn="l">
               <a:lnSpc>
-                <a:spcPct val="130000"/>
-              </a:lnSpc>
-              <a:spcAft>
-                <a:spcPts val="600"/>
-              </a:spcAft>
-            </a:pPr>
-            <a:r>
-              <a:rPr sz="1300" b="0">
+                <a:spcPct val="125000"/>
+              </a:lnSpc>
+              <a:spcAft>
+                <a:spcPts val="600"/>
+              </a:spcAft>
+            </a:pPr>
+            <a:r>
+              <a:rPr sz="1250" b="0">
                 <a:solidFill>
                   <a:srgbClr val="1C1C1A"/>
                 </a:solidFill>
@@ -8917,14 +8917,14 @@
           <a:p>
             <a:pPr algn="l">
               <a:lnSpc>
-                <a:spcPct val="130000"/>
-              </a:lnSpc>
-              <a:spcAft>
-                <a:spcPts val="600"/>
-              </a:spcAft>
-            </a:pPr>
-            <a:r>
-              <a:rPr sz="1300" b="0">
+                <a:spcPct val="125000"/>
+              </a:lnSpc>
+              <a:spcAft>
+                <a:spcPts val="600"/>
+              </a:spcAft>
+            </a:pPr>
+            <a:r>
+              <a:rPr sz="1250" b="0">
                 <a:solidFill>
                   <a:srgbClr val="1C1C1A"/>
                 </a:solidFill>
@@ -8936,14 +8936,14 @@
           <a:p>
             <a:pPr algn="l">
               <a:lnSpc>
-                <a:spcPct val="130000"/>
-              </a:lnSpc>
-              <a:spcAft>
-                <a:spcPts val="600"/>
-              </a:spcAft>
-            </a:pPr>
-            <a:r>
-              <a:rPr sz="1300" b="0">
+                <a:spcPct val="125000"/>
+              </a:lnSpc>
+              <a:spcAft>
+                <a:spcPts val="600"/>
+              </a:spcAft>
+            </a:pPr>
+            <a:r>
+              <a:rPr sz="1250" b="0">
                 <a:solidFill>
                   <a:srgbClr val="1C1C1A"/>
                 </a:solidFill>
@@ -8955,20 +8955,58 @@
           <a:p>
             <a:pPr algn="l">
               <a:lnSpc>
-                <a:spcPct val="130000"/>
-              </a:lnSpc>
-              <a:spcAft>
-                <a:spcPts val="600"/>
-              </a:spcAft>
-            </a:pPr>
-            <a:r>
-              <a:rPr sz="1300" b="0">
+                <a:spcPct val="125000"/>
+              </a:lnSpc>
+              <a:spcAft>
+                <a:spcPts val="600"/>
+              </a:spcAft>
+            </a:pPr>
+            <a:r>
+              <a:rPr sz="1250" b="0">
                 <a:solidFill>
                   <a:srgbClr val="1C1C1A"/>
                 </a:solidFill>
                 <a:latin typeface="Calibri"/>
               </a:rPr>
               <a:t>República Dominicana tiene dos cortes, no una serie.</a:t>
+            </a:r>
+          </a:p>
+          <a:p>
+            <a:pPr algn="l">
+              <a:lnSpc>
+                <a:spcPct val="125000"/>
+              </a:lnSpc>
+              <a:spcAft>
+                <a:spcPts val="600"/>
+              </a:spcAft>
+            </a:pPr>
+            <a:r>
+              <a:rPr sz="1250" b="0">
+                <a:solidFill>
+                  <a:srgbClr val="1C1C1A"/>
+                </a:solidFill>
+                <a:latin typeface="Calibri"/>
+              </a:rPr>
+              <a:t/>
+            </a:r>
+          </a:p>
+          <a:p>
+            <a:pPr algn="l">
+              <a:lnSpc>
+                <a:spcPct val="125000"/>
+              </a:lnSpc>
+              <a:spcAft>
+                <a:spcPts val="600"/>
+              </a:spcAft>
+            </a:pPr>
+            <a:r>
+              <a:rPr sz="1250" b="0">
+                <a:solidFill>
+                  <a:srgbClr val="1C1C1A"/>
+                </a:solidFill>
+                <a:latin typeface="Calibri"/>
+              </a:rPr>
+              <a:t>Guatemala publica sus datos sin el detalle de oficio ni de rama, así que no entra en los cortes finos. No se arregla con otra encuesta.</a:t>
             </a:r>
           </a:p>
         </p:txBody>

--- a/Presentacion_CID_IA_Sectores.pptx
+++ b/Presentacion_CID_IA_Sectores.pptx
@@ -24,6 +24,7 @@
     <p:sldId id="272" r:id="rId23"/>
     <p:sldId id="273" r:id="rId24"/>
     <p:sldId id="274" r:id="rId25"/>
+    <p:sldId id="275" r:id="rId26"/>
   </p:sldIdLst>
   <p:sldSz cx="12191695" cy="6858000" type="screen4x3"/>
   <p:notesSz cx="6858000" cy="9144000"/>
@@ -3400,7 +3401,7 @@
                 </a:solidFill>
                 <a:latin typeface="Calibri"/>
               </a:rPr>
-              <a:t>HALLAZGO 2</a:t>
+              <a:t>HALLAZGO 1 · QUÉ SIGNIFICA</a:t>
             </a:r>
           </a:p>
         </p:txBody>
@@ -3442,45 +3443,21 @@
                 </a:solidFill>
                 <a:latin typeface="Calibri"/>
               </a:rPr>
-              <a:t>En la cadena regional, cada país ocupa un lugar distinto</a:t>
-            </a:r>
-          </a:p>
-        </p:txBody>
-      </p:sp>
-      <p:pic>
-        <p:nvPicPr>
-          <p:cNvPr id="4" name="Picture 3" descr="W5_cadena_regional_capas.png"/>
-          <p:cNvPicPr>
-            <a:picLocks noChangeAspect="1"/>
-          </p:cNvPicPr>
-          <p:nvPr/>
-        </p:nvPicPr>
-        <p:blipFill>
-          <a:blip r:embed="rId2"/>
-          <a:stretch>
-            <a:fillRect/>
-          </a:stretch>
-        </p:blipFill>
-        <p:spPr>
-          <a:xfrm>
-            <a:off x="970667" y="1737360"/>
-            <a:ext cx="10250361" cy="3931920"/>
-          </a:xfrm>
-          <a:prstGeom prst="rect">
-            <a:avLst/>
-          </a:prstGeom>
-        </p:spPr>
-      </p:pic>
-      <p:sp>
-        <p:nvSpPr>
-          <p:cNvPr id="5" name="TextBox 4"/>
+              <a:t>El empleo de planta casi no cambia; el de oficina y oficina técnica, sí</a:t>
+            </a:r>
+          </a:p>
+        </p:txBody>
+      </p:sp>
+      <p:sp>
+        <p:nvSpPr>
+          <p:cNvPr id="4" name="TextBox 3"/>
           <p:cNvSpPr txBox="1"/>
           <p:nvPr/>
         </p:nvSpPr>
         <p:spPr>
           <a:xfrm>
-            <a:off x="658368" y="6199632"/>
-            <a:ext cx="10874959" cy="457200"/>
+            <a:off x="658368" y="1828800"/>
+            <a:ext cx="5577840" cy="3108960"/>
           </a:xfrm>
           <a:prstGeom prst="rect">
             <a:avLst/>
@@ -3495,20 +3472,256 @@
           <a:p>
             <a:pPr algn="l">
               <a:lnSpc>
-                <a:spcPct val="115000"/>
-              </a:lnSpc>
-              <a:spcAft>
-                <a:spcPts val="600"/>
-              </a:spcAft>
-            </a:pPr>
-            <a:r>
-              <a:rPr sz="1050" b="0">
-                <a:solidFill>
-                  <a:srgbClr val="6B6A64"/>
-                </a:solidFill>
-                <a:latin typeface="Calibri"/>
-              </a:rPr>
-              <a:t>Solo se muestran las combinaciones país-sector con más de 5.000 personas ocupadas: por eso El Salvador y Guatemala no aparecen, y Honduras solo en cables.</a:t>
+                <a:spcPct val="130000"/>
+              </a:lnSpc>
+              <a:spcAft>
+                <a:spcPts val="600"/>
+              </a:spcAft>
+            </a:pPr>
+            <a:r>
+              <a:rPr sz="1550" b="0">
+                <a:solidFill>
+                  <a:srgbClr val="1C1C1A"/>
+                </a:solidFill>
+                <a:latin typeface="Calibri"/>
+              </a:rPr>
+              <a:t>Más de la mitad del empleo de estos sectores son ensambladores, operarios y empacadores. Su exposición es muy baja: alrededor de 0,10.</a:t>
+            </a:r>
+          </a:p>
+          <a:p>
+            <a:pPr algn="l">
+              <a:lnSpc>
+                <a:spcPct val="130000"/>
+              </a:lnSpc>
+              <a:spcAft>
+                <a:spcPts val="600"/>
+              </a:spcAft>
+            </a:pPr>
+            <a:r>
+              <a:rPr sz="1550" b="0">
+                <a:solidFill>
+                  <a:srgbClr val="1C1C1A"/>
+                </a:solidFill>
+                <a:latin typeface="Calibri"/>
+              </a:rPr>
+              <a:t/>
+            </a:r>
+          </a:p>
+          <a:p>
+            <a:pPr algn="l">
+              <a:lnSpc>
+                <a:spcPct val="130000"/>
+              </a:lnSpc>
+              <a:spcAft>
+                <a:spcPts val="600"/>
+              </a:spcAft>
+            </a:pPr>
+            <a:r>
+              <a:rPr sz="1550" b="0">
+                <a:solidFill>
+                  <a:srgbClr val="1C1C1A"/>
+                </a:solidFill>
+                <a:latin typeface="Calibri"/>
+              </a:rPr>
+              <a:t>La razón no es que estén protegidos, sino que su trabajo es físico y estas herramientas no lo alcanzan.</a:t>
+            </a:r>
+          </a:p>
+          <a:p>
+            <a:pPr algn="l">
+              <a:lnSpc>
+                <a:spcPct val="130000"/>
+              </a:lnSpc>
+              <a:spcAft>
+                <a:spcPts val="600"/>
+              </a:spcAft>
+            </a:pPr>
+            <a:r>
+              <a:rPr sz="1550" b="0">
+                <a:solidFill>
+                  <a:srgbClr val="1C1C1A"/>
+                </a:solidFill>
+                <a:latin typeface="Calibri"/>
+              </a:rPr>
+              <a:t/>
+            </a:r>
+          </a:p>
+          <a:p>
+            <a:pPr algn="l">
+              <a:lnSpc>
+                <a:spcPct val="130000"/>
+              </a:lnSpc>
+              <a:spcAft>
+                <a:spcPts val="600"/>
+              </a:spcAft>
+            </a:pPr>
+            <a:r>
+              <a:rPr sz="1550" b="0">
+                <a:solidFill>
+                  <a:srgbClr val="1C1C1A"/>
+                </a:solidFill>
+                <a:latin typeface="Calibri"/>
+              </a:rPr>
+              <a:t>La exposición sube conforme sube la calificación: técnicos 0,41, personal administrativo 0,48, profesionales e ingenieros 0,56.</a:t>
+            </a:r>
+          </a:p>
+        </p:txBody>
+      </p:sp>
+      <p:sp>
+        <p:nvSpPr>
+          <p:cNvPr id="5" name="TextBox 4"/>
+          <p:cNvSpPr txBox="1"/>
+          <p:nvPr/>
+        </p:nvSpPr>
+        <p:spPr>
+          <a:xfrm>
+            <a:off x="6675120" y="1828800"/>
+            <a:ext cx="4846320" cy="3108960"/>
+          </a:xfrm>
+          <a:prstGeom prst="rect">
+            <a:avLst/>
+          </a:prstGeom>
+          <a:noFill/>
+        </p:spPr>
+        <p:txBody>
+          <a:bodyPr wrap="square" lIns="0" rIns="0" tIns="0" bIns="0">
+            <a:spAutoFit/>
+          </a:bodyPr>
+          <a:lstStyle/>
+          <a:p>
+            <a:pPr algn="l">
+              <a:lnSpc>
+                <a:spcPct val="135000"/>
+              </a:lnSpc>
+              <a:spcAft>
+                <a:spcPts val="600"/>
+              </a:spcAft>
+            </a:pPr>
+            <a:r>
+              <a:rPr sz="1600" b="0">
+                <a:solidFill>
+                  <a:srgbClr val="1C1C1A"/>
+                </a:solidFill>
+                <a:latin typeface="Calibri"/>
+              </a:rPr>
+              <a:t>Y aquí está lo incómodo:</a:t>
+            </a:r>
+          </a:p>
+          <a:p>
+            <a:pPr algn="l">
+              <a:lnSpc>
+                <a:spcPct val="135000"/>
+              </a:lnSpc>
+              <a:spcAft>
+                <a:spcPts val="600"/>
+              </a:spcAft>
+            </a:pPr>
+            <a:r>
+              <a:rPr sz="1600" b="0">
+                <a:solidFill>
+                  <a:srgbClr val="1C1C1A"/>
+                </a:solidFill>
+                <a:latin typeface="Calibri"/>
+              </a:rPr>
+              <a:t/>
+            </a:r>
+          </a:p>
+          <a:p>
+            <a:pPr algn="l">
+              <a:lnSpc>
+                <a:spcPct val="135000"/>
+              </a:lnSpc>
+              <a:spcAft>
+                <a:spcPts val="600"/>
+              </a:spcAft>
+            </a:pPr>
+            <a:r>
+              <a:rPr sz="1600" b="0">
+                <a:solidFill>
+                  <a:srgbClr val="1C1C1A"/>
+                </a:solidFill>
+                <a:latin typeface="Calibri"/>
+              </a:rPr>
+              <a:t>La capa que más alcanza la IA es justamente la que hace falta para que estos sectores pasen a productos de mayor valor.</a:t>
+            </a:r>
+          </a:p>
+          <a:p>
+            <a:pPr algn="l">
+              <a:lnSpc>
+                <a:spcPct val="135000"/>
+              </a:lnSpc>
+              <a:spcAft>
+                <a:spcPts val="600"/>
+              </a:spcAft>
+            </a:pPr>
+            <a:r>
+              <a:rPr sz="1600" b="0">
+                <a:solidFill>
+                  <a:srgbClr val="1C1C1A"/>
+                </a:solidFill>
+                <a:latin typeface="Calibri"/>
+              </a:rPr>
+              <a:t/>
+            </a:r>
+          </a:p>
+          <a:p>
+            <a:pPr algn="l">
+              <a:lnSpc>
+                <a:spcPct val="135000"/>
+              </a:lnSpc>
+              <a:spcAft>
+                <a:spcPts val="600"/>
+              </a:spcAft>
+            </a:pPr>
+            <a:r>
+              <a:rPr sz="1600" b="0">
+                <a:solidFill>
+                  <a:srgbClr val="1C1C1A"/>
+                </a:solidFill>
+                <a:latin typeface="Calibri"/>
+              </a:rPr>
+              <a:t>Subir en la cadena de valor significa mover gente hacia empleos MÁS expuestos, no menos.</a:t>
+            </a:r>
+          </a:p>
+        </p:txBody>
+      </p:sp>
+      <p:sp>
+        <p:nvSpPr>
+          <p:cNvPr id="6" name="TextBox 5"/>
+          <p:cNvSpPr txBox="1"/>
+          <p:nvPr/>
+        </p:nvSpPr>
+        <p:spPr>
+          <a:xfrm>
+            <a:off x="6675120" y="5212080"/>
+            <a:ext cx="4846320" cy="822960"/>
+          </a:xfrm>
+          <a:prstGeom prst="rect">
+            <a:avLst/>
+          </a:prstGeom>
+          <a:noFill/>
+        </p:spPr>
+        <p:txBody>
+          <a:bodyPr wrap="square" lIns="0" rIns="0" tIns="0" bIns="0">
+            <a:spAutoFit/>
+          </a:bodyPr>
+          <a:lstStyle/>
+          <a:p>
+            <a:pPr algn="l">
+              <a:lnSpc>
+                <a:spcPct val="125000"/>
+              </a:lnSpc>
+              <a:spcAft>
+                <a:spcPts val="600"/>
+              </a:spcAft>
+            </a:pPr>
+            <a:r>
+              <a:rPr sz="1600" b="1">
+                <a:solidFill>
+                  <a:srgbClr val="1BAF7A"/>
+                </a:solidFill>
+                <a:latin typeface="Calibri"/>
+              </a:rPr>
+              <a:t>La agenda de formación y la de IA no son dos agendas: son la misma.</a:t>
             </a:r>
           </a:p>
         </p:txBody>
@@ -3568,7 +3781,7 @@
                 </a:solidFill>
                 <a:latin typeface="Calibri"/>
               </a:rPr>
-              <a:t>HALLAZGO 3</a:t>
+              <a:t>HALLAZGO 2</a:t>
             </a:r>
           </a:p>
         </p:txBody>
@@ -3610,14 +3823,14 @@
                 </a:solidFill>
                 <a:latin typeface="Calibri"/>
               </a:rPr>
-              <a:t>Tener gente preparada no basta: hay que atraer los trabajos que la usan</a:t>
+              <a:t>En la cadena regional, cada país ocupa un lugar distinto</a:t>
             </a:r>
           </a:p>
         </p:txBody>
       </p:sp>
       <p:pic>
         <p:nvPicPr>
-          <p:cNvPr id="4" name="Picture 3" descr="W7_brecha_terciaria_capa.png"/>
+          <p:cNvPr id="4" name="Picture 3" descr="W5_cadena_regional_capas.png"/>
           <p:cNvPicPr>
             <a:picLocks noChangeAspect="1"/>
           </p:cNvPicPr>
@@ -3631,8 +3844,8 @@
         </p:blipFill>
         <p:spPr>
           <a:xfrm>
-            <a:off x="3108271" y="1691640"/>
-            <a:ext cx="5975153" cy="4114800"/>
+            <a:off x="970667" y="1737360"/>
+            <a:ext cx="10250361" cy="3931920"/>
           </a:xfrm>
           <a:prstGeom prst="rect">
             <a:avLst/>
@@ -3676,7 +3889,7 @@
                 </a:solidFill>
                 <a:latin typeface="Calibri"/>
               </a:rPr>
-              <a:t>Cuatro países. El Salvador y Guatemala quedan fuera porque sus sectores estratégicos son demasiado pequeños en la muestra para este corte.</a:t>
+              <a:t>Solo se muestran las combinaciones país-sector con más de 5.000 personas ocupadas: por eso El Salvador y Guatemala no aparecen, y Honduras solo en cables.</a:t>
             </a:r>
           </a:p>
         </p:txBody>
@@ -3736,7 +3949,7 @@
                 </a:solidFill>
                 <a:latin typeface="Calibri"/>
               </a:rPr>
-              <a:t>HALLAZGO 3 · QUÉ SIGNIFICA</a:t>
+              <a:t>HALLAZGO 3</a:t>
             </a:r>
           </a:p>
         </p:txBody>
@@ -3778,21 +3991,45 @@
                 </a:solidFill>
                 <a:latin typeface="Calibri"/>
               </a:rPr>
-              <a:t>República Dominicana tiene la gente, pero no los puestos</a:t>
-            </a:r>
-          </a:p>
-        </p:txBody>
-      </p:sp>
-      <p:sp>
-        <p:nvSpPr>
-          <p:cNvPr id="4" name="TextBox 3"/>
+              <a:t>Tener gente preparada no basta: hay que atraer los trabajos que la usan</a:t>
+            </a:r>
+          </a:p>
+        </p:txBody>
+      </p:sp>
+      <p:pic>
+        <p:nvPicPr>
+          <p:cNvPr id="4" name="Picture 3" descr="W7_brecha_terciaria_capa.png"/>
+          <p:cNvPicPr>
+            <a:picLocks noChangeAspect="1"/>
+          </p:cNvPicPr>
+          <p:nvPr/>
+        </p:nvPicPr>
+        <p:blipFill>
+          <a:blip r:embed="rId2"/>
+          <a:stretch>
+            <a:fillRect/>
+          </a:stretch>
+        </p:blipFill>
+        <p:spPr>
+          <a:xfrm>
+            <a:off x="3108271" y="1691640"/>
+            <a:ext cx="5975153" cy="4114800"/>
+          </a:xfrm>
+          <a:prstGeom prst="rect">
+            <a:avLst/>
+          </a:prstGeom>
+        </p:spPr>
+      </p:pic>
+      <p:sp>
+        <p:nvSpPr>
+          <p:cNvPr id="5" name="TextBox 4"/>
           <p:cNvSpPr txBox="1"/>
           <p:nvPr/>
         </p:nvSpPr>
         <p:spPr>
           <a:xfrm>
-            <a:off x="658368" y="1965960"/>
-            <a:ext cx="3108960" cy="731520"/>
+            <a:off x="658368" y="6199632"/>
+            <a:ext cx="10874959" cy="457200"/>
           </a:xfrm>
           <a:prstGeom prst="rect">
             <a:avLst/>
@@ -3807,349 +4044,20 @@
           <a:p>
             <a:pPr algn="l">
               <a:lnSpc>
-                <a:spcPct val="95000"/>
-              </a:lnSpc>
-              <a:spcAft>
-                <a:spcPts val="600"/>
-              </a:spcAft>
-            </a:pPr>
-            <a:r>
-              <a:rPr sz="4200" b="1">
-                <a:solidFill>
-                  <a:srgbClr val="2A78D6"/>
-                </a:solidFill>
-                <a:latin typeface="Calibri"/>
-              </a:rPr>
-              <a:t>26%</a:t>
-            </a:r>
-          </a:p>
-        </p:txBody>
-      </p:sp>
-      <p:sp>
-        <p:nvSpPr>
-          <p:cNvPr id="5" name="TextBox 4"/>
-          <p:cNvSpPr txBox="1"/>
-          <p:nvPr/>
-        </p:nvSpPr>
-        <p:spPr>
-          <a:xfrm>
-            <a:off x="658368" y="2624328"/>
-            <a:ext cx="3108960" cy="914400"/>
-          </a:xfrm>
-          <a:prstGeom prst="rect">
-            <a:avLst/>
-          </a:prstGeom>
-          <a:noFill/>
-        </p:spPr>
-        <p:txBody>
-          <a:bodyPr wrap="square" lIns="0" rIns="0" tIns="0" bIns="0">
-            <a:spAutoFit/>
-          </a:bodyPr>
-          <a:lstStyle/>
-          <a:p>
-            <a:pPr algn="l">
-              <a:lnSpc>
-                <a:spcPct val="120000"/>
-              </a:lnSpc>
-              <a:spcAft>
-                <a:spcPts val="600"/>
-              </a:spcAft>
-            </a:pPr>
-            <a:r>
-              <a:rPr sz="1250" b="0">
+                <a:spcPct val="115000"/>
+              </a:lnSpc>
+              <a:spcAft>
+                <a:spcPts val="600"/>
+              </a:spcAft>
+            </a:pPr>
+            <a:r>
+              <a:rPr sz="1050" b="0">
                 <a:solidFill>
                   <a:srgbClr val="6B6A64"/>
                 </a:solidFill>
                 <a:latin typeface="Calibri"/>
               </a:rPr>
-              <a:t>de los trabajadores dominicanos tienen educación superior — casi lo mismo que México</a:t>
-            </a:r>
-          </a:p>
-        </p:txBody>
-      </p:sp>
-      <p:sp>
-        <p:nvSpPr>
-          <p:cNvPr id="6" name="TextBox 5"/>
-          <p:cNvSpPr txBox="1"/>
-          <p:nvPr/>
-        </p:nvSpPr>
-        <p:spPr>
-          <a:xfrm>
-            <a:off x="4480560" y="1965960"/>
-            <a:ext cx="3108960" cy="731520"/>
-          </a:xfrm>
-          <a:prstGeom prst="rect">
-            <a:avLst/>
-          </a:prstGeom>
-          <a:noFill/>
-        </p:spPr>
-        <p:txBody>
-          <a:bodyPr wrap="square" lIns="0" rIns="0" tIns="0" bIns="0">
-            <a:spAutoFit/>
-          </a:bodyPr>
-          <a:lstStyle/>
-          <a:p>
-            <a:pPr algn="l">
-              <a:lnSpc>
-                <a:spcPct val="95000"/>
-              </a:lnSpc>
-              <a:spcAft>
-                <a:spcPts val="600"/>
-              </a:spcAft>
-            </a:pPr>
-            <a:r>
-              <a:rPr sz="4200" b="1">
-                <a:solidFill>
-                  <a:srgbClr val="4A3AA7"/>
-                </a:solidFill>
-                <a:latin typeface="Calibri"/>
-              </a:rPr>
-              <a:t>13%</a:t>
-            </a:r>
-          </a:p>
-        </p:txBody>
-      </p:sp>
-      <p:sp>
-        <p:nvSpPr>
-          <p:cNvPr id="7" name="TextBox 6"/>
-          <p:cNvSpPr txBox="1"/>
-          <p:nvPr/>
-        </p:nvSpPr>
-        <p:spPr>
-          <a:xfrm>
-            <a:off x="4480560" y="2624328"/>
-            <a:ext cx="3108960" cy="914400"/>
-          </a:xfrm>
-          <a:prstGeom prst="rect">
-            <a:avLst/>
-          </a:prstGeom>
-          <a:noFill/>
-        </p:spPr>
-        <p:txBody>
-          <a:bodyPr wrap="square" lIns="0" rIns="0" tIns="0" bIns="0">
-            <a:spAutoFit/>
-          </a:bodyPr>
-          <a:lstStyle/>
-          <a:p>
-            <a:pPr algn="l">
-              <a:lnSpc>
-                <a:spcPct val="120000"/>
-              </a:lnSpc>
-              <a:spcAft>
-                <a:spcPts val="600"/>
-              </a:spcAft>
-            </a:pPr>
-            <a:r>
-              <a:rPr sz="1250" b="0">
-                <a:solidFill>
-                  <a:srgbClr val="6B6A64"/>
-                </a:solidFill>
-                <a:latin typeface="Calibri"/>
-              </a:rPr>
-              <a:t>pero su sector de dispositivos médicos emplea esa proporción de técnicos y profesionales</a:t>
-            </a:r>
-          </a:p>
-        </p:txBody>
-      </p:sp>
-      <p:sp>
-        <p:nvSpPr>
-          <p:cNvPr id="8" name="TextBox 7"/>
-          <p:cNvSpPr txBox="1"/>
-          <p:nvPr/>
-        </p:nvSpPr>
-        <p:spPr>
-          <a:xfrm>
-            <a:off x="8321040" y="1965960"/>
-            <a:ext cx="3108960" cy="731520"/>
-          </a:xfrm>
-          <a:prstGeom prst="rect">
-            <a:avLst/>
-          </a:prstGeom>
-          <a:noFill/>
-        </p:spPr>
-        <p:txBody>
-          <a:bodyPr wrap="square" lIns="0" rIns="0" tIns="0" bIns="0">
-            <a:spAutoFit/>
-          </a:bodyPr>
-          <a:lstStyle/>
-          <a:p>
-            <a:pPr algn="l">
-              <a:lnSpc>
-                <a:spcPct val="95000"/>
-              </a:lnSpc>
-              <a:spcAft>
-                <a:spcPts val="600"/>
-              </a:spcAft>
-            </a:pPr>
-            <a:r>
-              <a:rPr sz="4200" b="1">
-                <a:solidFill>
-                  <a:srgbClr val="1BAF7A"/>
-                </a:solidFill>
-                <a:latin typeface="Calibri"/>
-              </a:rPr>
-              <a:t>26%</a:t>
-            </a:r>
-          </a:p>
-        </p:txBody>
-      </p:sp>
-      <p:sp>
-        <p:nvSpPr>
-          <p:cNvPr id="9" name="TextBox 8"/>
-          <p:cNvSpPr txBox="1"/>
-          <p:nvPr/>
-        </p:nvSpPr>
-        <p:spPr>
-          <a:xfrm>
-            <a:off x="8321040" y="2624328"/>
-            <a:ext cx="3108960" cy="914400"/>
-          </a:xfrm>
-          <a:prstGeom prst="rect">
-            <a:avLst/>
-          </a:prstGeom>
-          <a:noFill/>
-        </p:spPr>
-        <p:txBody>
-          <a:bodyPr wrap="square" lIns="0" rIns="0" tIns="0" bIns="0">
-            <a:spAutoFit/>
-          </a:bodyPr>
-          <a:lstStyle/>
-          <a:p>
-            <a:pPr algn="l">
-              <a:lnSpc>
-                <a:spcPct val="120000"/>
-              </a:lnSpc>
-              <a:spcAft>
-                <a:spcPts val="600"/>
-              </a:spcAft>
-            </a:pPr>
-            <a:r>
-              <a:rPr sz="1250" b="0">
-                <a:solidFill>
-                  <a:srgbClr val="6B6A64"/>
-                </a:solidFill>
-                <a:latin typeface="Calibri"/>
-              </a:rPr>
-              <a:t>Costa Rica, con un stock parecido, llega al doble en el mismo sector</a:t>
-            </a:r>
-          </a:p>
-        </p:txBody>
-      </p:sp>
-      <p:cxnSp>
-        <p:nvCxnSpPr>
-          <p:cNvPr id="10" name="Connector 9"/>
-          <p:cNvCxnSpPr/>
-          <p:nvPr/>
-        </p:nvCxnSpPr>
-        <p:spPr>
-          <a:xfrm>
-            <a:off x="658368" y="4343400"/>
-            <a:ext cx="10874959" cy="0"/>
-          </a:xfrm>
-          <a:prstGeom prst="line">
-            <a:avLst/>
-          </a:prstGeom>
-          <a:ln w="19050">
-            <a:solidFill>
-              <a:srgbClr val="E4E4DF"/>
-            </a:solidFill>
-          </a:ln>
-        </p:spPr>
-        <p:style>
-          <a:lnRef idx="2">
-            <a:schemeClr val="accent1"/>
-          </a:lnRef>
-          <a:fillRef idx="0">
-            <a:schemeClr val="accent1"/>
-          </a:fillRef>
-          <a:effectRef idx="1">
-            <a:schemeClr val="accent1"/>
-          </a:effectRef>
-          <a:fontRef idx="minor">
-            <a:schemeClr val="tx1"/>
-          </a:fontRef>
-        </p:style>
-      </p:cxnSp>
-      <p:sp>
-        <p:nvSpPr>
-          <p:cNvPr id="11" name="TextBox 10"/>
-          <p:cNvSpPr txBox="1"/>
-          <p:nvPr/>
-        </p:nvSpPr>
-        <p:spPr>
-          <a:xfrm>
-            <a:off x="658368" y="4617720"/>
-            <a:ext cx="10881360" cy="1463040"/>
-          </a:xfrm>
-          <a:prstGeom prst="rect">
-            <a:avLst/>
-          </a:prstGeom>
-          <a:noFill/>
-        </p:spPr>
-        <p:txBody>
-          <a:bodyPr wrap="square" lIns="0" rIns="0" tIns="0" bIns="0">
-            <a:spAutoFit/>
-          </a:bodyPr>
-          <a:lstStyle/>
-          <a:p>
-            <a:pPr algn="l">
-              <a:lnSpc>
-                <a:spcPct val="135000"/>
-              </a:lnSpc>
-              <a:spcAft>
-                <a:spcPts val="600"/>
-              </a:spcAft>
-            </a:pPr>
-            <a:r>
-              <a:rPr sz="1900" b="0">
-                <a:solidFill>
-                  <a:srgbClr val="1C1C1A"/>
-                </a:solidFill>
-                <a:latin typeface="Calibri"/>
-              </a:rPr>
-              <a:t>El país formó a la gente, pero las plantas que instaló son de ensamble. Honduras muestra el caso contrario: emplea más técnicos de los que su nivel educativo haría esperar, y ahí la restricción sí es de formación.</a:t>
-            </a:r>
-          </a:p>
-        </p:txBody>
-      </p:sp>
-      <p:sp>
-        <p:nvSpPr>
-          <p:cNvPr id="12" name="TextBox 11"/>
-          <p:cNvSpPr txBox="1"/>
-          <p:nvPr/>
-        </p:nvSpPr>
-        <p:spPr>
-          <a:xfrm>
-            <a:off x="658368" y="5852160"/>
-            <a:ext cx="10881360" cy="548640"/>
-          </a:xfrm>
-          <a:prstGeom prst="rect">
-            <a:avLst/>
-          </a:prstGeom>
-          <a:noFill/>
-        </p:spPr>
-        <p:txBody>
-          <a:bodyPr wrap="square" lIns="0" rIns="0" tIns="0" bIns="0">
-            <a:spAutoFit/>
-          </a:bodyPr>
-          <a:lstStyle/>
-          <a:p>
-            <a:pPr algn="l">
-              <a:lnSpc>
-                <a:spcPct val="125000"/>
-              </a:lnSpc>
-              <a:spcAft>
-                <a:spcPts val="600"/>
-              </a:spcAft>
-            </a:pPr>
-            <a:r>
-              <a:rPr sz="1600" b="1">
-                <a:solidFill>
-                  <a:srgbClr val="1BAF7A"/>
-                </a:solidFill>
-                <a:latin typeface="Calibri"/>
-              </a:rPr>
-              <a:t>Formar y atraer funciones son dos políticas distintas; hacen falta las dos.</a:t>
+              <a:t>Cuatro países. El Salvador y Guatemala quedan fuera porque sus sectores estratégicos son demasiado pequeños en la muestra para este corte.</a:t>
             </a:r>
           </a:p>
         </p:txBody>
@@ -4209,7 +4117,7 @@
                 </a:solidFill>
                 <a:latin typeface="Calibri"/>
               </a:rPr>
-              <a:t>HALLAZGO 4</a:t>
+              <a:t>HALLAZGO 3 · QUÉ SIGNIFICA</a:t>
             </a:r>
           </a:p>
         </p:txBody>
@@ -4251,45 +4159,21 @@
                 </a:solidFill>
                 <a:latin typeface="Calibri"/>
               </a:rPr>
-              <a:t>Los anuncios de trabajo delatan en qué se especializa cada bloque</a:t>
-            </a:r>
-          </a:p>
-        </p:txBody>
-      </p:sp>
-      <p:pic>
-        <p:nvPicPr>
-          <p:cNvPr id="4" name="Picture 3" descr="W10_habilidades_bloques.png"/>
-          <p:cNvPicPr>
-            <a:picLocks noChangeAspect="1"/>
-          </p:cNvPicPr>
-          <p:nvPr/>
-        </p:nvPicPr>
-        <p:blipFill>
-          <a:blip r:embed="rId2"/>
-          <a:stretch>
-            <a:fillRect/>
-          </a:stretch>
-        </p:blipFill>
-        <p:spPr>
-          <a:xfrm>
-            <a:off x="3054620" y="1645920"/>
-            <a:ext cx="6082455" cy="4114800"/>
-          </a:xfrm>
-          <a:prstGeom prst="rect">
-            <a:avLst/>
-          </a:prstGeom>
-        </p:spPr>
-      </p:pic>
-      <p:sp>
-        <p:nvSpPr>
-          <p:cNvPr id="5" name="TextBox 4"/>
+              <a:t>República Dominicana tiene la gente, pero no los puestos</a:t>
+            </a:r>
+          </a:p>
+        </p:txBody>
+      </p:sp>
+      <p:sp>
+        <p:nvSpPr>
+          <p:cNvPr id="4" name="TextBox 3"/>
           <p:cNvSpPr txBox="1"/>
           <p:nvPr/>
         </p:nvSpPr>
         <p:spPr>
           <a:xfrm>
-            <a:off x="658368" y="6199632"/>
-            <a:ext cx="10874959" cy="457200"/>
+            <a:off x="658368" y="1965960"/>
+            <a:ext cx="3108960" cy="731520"/>
           </a:xfrm>
           <a:prstGeom prst="rect">
             <a:avLst/>
@@ -4304,20 +4188,349 @@
           <a:p>
             <a:pPr algn="l">
               <a:lnSpc>
-                <a:spcPct val="115000"/>
-              </a:lnSpc>
-              <a:spcAft>
-                <a:spcPts val="600"/>
-              </a:spcAft>
-            </a:pPr>
-            <a:r>
-              <a:rPr sz="1050" b="0">
+                <a:spcPct val="95000"/>
+              </a:lnSpc>
+              <a:spcAft>
+                <a:spcPts val="600"/>
+              </a:spcAft>
+            </a:pPr>
+            <a:r>
+              <a:rPr sz="4200" b="1">
+                <a:solidFill>
+                  <a:srgbClr val="2A78D6"/>
+                </a:solidFill>
+                <a:latin typeface="Calibri"/>
+              </a:rPr>
+              <a:t>26%</a:t>
+            </a:r>
+          </a:p>
+        </p:txBody>
+      </p:sp>
+      <p:sp>
+        <p:nvSpPr>
+          <p:cNvPr id="5" name="TextBox 4"/>
+          <p:cNvSpPr txBox="1"/>
+          <p:nvPr/>
+        </p:nvSpPr>
+        <p:spPr>
+          <a:xfrm>
+            <a:off x="658368" y="2624328"/>
+            <a:ext cx="3108960" cy="914400"/>
+          </a:xfrm>
+          <a:prstGeom prst="rect">
+            <a:avLst/>
+          </a:prstGeom>
+          <a:noFill/>
+        </p:spPr>
+        <p:txBody>
+          <a:bodyPr wrap="square" lIns="0" rIns="0" tIns="0" bIns="0">
+            <a:spAutoFit/>
+          </a:bodyPr>
+          <a:lstStyle/>
+          <a:p>
+            <a:pPr algn="l">
+              <a:lnSpc>
+                <a:spcPct val="120000"/>
+              </a:lnSpc>
+              <a:spcAft>
+                <a:spcPts val="600"/>
+              </a:spcAft>
+            </a:pPr>
+            <a:r>
+              <a:rPr sz="1250" b="0">
                 <a:solidFill>
                   <a:srgbClr val="6B6A64"/>
                 </a:solidFill>
                 <a:latin typeface="Calibri"/>
               </a:rPr>
-              <a:t>925 mil anuncios de CAPARD (Guatemala, Honduras, Costa Rica y República Dominicana) y 1,6 millones de México. El Salvador, Nicaragua y Panamá no tienen anuncios en la base.</a:t>
+              <a:t>de los trabajadores dominicanos tienen educación superior — casi lo mismo que México</a:t>
+            </a:r>
+          </a:p>
+        </p:txBody>
+      </p:sp>
+      <p:sp>
+        <p:nvSpPr>
+          <p:cNvPr id="6" name="TextBox 5"/>
+          <p:cNvSpPr txBox="1"/>
+          <p:nvPr/>
+        </p:nvSpPr>
+        <p:spPr>
+          <a:xfrm>
+            <a:off x="4480560" y="1965960"/>
+            <a:ext cx="3108960" cy="731520"/>
+          </a:xfrm>
+          <a:prstGeom prst="rect">
+            <a:avLst/>
+          </a:prstGeom>
+          <a:noFill/>
+        </p:spPr>
+        <p:txBody>
+          <a:bodyPr wrap="square" lIns="0" rIns="0" tIns="0" bIns="0">
+            <a:spAutoFit/>
+          </a:bodyPr>
+          <a:lstStyle/>
+          <a:p>
+            <a:pPr algn="l">
+              <a:lnSpc>
+                <a:spcPct val="95000"/>
+              </a:lnSpc>
+              <a:spcAft>
+                <a:spcPts val="600"/>
+              </a:spcAft>
+            </a:pPr>
+            <a:r>
+              <a:rPr sz="4200" b="1">
+                <a:solidFill>
+                  <a:srgbClr val="4A3AA7"/>
+                </a:solidFill>
+                <a:latin typeface="Calibri"/>
+              </a:rPr>
+              <a:t>13%</a:t>
+            </a:r>
+          </a:p>
+        </p:txBody>
+      </p:sp>
+      <p:sp>
+        <p:nvSpPr>
+          <p:cNvPr id="7" name="TextBox 6"/>
+          <p:cNvSpPr txBox="1"/>
+          <p:nvPr/>
+        </p:nvSpPr>
+        <p:spPr>
+          <a:xfrm>
+            <a:off x="4480560" y="2624328"/>
+            <a:ext cx="3108960" cy="914400"/>
+          </a:xfrm>
+          <a:prstGeom prst="rect">
+            <a:avLst/>
+          </a:prstGeom>
+          <a:noFill/>
+        </p:spPr>
+        <p:txBody>
+          <a:bodyPr wrap="square" lIns="0" rIns="0" tIns="0" bIns="0">
+            <a:spAutoFit/>
+          </a:bodyPr>
+          <a:lstStyle/>
+          <a:p>
+            <a:pPr algn="l">
+              <a:lnSpc>
+                <a:spcPct val="120000"/>
+              </a:lnSpc>
+              <a:spcAft>
+                <a:spcPts val="600"/>
+              </a:spcAft>
+            </a:pPr>
+            <a:r>
+              <a:rPr sz="1250" b="0">
+                <a:solidFill>
+                  <a:srgbClr val="6B6A64"/>
+                </a:solidFill>
+                <a:latin typeface="Calibri"/>
+              </a:rPr>
+              <a:t>pero su sector de dispositivos médicos emplea esa proporción de técnicos y profesionales</a:t>
+            </a:r>
+          </a:p>
+        </p:txBody>
+      </p:sp>
+      <p:sp>
+        <p:nvSpPr>
+          <p:cNvPr id="8" name="TextBox 7"/>
+          <p:cNvSpPr txBox="1"/>
+          <p:nvPr/>
+        </p:nvSpPr>
+        <p:spPr>
+          <a:xfrm>
+            <a:off x="8321040" y="1965960"/>
+            <a:ext cx="3108960" cy="731520"/>
+          </a:xfrm>
+          <a:prstGeom prst="rect">
+            <a:avLst/>
+          </a:prstGeom>
+          <a:noFill/>
+        </p:spPr>
+        <p:txBody>
+          <a:bodyPr wrap="square" lIns="0" rIns="0" tIns="0" bIns="0">
+            <a:spAutoFit/>
+          </a:bodyPr>
+          <a:lstStyle/>
+          <a:p>
+            <a:pPr algn="l">
+              <a:lnSpc>
+                <a:spcPct val="95000"/>
+              </a:lnSpc>
+              <a:spcAft>
+                <a:spcPts val="600"/>
+              </a:spcAft>
+            </a:pPr>
+            <a:r>
+              <a:rPr sz="4200" b="1">
+                <a:solidFill>
+                  <a:srgbClr val="1BAF7A"/>
+                </a:solidFill>
+                <a:latin typeface="Calibri"/>
+              </a:rPr>
+              <a:t>26%</a:t>
+            </a:r>
+          </a:p>
+        </p:txBody>
+      </p:sp>
+      <p:sp>
+        <p:nvSpPr>
+          <p:cNvPr id="9" name="TextBox 8"/>
+          <p:cNvSpPr txBox="1"/>
+          <p:nvPr/>
+        </p:nvSpPr>
+        <p:spPr>
+          <a:xfrm>
+            <a:off x="8321040" y="2624328"/>
+            <a:ext cx="3108960" cy="914400"/>
+          </a:xfrm>
+          <a:prstGeom prst="rect">
+            <a:avLst/>
+          </a:prstGeom>
+          <a:noFill/>
+        </p:spPr>
+        <p:txBody>
+          <a:bodyPr wrap="square" lIns="0" rIns="0" tIns="0" bIns="0">
+            <a:spAutoFit/>
+          </a:bodyPr>
+          <a:lstStyle/>
+          <a:p>
+            <a:pPr algn="l">
+              <a:lnSpc>
+                <a:spcPct val="120000"/>
+              </a:lnSpc>
+              <a:spcAft>
+                <a:spcPts val="600"/>
+              </a:spcAft>
+            </a:pPr>
+            <a:r>
+              <a:rPr sz="1250" b="0">
+                <a:solidFill>
+                  <a:srgbClr val="6B6A64"/>
+                </a:solidFill>
+                <a:latin typeface="Calibri"/>
+              </a:rPr>
+              <a:t>Costa Rica, con un stock parecido, llega al doble en el mismo sector</a:t>
+            </a:r>
+          </a:p>
+        </p:txBody>
+      </p:sp>
+      <p:cxnSp>
+        <p:nvCxnSpPr>
+          <p:cNvPr id="10" name="Connector 9"/>
+          <p:cNvCxnSpPr/>
+          <p:nvPr/>
+        </p:nvCxnSpPr>
+        <p:spPr>
+          <a:xfrm>
+            <a:off x="658368" y="4343400"/>
+            <a:ext cx="10874959" cy="0"/>
+          </a:xfrm>
+          <a:prstGeom prst="line">
+            <a:avLst/>
+          </a:prstGeom>
+          <a:ln w="19050">
+            <a:solidFill>
+              <a:srgbClr val="E4E4DF"/>
+            </a:solidFill>
+          </a:ln>
+        </p:spPr>
+        <p:style>
+          <a:lnRef idx="2">
+            <a:schemeClr val="accent1"/>
+          </a:lnRef>
+          <a:fillRef idx="0">
+            <a:schemeClr val="accent1"/>
+          </a:fillRef>
+          <a:effectRef idx="1">
+            <a:schemeClr val="accent1"/>
+          </a:effectRef>
+          <a:fontRef idx="minor">
+            <a:schemeClr val="tx1"/>
+          </a:fontRef>
+        </p:style>
+      </p:cxnSp>
+      <p:sp>
+        <p:nvSpPr>
+          <p:cNvPr id="11" name="TextBox 10"/>
+          <p:cNvSpPr txBox="1"/>
+          <p:nvPr/>
+        </p:nvSpPr>
+        <p:spPr>
+          <a:xfrm>
+            <a:off x="658368" y="4617720"/>
+            <a:ext cx="10881360" cy="1463040"/>
+          </a:xfrm>
+          <a:prstGeom prst="rect">
+            <a:avLst/>
+          </a:prstGeom>
+          <a:noFill/>
+        </p:spPr>
+        <p:txBody>
+          <a:bodyPr wrap="square" lIns="0" rIns="0" tIns="0" bIns="0">
+            <a:spAutoFit/>
+          </a:bodyPr>
+          <a:lstStyle/>
+          <a:p>
+            <a:pPr algn="l">
+              <a:lnSpc>
+                <a:spcPct val="135000"/>
+              </a:lnSpc>
+              <a:spcAft>
+                <a:spcPts val="600"/>
+              </a:spcAft>
+            </a:pPr>
+            <a:r>
+              <a:rPr sz="1900" b="0">
+                <a:solidFill>
+                  <a:srgbClr val="1C1C1A"/>
+                </a:solidFill>
+                <a:latin typeface="Calibri"/>
+              </a:rPr>
+              <a:t>El país formó a la gente, pero las plantas que instaló son de ensamble. Honduras muestra el caso contrario: emplea más técnicos de los que su nivel educativo haría esperar, y ahí la restricción sí es de formación.</a:t>
+            </a:r>
+          </a:p>
+        </p:txBody>
+      </p:sp>
+      <p:sp>
+        <p:nvSpPr>
+          <p:cNvPr id="12" name="TextBox 11"/>
+          <p:cNvSpPr txBox="1"/>
+          <p:nvPr/>
+        </p:nvSpPr>
+        <p:spPr>
+          <a:xfrm>
+            <a:off x="658368" y="5852160"/>
+            <a:ext cx="10881360" cy="548640"/>
+          </a:xfrm>
+          <a:prstGeom prst="rect">
+            <a:avLst/>
+          </a:prstGeom>
+          <a:noFill/>
+        </p:spPr>
+        <p:txBody>
+          <a:bodyPr wrap="square" lIns="0" rIns="0" tIns="0" bIns="0">
+            <a:spAutoFit/>
+          </a:bodyPr>
+          <a:lstStyle/>
+          <a:p>
+            <a:pPr algn="l">
+              <a:lnSpc>
+                <a:spcPct val="125000"/>
+              </a:lnSpc>
+              <a:spcAft>
+                <a:spcPts val="600"/>
+              </a:spcAft>
+            </a:pPr>
+            <a:r>
+              <a:rPr sz="1600" b="1">
+                <a:solidFill>
+                  <a:srgbClr val="1BAF7A"/>
+                </a:solidFill>
+                <a:latin typeface="Calibri"/>
+              </a:rPr>
+              <a:t>Formar y atraer funciones son dos políticas distintas; hacen falta las dos.</a:t>
             </a:r>
           </a:p>
         </p:txBody>
@@ -4377,7 +4590,7 @@
                 </a:solidFill>
                 <a:latin typeface="Calibri"/>
               </a:rPr>
-              <a:t>HALLAZGO 4 · QUÉ SIGNIFICA</a:t>
+              <a:t>HALLAZGO 4</a:t>
             </a:r>
           </a:p>
         </p:txBody>
@@ -4419,21 +4632,45 @@
                 </a:solidFill>
                 <a:latin typeface="Calibri"/>
               </a:rPr>
-              <a:t>México contrata para fábrica de autos; Centroamérica, para planta médica</a:t>
-            </a:r>
-          </a:p>
-        </p:txBody>
-      </p:sp>
-      <p:sp>
-        <p:nvSpPr>
-          <p:cNvPr id="4" name="TextBox 3"/>
+              <a:t>Los anuncios de trabajo delatan en qué se especializa cada bloque</a:t>
+            </a:r>
+          </a:p>
+        </p:txBody>
+      </p:sp>
+      <p:pic>
+        <p:nvPicPr>
+          <p:cNvPr id="4" name="Picture 3" descr="W10_habilidades_bloques.png"/>
+          <p:cNvPicPr>
+            <a:picLocks noChangeAspect="1"/>
+          </p:cNvPicPr>
+          <p:nvPr/>
+        </p:nvPicPr>
+        <p:blipFill>
+          <a:blip r:embed="rId2"/>
+          <a:stretch>
+            <a:fillRect/>
+          </a:stretch>
+        </p:blipFill>
+        <p:spPr>
+          <a:xfrm>
+            <a:off x="3054620" y="1645920"/>
+            <a:ext cx="6082455" cy="4114800"/>
+          </a:xfrm>
+          <a:prstGeom prst="rect">
+            <a:avLst/>
+          </a:prstGeom>
+        </p:spPr>
+      </p:pic>
+      <p:sp>
+        <p:nvSpPr>
+          <p:cNvPr id="5" name="TextBox 4"/>
           <p:cNvSpPr txBox="1"/>
           <p:nvPr/>
         </p:nvSpPr>
         <p:spPr>
           <a:xfrm>
-            <a:off x="658368" y="1920240"/>
-            <a:ext cx="5394960" cy="2926080"/>
+            <a:off x="658368" y="6199632"/>
+            <a:ext cx="10874959" cy="457200"/>
           </a:xfrm>
           <a:prstGeom prst="rect">
             <a:avLst/>
@@ -4448,409 +4685,20 @@
           <a:p>
             <a:pPr algn="l">
               <a:lnSpc>
-                <a:spcPct val="130000"/>
-              </a:lnSpc>
-              <a:spcAft>
-                <a:spcPts val="600"/>
-              </a:spcAft>
-            </a:pPr>
-            <a:r>
-              <a:rPr sz="1550" b="0">
-                <a:solidFill>
-                  <a:srgbClr val="1C1C1A"/>
-                </a:solidFill>
-                <a:latin typeface="Calibri"/>
-              </a:rPr>
-              <a:t>México pide mucho más:</a:t>
-            </a:r>
-          </a:p>
-          <a:p>
-            <a:pPr algn="l">
-              <a:lnSpc>
-                <a:spcPct val="130000"/>
-              </a:lnSpc>
-              <a:spcAft>
-                <a:spcPts val="600"/>
-              </a:spcAft>
-            </a:pPr>
-            <a:r>
-              <a:rPr sz="1550" b="0">
-                <a:solidFill>
-                  <a:srgbClr val="1C1C1A"/>
-                </a:solidFill>
-                <a:latin typeface="Calibri"/>
-              </a:rPr>
-              <a:t/>
-            </a:r>
-          </a:p>
-          <a:p>
-            <a:pPr algn="l">
-              <a:lnSpc>
-                <a:spcPct val="130000"/>
-              </a:lnSpc>
-              <a:spcAft>
-                <a:spcPts val="600"/>
-              </a:spcAft>
-            </a:pPr>
-            <a:r>
-              <a:rPr sz="1550" b="0">
-                <a:solidFill>
-                  <a:srgbClr val="1C1C1A"/>
-                </a:solidFill>
-                <a:latin typeface="Calibri"/>
-              </a:rPr>
-              <a:t>•  Herramientas de calidad de la industria automotriz (ocho veces más que CAPARD)</a:t>
-            </a:r>
-          </a:p>
-          <a:p>
-            <a:pPr algn="l">
-              <a:lnSpc>
-                <a:spcPct val="130000"/>
-              </a:lnSpc>
-              <a:spcAft>
-                <a:spcPts val="600"/>
-              </a:spcAft>
-            </a:pPr>
-            <a:r>
-              <a:rPr sz="1550" b="0">
-                <a:solidFill>
-                  <a:srgbClr val="1C1C1A"/>
-                </a:solidFill>
-                <a:latin typeface="Calibri"/>
-              </a:rPr>
-              <a:t/>
-            </a:r>
-          </a:p>
-          <a:p>
-            <a:pPr algn="l">
-              <a:lnSpc>
-                <a:spcPct val="130000"/>
-              </a:lnSpc>
-              <a:spcAft>
-                <a:spcPts val="600"/>
-              </a:spcAft>
-            </a:pPr>
-            <a:r>
-              <a:rPr sz="1550" b="0">
-                <a:solidFill>
-                  <a:srgbClr val="1C1C1A"/>
-                </a:solidFill>
-                <a:latin typeface="Calibri"/>
-              </a:rPr>
-              <a:t>•  Análisis de fallas en la producción (tres veces más)</a:t>
-            </a:r>
-          </a:p>
-          <a:p>
-            <a:pPr algn="l">
-              <a:lnSpc>
-                <a:spcPct val="130000"/>
-              </a:lnSpc>
-              <a:spcAft>
-                <a:spcPts val="600"/>
-              </a:spcAft>
-            </a:pPr>
-            <a:r>
-              <a:rPr sz="1550" b="0">
-                <a:solidFill>
-                  <a:srgbClr val="1C1C1A"/>
-                </a:solidFill>
-                <a:latin typeface="Calibri"/>
-              </a:rPr>
-              <a:t/>
-            </a:r>
-          </a:p>
-          <a:p>
-            <a:pPr algn="l">
-              <a:lnSpc>
-                <a:spcPct val="130000"/>
-              </a:lnSpc>
-              <a:spcAft>
-                <a:spcPts val="600"/>
-              </a:spcAft>
-            </a:pPr>
-            <a:r>
-              <a:rPr sz="1550" b="0">
-                <a:solidFill>
-                  <a:srgbClr val="1C1C1A"/>
-                </a:solidFill>
-                <a:latin typeface="Calibri"/>
-              </a:rPr>
-              <a:t>•  Robótica (casi cuatro veces más)</a:t>
-            </a:r>
-          </a:p>
-        </p:txBody>
-      </p:sp>
-      <p:sp>
-        <p:nvSpPr>
-          <p:cNvPr id="5" name="TextBox 4"/>
-          <p:cNvSpPr txBox="1"/>
-          <p:nvPr/>
-        </p:nvSpPr>
-        <p:spPr>
-          <a:xfrm>
-            <a:off x="6492240" y="1920240"/>
-            <a:ext cx="5029200" cy="2926080"/>
-          </a:xfrm>
-          <a:prstGeom prst="rect">
-            <a:avLst/>
-          </a:prstGeom>
-          <a:noFill/>
-        </p:spPr>
-        <p:txBody>
-          <a:bodyPr wrap="square" lIns="0" rIns="0" tIns="0" bIns="0">
-            <a:spAutoFit/>
-          </a:bodyPr>
-          <a:lstStyle/>
-          <a:p>
-            <a:pPr algn="l">
-              <a:lnSpc>
-                <a:spcPct val="130000"/>
-              </a:lnSpc>
-              <a:spcAft>
-                <a:spcPts val="600"/>
-              </a:spcAft>
-            </a:pPr>
-            <a:r>
-              <a:rPr sz="1550" b="0">
-                <a:solidFill>
-                  <a:srgbClr val="1C1C1A"/>
-                </a:solidFill>
-                <a:latin typeface="Calibri"/>
-              </a:rPr>
-              <a:t>CAPARD pide mucho más:</a:t>
-            </a:r>
-          </a:p>
-          <a:p>
-            <a:pPr algn="l">
-              <a:lnSpc>
-                <a:spcPct val="130000"/>
-              </a:lnSpc>
-              <a:spcAft>
-                <a:spcPts val="600"/>
-              </a:spcAft>
-            </a:pPr>
-            <a:r>
-              <a:rPr sz="1550" b="0">
-                <a:solidFill>
-                  <a:srgbClr val="1C1C1A"/>
-                </a:solidFill>
-                <a:latin typeface="Calibri"/>
-              </a:rPr>
-              <a:t/>
-            </a:r>
-          </a:p>
-          <a:p>
-            <a:pPr algn="l">
-              <a:lnSpc>
-                <a:spcPct val="130000"/>
-              </a:lnSpc>
-              <a:spcAft>
-                <a:spcPts val="600"/>
-              </a:spcAft>
-            </a:pPr>
-            <a:r>
-              <a:rPr sz="1550" b="0">
-                <a:solidFill>
-                  <a:srgbClr val="1C1C1A"/>
-                </a:solidFill>
-                <a:latin typeface="Calibri"/>
-              </a:rPr>
-              <a:t>•  Excel y herramientas de análisis de datos</a:t>
-            </a:r>
-          </a:p>
-          <a:p>
-            <a:pPr algn="l">
-              <a:lnSpc>
-                <a:spcPct val="130000"/>
-              </a:lnSpc>
-              <a:spcAft>
-                <a:spcPts val="600"/>
-              </a:spcAft>
-            </a:pPr>
-            <a:r>
-              <a:rPr sz="1550" b="0">
-                <a:solidFill>
-                  <a:srgbClr val="1C1C1A"/>
-                </a:solidFill>
-                <a:latin typeface="Calibri"/>
-              </a:rPr>
-              <a:t/>
-            </a:r>
-          </a:p>
-          <a:p>
-            <a:pPr algn="l">
-              <a:lnSpc>
-                <a:spcPct val="130000"/>
-              </a:lnSpc>
-              <a:spcAft>
-                <a:spcPts val="600"/>
-              </a:spcAft>
-            </a:pPr>
-            <a:r>
-              <a:rPr sz="1550" b="0">
-                <a:solidFill>
-                  <a:srgbClr val="1C1C1A"/>
-                </a:solidFill>
-                <a:latin typeface="Calibri"/>
-              </a:rPr>
-              <a:t>•  Buenas prácticas de manufactura (tres veces más)</a:t>
-            </a:r>
-          </a:p>
-          <a:p>
-            <a:pPr algn="l">
-              <a:lnSpc>
-                <a:spcPct val="130000"/>
-              </a:lnSpc>
-              <a:spcAft>
-                <a:spcPts val="600"/>
-              </a:spcAft>
-            </a:pPr>
-            <a:r>
-              <a:rPr sz="1550" b="0">
-                <a:solidFill>
-                  <a:srgbClr val="1C1C1A"/>
-                </a:solidFill>
-                <a:latin typeface="Calibri"/>
-              </a:rPr>
-              <a:t/>
-            </a:r>
-          </a:p>
-          <a:p>
-            <a:pPr algn="l">
-              <a:lnSpc>
-                <a:spcPct val="130000"/>
-              </a:lnSpc>
-              <a:spcAft>
-                <a:spcPts val="600"/>
-              </a:spcAft>
-            </a:pPr>
-            <a:r>
-              <a:rPr sz="1550" b="0">
-                <a:solidFill>
-                  <a:srgbClr val="1C1C1A"/>
-                </a:solidFill>
-                <a:latin typeface="Calibri"/>
-              </a:rPr>
-              <a:t>•  Requisitos de la FDA, la agencia sanitaria de Estados Unidos (tres veces más)</a:t>
-            </a:r>
-          </a:p>
-        </p:txBody>
-      </p:sp>
-      <p:cxnSp>
-        <p:nvCxnSpPr>
-          <p:cNvPr id="6" name="Connector 5"/>
-          <p:cNvCxnSpPr/>
-          <p:nvPr/>
-        </p:nvCxnSpPr>
-        <p:spPr>
-          <a:xfrm>
-            <a:off x="658368" y="4892040"/>
-            <a:ext cx="10874959" cy="0"/>
-          </a:xfrm>
-          <a:prstGeom prst="line">
-            <a:avLst/>
-          </a:prstGeom>
-          <a:ln w="19050">
-            <a:solidFill>
-              <a:srgbClr val="E4E4DF"/>
-            </a:solidFill>
-          </a:ln>
-        </p:spPr>
-        <p:style>
-          <a:lnRef idx="2">
-            <a:schemeClr val="accent1"/>
-          </a:lnRef>
-          <a:fillRef idx="0">
-            <a:schemeClr val="accent1"/>
-          </a:fillRef>
-          <a:effectRef idx="1">
-            <a:schemeClr val="accent1"/>
-          </a:effectRef>
-          <a:fontRef idx="minor">
-            <a:schemeClr val="tx1"/>
-          </a:fontRef>
-        </p:style>
-      </p:cxnSp>
-      <p:sp>
-        <p:nvSpPr>
-          <p:cNvPr id="7" name="TextBox 6"/>
-          <p:cNvSpPr txBox="1"/>
-          <p:nvPr/>
-        </p:nvSpPr>
-        <p:spPr>
-          <a:xfrm>
-            <a:off x="658368" y="5120640"/>
-            <a:ext cx="10881360" cy="1097280"/>
-          </a:xfrm>
-          <a:prstGeom prst="rect">
-            <a:avLst/>
-          </a:prstGeom>
-          <a:noFill/>
-        </p:spPr>
-        <p:txBody>
-          <a:bodyPr wrap="square" lIns="0" rIns="0" tIns="0" bIns="0">
-            <a:spAutoFit/>
-          </a:bodyPr>
-          <a:lstStyle/>
-          <a:p>
-            <a:pPr algn="l">
-              <a:lnSpc>
-                <a:spcPct val="135000"/>
-              </a:lnSpc>
-              <a:spcAft>
-                <a:spcPts val="600"/>
-              </a:spcAft>
-            </a:pPr>
-            <a:r>
-              <a:rPr sz="1800" b="0">
-                <a:solidFill>
-                  <a:srgbClr val="1C1C1A"/>
-                </a:solidFill>
-                <a:latin typeface="Calibri"/>
-              </a:rPr>
-              <a:t>Es la huella de los dispositivos médicos —un sector regulado por la FDA— frente a la de las cadenas automotriz y electrónica. Lo que la Nota Técnica ve en las exportaciones, se ve igual en los anuncios de empleo.</a:t>
-            </a:r>
-          </a:p>
-        </p:txBody>
-      </p:sp>
-      <p:sp>
-        <p:nvSpPr>
-          <p:cNvPr id="8" name="TextBox 7"/>
-          <p:cNvSpPr txBox="1"/>
-          <p:nvPr/>
-        </p:nvSpPr>
-        <p:spPr>
-          <a:xfrm>
-            <a:off x="658368" y="6172200"/>
-            <a:ext cx="10881360" cy="457200"/>
-          </a:xfrm>
-          <a:prstGeom prst="rect">
-            <a:avLst/>
-          </a:prstGeom>
-          <a:noFill/>
-        </p:spPr>
-        <p:txBody>
-          <a:bodyPr wrap="square" lIns="0" rIns="0" tIns="0" bIns="0">
-            <a:spAutoFit/>
-          </a:bodyPr>
-          <a:lstStyle/>
-          <a:p>
-            <a:pPr algn="l">
-              <a:lnSpc>
-                <a:spcPct val="125000"/>
-              </a:lnSpc>
-              <a:spcAft>
-                <a:spcPts val="600"/>
-              </a:spcAft>
-            </a:pPr>
-            <a:r>
-              <a:rPr sz="1400" b="0">
+                <a:spcPct val="115000"/>
+              </a:lnSpc>
+              <a:spcAft>
+                <a:spcPts val="600"/>
+              </a:spcAft>
+            </a:pPr>
+            <a:r>
+              <a:rPr sz="1050" b="0">
                 <a:solidFill>
                   <a:srgbClr val="6B6A64"/>
                 </a:solidFill>
                 <a:latin typeface="Calibri"/>
               </a:rPr>
-              <a:t>El inglés se pide casi igual en los dos bloques (16% y 15%): la brecha de idioma que suele suponerse no aparece.</a:t>
+              <a:t>925 mil anuncios de CAPARD (Guatemala, Honduras, Costa Rica y República Dominicana) y 1,6 millones de México. El Salvador, Nicaragua y Panamá no tienen anuncios en la base.</a:t>
             </a:r>
           </a:p>
         </p:txBody>
@@ -4910,7 +4758,7 @@
                 </a:solidFill>
                 <a:latin typeface="Calibri"/>
               </a:rPr>
-              <a:t>LA PREGUNTA DE FONDO</a:t>
+              <a:t>HALLAZGO 4 · QUÉ SIGNIFICA</a:t>
             </a:r>
           </a:p>
         </p:txBody>
@@ -4952,45 +4800,21 @@
                 </a:solidFill>
                 <a:latin typeface="Calibri"/>
               </a:rPr>
-              <a:t>¿Está la región formando la gente que estos sectores necesitan?</a:t>
-            </a:r>
-          </a:p>
-        </p:txBody>
-      </p:sp>
-      <p:pic>
-        <p:nvPicPr>
-          <p:cNvPr id="4" name="Picture 3" descr="W11_escalamiento.png"/>
-          <p:cNvPicPr>
-            <a:picLocks noChangeAspect="1"/>
-          </p:cNvPicPr>
-          <p:nvPr/>
-        </p:nvPicPr>
-        <p:blipFill>
-          <a:blip r:embed="rId2"/>
-          <a:stretch>
-            <a:fillRect/>
-          </a:stretch>
-        </p:blipFill>
-        <p:spPr>
-          <a:xfrm>
-            <a:off x="1737365" y="1737360"/>
-            <a:ext cx="8716965" cy="3931920"/>
-          </a:xfrm>
-          <a:prstGeom prst="rect">
-            <a:avLst/>
-          </a:prstGeom>
-        </p:spPr>
-      </p:pic>
-      <p:sp>
-        <p:nvSpPr>
-          <p:cNvPr id="5" name="TextBox 4"/>
+              <a:t>México contrata para fábrica de autos; Centroamérica, para planta médica</a:t>
+            </a:r>
+          </a:p>
+        </p:txBody>
+      </p:sp>
+      <p:sp>
+        <p:nvSpPr>
+          <p:cNvPr id="4" name="TextBox 3"/>
           <p:cNvSpPr txBox="1"/>
           <p:nvPr/>
         </p:nvSpPr>
         <p:spPr>
           <a:xfrm>
-            <a:off x="658368" y="6199632"/>
-            <a:ext cx="10874959" cy="457200"/>
+            <a:off x="658368" y="1920240"/>
+            <a:ext cx="5394960" cy="2926080"/>
           </a:xfrm>
           <a:prstGeom prst="rect">
             <a:avLst/>
@@ -5005,20 +4829,409 @@
           <a:p>
             <a:pPr algn="l">
               <a:lnSpc>
-                <a:spcPct val="115000"/>
-              </a:lnSpc>
-              <a:spcAft>
-                <a:spcPts val="600"/>
-              </a:spcAft>
-            </a:pPr>
-            <a:r>
-              <a:rPr sz="1050" b="0">
+                <a:spcPct val="130000"/>
+              </a:lnSpc>
+              <a:spcAft>
+                <a:spcPts val="600"/>
+              </a:spcAft>
+            </a:pPr>
+            <a:r>
+              <a:rPr sz="1550" b="0">
+                <a:solidFill>
+                  <a:srgbClr val="1C1C1A"/>
+                </a:solidFill>
+                <a:latin typeface="Calibri"/>
+              </a:rPr>
+              <a:t>México pide mucho más:</a:t>
+            </a:r>
+          </a:p>
+          <a:p>
+            <a:pPr algn="l">
+              <a:lnSpc>
+                <a:spcPct val="130000"/>
+              </a:lnSpc>
+              <a:spcAft>
+                <a:spcPts val="600"/>
+              </a:spcAft>
+            </a:pPr>
+            <a:r>
+              <a:rPr sz="1550" b="0">
+                <a:solidFill>
+                  <a:srgbClr val="1C1C1A"/>
+                </a:solidFill>
+                <a:latin typeface="Calibri"/>
+              </a:rPr>
+              <a:t/>
+            </a:r>
+          </a:p>
+          <a:p>
+            <a:pPr algn="l">
+              <a:lnSpc>
+                <a:spcPct val="130000"/>
+              </a:lnSpc>
+              <a:spcAft>
+                <a:spcPts val="600"/>
+              </a:spcAft>
+            </a:pPr>
+            <a:r>
+              <a:rPr sz="1550" b="0">
+                <a:solidFill>
+                  <a:srgbClr val="1C1C1A"/>
+                </a:solidFill>
+                <a:latin typeface="Calibri"/>
+              </a:rPr>
+              <a:t>•  Herramientas de calidad de la industria automotriz (ocho veces más que CAPARD)</a:t>
+            </a:r>
+          </a:p>
+          <a:p>
+            <a:pPr algn="l">
+              <a:lnSpc>
+                <a:spcPct val="130000"/>
+              </a:lnSpc>
+              <a:spcAft>
+                <a:spcPts val="600"/>
+              </a:spcAft>
+            </a:pPr>
+            <a:r>
+              <a:rPr sz="1550" b="0">
+                <a:solidFill>
+                  <a:srgbClr val="1C1C1A"/>
+                </a:solidFill>
+                <a:latin typeface="Calibri"/>
+              </a:rPr>
+              <a:t/>
+            </a:r>
+          </a:p>
+          <a:p>
+            <a:pPr algn="l">
+              <a:lnSpc>
+                <a:spcPct val="130000"/>
+              </a:lnSpc>
+              <a:spcAft>
+                <a:spcPts val="600"/>
+              </a:spcAft>
+            </a:pPr>
+            <a:r>
+              <a:rPr sz="1550" b="0">
+                <a:solidFill>
+                  <a:srgbClr val="1C1C1A"/>
+                </a:solidFill>
+                <a:latin typeface="Calibri"/>
+              </a:rPr>
+              <a:t>•  Análisis de fallas en la producción (tres veces más)</a:t>
+            </a:r>
+          </a:p>
+          <a:p>
+            <a:pPr algn="l">
+              <a:lnSpc>
+                <a:spcPct val="130000"/>
+              </a:lnSpc>
+              <a:spcAft>
+                <a:spcPts val="600"/>
+              </a:spcAft>
+            </a:pPr>
+            <a:r>
+              <a:rPr sz="1550" b="0">
+                <a:solidFill>
+                  <a:srgbClr val="1C1C1A"/>
+                </a:solidFill>
+                <a:latin typeface="Calibri"/>
+              </a:rPr>
+              <a:t/>
+            </a:r>
+          </a:p>
+          <a:p>
+            <a:pPr algn="l">
+              <a:lnSpc>
+                <a:spcPct val="130000"/>
+              </a:lnSpc>
+              <a:spcAft>
+                <a:spcPts val="600"/>
+              </a:spcAft>
+            </a:pPr>
+            <a:r>
+              <a:rPr sz="1550" b="0">
+                <a:solidFill>
+                  <a:srgbClr val="1C1C1A"/>
+                </a:solidFill>
+                <a:latin typeface="Calibri"/>
+              </a:rPr>
+              <a:t>•  Robótica (casi cuatro veces más)</a:t>
+            </a:r>
+          </a:p>
+        </p:txBody>
+      </p:sp>
+      <p:sp>
+        <p:nvSpPr>
+          <p:cNvPr id="5" name="TextBox 4"/>
+          <p:cNvSpPr txBox="1"/>
+          <p:nvPr/>
+        </p:nvSpPr>
+        <p:spPr>
+          <a:xfrm>
+            <a:off x="6492240" y="1920240"/>
+            <a:ext cx="5029200" cy="2926080"/>
+          </a:xfrm>
+          <a:prstGeom prst="rect">
+            <a:avLst/>
+          </a:prstGeom>
+          <a:noFill/>
+        </p:spPr>
+        <p:txBody>
+          <a:bodyPr wrap="square" lIns="0" rIns="0" tIns="0" bIns="0">
+            <a:spAutoFit/>
+          </a:bodyPr>
+          <a:lstStyle/>
+          <a:p>
+            <a:pPr algn="l">
+              <a:lnSpc>
+                <a:spcPct val="130000"/>
+              </a:lnSpc>
+              <a:spcAft>
+                <a:spcPts val="600"/>
+              </a:spcAft>
+            </a:pPr>
+            <a:r>
+              <a:rPr sz="1550" b="0">
+                <a:solidFill>
+                  <a:srgbClr val="1C1C1A"/>
+                </a:solidFill>
+                <a:latin typeface="Calibri"/>
+              </a:rPr>
+              <a:t>CAPARD pide mucho más:</a:t>
+            </a:r>
+          </a:p>
+          <a:p>
+            <a:pPr algn="l">
+              <a:lnSpc>
+                <a:spcPct val="130000"/>
+              </a:lnSpc>
+              <a:spcAft>
+                <a:spcPts val="600"/>
+              </a:spcAft>
+            </a:pPr>
+            <a:r>
+              <a:rPr sz="1550" b="0">
+                <a:solidFill>
+                  <a:srgbClr val="1C1C1A"/>
+                </a:solidFill>
+                <a:latin typeface="Calibri"/>
+              </a:rPr>
+              <a:t/>
+            </a:r>
+          </a:p>
+          <a:p>
+            <a:pPr algn="l">
+              <a:lnSpc>
+                <a:spcPct val="130000"/>
+              </a:lnSpc>
+              <a:spcAft>
+                <a:spcPts val="600"/>
+              </a:spcAft>
+            </a:pPr>
+            <a:r>
+              <a:rPr sz="1550" b="0">
+                <a:solidFill>
+                  <a:srgbClr val="1C1C1A"/>
+                </a:solidFill>
+                <a:latin typeface="Calibri"/>
+              </a:rPr>
+              <a:t>•  Excel y herramientas de análisis de datos</a:t>
+            </a:r>
+          </a:p>
+          <a:p>
+            <a:pPr algn="l">
+              <a:lnSpc>
+                <a:spcPct val="130000"/>
+              </a:lnSpc>
+              <a:spcAft>
+                <a:spcPts val="600"/>
+              </a:spcAft>
+            </a:pPr>
+            <a:r>
+              <a:rPr sz="1550" b="0">
+                <a:solidFill>
+                  <a:srgbClr val="1C1C1A"/>
+                </a:solidFill>
+                <a:latin typeface="Calibri"/>
+              </a:rPr>
+              <a:t/>
+            </a:r>
+          </a:p>
+          <a:p>
+            <a:pPr algn="l">
+              <a:lnSpc>
+                <a:spcPct val="130000"/>
+              </a:lnSpc>
+              <a:spcAft>
+                <a:spcPts val="600"/>
+              </a:spcAft>
+            </a:pPr>
+            <a:r>
+              <a:rPr sz="1550" b="0">
+                <a:solidFill>
+                  <a:srgbClr val="1C1C1A"/>
+                </a:solidFill>
+                <a:latin typeface="Calibri"/>
+              </a:rPr>
+              <a:t>•  Buenas prácticas de manufactura (tres veces más)</a:t>
+            </a:r>
+          </a:p>
+          <a:p>
+            <a:pPr algn="l">
+              <a:lnSpc>
+                <a:spcPct val="130000"/>
+              </a:lnSpc>
+              <a:spcAft>
+                <a:spcPts val="600"/>
+              </a:spcAft>
+            </a:pPr>
+            <a:r>
+              <a:rPr sz="1550" b="0">
+                <a:solidFill>
+                  <a:srgbClr val="1C1C1A"/>
+                </a:solidFill>
+                <a:latin typeface="Calibri"/>
+              </a:rPr>
+              <a:t/>
+            </a:r>
+          </a:p>
+          <a:p>
+            <a:pPr algn="l">
+              <a:lnSpc>
+                <a:spcPct val="130000"/>
+              </a:lnSpc>
+              <a:spcAft>
+                <a:spcPts val="600"/>
+              </a:spcAft>
+            </a:pPr>
+            <a:r>
+              <a:rPr sz="1550" b="0">
+                <a:solidFill>
+                  <a:srgbClr val="1C1C1A"/>
+                </a:solidFill>
+                <a:latin typeface="Calibri"/>
+              </a:rPr>
+              <a:t>•  Requisitos de la FDA, la agencia sanitaria de Estados Unidos (tres veces más)</a:t>
+            </a:r>
+          </a:p>
+        </p:txBody>
+      </p:sp>
+      <p:cxnSp>
+        <p:nvCxnSpPr>
+          <p:cNvPr id="6" name="Connector 5"/>
+          <p:cNvCxnSpPr/>
+          <p:nvPr/>
+        </p:nvCxnSpPr>
+        <p:spPr>
+          <a:xfrm>
+            <a:off x="658368" y="4892040"/>
+            <a:ext cx="10874959" cy="0"/>
+          </a:xfrm>
+          <a:prstGeom prst="line">
+            <a:avLst/>
+          </a:prstGeom>
+          <a:ln w="19050">
+            <a:solidFill>
+              <a:srgbClr val="E4E4DF"/>
+            </a:solidFill>
+          </a:ln>
+        </p:spPr>
+        <p:style>
+          <a:lnRef idx="2">
+            <a:schemeClr val="accent1"/>
+          </a:lnRef>
+          <a:fillRef idx="0">
+            <a:schemeClr val="accent1"/>
+          </a:fillRef>
+          <a:effectRef idx="1">
+            <a:schemeClr val="accent1"/>
+          </a:effectRef>
+          <a:fontRef idx="minor">
+            <a:schemeClr val="tx1"/>
+          </a:fontRef>
+        </p:style>
+      </p:cxnSp>
+      <p:sp>
+        <p:nvSpPr>
+          <p:cNvPr id="7" name="TextBox 6"/>
+          <p:cNvSpPr txBox="1"/>
+          <p:nvPr/>
+        </p:nvSpPr>
+        <p:spPr>
+          <a:xfrm>
+            <a:off x="658368" y="5120640"/>
+            <a:ext cx="10881360" cy="1097280"/>
+          </a:xfrm>
+          <a:prstGeom prst="rect">
+            <a:avLst/>
+          </a:prstGeom>
+          <a:noFill/>
+        </p:spPr>
+        <p:txBody>
+          <a:bodyPr wrap="square" lIns="0" rIns="0" tIns="0" bIns="0">
+            <a:spAutoFit/>
+          </a:bodyPr>
+          <a:lstStyle/>
+          <a:p>
+            <a:pPr algn="l">
+              <a:lnSpc>
+                <a:spcPct val="135000"/>
+              </a:lnSpc>
+              <a:spcAft>
+                <a:spcPts val="600"/>
+              </a:spcAft>
+            </a:pPr>
+            <a:r>
+              <a:rPr sz="1800" b="0">
+                <a:solidFill>
+                  <a:srgbClr val="1C1C1A"/>
+                </a:solidFill>
+                <a:latin typeface="Calibri"/>
+              </a:rPr>
+              <a:t>Es la huella de los dispositivos médicos —un sector regulado por la FDA— frente a la de las cadenas automotriz y electrónica. Lo que la Nota Técnica ve en las exportaciones, se ve igual en los anuncios de empleo.</a:t>
+            </a:r>
+          </a:p>
+        </p:txBody>
+      </p:sp>
+      <p:sp>
+        <p:nvSpPr>
+          <p:cNvPr id="8" name="TextBox 7"/>
+          <p:cNvSpPr txBox="1"/>
+          <p:nvPr/>
+        </p:nvSpPr>
+        <p:spPr>
+          <a:xfrm>
+            <a:off x="658368" y="6172200"/>
+            <a:ext cx="10881360" cy="457200"/>
+          </a:xfrm>
+          <a:prstGeom prst="rect">
+            <a:avLst/>
+          </a:prstGeom>
+          <a:noFill/>
+        </p:spPr>
+        <p:txBody>
+          <a:bodyPr wrap="square" lIns="0" rIns="0" tIns="0" bIns="0">
+            <a:spAutoFit/>
+          </a:bodyPr>
+          <a:lstStyle/>
+          <a:p>
+            <a:pPr algn="l">
+              <a:lnSpc>
+                <a:spcPct val="125000"/>
+              </a:lnSpc>
+              <a:spcAft>
+                <a:spcPts val="600"/>
+              </a:spcAft>
+            </a:pPr>
+            <a:r>
+              <a:rPr sz="1400" b="0">
                 <a:solidFill>
                   <a:srgbClr val="6B6A64"/>
                 </a:solidFill>
                 <a:latin typeface="Calibri"/>
               </a:rPr>
-              <a:t>Izquierda: los dos países cuya encuesta permite seguir el sector año a año; Costa Rica desde 2016, porque su encuesta previa a la pandemia sí está en el kit. En 2020 no hubo encuesta. Derecha: los cinco países con anuncios, sobre el total de su economía, porque la base no permite separar los sectores.</a:t>
+              <a:t>El inglés se pide casi igual en los dos bloques (16% y 15%): la brecha de idioma que suele suponerse no aparece.</a:t>
             </a:r>
           </a:p>
         </p:txBody>
@@ -5078,7 +5291,7 @@
                 </a:solidFill>
                 <a:latin typeface="Calibri"/>
               </a:rPr>
-              <a:t>LA RESPUESTA</a:t>
+              <a:t>LA PREGUNTA DE FONDO</a:t>
             </a:r>
           </a:p>
         </p:txBody>
@@ -5120,21 +5333,45 @@
                 </a:solidFill>
                 <a:latin typeface="Calibri"/>
               </a:rPr>
-              <a:t>Las empresas piden más gente calificada; el empleo no la está dando</a:t>
-            </a:r>
-          </a:p>
-        </p:txBody>
-      </p:sp>
-      <p:sp>
-        <p:nvSpPr>
-          <p:cNvPr id="4" name="TextBox 3"/>
+              <a:t>¿Está la región formando la gente que estos sectores necesitan?</a:t>
+            </a:r>
+          </a:p>
+        </p:txBody>
+      </p:sp>
+      <p:pic>
+        <p:nvPicPr>
+          <p:cNvPr id="4" name="Picture 3" descr="W11_escalamiento.png"/>
+          <p:cNvPicPr>
+            <a:picLocks noChangeAspect="1"/>
+          </p:cNvPicPr>
+          <p:nvPr/>
+        </p:nvPicPr>
+        <p:blipFill>
+          <a:blip r:embed="rId2"/>
+          <a:stretch>
+            <a:fillRect/>
+          </a:stretch>
+        </p:blipFill>
+        <p:spPr>
+          <a:xfrm>
+            <a:off x="1737365" y="1737360"/>
+            <a:ext cx="8716965" cy="3931920"/>
+          </a:xfrm>
+          <a:prstGeom prst="rect">
+            <a:avLst/>
+          </a:prstGeom>
+        </p:spPr>
+      </p:pic>
+      <p:sp>
+        <p:nvSpPr>
+          <p:cNvPr id="5" name="TextBox 4"/>
           <p:cNvSpPr txBox="1"/>
           <p:nvPr/>
         </p:nvSpPr>
         <p:spPr>
           <a:xfrm>
-            <a:off x="658368" y="1965960"/>
-            <a:ext cx="3108960" cy="731520"/>
+            <a:off x="658368" y="6199632"/>
+            <a:ext cx="10874959" cy="457200"/>
           </a:xfrm>
           <a:prstGeom prst="rect">
             <a:avLst/>
@@ -5149,391 +5386,20 @@
           <a:p>
             <a:pPr algn="l">
               <a:lnSpc>
-                <a:spcPct val="95000"/>
-              </a:lnSpc>
-              <a:spcAft>
-                <a:spcPts val="600"/>
-              </a:spcAft>
-            </a:pPr>
-            <a:r>
-              <a:rPr sz="4200" b="1">
-                <a:solidFill>
-                  <a:srgbClr val="4A3AA7"/>
-                </a:solidFill>
-                <a:latin typeface="Calibri"/>
-              </a:rPr>
-              <a:t>−0,9</a:t>
-            </a:r>
-          </a:p>
-        </p:txBody>
-      </p:sp>
-      <p:sp>
-        <p:nvSpPr>
-          <p:cNvPr id="5" name="TextBox 4"/>
-          <p:cNvSpPr txBox="1"/>
-          <p:nvPr/>
-        </p:nvSpPr>
-        <p:spPr>
-          <a:xfrm>
-            <a:off x="658368" y="2624328"/>
-            <a:ext cx="3108960" cy="914400"/>
-          </a:xfrm>
-          <a:prstGeom prst="rect">
-            <a:avLst/>
-          </a:prstGeom>
-          <a:noFill/>
-        </p:spPr>
-        <p:txBody>
-          <a:bodyPr wrap="square" lIns="0" rIns="0" tIns="0" bIns="0">
-            <a:spAutoFit/>
-          </a:bodyPr>
-          <a:lstStyle/>
-          <a:p>
-            <a:pPr algn="l">
-              <a:lnSpc>
-                <a:spcPct val="120000"/>
-              </a:lnSpc>
-              <a:spcAft>
-                <a:spcPts val="600"/>
-              </a:spcAft>
-            </a:pPr>
-            <a:r>
-              <a:rPr sz="1250" b="0">
+                <a:spcPct val="115000"/>
+              </a:lnSpc>
+              <a:spcAft>
+                <a:spcPts val="600"/>
+              </a:spcAft>
+            </a:pPr>
+            <a:r>
+              <a:rPr sz="1050" b="0">
                 <a:solidFill>
                   <a:srgbClr val="6B6A64"/>
                 </a:solidFill>
                 <a:latin typeface="Calibri"/>
               </a:rPr>
-              <a:t>puntos por año cae la proporción de técnicos y profesionales en los sectores mexicanos</a:t>
-            </a:r>
-          </a:p>
-        </p:txBody>
-      </p:sp>
-      <p:sp>
-        <p:nvSpPr>
-          <p:cNvPr id="6" name="TextBox 5"/>
-          <p:cNvSpPr txBox="1"/>
-          <p:nvPr/>
-        </p:nvSpPr>
-        <p:spPr>
-          <a:xfrm>
-            <a:off x="4480560" y="1965960"/>
-            <a:ext cx="3291840" cy="731520"/>
-          </a:xfrm>
-          <a:prstGeom prst="rect">
-            <a:avLst/>
-          </a:prstGeom>
-          <a:noFill/>
-        </p:spPr>
-        <p:txBody>
-          <a:bodyPr wrap="square" lIns="0" rIns="0" tIns="0" bIns="0">
-            <a:spAutoFit/>
-          </a:bodyPr>
-          <a:lstStyle/>
-          <a:p>
-            <a:pPr algn="l">
-              <a:lnSpc>
-                <a:spcPct val="95000"/>
-              </a:lnSpc>
-              <a:spcAft>
-                <a:spcPts val="600"/>
-              </a:spcAft>
-            </a:pPr>
-            <a:r>
-              <a:rPr sz="4200" b="1">
-                <a:solidFill>
-                  <a:srgbClr val="6B6A64"/>
-                </a:solidFill>
-                <a:latin typeface="Calibri"/>
-              </a:rPr>
-              <a:t>617 → 633 mil</a:t>
-            </a:r>
-          </a:p>
-        </p:txBody>
-      </p:sp>
-      <p:sp>
-        <p:nvSpPr>
-          <p:cNvPr id="7" name="TextBox 6"/>
-          <p:cNvSpPr txBox="1"/>
-          <p:nvPr/>
-        </p:nvSpPr>
-        <p:spPr>
-          <a:xfrm>
-            <a:off x="4480560" y="2624328"/>
-            <a:ext cx="3291840" cy="914400"/>
-          </a:xfrm>
-          <a:prstGeom prst="rect">
-            <a:avLst/>
-          </a:prstGeom>
-          <a:noFill/>
-        </p:spPr>
-        <p:txBody>
-          <a:bodyPr wrap="square" lIns="0" rIns="0" tIns="0" bIns="0">
-            <a:spAutoFit/>
-          </a:bodyPr>
-          <a:lstStyle/>
-          <a:p>
-            <a:pPr algn="l">
-              <a:lnSpc>
-                <a:spcPct val="120000"/>
-              </a:lnSpc>
-              <a:spcAft>
-                <a:spcPts val="600"/>
-              </a:spcAft>
-            </a:pPr>
-            <a:r>
-              <a:rPr sz="1250" b="0">
-                <a:solidFill>
-                  <a:srgbClr val="6B6A64"/>
-                </a:solidFill>
-                <a:latin typeface="Calibri"/>
-              </a:rPr>
-              <a:t>y eso pasa mientras el empleo del sector crece: contrata, pero hacia abajo</a:t>
-            </a:r>
-          </a:p>
-        </p:txBody>
-      </p:sp>
-      <p:sp>
-        <p:nvSpPr>
-          <p:cNvPr id="8" name="TextBox 7"/>
-          <p:cNvSpPr txBox="1"/>
-          <p:nvPr/>
-        </p:nvSpPr>
-        <p:spPr>
-          <a:xfrm>
-            <a:off x="8503920" y="1965960"/>
-            <a:ext cx="2926080" cy="731520"/>
-          </a:xfrm>
-          <a:prstGeom prst="rect">
-            <a:avLst/>
-          </a:prstGeom>
-          <a:noFill/>
-        </p:spPr>
-        <p:txBody>
-          <a:bodyPr wrap="square" lIns="0" rIns="0" tIns="0" bIns="0">
-            <a:spAutoFit/>
-          </a:bodyPr>
-          <a:lstStyle/>
-          <a:p>
-            <a:pPr algn="l">
-              <a:lnSpc>
-                <a:spcPct val="95000"/>
-              </a:lnSpc>
-              <a:spcAft>
-                <a:spcPts val="600"/>
-              </a:spcAft>
-            </a:pPr>
-            <a:r>
-              <a:rPr sz="4200" b="1">
-                <a:solidFill>
-                  <a:srgbClr val="1BAF7A"/>
-                </a:solidFill>
-                <a:latin typeface="Calibri"/>
-              </a:rPr>
-              <a:t>+6,7</a:t>
-            </a:r>
-          </a:p>
-        </p:txBody>
-      </p:sp>
-      <p:sp>
-        <p:nvSpPr>
-          <p:cNvPr id="9" name="TextBox 8"/>
-          <p:cNvSpPr txBox="1"/>
-          <p:nvPr/>
-        </p:nvSpPr>
-        <p:spPr>
-          <a:xfrm>
-            <a:off x="8503920" y="2624328"/>
-            <a:ext cx="2926080" cy="914400"/>
-          </a:xfrm>
-          <a:prstGeom prst="rect">
-            <a:avLst/>
-          </a:prstGeom>
-          <a:noFill/>
-        </p:spPr>
-        <p:txBody>
-          <a:bodyPr wrap="square" lIns="0" rIns="0" tIns="0" bIns="0">
-            <a:spAutoFit/>
-          </a:bodyPr>
-          <a:lstStyle/>
-          <a:p>
-            <a:pPr algn="l">
-              <a:lnSpc>
-                <a:spcPct val="120000"/>
-              </a:lnSpc>
-              <a:spcAft>
-                <a:spcPts val="600"/>
-              </a:spcAft>
-            </a:pPr>
-            <a:r>
-              <a:rPr sz="1250" b="0">
-                <a:solidFill>
-                  <a:srgbClr val="6B6A64"/>
-                </a:solidFill>
-                <a:latin typeface="Calibri"/>
-              </a:rPr>
-              <a:t>puntos sube esa misma proporción en los anuncios mexicanos</a:t>
-            </a:r>
-          </a:p>
-        </p:txBody>
-      </p:sp>
-      <p:sp>
-        <p:nvSpPr>
-          <p:cNvPr id="10" name="TextBox 9"/>
-          <p:cNvSpPr txBox="1"/>
-          <p:nvPr/>
-        </p:nvSpPr>
-        <p:spPr>
-          <a:xfrm>
-            <a:off x="658368" y="3749039"/>
-            <a:ext cx="10881360" cy="457200"/>
-          </a:xfrm>
-          <a:prstGeom prst="rect">
-            <a:avLst/>
-          </a:prstGeom>
-          <a:noFill/>
-        </p:spPr>
-        <p:txBody>
-          <a:bodyPr wrap="square" lIns="0" rIns="0" tIns="0" bIns="0">
-            <a:spAutoFit/>
-          </a:bodyPr>
-          <a:lstStyle/>
-          <a:p>
-            <a:pPr algn="l">
-              <a:lnSpc>
-                <a:spcPct val="125000"/>
-              </a:lnSpc>
-              <a:spcAft>
-                <a:spcPts val="600"/>
-              </a:spcAft>
-            </a:pPr>
-            <a:r>
-              <a:rPr sz="1400" b="0">
-                <a:solidFill>
-                  <a:srgbClr val="6B6A64"/>
-                </a:solidFill>
-                <a:latin typeface="Calibri"/>
-              </a:rPr>
-              <a:t>Costa Rica permite mirar una década entera: entre 2016 y 2024 el empleo del sector se duplicó, y la proporción de técnicos y profesionales pasó de 31% antes de la pandemia a 27% después. No subió en ningún tramo.</a:t>
-            </a:r>
-          </a:p>
-        </p:txBody>
-      </p:sp>
-      <p:cxnSp>
-        <p:nvCxnSpPr>
-          <p:cNvPr id="11" name="Connector 10"/>
-          <p:cNvCxnSpPr/>
-          <p:nvPr/>
-        </p:nvCxnSpPr>
-        <p:spPr>
-          <a:xfrm>
-            <a:off x="658368" y="4590288"/>
-            <a:ext cx="10874959" cy="0"/>
-          </a:xfrm>
-          <a:prstGeom prst="line">
-            <a:avLst/>
-          </a:prstGeom>
-          <a:ln w="19050">
-            <a:solidFill>
-              <a:srgbClr val="E4E4DF"/>
-            </a:solidFill>
-          </a:ln>
-        </p:spPr>
-        <p:style>
-          <a:lnRef idx="2">
-            <a:schemeClr val="accent1"/>
-          </a:lnRef>
-          <a:fillRef idx="0">
-            <a:schemeClr val="accent1"/>
-          </a:fillRef>
-          <a:effectRef idx="1">
-            <a:schemeClr val="accent1"/>
-          </a:effectRef>
-          <a:fontRef idx="minor">
-            <a:schemeClr val="tx1"/>
-          </a:fontRef>
-        </p:style>
-      </p:cxnSp>
-      <p:sp>
-        <p:nvSpPr>
-          <p:cNvPr id="12" name="TextBox 11"/>
-          <p:cNvSpPr txBox="1"/>
-          <p:nvPr/>
-        </p:nvSpPr>
-        <p:spPr>
-          <a:xfrm>
-            <a:off x="658368" y="4846320"/>
-            <a:ext cx="10881360" cy="1463040"/>
-          </a:xfrm>
-          <a:prstGeom prst="rect">
-            <a:avLst/>
-          </a:prstGeom>
-          <a:noFill/>
-        </p:spPr>
-        <p:txBody>
-          <a:bodyPr wrap="square" lIns="0" rIns="0" tIns="0" bIns="0">
-            <a:spAutoFit/>
-          </a:bodyPr>
-          <a:lstStyle/>
-          <a:p>
-            <a:pPr algn="l">
-              <a:lnSpc>
-                <a:spcPct val="135000"/>
-              </a:lnSpc>
-              <a:spcAft>
-                <a:spcPts val="600"/>
-              </a:spcAft>
-            </a:pPr>
-            <a:r>
-              <a:rPr sz="1900" b="0">
-                <a:solidFill>
-                  <a:srgbClr val="1C1C1A"/>
-                </a:solidFill>
-                <a:latin typeface="Calibri"/>
-              </a:rPr>
-              <a:t>La Nota Técnica acierta: el capital humano calificado es el margen que importa. Pero el crecimiento exportador no lo está resolviendo solo. Los sectores crearon empleo ensanchando la base, no la capa que permite escalar.</a:t>
-            </a:r>
-          </a:p>
-        </p:txBody>
-      </p:sp>
-      <p:sp>
-        <p:nvSpPr>
-          <p:cNvPr id="13" name="TextBox 12"/>
-          <p:cNvSpPr txBox="1"/>
-          <p:nvPr/>
-        </p:nvSpPr>
-        <p:spPr>
-          <a:xfrm>
-            <a:off x="658368" y="6053328"/>
-            <a:ext cx="10881360" cy="548640"/>
-          </a:xfrm>
-          <a:prstGeom prst="rect">
-            <a:avLst/>
-          </a:prstGeom>
-          <a:noFill/>
-        </p:spPr>
-        <p:txBody>
-          <a:bodyPr wrap="square" lIns="0" rIns="0" tIns="0" bIns="0">
-            <a:spAutoFit/>
-          </a:bodyPr>
-          <a:lstStyle/>
-          <a:p>
-            <a:pPr algn="l">
-              <a:lnSpc>
-                <a:spcPct val="125000"/>
-              </a:lnSpc>
-              <a:spcAft>
-                <a:spcPts val="600"/>
-              </a:spcAft>
-            </a:pPr>
-            <a:r>
-              <a:rPr sz="1600" b="1">
-                <a:solidFill>
-                  <a:srgbClr val="1BAF7A"/>
-                </a:solidFill>
-                <a:latin typeface="Calibri"/>
-              </a:rPr>
-              <a:t>No conviene dar por hecho que el auge exportador arrastrará por sí solo la calificación de la fuerza laboral.</a:t>
+              <a:t>Izquierda: los dos países cuya encuesta permite seguir el sector año a año; Costa Rica desde 2016, porque su encuesta previa a la pandemia sí está en el kit. En 2020 no hubo encuesta. Derecha: los cinco países con anuncios, sobre el total de su economía, porque la base no permite separar los sectores.</a:t>
             </a:r>
           </a:p>
         </p:txBody>
@@ -5593,7 +5459,7 @@
                 </a:solidFill>
                 <a:latin typeface="Calibri"/>
               </a:rPr>
-              <a:t>HONESTIDAD SOBRE LOS DATOS</a:t>
+              <a:t>LA RESPUESTA</a:t>
             </a:r>
           </a:p>
         </p:txBody>
@@ -5635,7 +5501,7 @@
                 </a:solidFill>
                 <a:latin typeface="Calibri"/>
               </a:rPr>
-              <a:t>Lo que estos números NO nos permiten decir</a:t>
+              <a:t>Las empresas piden más gente calificada; el empleo no la está dando</a:t>
             </a:r>
           </a:p>
         </p:txBody>
@@ -5648,8 +5514,8 @@
         </p:nvSpPr>
         <p:spPr>
           <a:xfrm>
-            <a:off x="658368" y="1828800"/>
-            <a:ext cx="10881360" cy="3840480"/>
+            <a:off x="658368" y="1965960"/>
+            <a:ext cx="3108960" cy="731520"/>
           </a:xfrm>
           <a:prstGeom prst="rect">
             <a:avLst/>
@@ -5664,172 +5530,391 @@
           <a:p>
             <a:pPr algn="l">
               <a:lnSpc>
-                <a:spcPct val="130000"/>
-              </a:lnSpc>
-              <a:spcAft>
-                <a:spcPts val="600"/>
-              </a:spcAft>
-            </a:pPr>
-            <a:r>
-              <a:rPr sz="1600" b="0">
+                <a:spcPct val="95000"/>
+              </a:lnSpc>
+              <a:spcAft>
+                <a:spcPts val="600"/>
+              </a:spcAft>
+            </a:pPr>
+            <a:r>
+              <a:rPr sz="4200" b="1">
+                <a:solidFill>
+                  <a:srgbClr val="4A3AA7"/>
+                </a:solidFill>
+                <a:latin typeface="Calibri"/>
+              </a:rPr>
+              <a:t>−0,9</a:t>
+            </a:r>
+          </a:p>
+        </p:txBody>
+      </p:sp>
+      <p:sp>
+        <p:nvSpPr>
+          <p:cNvPr id="5" name="TextBox 4"/>
+          <p:cNvSpPr txBox="1"/>
+          <p:nvPr/>
+        </p:nvSpPr>
+        <p:spPr>
+          <a:xfrm>
+            <a:off x="658368" y="2624328"/>
+            <a:ext cx="3108960" cy="914400"/>
+          </a:xfrm>
+          <a:prstGeom prst="rect">
+            <a:avLst/>
+          </a:prstGeom>
+          <a:noFill/>
+        </p:spPr>
+        <p:txBody>
+          <a:bodyPr wrap="square" lIns="0" rIns="0" tIns="0" bIns="0">
+            <a:spAutoFit/>
+          </a:bodyPr>
+          <a:lstStyle/>
+          <a:p>
+            <a:pPr algn="l">
+              <a:lnSpc>
+                <a:spcPct val="120000"/>
+              </a:lnSpc>
+              <a:spcAft>
+                <a:spcPts val="600"/>
+              </a:spcAft>
+            </a:pPr>
+            <a:r>
+              <a:rPr sz="1250" b="0">
+                <a:solidFill>
+                  <a:srgbClr val="6B6A64"/>
+                </a:solidFill>
+                <a:latin typeface="Calibri"/>
+              </a:rPr>
+              <a:t>puntos por año cae la proporción de técnicos y profesionales en los sectores mexicanos</a:t>
+            </a:r>
+          </a:p>
+        </p:txBody>
+      </p:sp>
+      <p:sp>
+        <p:nvSpPr>
+          <p:cNvPr id="6" name="TextBox 5"/>
+          <p:cNvSpPr txBox="1"/>
+          <p:nvPr/>
+        </p:nvSpPr>
+        <p:spPr>
+          <a:xfrm>
+            <a:off x="4480560" y="1965960"/>
+            <a:ext cx="3291840" cy="731520"/>
+          </a:xfrm>
+          <a:prstGeom prst="rect">
+            <a:avLst/>
+          </a:prstGeom>
+          <a:noFill/>
+        </p:spPr>
+        <p:txBody>
+          <a:bodyPr wrap="square" lIns="0" rIns="0" tIns="0" bIns="0">
+            <a:spAutoFit/>
+          </a:bodyPr>
+          <a:lstStyle/>
+          <a:p>
+            <a:pPr algn="l">
+              <a:lnSpc>
+                <a:spcPct val="95000"/>
+              </a:lnSpc>
+              <a:spcAft>
+                <a:spcPts val="600"/>
+              </a:spcAft>
+            </a:pPr>
+            <a:r>
+              <a:rPr sz="4200" b="1">
+                <a:solidFill>
+                  <a:srgbClr val="6B6A64"/>
+                </a:solidFill>
+                <a:latin typeface="Calibri"/>
+              </a:rPr>
+              <a:t>617 → 633 mil</a:t>
+            </a:r>
+          </a:p>
+        </p:txBody>
+      </p:sp>
+      <p:sp>
+        <p:nvSpPr>
+          <p:cNvPr id="7" name="TextBox 6"/>
+          <p:cNvSpPr txBox="1"/>
+          <p:nvPr/>
+        </p:nvSpPr>
+        <p:spPr>
+          <a:xfrm>
+            <a:off x="4480560" y="2624328"/>
+            <a:ext cx="3291840" cy="914400"/>
+          </a:xfrm>
+          <a:prstGeom prst="rect">
+            <a:avLst/>
+          </a:prstGeom>
+          <a:noFill/>
+        </p:spPr>
+        <p:txBody>
+          <a:bodyPr wrap="square" lIns="0" rIns="0" tIns="0" bIns="0">
+            <a:spAutoFit/>
+          </a:bodyPr>
+          <a:lstStyle/>
+          <a:p>
+            <a:pPr algn="l">
+              <a:lnSpc>
+                <a:spcPct val="120000"/>
+              </a:lnSpc>
+              <a:spcAft>
+                <a:spcPts val="600"/>
+              </a:spcAft>
+            </a:pPr>
+            <a:r>
+              <a:rPr sz="1250" b="0">
+                <a:solidFill>
+                  <a:srgbClr val="6B6A64"/>
+                </a:solidFill>
+                <a:latin typeface="Calibri"/>
+              </a:rPr>
+              <a:t>y eso pasa mientras el empleo del sector crece: contrata, pero hacia abajo</a:t>
+            </a:r>
+          </a:p>
+        </p:txBody>
+      </p:sp>
+      <p:sp>
+        <p:nvSpPr>
+          <p:cNvPr id="8" name="TextBox 7"/>
+          <p:cNvSpPr txBox="1"/>
+          <p:nvPr/>
+        </p:nvSpPr>
+        <p:spPr>
+          <a:xfrm>
+            <a:off x="8503920" y="1965960"/>
+            <a:ext cx="2926080" cy="731520"/>
+          </a:xfrm>
+          <a:prstGeom prst="rect">
+            <a:avLst/>
+          </a:prstGeom>
+          <a:noFill/>
+        </p:spPr>
+        <p:txBody>
+          <a:bodyPr wrap="square" lIns="0" rIns="0" tIns="0" bIns="0">
+            <a:spAutoFit/>
+          </a:bodyPr>
+          <a:lstStyle/>
+          <a:p>
+            <a:pPr algn="l">
+              <a:lnSpc>
+                <a:spcPct val="95000"/>
+              </a:lnSpc>
+              <a:spcAft>
+                <a:spcPts val="600"/>
+              </a:spcAft>
+            </a:pPr>
+            <a:r>
+              <a:rPr sz="4200" b="1">
+                <a:solidFill>
+                  <a:srgbClr val="1BAF7A"/>
+                </a:solidFill>
+                <a:latin typeface="Calibri"/>
+              </a:rPr>
+              <a:t>+6,7</a:t>
+            </a:r>
+          </a:p>
+        </p:txBody>
+      </p:sp>
+      <p:sp>
+        <p:nvSpPr>
+          <p:cNvPr id="9" name="TextBox 8"/>
+          <p:cNvSpPr txBox="1"/>
+          <p:nvPr/>
+        </p:nvSpPr>
+        <p:spPr>
+          <a:xfrm>
+            <a:off x="8503920" y="2624328"/>
+            <a:ext cx="2926080" cy="914400"/>
+          </a:xfrm>
+          <a:prstGeom prst="rect">
+            <a:avLst/>
+          </a:prstGeom>
+          <a:noFill/>
+        </p:spPr>
+        <p:txBody>
+          <a:bodyPr wrap="square" lIns="0" rIns="0" tIns="0" bIns="0">
+            <a:spAutoFit/>
+          </a:bodyPr>
+          <a:lstStyle/>
+          <a:p>
+            <a:pPr algn="l">
+              <a:lnSpc>
+                <a:spcPct val="120000"/>
+              </a:lnSpc>
+              <a:spcAft>
+                <a:spcPts val="600"/>
+              </a:spcAft>
+            </a:pPr>
+            <a:r>
+              <a:rPr sz="1250" b="0">
+                <a:solidFill>
+                  <a:srgbClr val="6B6A64"/>
+                </a:solidFill>
+                <a:latin typeface="Calibri"/>
+              </a:rPr>
+              <a:t>puntos sube esa misma proporción en los anuncios mexicanos</a:t>
+            </a:r>
+          </a:p>
+        </p:txBody>
+      </p:sp>
+      <p:sp>
+        <p:nvSpPr>
+          <p:cNvPr id="10" name="TextBox 9"/>
+          <p:cNvSpPr txBox="1"/>
+          <p:nvPr/>
+        </p:nvSpPr>
+        <p:spPr>
+          <a:xfrm>
+            <a:off x="658368" y="3749039"/>
+            <a:ext cx="10881360" cy="457200"/>
+          </a:xfrm>
+          <a:prstGeom prst="rect">
+            <a:avLst/>
+          </a:prstGeom>
+          <a:noFill/>
+        </p:spPr>
+        <p:txBody>
+          <a:bodyPr wrap="square" lIns="0" rIns="0" tIns="0" bIns="0">
+            <a:spAutoFit/>
+          </a:bodyPr>
+          <a:lstStyle/>
+          <a:p>
+            <a:pPr algn="l">
+              <a:lnSpc>
+                <a:spcPct val="125000"/>
+              </a:lnSpc>
+              <a:spcAft>
+                <a:spcPts val="600"/>
+              </a:spcAft>
+            </a:pPr>
+            <a:r>
+              <a:rPr sz="1400" b="0">
+                <a:solidFill>
+                  <a:srgbClr val="6B6A64"/>
+                </a:solidFill>
+                <a:latin typeface="Calibri"/>
+              </a:rPr>
+              <a:t>Costa Rica permite mirar una década entera: entre 2016 y 2024 el empleo del sector se duplicó, y la proporción de técnicos y profesionales pasó de 31% antes de la pandemia a 27% después. No subió en ningún tramo.</a:t>
+            </a:r>
+          </a:p>
+        </p:txBody>
+      </p:sp>
+      <p:cxnSp>
+        <p:nvCxnSpPr>
+          <p:cNvPr id="11" name="Connector 10"/>
+          <p:cNvCxnSpPr/>
+          <p:nvPr/>
+        </p:nvCxnSpPr>
+        <p:spPr>
+          <a:xfrm>
+            <a:off x="658368" y="4590288"/>
+            <a:ext cx="10874959" cy="0"/>
+          </a:xfrm>
+          <a:prstGeom prst="line">
+            <a:avLst/>
+          </a:prstGeom>
+          <a:ln w="19050">
+            <a:solidFill>
+              <a:srgbClr val="E4E4DF"/>
+            </a:solidFill>
+          </a:ln>
+        </p:spPr>
+        <p:style>
+          <a:lnRef idx="2">
+            <a:schemeClr val="accent1"/>
+          </a:lnRef>
+          <a:fillRef idx="0">
+            <a:schemeClr val="accent1"/>
+          </a:fillRef>
+          <a:effectRef idx="1">
+            <a:schemeClr val="accent1"/>
+          </a:effectRef>
+          <a:fontRef idx="minor">
+            <a:schemeClr val="tx1"/>
+          </a:fontRef>
+        </p:style>
+      </p:cxnSp>
+      <p:sp>
+        <p:nvSpPr>
+          <p:cNvPr id="12" name="TextBox 11"/>
+          <p:cNvSpPr txBox="1"/>
+          <p:nvPr/>
+        </p:nvSpPr>
+        <p:spPr>
+          <a:xfrm>
+            <a:off x="658368" y="4846320"/>
+            <a:ext cx="10881360" cy="1463040"/>
+          </a:xfrm>
+          <a:prstGeom prst="rect">
+            <a:avLst/>
+          </a:prstGeom>
+          <a:noFill/>
+        </p:spPr>
+        <p:txBody>
+          <a:bodyPr wrap="square" lIns="0" rIns="0" tIns="0" bIns="0">
+            <a:spAutoFit/>
+          </a:bodyPr>
+          <a:lstStyle/>
+          <a:p>
+            <a:pPr algn="l">
+              <a:lnSpc>
+                <a:spcPct val="135000"/>
+              </a:lnSpc>
+              <a:spcAft>
+                <a:spcPts val="600"/>
+              </a:spcAft>
+            </a:pPr>
+            <a:r>
+              <a:rPr sz="1900" b="0">
                 <a:solidFill>
                   <a:srgbClr val="1C1C1A"/>
                 </a:solidFill>
                 <a:latin typeface="Calibri"/>
               </a:rPr>
-              <a:t>•  No sabemos si se van a perder empleos. La medida dice cuánto tiempo se puede ahorrar, no quién se queda con ese ahorro.</a:t>
-            </a:r>
-          </a:p>
-          <a:p>
-            <a:pPr algn="l">
-              <a:lnSpc>
-                <a:spcPct val="130000"/>
-              </a:lnSpc>
-              <a:spcAft>
-                <a:spcPts val="600"/>
-              </a:spcAft>
-            </a:pPr>
-            <a:r>
-              <a:rPr sz="1600" b="0">
-                <a:solidFill>
-                  <a:srgbClr val="1C1C1A"/>
-                </a:solidFill>
-                <a:latin typeface="Calibri"/>
-              </a:rPr>
-              <a:t/>
-            </a:r>
-          </a:p>
-          <a:p>
-            <a:pPr algn="l">
-              <a:lnSpc>
-                <a:spcPct val="130000"/>
-              </a:lnSpc>
-              <a:spcAft>
-                <a:spcPts val="600"/>
-              </a:spcAft>
-            </a:pPr>
-            <a:r>
-              <a:rPr sz="1600" b="0">
-                <a:solidFill>
-                  <a:srgbClr val="1C1C1A"/>
-                </a:solidFill>
-                <a:latin typeface="Calibri"/>
-              </a:rPr>
-              <a:t>•  Los anuncios en línea no son el mercado laboral. Son la parte formal y urbana: sirven para ver qué se pide, no cuántos empleos hay.</a:t>
-            </a:r>
-          </a:p>
-          <a:p>
-            <a:pPr algn="l">
-              <a:lnSpc>
-                <a:spcPct val="130000"/>
-              </a:lnSpc>
-              <a:spcAft>
-                <a:spcPts val="600"/>
-              </a:spcAft>
-            </a:pPr>
-            <a:r>
-              <a:rPr sz="1600" b="0">
-                <a:solidFill>
-                  <a:srgbClr val="1C1C1A"/>
-                </a:solidFill>
-                <a:latin typeface="Calibri"/>
-              </a:rPr>
-              <a:t/>
-            </a:r>
-          </a:p>
-          <a:p>
-            <a:pPr algn="l">
-              <a:lnSpc>
-                <a:spcPct val="130000"/>
-              </a:lnSpc>
-              <a:spcAft>
-                <a:spcPts val="600"/>
-              </a:spcAft>
-            </a:pPr>
-            <a:r>
-              <a:rPr sz="1600" b="0">
-                <a:solidFill>
-                  <a:srgbClr val="1C1C1A"/>
-                </a:solidFill>
-                <a:latin typeface="Calibri"/>
-              </a:rPr>
-              <a:t>•  Faltan países. Nicaragua y Panamá no están; El Salvador no tiene anuncios. Nuestro CAPARD nunca son los siete países.</a:t>
-            </a:r>
-          </a:p>
-          <a:p>
-            <a:pPr algn="l">
-              <a:lnSpc>
-                <a:spcPct val="130000"/>
-              </a:lnSpc>
-              <a:spcAft>
-                <a:spcPts val="600"/>
-              </a:spcAft>
-            </a:pPr>
-            <a:r>
-              <a:rPr sz="1600" b="0">
-                <a:solidFill>
-                  <a:srgbClr val="1C1C1A"/>
-                </a:solidFill>
-                <a:latin typeface="Calibri"/>
-              </a:rPr>
-              <a:t/>
-            </a:r>
-          </a:p>
-          <a:p>
-            <a:pPr algn="l">
-              <a:lnSpc>
-                <a:spcPct val="130000"/>
-              </a:lnSpc>
-              <a:spcAft>
-                <a:spcPts val="600"/>
-              </a:spcAft>
-            </a:pPr>
-            <a:r>
-              <a:rPr sz="1600" b="0">
-                <a:solidFill>
-                  <a:srgbClr val="1C1C1A"/>
-                </a:solidFill>
-                <a:latin typeface="Calibri"/>
-              </a:rPr>
-              <a:t>•  Guatemala queda fuera de varios análisis porque su encuesta registra la ocupación con menos detalle que las demás.</a:t>
-            </a:r>
-          </a:p>
-          <a:p>
-            <a:pPr algn="l">
-              <a:lnSpc>
-                <a:spcPct val="130000"/>
-              </a:lnSpc>
-              <a:spcAft>
-                <a:spcPts val="600"/>
-              </a:spcAft>
-            </a:pPr>
-            <a:r>
-              <a:rPr sz="1600" b="0">
-                <a:solidFill>
-                  <a:srgbClr val="1C1C1A"/>
-                </a:solidFill>
-                <a:latin typeface="Calibri"/>
-              </a:rPr>
-              <a:t/>
-            </a:r>
-          </a:p>
-          <a:p>
-            <a:pPr algn="l">
-              <a:lnSpc>
-                <a:spcPct val="130000"/>
-              </a:lnSpc>
-              <a:spcAft>
-                <a:spcPts val="600"/>
-              </a:spcAft>
-            </a:pPr>
-            <a:r>
-              <a:rPr sz="1600" b="0">
-                <a:solidFill>
-                  <a:srgbClr val="1C1C1A"/>
-                </a:solidFill>
-                <a:latin typeface="Calibri"/>
-              </a:rPr>
-              <a:t>•  Un empleo poco expuesto también gana poco con la IA. Estar a salvo de esta ola y estar estancado en tareas de bajo valor son, en estos datos, la misma cosa.</a:t>
+              <a:t>La Nota Técnica acierta: el capital humano calificado es el margen que importa. Pero el crecimiento exportador no lo está resolviendo solo. Los sectores crearon empleo ensanchando la base, no la capa que permite escalar.</a:t>
+            </a:r>
+          </a:p>
+        </p:txBody>
+      </p:sp>
+      <p:sp>
+        <p:nvSpPr>
+          <p:cNvPr id="13" name="TextBox 12"/>
+          <p:cNvSpPr txBox="1"/>
+          <p:nvPr/>
+        </p:nvSpPr>
+        <p:spPr>
+          <a:xfrm>
+            <a:off x="658368" y="6053328"/>
+            <a:ext cx="10881360" cy="548640"/>
+          </a:xfrm>
+          <a:prstGeom prst="rect">
+            <a:avLst/>
+          </a:prstGeom>
+          <a:noFill/>
+        </p:spPr>
+        <p:txBody>
+          <a:bodyPr wrap="square" lIns="0" rIns="0" tIns="0" bIns="0">
+            <a:spAutoFit/>
+          </a:bodyPr>
+          <a:lstStyle/>
+          <a:p>
+            <a:pPr algn="l">
+              <a:lnSpc>
+                <a:spcPct val="125000"/>
+              </a:lnSpc>
+              <a:spcAft>
+                <a:spcPts val="600"/>
+              </a:spcAft>
+            </a:pPr>
+            <a:r>
+              <a:rPr sz="1600" b="1">
+                <a:solidFill>
+                  <a:srgbClr val="1BAF7A"/>
+                </a:solidFill>
+                <a:latin typeface="Calibri"/>
+              </a:rPr>
+              <a:t>No conviene dar por hecho que el auge exportador arrastrará por sí solo la calificación de la fuerza laboral.</a:t>
             </a:r>
           </a:p>
         </p:txBody>
@@ -5889,7 +5974,7 @@
                 </a:solidFill>
                 <a:latin typeface="Calibri"/>
               </a:rPr>
-              <a:t>PARA DISCUSIÓN</a:t>
+              <a:t>HONESTIDAD SOBRE LOS DATOS</a:t>
             </a:r>
           </a:p>
         </p:txBody>
@@ -5931,7 +6016,7 @@
                 </a:solidFill>
                 <a:latin typeface="Calibri"/>
               </a:rPr>
-              <a:t>Cuatro cosas que se desprenden</a:t>
+              <a:t>Lo que estos números NO nos permiten decir</a:t>
             </a:r>
           </a:p>
         </p:txBody>
@@ -5944,8 +6029,8 @@
         </p:nvSpPr>
         <p:spPr>
           <a:xfrm>
-            <a:off x="658368" y="1783080"/>
-            <a:ext cx="5394960" cy="4023360"/>
+            <a:off x="658368" y="1828800"/>
+            <a:ext cx="10881360" cy="3840480"/>
           </a:xfrm>
           <a:prstGeom prst="rect">
             <a:avLst/>
@@ -5967,13 +6052,13 @@
               </a:spcAft>
             </a:pPr>
             <a:r>
-              <a:rPr sz="1550" b="0">
+              <a:rPr sz="1600" b="0">
                 <a:solidFill>
                   <a:srgbClr val="1C1C1A"/>
                 </a:solidFill>
                 <a:latin typeface="Calibri"/>
               </a:rPr>
-              <a:t>1.  No frenar la atracción de estos sectores por miedo a la IA. Su base de empleo es de las menos alcanzables por estas herramientas.</a:t>
+              <a:t>•  No sabemos si se van a perder empleos. La medida dice cuánto tiempo se puede ahorrar, no quién se queda con ese ahorro.</a:t>
             </a:r>
           </a:p>
           <a:p>
@@ -5986,7 +6071,7 @@
               </a:spcAft>
             </a:pPr>
             <a:r>
-              <a:rPr sz="1550" b="0">
+              <a:rPr sz="1600" b="0">
                 <a:solidFill>
                   <a:srgbClr val="1C1C1A"/>
                 </a:solidFill>
@@ -6005,38 +6090,15 @@
               </a:spcAft>
             </a:pPr>
             <a:r>
-              <a:rPr sz="1550" b="0">
+              <a:rPr sz="1600" b="0">
                 <a:solidFill>
                   <a:srgbClr val="1C1C1A"/>
                 </a:solidFill>
                 <a:latin typeface="Calibri"/>
               </a:rPr>
-              <a:t>2.  Pero tampoco esperar que el auge resuelva la calificación. Hoy los sectores crecen ensanchando la planta, no la capa técnica.</a:t>
-            </a:r>
-          </a:p>
-        </p:txBody>
-      </p:sp>
-      <p:sp>
-        <p:nvSpPr>
-          <p:cNvPr id="5" name="TextBox 4"/>
-          <p:cNvSpPr txBox="1"/>
-          <p:nvPr/>
-        </p:nvSpPr>
-        <p:spPr>
-          <a:xfrm>
-            <a:off x="6492240" y="1783080"/>
-            <a:ext cx="5029200" cy="4023360"/>
-          </a:xfrm>
-          <a:prstGeom prst="rect">
-            <a:avLst/>
-          </a:prstGeom>
-          <a:noFill/>
-        </p:spPr>
-        <p:txBody>
-          <a:bodyPr wrap="square" lIns="0" rIns="0" tIns="0" bIns="0">
-            <a:spAutoFit/>
-          </a:bodyPr>
-          <a:lstStyle/>
+              <a:t>•  Los anuncios en línea no son el mercado laboral. Son la parte formal y urbana: sirven para ver qué se pide, no cuántos empleos hay.</a:t>
+            </a:r>
+          </a:p>
           <a:p>
             <a:pPr algn="l">
               <a:lnSpc>
@@ -6047,13 +6109,13 @@
               </a:spcAft>
             </a:pPr>
             <a:r>
-              <a:rPr sz="1550" b="0">
+              <a:rPr sz="1600" b="0">
                 <a:solidFill>
                   <a:srgbClr val="1C1C1A"/>
                 </a:solidFill>
                 <a:latin typeface="Calibri"/>
               </a:rPr>
-              <a:t>3.  Formar técnicos y profesionales es a la vez la agenda exportadora y la agenda de IA. Es la misma gente.</a:t>
+              <a:t/>
             </a:r>
           </a:p>
           <a:p>
@@ -6066,12 +6128,31 @@
               </a:spcAft>
             </a:pPr>
             <a:r>
-              <a:rPr sz="1550" b="0">
+              <a:rPr sz="1600" b="0">
                 <a:solidFill>
                   <a:srgbClr val="1C1C1A"/>
                 </a:solidFill>
                 <a:latin typeface="Calibri"/>
               </a:rPr>
+              <a:t>•  Faltan países. Nicaragua y Panamá no están; El Salvador no tiene anuncios. Nuestro CAPARD nunca son los siete países.</a:t>
+            </a:r>
+          </a:p>
+          <a:p>
+            <a:pPr algn="l">
+              <a:lnSpc>
+                <a:spcPct val="130000"/>
+              </a:lnSpc>
+              <a:spcAft>
+                <a:spcPts val="600"/>
+              </a:spcAft>
+            </a:pPr>
+            <a:r>
+              <a:rPr sz="1600" b="0">
+                <a:solidFill>
+                  <a:srgbClr val="1C1C1A"/>
+                </a:solidFill>
+                <a:latin typeface="Calibri"/>
+              </a:rPr>
               <a:t/>
             </a:r>
           </a:p>
@@ -6085,73 +6166,15 @@
               </a:spcAft>
             </a:pPr>
             <a:r>
-              <a:rPr sz="1550" b="0">
+              <a:rPr sz="1600" b="0">
                 <a:solidFill>
                   <a:srgbClr val="1C1C1A"/>
                 </a:solidFill>
                 <a:latin typeface="Calibri"/>
               </a:rPr>
-              <a:t>4.  Atender al personal administrativo. Son unas 60 mil personas en estos sectores, con la exposición más alta después de los profesionales, y el debate público casi no los menciona.</a:t>
-            </a:r>
-          </a:p>
-        </p:txBody>
-      </p:sp>
-      <p:cxnSp>
-        <p:nvCxnSpPr>
-          <p:cNvPr id="6" name="Connector 5"/>
-          <p:cNvCxnSpPr/>
-          <p:nvPr/>
-        </p:nvCxnSpPr>
-        <p:spPr>
-          <a:xfrm>
-            <a:off x="658368" y="5257800"/>
-            <a:ext cx="10874959" cy="0"/>
-          </a:xfrm>
-          <a:prstGeom prst="line">
-            <a:avLst/>
-          </a:prstGeom>
-          <a:ln w="19050">
-            <a:solidFill>
-              <a:srgbClr val="E4E4DF"/>
-            </a:solidFill>
-          </a:ln>
-        </p:spPr>
-        <p:style>
-          <a:lnRef idx="2">
-            <a:schemeClr val="accent1"/>
-          </a:lnRef>
-          <a:fillRef idx="0">
-            <a:schemeClr val="accent1"/>
-          </a:fillRef>
-          <a:effectRef idx="1">
-            <a:schemeClr val="accent1"/>
-          </a:effectRef>
-          <a:fontRef idx="minor">
-            <a:schemeClr val="tx1"/>
-          </a:fontRef>
-        </p:style>
-      </p:cxnSp>
-      <p:sp>
-        <p:nvSpPr>
-          <p:cNvPr id="7" name="TextBox 6"/>
-          <p:cNvSpPr txBox="1"/>
-          <p:nvPr/>
-        </p:nvSpPr>
-        <p:spPr>
-          <a:xfrm>
-            <a:off x="658368" y="5486400"/>
-            <a:ext cx="10881360" cy="822960"/>
-          </a:xfrm>
-          <a:prstGeom prst="rect">
-            <a:avLst/>
-          </a:prstGeom>
-          <a:noFill/>
-        </p:spPr>
-        <p:txBody>
-          <a:bodyPr wrap="square" lIns="0" rIns="0" tIns="0" bIns="0">
-            <a:spAutoFit/>
-          </a:bodyPr>
-          <a:lstStyle/>
+              <a:t>•  Guatemala queda fuera de varios análisis porque su encuesta registra la ocupación con menos detalle que las demás.</a:t>
+            </a:r>
+          </a:p>
           <a:p>
             <a:pPr algn="l">
               <a:lnSpc>
@@ -6162,13 +6185,32 @@
               </a:spcAft>
             </a:pPr>
             <a:r>
-              <a:rPr sz="1500" b="0">
-                <a:solidFill>
-                  <a:srgbClr val="6B6A64"/>
-                </a:solidFill>
-                <a:latin typeface="Calibri"/>
-              </a:rPr>
-              <a:t>Pendiente: conseguir los anuncios de Panamá y El Salvador, y explorar con el equipo si conviene un corte por tamaño de empresa.</a:t>
+              <a:rPr sz="1600" b="0">
+                <a:solidFill>
+                  <a:srgbClr val="1C1C1A"/>
+                </a:solidFill>
+                <a:latin typeface="Calibri"/>
+              </a:rPr>
+              <a:t/>
+            </a:r>
+          </a:p>
+          <a:p>
+            <a:pPr algn="l">
+              <a:lnSpc>
+                <a:spcPct val="130000"/>
+              </a:lnSpc>
+              <a:spcAft>
+                <a:spcPts val="600"/>
+              </a:spcAft>
+            </a:pPr>
+            <a:r>
+              <a:rPr sz="1600" b="0">
+                <a:solidFill>
+                  <a:srgbClr val="1C1C1A"/>
+                </a:solidFill>
+                <a:latin typeface="Calibri"/>
+              </a:rPr>
+              <a:t>•  Un empleo poco expuesto también gana poco con la IA. Estar a salvo de esta ola y estar estancado en tareas de bajo valor son, en estos datos, la misma cosa.</a:t>
             </a:r>
           </a:p>
         </p:txBody>
@@ -6191,23 +6233,267 @@
         <p:nvPr/>
       </p:nvGrpSpPr>
       <p:grpSpPr/>
+      <p:sp>
+        <p:nvSpPr>
+          <p:cNvPr id="2" name="TextBox 1"/>
+          <p:cNvSpPr txBox="1"/>
+          <p:nvPr/>
+        </p:nvSpPr>
+        <p:spPr>
+          <a:xfrm>
+            <a:off x="658368" y="402336"/>
+            <a:ext cx="10874959" cy="274320"/>
+          </a:xfrm>
+          <a:prstGeom prst="rect">
+            <a:avLst/>
+          </a:prstGeom>
+          <a:noFill/>
+        </p:spPr>
+        <p:txBody>
+          <a:bodyPr wrap="square" lIns="0" rIns="0" tIns="0" bIns="0">
+            <a:spAutoFit/>
+          </a:bodyPr>
+          <a:lstStyle/>
+          <a:p>
+            <a:pPr algn="l">
+              <a:lnSpc>
+                <a:spcPct val="100000"/>
+              </a:lnSpc>
+              <a:spcAft>
+                <a:spcPts val="600"/>
+              </a:spcAft>
+            </a:pPr>
+            <a:r>
+              <a:rPr sz="1100" b="0">
+                <a:solidFill>
+                  <a:srgbClr val="6B6A64"/>
+                </a:solidFill>
+                <a:latin typeface="Calibri"/>
+              </a:rPr>
+              <a:t>PARA DISCUSIÓN</a:t>
+            </a:r>
+          </a:p>
+        </p:txBody>
+      </p:sp>
+      <p:sp>
+        <p:nvSpPr>
+          <p:cNvPr id="3" name="TextBox 2"/>
+          <p:cNvSpPr txBox="1"/>
+          <p:nvPr/>
+        </p:nvSpPr>
+        <p:spPr>
+          <a:xfrm>
+            <a:off x="658368" y="713232"/>
+            <a:ext cx="10874959" cy="914400"/>
+          </a:xfrm>
+          <a:prstGeom prst="rect">
+            <a:avLst/>
+          </a:prstGeom>
+          <a:noFill/>
+        </p:spPr>
+        <p:txBody>
+          <a:bodyPr wrap="square" lIns="0" rIns="0" tIns="0" bIns="0">
+            <a:spAutoFit/>
+          </a:bodyPr>
+          <a:lstStyle/>
+          <a:p>
+            <a:pPr algn="l">
+              <a:lnSpc>
+                <a:spcPct val="106000"/>
+              </a:lnSpc>
+              <a:spcAft>
+                <a:spcPts val="600"/>
+              </a:spcAft>
+            </a:pPr>
+            <a:r>
+              <a:rPr sz="3000" b="1">
+                <a:solidFill>
+                  <a:srgbClr val="1C1C1A"/>
+                </a:solidFill>
+                <a:latin typeface="Calibri"/>
+              </a:rPr>
+              <a:t>Cuatro cosas que se desprenden</a:t>
+            </a:r>
+          </a:p>
+        </p:txBody>
+      </p:sp>
+      <p:sp>
+        <p:nvSpPr>
+          <p:cNvPr id="4" name="TextBox 3"/>
+          <p:cNvSpPr txBox="1"/>
+          <p:nvPr/>
+        </p:nvSpPr>
+        <p:spPr>
+          <a:xfrm>
+            <a:off x="658368" y="1783080"/>
+            <a:ext cx="5394960" cy="4023360"/>
+          </a:xfrm>
+          <a:prstGeom prst="rect">
+            <a:avLst/>
+          </a:prstGeom>
+          <a:noFill/>
+        </p:spPr>
+        <p:txBody>
+          <a:bodyPr wrap="square" lIns="0" rIns="0" tIns="0" bIns="0">
+            <a:spAutoFit/>
+          </a:bodyPr>
+          <a:lstStyle/>
+          <a:p>
+            <a:pPr algn="l">
+              <a:lnSpc>
+                <a:spcPct val="130000"/>
+              </a:lnSpc>
+              <a:spcAft>
+                <a:spcPts val="600"/>
+              </a:spcAft>
+            </a:pPr>
+            <a:r>
+              <a:rPr sz="1550" b="0">
+                <a:solidFill>
+                  <a:srgbClr val="1C1C1A"/>
+                </a:solidFill>
+                <a:latin typeface="Calibri"/>
+              </a:rPr>
+              <a:t>1.  No frenar la atracción de estos sectores por miedo a la IA. Su base de empleo es de las menos alcanzables por estas herramientas.</a:t>
+            </a:r>
+          </a:p>
+          <a:p>
+            <a:pPr algn="l">
+              <a:lnSpc>
+                <a:spcPct val="130000"/>
+              </a:lnSpc>
+              <a:spcAft>
+                <a:spcPts val="600"/>
+              </a:spcAft>
+            </a:pPr>
+            <a:r>
+              <a:rPr sz="1550" b="0">
+                <a:solidFill>
+                  <a:srgbClr val="1C1C1A"/>
+                </a:solidFill>
+                <a:latin typeface="Calibri"/>
+              </a:rPr>
+              <a:t/>
+            </a:r>
+          </a:p>
+          <a:p>
+            <a:pPr algn="l">
+              <a:lnSpc>
+                <a:spcPct val="130000"/>
+              </a:lnSpc>
+              <a:spcAft>
+                <a:spcPts val="600"/>
+              </a:spcAft>
+            </a:pPr>
+            <a:r>
+              <a:rPr sz="1550" b="0">
+                <a:solidFill>
+                  <a:srgbClr val="1C1C1A"/>
+                </a:solidFill>
+                <a:latin typeface="Calibri"/>
+              </a:rPr>
+              <a:t>2.  Pero tampoco esperar que el auge resuelva la calificación. Hoy los sectores crecen ensanchando la planta, no la capa técnica.</a:t>
+            </a:r>
+          </a:p>
+        </p:txBody>
+      </p:sp>
+      <p:sp>
+        <p:nvSpPr>
+          <p:cNvPr id="5" name="TextBox 4"/>
+          <p:cNvSpPr txBox="1"/>
+          <p:nvPr/>
+        </p:nvSpPr>
+        <p:spPr>
+          <a:xfrm>
+            <a:off x="6492240" y="1783080"/>
+            <a:ext cx="5029200" cy="4023360"/>
+          </a:xfrm>
+          <a:prstGeom prst="rect">
+            <a:avLst/>
+          </a:prstGeom>
+          <a:noFill/>
+        </p:spPr>
+        <p:txBody>
+          <a:bodyPr wrap="square" lIns="0" rIns="0" tIns="0" bIns="0">
+            <a:spAutoFit/>
+          </a:bodyPr>
+          <a:lstStyle/>
+          <a:p>
+            <a:pPr algn="l">
+              <a:lnSpc>
+                <a:spcPct val="130000"/>
+              </a:lnSpc>
+              <a:spcAft>
+                <a:spcPts val="600"/>
+              </a:spcAft>
+            </a:pPr>
+            <a:r>
+              <a:rPr sz="1550" b="0">
+                <a:solidFill>
+                  <a:srgbClr val="1C1C1A"/>
+                </a:solidFill>
+                <a:latin typeface="Calibri"/>
+              </a:rPr>
+              <a:t>3.  Formar técnicos y profesionales es a la vez la agenda exportadora y la agenda de IA. Es la misma gente.</a:t>
+            </a:r>
+          </a:p>
+          <a:p>
+            <a:pPr algn="l">
+              <a:lnSpc>
+                <a:spcPct val="130000"/>
+              </a:lnSpc>
+              <a:spcAft>
+                <a:spcPts val="600"/>
+              </a:spcAft>
+            </a:pPr>
+            <a:r>
+              <a:rPr sz="1550" b="0">
+                <a:solidFill>
+                  <a:srgbClr val="1C1C1A"/>
+                </a:solidFill>
+                <a:latin typeface="Calibri"/>
+              </a:rPr>
+              <a:t/>
+            </a:r>
+          </a:p>
+          <a:p>
+            <a:pPr algn="l">
+              <a:lnSpc>
+                <a:spcPct val="130000"/>
+              </a:lnSpc>
+              <a:spcAft>
+                <a:spcPts val="600"/>
+              </a:spcAft>
+            </a:pPr>
+            <a:r>
+              <a:rPr sz="1550" b="0">
+                <a:solidFill>
+                  <a:srgbClr val="1C1C1A"/>
+                </a:solidFill>
+                <a:latin typeface="Calibri"/>
+              </a:rPr>
+              <a:t>4.  Atender al personal administrativo. Son unas 60 mil personas en estos sectores, con la exposición más alta después de los profesionales, y el debate público casi no los menciona.</a:t>
+            </a:r>
+          </a:p>
+        </p:txBody>
+      </p:sp>
       <p:cxnSp>
         <p:nvCxnSpPr>
-          <p:cNvPr id="2" name="Connector 1"/>
+          <p:cNvPr id="6" name="Connector 5"/>
           <p:cNvCxnSpPr/>
           <p:nvPr/>
         </p:nvCxnSpPr>
         <p:spPr>
           <a:xfrm>
-            <a:off x="658368" y="2377440"/>
-            <a:ext cx="1463040" cy="0"/>
+            <a:off x="658368" y="5257800"/>
+            <a:ext cx="10874959" cy="0"/>
           </a:xfrm>
           <a:prstGeom prst="line">
             <a:avLst/>
           </a:prstGeom>
-          <a:ln w="50800">
+          <a:ln w="19050">
             <a:solidFill>
-              <a:srgbClr val="1BAF7A"/>
+              <a:srgbClr val="E4E4DF"/>
             </a:solidFill>
           </a:ln>
         </p:spPr>
@@ -6228,14 +6514,14 @@
       </p:cxnSp>
       <p:sp>
         <p:nvSpPr>
-          <p:cNvPr id="3" name="TextBox 2"/>
+          <p:cNvPr id="7" name="TextBox 6"/>
           <p:cNvSpPr txBox="1"/>
           <p:nvPr/>
         </p:nvSpPr>
         <p:spPr>
           <a:xfrm>
-            <a:off x="658368" y="2697480"/>
-            <a:ext cx="10424160" cy="1463040"/>
+            <a:off x="658368" y="5486400"/>
+            <a:ext cx="10881360" cy="822960"/>
           </a:xfrm>
           <a:prstGeom prst="rect">
             <a:avLst/>
@@ -6250,7 +6536,7 @@
           <a:p>
             <a:pPr algn="l">
               <a:lnSpc>
-                <a:spcPct val="125000"/>
+                <a:spcPct val="130000"/>
               </a:lnSpc>
               <a:spcAft>
                 <a:spcPts val="600"/>
@@ -6263,91 +6549,7 @@
                 </a:solidFill>
                 <a:latin typeface="Calibri"/>
               </a:rPr>
-              <a:t>EN UNA FRASE</a:t>
-            </a:r>
-          </a:p>
-        </p:txBody>
-      </p:sp>
-      <p:sp>
-        <p:nvSpPr>
-          <p:cNvPr id="4" name="TextBox 3"/>
-          <p:cNvSpPr txBox="1"/>
-          <p:nvPr/>
-        </p:nvSpPr>
-        <p:spPr>
-          <a:xfrm>
-            <a:off x="658368" y="3108960"/>
-            <a:ext cx="10607040" cy="2011680"/>
-          </a:xfrm>
-          <a:prstGeom prst="rect">
-            <a:avLst/>
-          </a:prstGeom>
-          <a:noFill/>
-        </p:spPr>
-        <p:txBody>
-          <a:bodyPr wrap="square" lIns="0" rIns="0" tIns="0" bIns="0">
-            <a:spAutoFit/>
-          </a:bodyPr>
-          <a:lstStyle/>
-          <a:p>
-            <a:pPr algn="l">
-              <a:lnSpc>
-                <a:spcPct val="130000"/>
-              </a:lnSpc>
-              <a:spcAft>
-                <a:spcPts val="600"/>
-              </a:spcAft>
-            </a:pPr>
-            <a:r>
-              <a:rPr sz="2600" b="0">
-                <a:solidFill>
-                  <a:srgbClr val="1C1C1A"/>
-                </a:solidFill>
-                <a:latin typeface="Calibri"/>
-              </a:rPr>
-              <a:t>La inteligencia artificial no amenaza la planta de estos sectores: alcanza sobre todo a la capa calificada, que es justamente la que la región necesita ampliar para exportar más valor. Y esa capa no está creciendo.</a:t>
-            </a:r>
-          </a:p>
-        </p:txBody>
-      </p:sp>
-      <p:sp>
-        <p:nvSpPr>
-          <p:cNvPr id="5" name="TextBox 4"/>
-          <p:cNvSpPr txBox="1"/>
-          <p:nvPr/>
-        </p:nvSpPr>
-        <p:spPr>
-          <a:xfrm>
-            <a:off x="658368" y="5669280"/>
-            <a:ext cx="10607040" cy="731520"/>
-          </a:xfrm>
-          <a:prstGeom prst="rect">
-            <a:avLst/>
-          </a:prstGeom>
-          <a:noFill/>
-        </p:spPr>
-        <p:txBody>
-          <a:bodyPr wrap="square" lIns="0" rIns="0" tIns="0" bIns="0">
-            <a:spAutoFit/>
-          </a:bodyPr>
-          <a:lstStyle/>
-          <a:p>
-            <a:pPr algn="l">
-              <a:lnSpc>
-                <a:spcPct val="125000"/>
-              </a:lnSpc>
-              <a:spcAft>
-                <a:spcPts val="600"/>
-              </a:spcAft>
-            </a:pPr>
-            <a:r>
-              <a:rPr sz="1300" b="0">
-                <a:solidFill>
-                  <a:srgbClr val="6B6A64"/>
-                </a:solidFill>
-                <a:latin typeface="Calibri"/>
-              </a:rPr>
-              <a:t>Material completo, con todas las figuras y los cuadros: etorresram.github.io/CID-Technical-Note</a:t>
+              <a:t>Pendiente: conseguir los anuncios de Panamá y El Salvador, y explorar con el equipo si conviene un corte por tamaño de empresa.</a:t>
             </a:r>
           </a:p>
         </p:txBody>
@@ -6839,6 +7041,185 @@
                 <a:latin typeface="Calibri"/>
               </a:rPr>
               <a:t>Esta sección responde esas tres preguntas con datos de empleo y de anuncios de trabajo.</a:t>
+            </a:r>
+          </a:p>
+        </p:txBody>
+      </p:sp>
+    </p:spTree>
+  </p:cSld>
+  <p:clrMapOvr>
+    <a:masterClrMapping/>
+  </p:clrMapOvr>
+</p:sld>
+</file>
+
+<file path=ppt/slides/slide20.xml><?xml version="1.0" encoding="utf-8"?>
+<p:sld xmlns:a="http://schemas.openxmlformats.org/drawingml/2006/main" xmlns:p="http://schemas.openxmlformats.org/presentationml/2006/main" xmlns:r="http://schemas.openxmlformats.org/officeDocument/2006/relationships">
+  <p:cSld>
+    <p:spTree>
+      <p:nvGrpSpPr>
+        <p:cNvPr id="1" name=""/>
+        <p:cNvGrpSpPr/>
+        <p:nvPr/>
+      </p:nvGrpSpPr>
+      <p:grpSpPr/>
+      <p:cxnSp>
+        <p:nvCxnSpPr>
+          <p:cNvPr id="2" name="Connector 1"/>
+          <p:cNvCxnSpPr/>
+          <p:nvPr/>
+        </p:nvCxnSpPr>
+        <p:spPr>
+          <a:xfrm>
+            <a:off x="658368" y="2377440"/>
+            <a:ext cx="1463040" cy="0"/>
+          </a:xfrm>
+          <a:prstGeom prst="line">
+            <a:avLst/>
+          </a:prstGeom>
+          <a:ln w="50800">
+            <a:solidFill>
+              <a:srgbClr val="1BAF7A"/>
+            </a:solidFill>
+          </a:ln>
+        </p:spPr>
+        <p:style>
+          <a:lnRef idx="2">
+            <a:schemeClr val="accent1"/>
+          </a:lnRef>
+          <a:fillRef idx="0">
+            <a:schemeClr val="accent1"/>
+          </a:fillRef>
+          <a:effectRef idx="1">
+            <a:schemeClr val="accent1"/>
+          </a:effectRef>
+          <a:fontRef idx="minor">
+            <a:schemeClr val="tx1"/>
+          </a:fontRef>
+        </p:style>
+      </p:cxnSp>
+      <p:sp>
+        <p:nvSpPr>
+          <p:cNvPr id="3" name="TextBox 2"/>
+          <p:cNvSpPr txBox="1"/>
+          <p:nvPr/>
+        </p:nvSpPr>
+        <p:spPr>
+          <a:xfrm>
+            <a:off x="658368" y="2697480"/>
+            <a:ext cx="10424160" cy="1463040"/>
+          </a:xfrm>
+          <a:prstGeom prst="rect">
+            <a:avLst/>
+          </a:prstGeom>
+          <a:noFill/>
+        </p:spPr>
+        <p:txBody>
+          <a:bodyPr wrap="square" lIns="0" rIns="0" tIns="0" bIns="0">
+            <a:spAutoFit/>
+          </a:bodyPr>
+          <a:lstStyle/>
+          <a:p>
+            <a:pPr algn="l">
+              <a:lnSpc>
+                <a:spcPct val="125000"/>
+              </a:lnSpc>
+              <a:spcAft>
+                <a:spcPts val="600"/>
+              </a:spcAft>
+            </a:pPr>
+            <a:r>
+              <a:rPr sz="1500" b="0">
+                <a:solidFill>
+                  <a:srgbClr val="6B6A64"/>
+                </a:solidFill>
+                <a:latin typeface="Calibri"/>
+              </a:rPr>
+              <a:t>EN UNA FRASE</a:t>
+            </a:r>
+          </a:p>
+        </p:txBody>
+      </p:sp>
+      <p:sp>
+        <p:nvSpPr>
+          <p:cNvPr id="4" name="TextBox 3"/>
+          <p:cNvSpPr txBox="1"/>
+          <p:nvPr/>
+        </p:nvSpPr>
+        <p:spPr>
+          <a:xfrm>
+            <a:off x="658368" y="3108960"/>
+            <a:ext cx="10607040" cy="2011680"/>
+          </a:xfrm>
+          <a:prstGeom prst="rect">
+            <a:avLst/>
+          </a:prstGeom>
+          <a:noFill/>
+        </p:spPr>
+        <p:txBody>
+          <a:bodyPr wrap="square" lIns="0" rIns="0" tIns="0" bIns="0">
+            <a:spAutoFit/>
+          </a:bodyPr>
+          <a:lstStyle/>
+          <a:p>
+            <a:pPr algn="l">
+              <a:lnSpc>
+                <a:spcPct val="130000"/>
+              </a:lnSpc>
+              <a:spcAft>
+                <a:spcPts val="600"/>
+              </a:spcAft>
+            </a:pPr>
+            <a:r>
+              <a:rPr sz="2600" b="0">
+                <a:solidFill>
+                  <a:srgbClr val="1C1C1A"/>
+                </a:solidFill>
+                <a:latin typeface="Calibri"/>
+              </a:rPr>
+              <a:t>La inteligencia artificial no amenaza la planta de estos sectores: alcanza sobre todo a la capa calificada, que es justamente la que la región necesita ampliar para exportar más valor. Y esa capa no está creciendo.</a:t>
+            </a:r>
+          </a:p>
+        </p:txBody>
+      </p:sp>
+      <p:sp>
+        <p:nvSpPr>
+          <p:cNvPr id="5" name="TextBox 4"/>
+          <p:cNvSpPr txBox="1"/>
+          <p:nvPr/>
+        </p:nvSpPr>
+        <p:spPr>
+          <a:xfrm>
+            <a:off x="658368" y="5669280"/>
+            <a:ext cx="10607040" cy="731520"/>
+          </a:xfrm>
+          <a:prstGeom prst="rect">
+            <a:avLst/>
+          </a:prstGeom>
+          <a:noFill/>
+        </p:spPr>
+        <p:txBody>
+          <a:bodyPr wrap="square" lIns="0" rIns="0" tIns="0" bIns="0">
+            <a:spAutoFit/>
+          </a:bodyPr>
+          <a:lstStyle/>
+          <a:p>
+            <a:pPr algn="l">
+              <a:lnSpc>
+                <a:spcPct val="125000"/>
+              </a:lnSpc>
+              <a:spcAft>
+                <a:spcPts val="600"/>
+              </a:spcAft>
+            </a:pPr>
+            <a:r>
+              <a:rPr sz="1300" b="0">
+                <a:solidFill>
+                  <a:srgbClr val="6B6A64"/>
+                </a:solidFill>
+                <a:latin typeface="Calibri"/>
+              </a:rPr>
+              <a:t>Material completo, con todas las figuras y los cuadros: etorresram.github.io/CID-Technical-Note</a:t>
             </a:r>
           </a:p>
         </p:txBody>
@@ -8120,7 +8501,7 @@
                         </a:defRPr>
                       </a:pPr>
                       <a:r>
-                        <a:t>2016–2025</a:t>
+                        <a:t>2015–2025</a:t>
                       </a:r>
                     </a:p>
                   </a:txBody>
@@ -8227,7 +8608,7 @@
                         </a:defRPr>
                       </a:pPr>
                       <a:r>
-                        <a:t>2021 y 2024</a:t>
+                        <a:t>2017–2025</a:t>
                       </a:r>
                     </a:p>
                   </a:txBody>
@@ -8248,7 +8629,7 @@
                         </a:defRPr>
                       </a:pPr>
                       <a:r>
-                        <a:t>5.0 mill.</a:t>
+                        <a:t>5.1 mill.</a:t>
                       </a:r>
                     </a:p>
                   </a:txBody>
@@ -8548,7 +8929,7 @@
                         </a:defRPr>
                       </a:pPr>
                       <a:r>
-                        <a:t>2021–2025</a:t>
+                        <a:t>2015–2025</a:t>
                       </a:r>
                     </a:p>
                   </a:txBody>
@@ -8968,7 +9349,7 @@
                 </a:solidFill>
                 <a:latin typeface="Calibri"/>
               </a:rPr>
-              <a:t>República Dominicana tiene dos cortes, no una serie.</a:t>
+              <a:t>Tres países llegan hasta 2015, antes de la pandemia. México y Honduras no.</a:t>
             </a:r>
           </a:p>
           <a:p>
@@ -9143,7 +9524,7 @@
                 </a:solidFill>
                 <a:latin typeface="Calibri"/>
               </a:rPr>
-              <a:t>PANORAMA</a:t>
+              <a:t>LO QUE CAMBIA CON EL TIEMPO</a:t>
             </a:r>
           </a:p>
         </p:txBody>
@@ -9179,20 +9560,20 @@
               </a:spcAft>
             </a:pPr>
             <a:r>
-              <a:rPr sz="3000" b="1">
+              <a:rPr sz="2700" b="1">
                 <a:solidFill>
                   <a:srgbClr val="1C1C1A"/>
                 </a:solidFill>
                 <a:latin typeface="Calibri"/>
               </a:rPr>
-              <a:t>Los empleos formales están igual de expuestos en toda la región</a:t>
+              <a:t>La exposición sube porque hay más empleo formal, no porque el trabajo cambie</a:t>
             </a:r>
           </a:p>
         </p:txBody>
       </p:sp>
       <p:pic>
         <p:nvPicPr>
-          <p:cNvPr id="4" name="Picture 3" descr="W8_comparacion_paises.png"/>
+          <p:cNvPr id="4" name="Picture 3" descr="W12_formal_serie.png"/>
           <p:cNvPicPr>
             <a:picLocks noChangeAspect="1"/>
           </p:cNvPicPr>
@@ -9206,24 +9587,59 @@
         </p:blipFill>
         <p:spPr>
           <a:xfrm>
-            <a:off x="2742118" y="1691640"/>
-            <a:ext cx="6707458" cy="4343400"/>
+            <a:off x="2772608" y="1691640"/>
+            <a:ext cx="6646478" cy="3200400"/>
           </a:xfrm>
           <a:prstGeom prst="rect">
             <a:avLst/>
           </a:prstGeom>
         </p:spPr>
       </p:pic>
-      <p:sp>
-        <p:nvSpPr>
-          <p:cNvPr id="5" name="TextBox 4"/>
+      <p:cxnSp>
+        <p:nvCxnSpPr>
+          <p:cNvPr id="5" name="Connector 4"/>
+          <p:cNvCxnSpPr/>
+          <p:nvPr/>
+        </p:nvCxnSpPr>
+        <p:spPr>
+          <a:xfrm>
+            <a:off x="658368" y="5138928"/>
+            <a:ext cx="10874959" cy="0"/>
+          </a:xfrm>
+          <a:prstGeom prst="line">
+            <a:avLst/>
+          </a:prstGeom>
+          <a:ln w="19050">
+            <a:solidFill>
+              <a:srgbClr val="E4E4DF"/>
+            </a:solidFill>
+          </a:ln>
+        </p:spPr>
+        <p:style>
+          <a:lnRef idx="2">
+            <a:schemeClr val="accent1"/>
+          </a:lnRef>
+          <a:fillRef idx="0">
+            <a:schemeClr val="accent1"/>
+          </a:fillRef>
+          <a:effectRef idx="1">
+            <a:schemeClr val="accent1"/>
+          </a:effectRef>
+          <a:fontRef idx="minor">
+            <a:schemeClr val="tx1"/>
+          </a:fontRef>
+        </p:style>
+      </p:cxnSp>
+      <p:sp>
+        <p:nvSpPr>
+          <p:cNvPr id="6" name="TextBox 5"/>
           <p:cNvSpPr txBox="1"/>
           <p:nvPr/>
         </p:nvSpPr>
         <p:spPr>
           <a:xfrm>
-            <a:off x="658368" y="6199632"/>
-            <a:ext cx="10874959" cy="457200"/>
+            <a:off x="658368" y="5349240"/>
+            <a:ext cx="10881360" cy="914400"/>
           </a:xfrm>
           <a:prstGeom prst="rect">
             <a:avLst/>
@@ -9238,6 +9654,48 @@
           <a:p>
             <a:pPr algn="l">
               <a:lnSpc>
+                <a:spcPct val="130000"/>
+              </a:lnSpc>
+              <a:spcAft>
+                <a:spcPts val="600"/>
+              </a:spcAft>
+            </a:pPr>
+            <a:r>
+              <a:rPr sz="1500" b="0">
+                <a:solidFill>
+                  <a:srgbClr val="1C1C1A"/>
+                </a:solidFill>
+                <a:latin typeface="Calibri"/>
+              </a:rPr>
+              <a:t>La línea verde son los empleos con seguridad social; la azul, todos. La verde casi no se mueve en diez años. La azul sube, y sube al ritmo al que la gente pasa de un empleo informal a uno formal.</a:t>
+            </a:r>
+          </a:p>
+        </p:txBody>
+      </p:sp>
+      <p:sp>
+        <p:nvSpPr>
+          <p:cNvPr id="7" name="TextBox 6"/>
+          <p:cNvSpPr txBox="1"/>
+          <p:nvPr/>
+        </p:nvSpPr>
+        <p:spPr>
+          <a:xfrm>
+            <a:off x="658368" y="6199632"/>
+            <a:ext cx="10874959" cy="457200"/>
+          </a:xfrm>
+          <a:prstGeom prst="rect">
+            <a:avLst/>
+          </a:prstGeom>
+          <a:noFill/>
+        </p:spPr>
+        <p:txBody>
+          <a:bodyPr wrap="square" lIns="0" rIns="0" tIns="0" bIns="0">
+            <a:spAutoFit/>
+          </a:bodyPr>
+          <a:lstStyle/>
+          <a:p>
+            <a:pPr algn="l">
+              <a:lnSpc>
                 <a:spcPct val="115000"/>
               </a:lnSpc>
               <a:spcAft>
@@ -9251,7 +9709,7 @@
                 </a:solidFill>
                 <a:latin typeface="Calibri"/>
               </a:rPr>
-              <a:t>Cada país en su último año con encuesta. El Salvador no tiene anuncios de trabajo porque no fueron entregados; Panamá no tiene ninguna de las dos fuentes.</a:t>
+              <a:t>Los tres países cuya encuesta llega hasta 2015: Costa Rica, El Salvador y República Dominicana. En 2020 no hubo encuesta en Costa Rica.</a:t>
             </a:r>
           </a:p>
         </p:txBody>
@@ -9311,7 +9769,7 @@
                 </a:solidFill>
                 <a:latin typeface="Calibri"/>
               </a:rPr>
-              <a:t>PANORAMA · QUÉ SIGNIFICA</a:t>
+              <a:t>PANORAMA</a:t>
             </a:r>
           </a:p>
         </p:txBody>
@@ -9353,21 +9811,45 @@
                 </a:solidFill>
                 <a:latin typeface="Calibri"/>
               </a:rPr>
-              <a:t>La diferencia entre países es informalidad, no tecnología</a:t>
-            </a:r>
-          </a:p>
-        </p:txBody>
-      </p:sp>
-      <p:sp>
-        <p:nvSpPr>
-          <p:cNvPr id="4" name="TextBox 3"/>
+              <a:t>Los empleos formales están igual de expuestos en toda la región</a:t>
+            </a:r>
+          </a:p>
+        </p:txBody>
+      </p:sp>
+      <p:pic>
+        <p:nvPicPr>
+          <p:cNvPr id="4" name="Picture 3" descr="W8_comparacion_paises.png"/>
+          <p:cNvPicPr>
+            <a:picLocks noChangeAspect="1"/>
+          </p:cNvPicPr>
+          <p:nvPr/>
+        </p:nvPicPr>
+        <p:blipFill>
+          <a:blip r:embed="rId2"/>
+          <a:stretch>
+            <a:fillRect/>
+          </a:stretch>
+        </p:blipFill>
+        <p:spPr>
+          <a:xfrm>
+            <a:off x="2742118" y="1691640"/>
+            <a:ext cx="6707458" cy="4343400"/>
+          </a:xfrm>
+          <a:prstGeom prst="rect">
+            <a:avLst/>
+          </a:prstGeom>
+        </p:spPr>
+      </p:pic>
+      <p:sp>
+        <p:nvSpPr>
+          <p:cNvPr id="5" name="TextBox 4"/>
           <p:cNvSpPr txBox="1"/>
           <p:nvPr/>
         </p:nvSpPr>
         <p:spPr>
           <a:xfrm>
-            <a:off x="658368" y="1920240"/>
-            <a:ext cx="3200400" cy="731520"/>
+            <a:off x="658368" y="6199632"/>
+            <a:ext cx="10874959" cy="457200"/>
           </a:xfrm>
           <a:prstGeom prst="rect">
             <a:avLst/>
@@ -9382,349 +9864,20 @@
           <a:p>
             <a:pPr algn="l">
               <a:lnSpc>
-                <a:spcPct val="95000"/>
-              </a:lnSpc>
-              <a:spcAft>
-                <a:spcPts val="600"/>
-              </a:spcAft>
-            </a:pPr>
-            <a:r>
-              <a:rPr sz="4200" b="1">
-                <a:solidFill>
-                  <a:srgbClr val="2A78D6"/>
-                </a:solidFill>
-                <a:latin typeface="Calibri"/>
-              </a:rPr>
-              <a:t>0,21 a 0,29</a:t>
-            </a:r>
-          </a:p>
-        </p:txBody>
-      </p:sp>
-      <p:sp>
-        <p:nvSpPr>
-          <p:cNvPr id="5" name="TextBox 4"/>
-          <p:cNvSpPr txBox="1"/>
-          <p:nvPr/>
-        </p:nvSpPr>
-        <p:spPr>
-          <a:xfrm>
-            <a:off x="658368" y="2578608"/>
-            <a:ext cx="3200400" cy="914400"/>
-          </a:xfrm>
-          <a:prstGeom prst="rect">
-            <a:avLst/>
-          </a:prstGeom>
-          <a:noFill/>
-        </p:spPr>
-        <p:txBody>
-          <a:bodyPr wrap="square" lIns="0" rIns="0" tIns="0" bIns="0">
-            <a:spAutoFit/>
-          </a:bodyPr>
-          <a:lstStyle/>
-          <a:p>
-            <a:pPr algn="l">
-              <a:lnSpc>
-                <a:spcPct val="120000"/>
-              </a:lnSpc>
-              <a:spcAft>
-                <a:spcPts val="600"/>
-              </a:spcAft>
-            </a:pPr>
-            <a:r>
-              <a:rPr sz="1250" b="0">
+                <a:spcPct val="115000"/>
+              </a:lnSpc>
+              <a:spcAft>
+                <a:spcPts val="600"/>
+              </a:spcAft>
+            </a:pPr>
+            <a:r>
+              <a:rPr sz="1050" b="0">
                 <a:solidFill>
                   <a:srgbClr val="6B6A64"/>
                 </a:solidFill>
                 <a:latin typeface="Calibri"/>
               </a:rPr>
-              <a:t>Exposición del empleo total: los países se ven muy distintos entre sí</a:t>
-            </a:r>
-          </a:p>
-        </p:txBody>
-      </p:sp>
-      <p:sp>
-        <p:nvSpPr>
-          <p:cNvPr id="6" name="TextBox 5"/>
-          <p:cNvSpPr txBox="1"/>
-          <p:nvPr/>
-        </p:nvSpPr>
-        <p:spPr>
-          <a:xfrm>
-            <a:off x="4343400" y="1920240"/>
-            <a:ext cx="3200400" cy="731520"/>
-          </a:xfrm>
-          <a:prstGeom prst="rect">
-            <a:avLst/>
-          </a:prstGeom>
-          <a:noFill/>
-        </p:spPr>
-        <p:txBody>
-          <a:bodyPr wrap="square" lIns="0" rIns="0" tIns="0" bIns="0">
-            <a:spAutoFit/>
-          </a:bodyPr>
-          <a:lstStyle/>
-          <a:p>
-            <a:pPr algn="l">
-              <a:lnSpc>
-                <a:spcPct val="95000"/>
-              </a:lnSpc>
-              <a:spcAft>
-                <a:spcPts val="600"/>
-              </a:spcAft>
-            </a:pPr>
-            <a:r>
-              <a:rPr sz="4200" b="1">
-                <a:solidFill>
-                  <a:srgbClr val="1BAF7A"/>
-                </a:solidFill>
-                <a:latin typeface="Calibri"/>
-              </a:rPr>
-              <a:t>0,30 a 0,35</a:t>
-            </a:r>
-          </a:p>
-        </p:txBody>
-      </p:sp>
-      <p:sp>
-        <p:nvSpPr>
-          <p:cNvPr id="7" name="TextBox 6"/>
-          <p:cNvSpPr txBox="1"/>
-          <p:nvPr/>
-        </p:nvSpPr>
-        <p:spPr>
-          <a:xfrm>
-            <a:off x="4343400" y="2578608"/>
-            <a:ext cx="3200400" cy="914400"/>
-          </a:xfrm>
-          <a:prstGeom prst="rect">
-            <a:avLst/>
-          </a:prstGeom>
-          <a:noFill/>
-        </p:spPr>
-        <p:txBody>
-          <a:bodyPr wrap="square" lIns="0" rIns="0" tIns="0" bIns="0">
-            <a:spAutoFit/>
-          </a:bodyPr>
-          <a:lstStyle/>
-          <a:p>
-            <a:pPr algn="l">
-              <a:lnSpc>
-                <a:spcPct val="120000"/>
-              </a:lnSpc>
-              <a:spcAft>
-                <a:spcPts val="600"/>
-              </a:spcAft>
-            </a:pPr>
-            <a:r>
-              <a:rPr sz="1250" b="0">
-                <a:solidFill>
-                  <a:srgbClr val="6B6A64"/>
-                </a:solidFill>
-                <a:latin typeface="Calibri"/>
-              </a:rPr>
-              <a:t>Pero si miramos solo el empleo formal, casi no hay diferencia</a:t>
-            </a:r>
-          </a:p>
-        </p:txBody>
-      </p:sp>
-      <p:sp>
-        <p:nvSpPr>
-          <p:cNvPr id="8" name="TextBox 7"/>
-          <p:cNvSpPr txBox="1"/>
-          <p:nvPr/>
-        </p:nvSpPr>
-        <p:spPr>
-          <a:xfrm>
-            <a:off x="8229600" y="1920240"/>
-            <a:ext cx="3200400" cy="731520"/>
-          </a:xfrm>
-          <a:prstGeom prst="rect">
-            <a:avLst/>
-          </a:prstGeom>
-          <a:noFill/>
-        </p:spPr>
-        <p:txBody>
-          <a:bodyPr wrap="square" lIns="0" rIns="0" tIns="0" bIns="0">
-            <a:spAutoFit/>
-          </a:bodyPr>
-          <a:lstStyle/>
-          <a:p>
-            <a:pPr algn="l">
-              <a:lnSpc>
-                <a:spcPct val="95000"/>
-              </a:lnSpc>
-              <a:spcAft>
-                <a:spcPts val="600"/>
-              </a:spcAft>
-            </a:pPr>
-            <a:r>
-              <a:rPr sz="4200" b="1">
-                <a:solidFill>
-                  <a:srgbClr val="6B6A64"/>
-                </a:solidFill>
-                <a:latin typeface="Calibri"/>
-              </a:rPr>
-              <a:t>+0,89 → 0,00</a:t>
-            </a:r>
-          </a:p>
-        </p:txBody>
-      </p:sp>
-      <p:sp>
-        <p:nvSpPr>
-          <p:cNvPr id="9" name="TextBox 8"/>
-          <p:cNvSpPr txBox="1"/>
-          <p:nvPr/>
-        </p:nvSpPr>
-        <p:spPr>
-          <a:xfrm>
-            <a:off x="8229600" y="2578608"/>
-            <a:ext cx="3200400" cy="914400"/>
-          </a:xfrm>
-          <a:prstGeom prst="rect">
-            <a:avLst/>
-          </a:prstGeom>
-          <a:noFill/>
-        </p:spPr>
-        <p:txBody>
-          <a:bodyPr wrap="square" lIns="0" rIns="0" tIns="0" bIns="0">
-            <a:spAutoFit/>
-          </a:bodyPr>
-          <a:lstStyle/>
-          <a:p>
-            <a:pPr algn="l">
-              <a:lnSpc>
-                <a:spcPct val="120000"/>
-              </a:lnSpc>
-              <a:spcAft>
-                <a:spcPts val="600"/>
-              </a:spcAft>
-            </a:pPr>
-            <a:r>
-              <a:rPr sz="1250" b="0">
-                <a:solidFill>
-                  <a:srgbClr val="6B6A64"/>
-                </a:solidFill>
-                <a:latin typeface="Calibri"/>
-              </a:rPr>
-              <a:t>La relación con la informalidad desaparece al comparar solo empleo formal</a:t>
-            </a:r>
-          </a:p>
-        </p:txBody>
-      </p:sp>
-      <p:cxnSp>
-        <p:nvCxnSpPr>
-          <p:cNvPr id="10" name="Connector 9"/>
-          <p:cNvCxnSpPr/>
-          <p:nvPr/>
-        </p:nvCxnSpPr>
-        <p:spPr>
-          <a:xfrm>
-            <a:off x="658368" y="4206240"/>
-            <a:ext cx="10874959" cy="0"/>
-          </a:xfrm>
-          <a:prstGeom prst="line">
-            <a:avLst/>
-          </a:prstGeom>
-          <a:ln w="19050">
-            <a:solidFill>
-              <a:srgbClr val="E4E4DF"/>
-            </a:solidFill>
-          </a:ln>
-        </p:spPr>
-        <p:style>
-          <a:lnRef idx="2">
-            <a:schemeClr val="accent1"/>
-          </a:lnRef>
-          <a:fillRef idx="0">
-            <a:schemeClr val="accent1"/>
-          </a:fillRef>
-          <a:effectRef idx="1">
-            <a:schemeClr val="accent1"/>
-          </a:effectRef>
-          <a:fontRef idx="minor">
-            <a:schemeClr val="tx1"/>
-          </a:fontRef>
-        </p:style>
-      </p:cxnSp>
-      <p:sp>
-        <p:nvSpPr>
-          <p:cNvPr id="11" name="TextBox 10"/>
-          <p:cNvSpPr txBox="1"/>
-          <p:nvPr/>
-        </p:nvSpPr>
-        <p:spPr>
-          <a:xfrm>
-            <a:off x="658368" y="4480560"/>
-            <a:ext cx="10881360" cy="1645920"/>
-          </a:xfrm>
-          <a:prstGeom prst="rect">
-            <a:avLst/>
-          </a:prstGeom>
-          <a:noFill/>
-        </p:spPr>
-        <p:txBody>
-          <a:bodyPr wrap="square" lIns="0" rIns="0" tIns="0" bIns="0">
-            <a:spAutoFit/>
-          </a:bodyPr>
-          <a:lstStyle/>
-          <a:p>
-            <a:pPr algn="l">
-              <a:lnSpc>
-                <a:spcPct val="135000"/>
-              </a:lnSpc>
-              <a:spcAft>
-                <a:spcPts val="600"/>
-              </a:spcAft>
-            </a:pPr>
-            <a:r>
-              <a:rPr sz="1900" b="0">
-                <a:solidFill>
-                  <a:srgbClr val="1C1C1A"/>
-                </a:solidFill>
-                <a:latin typeface="Calibri"/>
-              </a:rPr>
-              <a:t>Guatemala parece mucho menos expuesta que México. Pero no es porque su empleo formal sea distinto: es porque arrastra mucho más empleo informal, que casi no está expuesto. Cuando comparamos formales con formales, los seis países se parecen.</a:t>
-            </a:r>
-          </a:p>
-        </p:txBody>
-      </p:sp>
-      <p:sp>
-        <p:nvSpPr>
-          <p:cNvPr id="12" name="TextBox 11"/>
-          <p:cNvSpPr txBox="1"/>
-          <p:nvPr/>
-        </p:nvSpPr>
-        <p:spPr>
-          <a:xfrm>
-            <a:off x="658368" y="5806440"/>
-            <a:ext cx="10881360" cy="548640"/>
-          </a:xfrm>
-          <a:prstGeom prst="rect">
-            <a:avLst/>
-          </a:prstGeom>
-          <a:noFill/>
-        </p:spPr>
-        <p:txBody>
-          <a:bodyPr wrap="square" lIns="0" rIns="0" tIns="0" bIns="0">
-            <a:spAutoFit/>
-          </a:bodyPr>
-          <a:lstStyle/>
-          <a:p>
-            <a:pPr algn="l">
-              <a:lnSpc>
-                <a:spcPct val="125000"/>
-              </a:lnSpc>
-              <a:spcAft>
-                <a:spcPts val="600"/>
-              </a:spcAft>
-            </a:pPr>
-            <a:r>
-              <a:rPr sz="1600" b="1">
-                <a:solidFill>
-                  <a:srgbClr val="1BAF7A"/>
-                </a:solidFill>
-                <a:latin typeface="Calibri"/>
-              </a:rPr>
-              <a:t>Para política: hablar de exposición a la IA en la región es, en buena medida, hablar de informalidad.</a:t>
+              <a:t>Cada país en su último año con encuesta. El Salvador no tiene anuncios de trabajo porque no fueron entregados; Panamá no tiene ninguna de las dos fuentes.</a:t>
             </a:r>
           </a:p>
         </p:txBody>
@@ -9784,7 +9937,7 @@
                 </a:solidFill>
                 <a:latin typeface="Calibri"/>
               </a:rPr>
-              <a:t>HALLAZGO 1</a:t>
+              <a:t>PANORAMA · QUÉ SIGNIFICA</a:t>
             </a:r>
           </a:p>
         </p:txBody>
@@ -9826,45 +9979,21 @@
                 </a:solidFill>
                 <a:latin typeface="Calibri"/>
               </a:rPr>
-              <a:t>La IA alcanza más a los empleos calificados que a los de planta</a:t>
-            </a:r>
-          </a:p>
-        </p:txBody>
-      </p:sp>
-      <p:pic>
-        <p:nvPicPr>
-          <p:cNvPr id="4" name="Picture 3" descr="W4_escalera_bloques.png"/>
-          <p:cNvPicPr>
-            <a:picLocks noChangeAspect="1"/>
-          </p:cNvPicPr>
-          <p:nvPr/>
-        </p:nvPicPr>
-        <p:blipFill>
-          <a:blip r:embed="rId2"/>
-          <a:stretch>
-            <a:fillRect/>
-          </a:stretch>
-        </p:blipFill>
-        <p:spPr>
-          <a:xfrm>
-            <a:off x="2915550" y="1645920"/>
-            <a:ext cx="6360594" cy="4206240"/>
-          </a:xfrm>
-          <a:prstGeom prst="rect">
-            <a:avLst/>
-          </a:prstGeom>
-        </p:spPr>
-      </p:pic>
-      <p:sp>
-        <p:nvSpPr>
-          <p:cNvPr id="5" name="TextBox 4"/>
+              <a:t>La diferencia entre países es informalidad, no tecnología</a:t>
+            </a:r>
+          </a:p>
+        </p:txBody>
+      </p:sp>
+      <p:sp>
+        <p:nvSpPr>
+          <p:cNvPr id="4" name="TextBox 3"/>
           <p:cNvSpPr txBox="1"/>
           <p:nvPr/>
         </p:nvSpPr>
         <p:spPr>
           <a:xfrm>
-            <a:off x="658368" y="6199632"/>
-            <a:ext cx="10874959" cy="457200"/>
+            <a:off x="658368" y="1920240"/>
+            <a:ext cx="3200400" cy="731520"/>
           </a:xfrm>
           <a:prstGeom prst="rect">
             <a:avLst/>
@@ -9879,20 +10008,349 @@
           <a:p>
             <a:pPr algn="l">
               <a:lnSpc>
-                <a:spcPct val="115000"/>
-              </a:lnSpc>
-              <a:spcAft>
-                <a:spcPts val="600"/>
-              </a:spcAft>
-            </a:pPr>
-            <a:r>
-              <a:rPr sz="1050" b="0">
+                <a:spcPct val="95000"/>
+              </a:lnSpc>
+              <a:spcAft>
+                <a:spcPts val="600"/>
+              </a:spcAft>
+            </a:pPr>
+            <a:r>
+              <a:rPr sz="4200" b="1">
+                <a:solidFill>
+                  <a:srgbClr val="2A78D6"/>
+                </a:solidFill>
+                <a:latin typeface="Calibri"/>
+              </a:rPr>
+              <a:t>0,21 a 0,29</a:t>
+            </a:r>
+          </a:p>
+        </p:txBody>
+      </p:sp>
+      <p:sp>
+        <p:nvSpPr>
+          <p:cNvPr id="5" name="TextBox 4"/>
+          <p:cNvSpPr txBox="1"/>
+          <p:nvPr/>
+        </p:nvSpPr>
+        <p:spPr>
+          <a:xfrm>
+            <a:off x="658368" y="2578608"/>
+            <a:ext cx="3200400" cy="914400"/>
+          </a:xfrm>
+          <a:prstGeom prst="rect">
+            <a:avLst/>
+          </a:prstGeom>
+          <a:noFill/>
+        </p:spPr>
+        <p:txBody>
+          <a:bodyPr wrap="square" lIns="0" rIns="0" tIns="0" bIns="0">
+            <a:spAutoFit/>
+          </a:bodyPr>
+          <a:lstStyle/>
+          <a:p>
+            <a:pPr algn="l">
+              <a:lnSpc>
+                <a:spcPct val="120000"/>
+              </a:lnSpc>
+              <a:spcAft>
+                <a:spcPts val="600"/>
+              </a:spcAft>
+            </a:pPr>
+            <a:r>
+              <a:rPr sz="1250" b="0">
                 <a:solidFill>
                   <a:srgbClr val="6B6A64"/>
                 </a:solidFill>
                 <a:latin typeface="Calibri"/>
               </a:rPr>
-              <a:t>CAPARD son aquí cuatro países: Costa Rica, El Salvador, Honduras y República Dominicana. Guatemala no aparece porque su encuesta registra la ocupación con menos detalle; Nicaragua y Panamá no están disponibles.</a:t>
+              <a:t>Exposición del empleo total: los países se ven muy distintos entre sí</a:t>
+            </a:r>
+          </a:p>
+        </p:txBody>
+      </p:sp>
+      <p:sp>
+        <p:nvSpPr>
+          <p:cNvPr id="6" name="TextBox 5"/>
+          <p:cNvSpPr txBox="1"/>
+          <p:nvPr/>
+        </p:nvSpPr>
+        <p:spPr>
+          <a:xfrm>
+            <a:off x="4343400" y="1920240"/>
+            <a:ext cx="3200400" cy="731520"/>
+          </a:xfrm>
+          <a:prstGeom prst="rect">
+            <a:avLst/>
+          </a:prstGeom>
+          <a:noFill/>
+        </p:spPr>
+        <p:txBody>
+          <a:bodyPr wrap="square" lIns="0" rIns="0" tIns="0" bIns="0">
+            <a:spAutoFit/>
+          </a:bodyPr>
+          <a:lstStyle/>
+          <a:p>
+            <a:pPr algn="l">
+              <a:lnSpc>
+                <a:spcPct val="95000"/>
+              </a:lnSpc>
+              <a:spcAft>
+                <a:spcPts val="600"/>
+              </a:spcAft>
+            </a:pPr>
+            <a:r>
+              <a:rPr sz="4200" b="1">
+                <a:solidFill>
+                  <a:srgbClr val="1BAF7A"/>
+                </a:solidFill>
+                <a:latin typeface="Calibri"/>
+              </a:rPr>
+              <a:t>0,30 a 0,35</a:t>
+            </a:r>
+          </a:p>
+        </p:txBody>
+      </p:sp>
+      <p:sp>
+        <p:nvSpPr>
+          <p:cNvPr id="7" name="TextBox 6"/>
+          <p:cNvSpPr txBox="1"/>
+          <p:nvPr/>
+        </p:nvSpPr>
+        <p:spPr>
+          <a:xfrm>
+            <a:off x="4343400" y="2578608"/>
+            <a:ext cx="3200400" cy="914400"/>
+          </a:xfrm>
+          <a:prstGeom prst="rect">
+            <a:avLst/>
+          </a:prstGeom>
+          <a:noFill/>
+        </p:spPr>
+        <p:txBody>
+          <a:bodyPr wrap="square" lIns="0" rIns="0" tIns="0" bIns="0">
+            <a:spAutoFit/>
+          </a:bodyPr>
+          <a:lstStyle/>
+          <a:p>
+            <a:pPr algn="l">
+              <a:lnSpc>
+                <a:spcPct val="120000"/>
+              </a:lnSpc>
+              <a:spcAft>
+                <a:spcPts val="600"/>
+              </a:spcAft>
+            </a:pPr>
+            <a:r>
+              <a:rPr sz="1250" b="0">
+                <a:solidFill>
+                  <a:srgbClr val="6B6A64"/>
+                </a:solidFill>
+                <a:latin typeface="Calibri"/>
+              </a:rPr>
+              <a:t>Pero si miramos solo el empleo formal, casi no hay diferencia</a:t>
+            </a:r>
+          </a:p>
+        </p:txBody>
+      </p:sp>
+      <p:sp>
+        <p:nvSpPr>
+          <p:cNvPr id="8" name="TextBox 7"/>
+          <p:cNvSpPr txBox="1"/>
+          <p:nvPr/>
+        </p:nvSpPr>
+        <p:spPr>
+          <a:xfrm>
+            <a:off x="8229600" y="1920240"/>
+            <a:ext cx="3200400" cy="731520"/>
+          </a:xfrm>
+          <a:prstGeom prst="rect">
+            <a:avLst/>
+          </a:prstGeom>
+          <a:noFill/>
+        </p:spPr>
+        <p:txBody>
+          <a:bodyPr wrap="square" lIns="0" rIns="0" tIns="0" bIns="0">
+            <a:spAutoFit/>
+          </a:bodyPr>
+          <a:lstStyle/>
+          <a:p>
+            <a:pPr algn="l">
+              <a:lnSpc>
+                <a:spcPct val="95000"/>
+              </a:lnSpc>
+              <a:spcAft>
+                <a:spcPts val="600"/>
+              </a:spcAft>
+            </a:pPr>
+            <a:r>
+              <a:rPr sz="4200" b="1">
+                <a:solidFill>
+                  <a:srgbClr val="6B6A64"/>
+                </a:solidFill>
+                <a:latin typeface="Calibri"/>
+              </a:rPr>
+              <a:t>+0,89 → 0,00</a:t>
+            </a:r>
+          </a:p>
+        </p:txBody>
+      </p:sp>
+      <p:sp>
+        <p:nvSpPr>
+          <p:cNvPr id="9" name="TextBox 8"/>
+          <p:cNvSpPr txBox="1"/>
+          <p:nvPr/>
+        </p:nvSpPr>
+        <p:spPr>
+          <a:xfrm>
+            <a:off x="8229600" y="2578608"/>
+            <a:ext cx="3200400" cy="914400"/>
+          </a:xfrm>
+          <a:prstGeom prst="rect">
+            <a:avLst/>
+          </a:prstGeom>
+          <a:noFill/>
+        </p:spPr>
+        <p:txBody>
+          <a:bodyPr wrap="square" lIns="0" rIns="0" tIns="0" bIns="0">
+            <a:spAutoFit/>
+          </a:bodyPr>
+          <a:lstStyle/>
+          <a:p>
+            <a:pPr algn="l">
+              <a:lnSpc>
+                <a:spcPct val="120000"/>
+              </a:lnSpc>
+              <a:spcAft>
+                <a:spcPts val="600"/>
+              </a:spcAft>
+            </a:pPr>
+            <a:r>
+              <a:rPr sz="1250" b="0">
+                <a:solidFill>
+                  <a:srgbClr val="6B6A64"/>
+                </a:solidFill>
+                <a:latin typeface="Calibri"/>
+              </a:rPr>
+              <a:t>La relación con la informalidad desaparece al comparar solo empleo formal</a:t>
+            </a:r>
+          </a:p>
+        </p:txBody>
+      </p:sp>
+      <p:cxnSp>
+        <p:nvCxnSpPr>
+          <p:cNvPr id="10" name="Connector 9"/>
+          <p:cNvCxnSpPr/>
+          <p:nvPr/>
+        </p:nvCxnSpPr>
+        <p:spPr>
+          <a:xfrm>
+            <a:off x="658368" y="4206240"/>
+            <a:ext cx="10874959" cy="0"/>
+          </a:xfrm>
+          <a:prstGeom prst="line">
+            <a:avLst/>
+          </a:prstGeom>
+          <a:ln w="19050">
+            <a:solidFill>
+              <a:srgbClr val="E4E4DF"/>
+            </a:solidFill>
+          </a:ln>
+        </p:spPr>
+        <p:style>
+          <a:lnRef idx="2">
+            <a:schemeClr val="accent1"/>
+          </a:lnRef>
+          <a:fillRef idx="0">
+            <a:schemeClr val="accent1"/>
+          </a:fillRef>
+          <a:effectRef idx="1">
+            <a:schemeClr val="accent1"/>
+          </a:effectRef>
+          <a:fontRef idx="minor">
+            <a:schemeClr val="tx1"/>
+          </a:fontRef>
+        </p:style>
+      </p:cxnSp>
+      <p:sp>
+        <p:nvSpPr>
+          <p:cNvPr id="11" name="TextBox 10"/>
+          <p:cNvSpPr txBox="1"/>
+          <p:nvPr/>
+        </p:nvSpPr>
+        <p:spPr>
+          <a:xfrm>
+            <a:off x="658368" y="4480560"/>
+            <a:ext cx="10881360" cy="1645920"/>
+          </a:xfrm>
+          <a:prstGeom prst="rect">
+            <a:avLst/>
+          </a:prstGeom>
+          <a:noFill/>
+        </p:spPr>
+        <p:txBody>
+          <a:bodyPr wrap="square" lIns="0" rIns="0" tIns="0" bIns="0">
+            <a:spAutoFit/>
+          </a:bodyPr>
+          <a:lstStyle/>
+          <a:p>
+            <a:pPr algn="l">
+              <a:lnSpc>
+                <a:spcPct val="135000"/>
+              </a:lnSpc>
+              <a:spcAft>
+                <a:spcPts val="600"/>
+              </a:spcAft>
+            </a:pPr>
+            <a:r>
+              <a:rPr sz="1900" b="0">
+                <a:solidFill>
+                  <a:srgbClr val="1C1C1A"/>
+                </a:solidFill>
+                <a:latin typeface="Calibri"/>
+              </a:rPr>
+              <a:t>Guatemala parece mucho menos expuesta que México. Pero no es porque su empleo formal sea distinto: es porque arrastra mucho más empleo informal, que casi no está expuesto. Cuando comparamos formales con formales, los seis países se parecen.</a:t>
+            </a:r>
+          </a:p>
+        </p:txBody>
+      </p:sp>
+      <p:sp>
+        <p:nvSpPr>
+          <p:cNvPr id="12" name="TextBox 11"/>
+          <p:cNvSpPr txBox="1"/>
+          <p:nvPr/>
+        </p:nvSpPr>
+        <p:spPr>
+          <a:xfrm>
+            <a:off x="658368" y="5806440"/>
+            <a:ext cx="10881360" cy="548640"/>
+          </a:xfrm>
+          <a:prstGeom prst="rect">
+            <a:avLst/>
+          </a:prstGeom>
+          <a:noFill/>
+        </p:spPr>
+        <p:txBody>
+          <a:bodyPr wrap="square" lIns="0" rIns="0" tIns="0" bIns="0">
+            <a:spAutoFit/>
+          </a:bodyPr>
+          <a:lstStyle/>
+          <a:p>
+            <a:pPr algn="l">
+              <a:lnSpc>
+                <a:spcPct val="125000"/>
+              </a:lnSpc>
+              <a:spcAft>
+                <a:spcPts val="600"/>
+              </a:spcAft>
+            </a:pPr>
+            <a:r>
+              <a:rPr sz="1600" b="1">
+                <a:solidFill>
+                  <a:srgbClr val="1BAF7A"/>
+                </a:solidFill>
+                <a:latin typeface="Calibri"/>
+              </a:rPr>
+              <a:t>Para política: hablar de exposición a la IA en la región es, en buena medida, hablar de informalidad.</a:t>
             </a:r>
           </a:p>
         </p:txBody>
@@ -9952,7 +10410,7 @@
                 </a:solidFill>
                 <a:latin typeface="Calibri"/>
               </a:rPr>
-              <a:t>HALLAZGO 1 · QUÉ SIGNIFICA</a:t>
+              <a:t>HALLAZGO 1</a:t>
             </a:r>
           </a:p>
         </p:txBody>
@@ -9994,21 +10452,45 @@
                 </a:solidFill>
                 <a:latin typeface="Calibri"/>
               </a:rPr>
-              <a:t>El empleo de planta casi no cambia; el de oficina y oficina técnica, sí</a:t>
-            </a:r>
-          </a:p>
-        </p:txBody>
-      </p:sp>
-      <p:sp>
-        <p:nvSpPr>
-          <p:cNvPr id="4" name="TextBox 3"/>
+              <a:t>La IA alcanza más a los empleos calificados que a los de planta</a:t>
+            </a:r>
+          </a:p>
+        </p:txBody>
+      </p:sp>
+      <p:pic>
+        <p:nvPicPr>
+          <p:cNvPr id="4" name="Picture 3" descr="W4_escalera_bloques.png"/>
+          <p:cNvPicPr>
+            <a:picLocks noChangeAspect="1"/>
+          </p:cNvPicPr>
+          <p:nvPr/>
+        </p:nvPicPr>
+        <p:blipFill>
+          <a:blip r:embed="rId2"/>
+          <a:stretch>
+            <a:fillRect/>
+          </a:stretch>
+        </p:blipFill>
+        <p:spPr>
+          <a:xfrm>
+            <a:off x="2915550" y="1645920"/>
+            <a:ext cx="6360594" cy="4206240"/>
+          </a:xfrm>
+          <a:prstGeom prst="rect">
+            <a:avLst/>
+          </a:prstGeom>
+        </p:spPr>
+      </p:pic>
+      <p:sp>
+        <p:nvSpPr>
+          <p:cNvPr id="5" name="TextBox 4"/>
           <p:cNvSpPr txBox="1"/>
           <p:nvPr/>
         </p:nvSpPr>
         <p:spPr>
           <a:xfrm>
-            <a:off x="658368" y="1828800"/>
-            <a:ext cx="5577840" cy="3108960"/>
+            <a:off x="658368" y="6199632"/>
+            <a:ext cx="10874959" cy="457200"/>
           </a:xfrm>
           <a:prstGeom prst="rect">
             <a:avLst/>
@@ -10023,256 +10505,20 @@
           <a:p>
             <a:pPr algn="l">
               <a:lnSpc>
-                <a:spcPct val="130000"/>
-              </a:lnSpc>
-              <a:spcAft>
-                <a:spcPts val="600"/>
-              </a:spcAft>
-            </a:pPr>
-            <a:r>
-              <a:rPr sz="1550" b="0">
-                <a:solidFill>
-                  <a:srgbClr val="1C1C1A"/>
-                </a:solidFill>
-                <a:latin typeface="Calibri"/>
-              </a:rPr>
-              <a:t>Más de la mitad del empleo de estos sectores son ensambladores, operarios y empacadores. Su exposición es muy baja: alrededor de 0,10.</a:t>
-            </a:r>
-          </a:p>
-          <a:p>
-            <a:pPr algn="l">
-              <a:lnSpc>
-                <a:spcPct val="130000"/>
-              </a:lnSpc>
-              <a:spcAft>
-                <a:spcPts val="600"/>
-              </a:spcAft>
-            </a:pPr>
-            <a:r>
-              <a:rPr sz="1550" b="0">
-                <a:solidFill>
-                  <a:srgbClr val="1C1C1A"/>
-                </a:solidFill>
-                <a:latin typeface="Calibri"/>
-              </a:rPr>
-              <a:t/>
-            </a:r>
-          </a:p>
-          <a:p>
-            <a:pPr algn="l">
-              <a:lnSpc>
-                <a:spcPct val="130000"/>
-              </a:lnSpc>
-              <a:spcAft>
-                <a:spcPts val="600"/>
-              </a:spcAft>
-            </a:pPr>
-            <a:r>
-              <a:rPr sz="1550" b="0">
-                <a:solidFill>
-                  <a:srgbClr val="1C1C1A"/>
-                </a:solidFill>
-                <a:latin typeface="Calibri"/>
-              </a:rPr>
-              <a:t>La razón no es que estén protegidos, sino que su trabajo es físico y estas herramientas no lo alcanzan.</a:t>
-            </a:r>
-          </a:p>
-          <a:p>
-            <a:pPr algn="l">
-              <a:lnSpc>
-                <a:spcPct val="130000"/>
-              </a:lnSpc>
-              <a:spcAft>
-                <a:spcPts val="600"/>
-              </a:spcAft>
-            </a:pPr>
-            <a:r>
-              <a:rPr sz="1550" b="0">
-                <a:solidFill>
-                  <a:srgbClr val="1C1C1A"/>
-                </a:solidFill>
-                <a:latin typeface="Calibri"/>
-              </a:rPr>
-              <a:t/>
-            </a:r>
-          </a:p>
-          <a:p>
-            <a:pPr algn="l">
-              <a:lnSpc>
-                <a:spcPct val="130000"/>
-              </a:lnSpc>
-              <a:spcAft>
-                <a:spcPts val="600"/>
-              </a:spcAft>
-            </a:pPr>
-            <a:r>
-              <a:rPr sz="1550" b="0">
-                <a:solidFill>
-                  <a:srgbClr val="1C1C1A"/>
-                </a:solidFill>
-                <a:latin typeface="Calibri"/>
-              </a:rPr>
-              <a:t>La exposición sube conforme sube la calificación: técnicos 0,41, personal administrativo 0,48, profesionales e ingenieros 0,56.</a:t>
-            </a:r>
-          </a:p>
-        </p:txBody>
-      </p:sp>
-      <p:sp>
-        <p:nvSpPr>
-          <p:cNvPr id="5" name="TextBox 4"/>
-          <p:cNvSpPr txBox="1"/>
-          <p:nvPr/>
-        </p:nvSpPr>
-        <p:spPr>
-          <a:xfrm>
-            <a:off x="6675120" y="1828800"/>
-            <a:ext cx="4846320" cy="3108960"/>
-          </a:xfrm>
-          <a:prstGeom prst="rect">
-            <a:avLst/>
-          </a:prstGeom>
-          <a:noFill/>
-        </p:spPr>
-        <p:txBody>
-          <a:bodyPr wrap="square" lIns="0" rIns="0" tIns="0" bIns="0">
-            <a:spAutoFit/>
-          </a:bodyPr>
-          <a:lstStyle/>
-          <a:p>
-            <a:pPr algn="l">
-              <a:lnSpc>
-                <a:spcPct val="135000"/>
-              </a:lnSpc>
-              <a:spcAft>
-                <a:spcPts val="600"/>
-              </a:spcAft>
-            </a:pPr>
-            <a:r>
-              <a:rPr sz="1600" b="0">
-                <a:solidFill>
-                  <a:srgbClr val="1C1C1A"/>
-                </a:solidFill>
-                <a:latin typeface="Calibri"/>
-              </a:rPr>
-              <a:t>Y aquí está lo incómodo:</a:t>
-            </a:r>
-          </a:p>
-          <a:p>
-            <a:pPr algn="l">
-              <a:lnSpc>
-                <a:spcPct val="135000"/>
-              </a:lnSpc>
-              <a:spcAft>
-                <a:spcPts val="600"/>
-              </a:spcAft>
-            </a:pPr>
-            <a:r>
-              <a:rPr sz="1600" b="0">
-                <a:solidFill>
-                  <a:srgbClr val="1C1C1A"/>
-                </a:solidFill>
-                <a:latin typeface="Calibri"/>
-              </a:rPr>
-              <a:t/>
-            </a:r>
-          </a:p>
-          <a:p>
-            <a:pPr algn="l">
-              <a:lnSpc>
-                <a:spcPct val="135000"/>
-              </a:lnSpc>
-              <a:spcAft>
-                <a:spcPts val="600"/>
-              </a:spcAft>
-            </a:pPr>
-            <a:r>
-              <a:rPr sz="1600" b="0">
-                <a:solidFill>
-                  <a:srgbClr val="1C1C1A"/>
-                </a:solidFill>
-                <a:latin typeface="Calibri"/>
-              </a:rPr>
-              <a:t>La capa que más alcanza la IA es justamente la que hace falta para que estos sectores pasen a productos de mayor valor.</a:t>
-            </a:r>
-          </a:p>
-          <a:p>
-            <a:pPr algn="l">
-              <a:lnSpc>
-                <a:spcPct val="135000"/>
-              </a:lnSpc>
-              <a:spcAft>
-                <a:spcPts val="600"/>
-              </a:spcAft>
-            </a:pPr>
-            <a:r>
-              <a:rPr sz="1600" b="0">
-                <a:solidFill>
-                  <a:srgbClr val="1C1C1A"/>
-                </a:solidFill>
-                <a:latin typeface="Calibri"/>
-              </a:rPr>
-              <a:t/>
-            </a:r>
-          </a:p>
-          <a:p>
-            <a:pPr algn="l">
-              <a:lnSpc>
-                <a:spcPct val="135000"/>
-              </a:lnSpc>
-              <a:spcAft>
-                <a:spcPts val="600"/>
-              </a:spcAft>
-            </a:pPr>
-            <a:r>
-              <a:rPr sz="1600" b="0">
-                <a:solidFill>
-                  <a:srgbClr val="1C1C1A"/>
-                </a:solidFill>
-                <a:latin typeface="Calibri"/>
-              </a:rPr>
-              <a:t>Subir en la cadena de valor significa mover gente hacia empleos MÁS expuestos, no menos.</a:t>
-            </a:r>
-          </a:p>
-        </p:txBody>
-      </p:sp>
-      <p:sp>
-        <p:nvSpPr>
-          <p:cNvPr id="6" name="TextBox 5"/>
-          <p:cNvSpPr txBox="1"/>
-          <p:nvPr/>
-        </p:nvSpPr>
-        <p:spPr>
-          <a:xfrm>
-            <a:off x="6675120" y="5212080"/>
-            <a:ext cx="4846320" cy="822960"/>
-          </a:xfrm>
-          <a:prstGeom prst="rect">
-            <a:avLst/>
-          </a:prstGeom>
-          <a:noFill/>
-        </p:spPr>
-        <p:txBody>
-          <a:bodyPr wrap="square" lIns="0" rIns="0" tIns="0" bIns="0">
-            <a:spAutoFit/>
-          </a:bodyPr>
-          <a:lstStyle/>
-          <a:p>
-            <a:pPr algn="l">
-              <a:lnSpc>
-                <a:spcPct val="125000"/>
-              </a:lnSpc>
-              <a:spcAft>
-                <a:spcPts val="600"/>
-              </a:spcAft>
-            </a:pPr>
-            <a:r>
-              <a:rPr sz="1600" b="1">
-                <a:solidFill>
-                  <a:srgbClr val="1BAF7A"/>
-                </a:solidFill>
-                <a:latin typeface="Calibri"/>
-              </a:rPr>
-              <a:t>La agenda de formación y la de IA no son dos agendas: son la misma.</a:t>
+                <a:spcPct val="115000"/>
+              </a:lnSpc>
+              <a:spcAft>
+                <a:spcPts val="600"/>
+              </a:spcAft>
+            </a:pPr>
+            <a:r>
+              <a:rPr sz="1050" b="0">
+                <a:solidFill>
+                  <a:srgbClr val="6B6A64"/>
+                </a:solidFill>
+                <a:latin typeface="Calibri"/>
+              </a:rPr>
+              <a:t>CAPARD son aquí cuatro países: Costa Rica, El Salvador, Honduras y República Dominicana. Guatemala no aparece porque su encuesta registra la ocupación con menos detalle; Nicaragua y Panamá no están disponibles.</a:t>
             </a:r>
           </a:p>
         </p:txBody>

--- a/Presentacion_CID_IA_Sectores.pptx
+++ b/Presentacion_CID_IA_Sectores.pptx
@@ -3341,7 +3341,7 @@
                 </a:solidFill>
                 <a:latin typeface="Calibri"/>
               </a:rPr>
-              <a:t>6 encuestas de empleo  ·  2,5 millones de anuncios de trabajo  ·  2015–2026</a:t>
+              <a:t>7 encuestas de empleo  ·  2,8 millones de anuncios de trabajo  ·  2015–2026</a:t>
             </a:r>
           </a:p>
         </p:txBody>
@@ -4698,7 +4698,7 @@
                 </a:solidFill>
                 <a:latin typeface="Calibri"/>
               </a:rPr>
-              <a:t>925 mil anuncios de CAPARD (Guatemala, Honduras, Costa Rica y República Dominicana) y 1,6 millones de México. El Salvador, Nicaragua y Panamá no tienen anuncios en la base.</a:t>
+              <a:t>1,1 millones de anuncios de CAPARD (Guatemala, Honduras, Costa Rica, Panamá y República Dominicana) y 1,6 millones de México. El Salvador, Nicaragua y Panamá no tienen anuncios en la base.</a:t>
             </a:r>
           </a:p>
         </p:txBody>
@@ -7824,7 +7824,7 @@
                 </a:solidFill>
                 <a:latin typeface="Calibri"/>
               </a:rPr>
-              <a:t>México (ENOE) · Costa Rica (ECE) · El Salvador (EHPM) · Honduras (EPHPM) · Guatemala (ENCOVI) · República Dominicana (ENCFT)</a:t>
+              <a:t>México (ENOE) · Costa Rica (ECE) · El Salvador (EHPM) · Honduras (EPHPM) · Guatemala (ENCOVI) · Panamá (EML) · República Dominicana (ENCFT)</a:t>
             </a:r>
           </a:p>
           <a:p>
@@ -7862,7 +7862,7 @@
                 </a:solidFill>
                 <a:latin typeface="Calibri"/>
               </a:rPr>
-              <a:t>No hay datos de Nicaragua ni de Panamá.</a:t>
+              <a:t>Nicaragua es el único país sin datos.</a:t>
             </a:r>
           </a:p>
         </p:txBody>
@@ -7984,7 +7984,7 @@
                 </a:solidFill>
                 <a:latin typeface="Calibri"/>
               </a:rPr>
-              <a:t>México · Guatemala · Honduras · Costa Rica · República Dominicana</a:t>
+              <a:t>México · Guatemala · Honduras · Costa Rica · Panamá · República Dominicana</a:t>
             </a:r>
           </a:p>
           <a:p>
@@ -8022,7 +8022,7 @@
                 </a:solidFill>
                 <a:latin typeface="Calibri"/>
               </a:rPr>
-              <a:t>El Salvador y Panamá no fueron entregados.</a:t>
+              <a:t>El Salvador no forma parte de la entrega.</a:t>
             </a:r>
           </a:p>
         </p:txBody>
@@ -8987,9 +8987,9 @@
                     <a:lstStyle/>
                     <a:p>
                       <a:pPr algn="l">
-                        <a:defRPr sz="1250" b="1">
+                        <a:defRPr sz="1250" b="0">
                           <a:solidFill>
-                            <a:srgbClr val="1C1C1A"/>
+                            <a:srgbClr val="6B6A64"/>
                           </a:solidFill>
                         </a:defRPr>
                       </a:pPr>
@@ -9008,14 +9008,14 @@
                     <a:lstStyle/>
                     <a:p>
                       <a:pPr algn="r">
-                        <a:defRPr sz="1250" b="1">
+                        <a:defRPr sz="1250" b="0">
                           <a:solidFill>
-                            <a:srgbClr val="1C1C1A"/>
+                            <a:srgbClr val="6B6A64"/>
                           </a:solidFill>
                         </a:defRPr>
                       </a:pPr>
                       <a:r>
-                        <a:t>sin datos</a:t>
+                        <a:t>EML</a:t>
                       </a:r>
                     </a:p>
                   </a:txBody>
@@ -9029,14 +9029,14 @@
                     <a:lstStyle/>
                     <a:p>
                       <a:pPr algn="r">
-                        <a:defRPr sz="1250" b="1">
+                        <a:defRPr sz="1250" b="0">
                           <a:solidFill>
-                            <a:srgbClr val="1C1C1A"/>
+                            <a:srgbClr val="6B6A64"/>
                           </a:solidFill>
                         </a:defRPr>
                       </a:pPr>
                       <a:r>
-                        <a:t>—</a:t>
+                        <a:t>2017–2023</a:t>
                       </a:r>
                     </a:p>
                   </a:txBody>
@@ -9050,14 +9050,14 @@
                     <a:lstStyle/>
                     <a:p>
                       <a:pPr algn="r">
-                        <a:defRPr sz="1250" b="1">
+                        <a:defRPr sz="1250" b="0">
                           <a:solidFill>
-                            <a:srgbClr val="1C1C1A"/>
+                            <a:srgbClr val="6B6A64"/>
                           </a:solidFill>
                         </a:defRPr>
                       </a:pPr>
                       <a:r>
-                        <a:t>—</a:t>
+                        <a:t>1.9 mill.</a:t>
                       </a:r>
                     </a:p>
                   </a:txBody>
@@ -9071,14 +9071,14 @@
                     <a:lstStyle/>
                     <a:p>
                       <a:pPr algn="r">
-                        <a:defRPr sz="1250" b="1">
+                        <a:defRPr sz="1250" b="0">
                           <a:solidFill>
-                            <a:srgbClr val="1C1C1A"/>
+                            <a:srgbClr val="6B6A64"/>
                           </a:solidFill>
                         </a:defRPr>
                       </a:pPr>
                       <a:r>
-                        <a:t>no entregados</a:t>
+                        <a:t>179 767</a:t>
                       </a:r>
                     </a:p>
                   </a:txBody>
@@ -9390,6 +9390,44 @@
               <a:t>Guatemala publica sus datos sin el detalle de oficio ni de rama, así que no entra en los cortes finos. No se arregla con otra encuesta.</a:t>
             </a:r>
           </a:p>
+          <a:p>
+            <a:pPr algn="l">
+              <a:lnSpc>
+                <a:spcPct val="125000"/>
+              </a:lnSpc>
+              <a:spcAft>
+                <a:spcPts val="600"/>
+              </a:spcAft>
+            </a:pPr>
+            <a:r>
+              <a:rPr sz="1250" b="0">
+                <a:solidFill>
+                  <a:srgbClr val="1C1C1A"/>
+                </a:solidFill>
+                <a:latin typeface="Calibri"/>
+              </a:rPr>
+              <a:t/>
+            </a:r>
+          </a:p>
+          <a:p>
+            <a:pPr algn="l">
+              <a:lnSpc>
+                <a:spcPct val="125000"/>
+              </a:lnSpc>
+              <a:spcAft>
+                <a:spcPts val="600"/>
+              </a:spcAft>
+            </a:pPr>
+            <a:r>
+              <a:rPr sz="1250" b="0">
+                <a:solidFill>
+                  <a:srgbClr val="1C1C1A"/>
+                </a:solidFill>
+                <a:latin typeface="Calibri"/>
+              </a:rPr>
+              <a:t>Panamá entró completo, pero casi no tiene estos sectores: es una economía de servicios.</a:t>
+            </a:r>
+          </a:p>
         </p:txBody>
       </p:sp>
       <p:cxnSp>
@@ -9832,8 +9870,8 @@
         </p:blipFill>
         <p:spPr>
           <a:xfrm>
-            <a:off x="2742118" y="1691640"/>
-            <a:ext cx="6707458" cy="4343400"/>
+            <a:off x="2815803" y="1691640"/>
+            <a:ext cx="6560088" cy="4343400"/>
           </a:xfrm>
           <a:prstGeom prst="rect">
             <a:avLst/>
@@ -10518,7 +10556,7 @@
                 </a:solidFill>
                 <a:latin typeface="Calibri"/>
               </a:rPr>
-              <a:t>CAPARD son aquí cuatro países: Costa Rica, El Salvador, Honduras y República Dominicana. Guatemala no aparece porque su encuesta registra la ocupación con menos detalle; Nicaragua y Panamá no están disponibles.</a:t>
+              <a:t>CAPARD son aquí cuatro países con ocupación a cuatro dígitos: Costa Rica, El Salvador, Honduras y República Dominicana. Guatemala no aparece porque su encuesta registra la ocupación con menos detalle; Nicaragua y Panamá no están disponibles.</a:t>
             </a:r>
           </a:p>
         </p:txBody>

--- a/Presentacion_CID_IA_Sectores.pptx
+++ b/Presentacion_CID_IA_Sectores.pptx
@@ -7824,7 +7824,7 @@
                 </a:solidFill>
                 <a:latin typeface="Calibri"/>
               </a:rPr>
-              <a:t>México (ENOE) · Costa Rica (ECE) · El Salvador (EHPM) · Honduras (EPHPM) · Guatemala (ENCOVI) · Panamá (EML) · República Dominicana (ENCFT)</a:t>
+              <a:t>México (ENOE) · Costa Rica (ECE) · El Salvador (EHPM) · Honduras (EPHPM) · Guatemala (ENEIC) · Panamá (EML) · República Dominicana (ENCFT)</a:t>
             </a:r>
           </a:p>
           <a:p>
@@ -8801,7 +8801,7 @@
                         </a:defRPr>
                       </a:pPr>
                       <a:r>
-                        <a:t>ENCOVI</a:t>
+                        <a:t>ENEIC</a:t>
                       </a:r>
                     </a:p>
                   </a:txBody>
@@ -8822,7 +8822,7 @@
                         </a:defRPr>
                       </a:pPr>
                       <a:r>
-                        <a:t>solo 2023</a:t>
+                        <a:t>2015–2025</a:t>
                       </a:r>
                     </a:p>
                   </a:txBody>
@@ -8843,7 +8843,7 @@
                         </a:defRPr>
                       </a:pPr>
                       <a:r>
-                        <a:t>6.8 mill.</a:t>
+                        <a:t>8.0 mill.</a:t>
                       </a:r>
                     </a:p>
                   </a:txBody>
@@ -9311,7 +9311,7 @@
                 </a:solidFill>
                 <a:latin typeface="Calibri"/>
               </a:rPr>
-              <a:t>Guatemala tiene un solo año, así que no entra en ninguna tendencia.</a:t>
+              <a:t>Guatemala publica sin detalle de oficio: entra en los promedios, no en los cortes finos.</a:t>
             </a:r>
           </a:p>
           <a:p>

--- a/Presentacion_CID_IA_Sectores.pptx
+++ b/Presentacion_CID_IA_Sectores.pptx
@@ -9625,8 +9625,8 @@
         </p:blipFill>
         <p:spPr>
           <a:xfrm>
-            <a:off x="2772608" y="1691640"/>
-            <a:ext cx="6646478" cy="3200400"/>
+            <a:off x="2173053" y="1691640"/>
+            <a:ext cx="7845588" cy="3200399"/>
           </a:xfrm>
           <a:prstGeom prst="rect">
             <a:avLst/>
